--- a/poster_draft.pptx
+++ b/poster_draft.pptx
@@ -11,17 +11,26 @@
   <p:notesSz cx="6858000" cy="9144000"/>
   <p:embeddedFontLst>
     <p:embeddedFont>
+      <p:font typeface="Cambria Math" panose="02040503050406030204" pitchFamily="18" charset="0"/>
+      <p:regular r:id="rId3"/>
+    </p:embeddedFont>
+    <p:embeddedFont>
+      <p:font typeface="Tahoma" panose="020B0604030504040204" pitchFamily="34" charset="0"/>
+      <p:regular r:id="rId4"/>
+      <p:bold r:id="rId5"/>
+    </p:embeddedFont>
+    <p:embeddedFont>
       <p:font typeface="UCL Sans" panose="020B0604020202020204" charset="0"/>
-      <p:regular r:id="rId3"/>
-      <p:bold r:id="rId4"/>
-      <p:italic r:id="rId5"/>
+      <p:regular r:id="rId6"/>
+      <p:bold r:id="rId7"/>
+      <p:italic r:id="rId8"/>
     </p:embeddedFont>
     <p:embeddedFont>
       <p:font typeface="UCL Sans SemiBold" panose="020B0604020202020204" charset="0"/>
-      <p:regular r:id="rId6"/>
-      <p:bold r:id="rId7"/>
-      <p:italic r:id="rId8"/>
-      <p:boldItalic r:id="rId9"/>
+      <p:regular r:id="rId9"/>
+      <p:bold r:id="rId10"/>
+      <p:italic r:id="rId11"/>
+      <p:boldItalic r:id="rId12"/>
     </p:embeddedFont>
   </p:embeddedFontLst>
   <p:defaultTextStyle>
@@ -138,100 +147,334 @@
 </p:presentation>
 </file>
 
+<file path=ppt/revisionInfo.xml><?xml version="1.0" encoding="utf-8"?>
+<p1510:revInfo xmlns:a="http://schemas.openxmlformats.org/drawingml/2006/main" xmlns:r="http://schemas.openxmlformats.org/officeDocument/2006/relationships" xmlns:p1510="http://schemas.microsoft.com/office/powerpoint/2015/10/main">
+  <p1510:revLst>
+    <p1510:client id="{7F17B0CF-DC0F-479A-8BD4-09BA188B4891}" v="6" dt="2026-08-17T15:58:34.318"/>
+  </p1510:revLst>
+</p1510:revInfo>
+</file>
+
 <file path=ppt/changesInfos/changesInfo1.xml><?xml version="1.0" encoding="utf-8"?>
 <pc:chgInfo xmlns:a="http://schemas.openxmlformats.org/drawingml/2006/main" xmlns:r="http://schemas.openxmlformats.org/officeDocument/2006/relationships" xmlns:ac="http://schemas.microsoft.com/office/drawing/2013/main/command" xmlns:pc="http://schemas.microsoft.com/office/powerpoint/2013/main/command">
   <pc:docChgLst>
     <pc:chgData name="Ryan Mok" userId="2b5ff9b4bc27d924" providerId="LiveId" clId="{98BDB49B-93C9-4AB7-A5FC-395AE49E91C6}"/>
-    <pc:docChg chg="delSld modSld delMainMaster">
-      <pc:chgData name="Ryan Mok" userId="2b5ff9b4bc27d924" providerId="LiveId" clId="{98BDB49B-93C9-4AB7-A5FC-395AE49E91C6}" dt="2026-08-14T16:51:16.845" v="122" actId="20577"/>
+    <pc:docChg chg="undo custSel delSld modSld delMainMaster">
+      <pc:chgData name="Ryan Mok" userId="2b5ff9b4bc27d924" providerId="LiveId" clId="{98BDB49B-93C9-4AB7-A5FC-395AE49E91C6}" dt="2026-08-17T17:37:30.005" v="285" actId="208"/>
       <pc:docMkLst>
         <pc:docMk/>
       </pc:docMkLst>
-      <pc:sldChg chg="del">
-        <pc:chgData name="Ryan Mok" userId="2b5ff9b4bc27d924" providerId="LiveId" clId="{98BDB49B-93C9-4AB7-A5FC-395AE49E91C6}" dt="2026-08-14T16:50:13.628" v="0" actId="47"/>
-        <pc:sldMkLst>
-          <pc:docMk/>
-          <pc:sldMk cId="4227999703" sldId="256"/>
-        </pc:sldMkLst>
-      </pc:sldChg>
-      <pc:sldChg chg="modSp mod">
-        <pc:chgData name="Ryan Mok" userId="2b5ff9b4bc27d924" providerId="LiveId" clId="{98BDB49B-93C9-4AB7-A5FC-395AE49E91C6}" dt="2026-08-14T16:51:16.845" v="122" actId="20577"/>
+      <pc:sldChg chg="addSp delSp modSp mod setBg">
+        <pc:chgData name="Ryan Mok" userId="2b5ff9b4bc27d924" providerId="LiveId" clId="{98BDB49B-93C9-4AB7-A5FC-395AE49E91C6}" dt="2026-08-17T17:37:30.005" v="285" actId="208"/>
         <pc:sldMkLst>
           <pc:docMk/>
           <pc:sldMk cId="4284697073" sldId="257"/>
         </pc:sldMkLst>
         <pc:spChg chg="mod">
-          <ac:chgData name="Ryan Mok" userId="2b5ff9b4bc27d924" providerId="LiveId" clId="{98BDB49B-93C9-4AB7-A5FC-395AE49E91C6}" dt="2026-08-14T16:51:16.845" v="122" actId="20577"/>
+          <ac:chgData name="Ryan Mok" userId="2b5ff9b4bc27d924" providerId="LiveId" clId="{98BDB49B-93C9-4AB7-A5FC-395AE49E91C6}" dt="2026-08-16T00:21:57.819" v="128" actId="14100"/>
+          <ac:spMkLst>
+            <pc:docMk/>
+            <pc:sldMk cId="4284697073" sldId="257"/>
+            <ac:spMk id="3" creationId="{D224DBA9-3BCF-2968-5DEF-36775ABF4603}"/>
+          </ac:spMkLst>
+        </pc:spChg>
+        <pc:spChg chg="add del mod">
+          <ac:chgData name="Ryan Mok" userId="2b5ff9b4bc27d924" providerId="LiveId" clId="{98BDB49B-93C9-4AB7-A5FC-395AE49E91C6}" dt="2026-08-17T14:31:10.777" v="140" actId="931"/>
+          <ac:spMkLst>
+            <pc:docMk/>
+            <pc:sldMk cId="4284697073" sldId="257"/>
+            <ac:spMk id="5" creationId="{02A1B259-8E34-0716-DE3D-F153B9DE671D}"/>
+          </ac:spMkLst>
+        </pc:spChg>
+        <pc:spChg chg="mod">
+          <ac:chgData name="Ryan Mok" userId="2b5ff9b4bc27d924" providerId="LiveId" clId="{98BDB49B-93C9-4AB7-A5FC-395AE49E91C6}" dt="2026-08-16T00:21:39.298" v="123"/>
+          <ac:spMkLst>
+            <pc:docMk/>
+            <pc:sldMk cId="4284697073" sldId="257"/>
+            <ac:spMk id="5" creationId="{2EAF473D-2721-78EB-286D-5C65F138247A}"/>
+          </ac:spMkLst>
+        </pc:spChg>
+        <pc:spChg chg="mod">
+          <ac:chgData name="Ryan Mok" userId="2b5ff9b4bc27d924" providerId="LiveId" clId="{98BDB49B-93C9-4AB7-A5FC-395AE49E91C6}" dt="2026-08-16T00:21:39.298" v="123"/>
+          <ac:spMkLst>
+            <pc:docMk/>
+            <pc:sldMk cId="4284697073" sldId="257"/>
+            <ac:spMk id="7" creationId="{3C8F305D-6A2F-EC9A-FBDD-279BAFB0F101}"/>
+          </ac:spMkLst>
+        </pc:spChg>
+        <pc:spChg chg="add mod ord">
+          <ac:chgData name="Ryan Mok" userId="2b5ff9b4bc27d924" providerId="LiveId" clId="{98BDB49B-93C9-4AB7-A5FC-395AE49E91C6}" dt="2026-08-17T17:37:30.005" v="285" actId="208"/>
+          <ac:spMkLst>
+            <pc:docMk/>
+            <pc:sldMk cId="4284697073" sldId="257"/>
+            <ac:spMk id="8" creationId="{7A734323-8DED-6057-40A5-62D55DC614A9}"/>
+          </ac:spMkLst>
+        </pc:spChg>
+        <pc:spChg chg="mod">
+          <ac:chgData name="Ryan Mok" userId="2b5ff9b4bc27d924" providerId="LiveId" clId="{98BDB49B-93C9-4AB7-A5FC-395AE49E91C6}" dt="2026-08-16T00:21:39.298" v="123"/>
+          <ac:spMkLst>
+            <pc:docMk/>
+            <pc:sldMk cId="4284697073" sldId="257"/>
+            <ac:spMk id="8" creationId="{C8056347-2A33-4CA4-13EF-D8E62D73CD0D}"/>
+          </ac:spMkLst>
+        </pc:spChg>
+        <pc:spChg chg="mod">
+          <ac:chgData name="Ryan Mok" userId="2b5ff9b4bc27d924" providerId="LiveId" clId="{98BDB49B-93C9-4AB7-A5FC-395AE49E91C6}" dt="2026-08-16T00:21:39.298" v="123"/>
+          <ac:spMkLst>
+            <pc:docMk/>
+            <pc:sldMk cId="4284697073" sldId="257"/>
+            <ac:spMk id="9" creationId="{40592C98-735C-8DE6-F2A4-E78EE667D165}"/>
+          </ac:spMkLst>
+        </pc:spChg>
+        <pc:spChg chg="add del mod">
+          <ac:chgData name="Ryan Mok" userId="2b5ff9b4bc27d924" providerId="LiveId" clId="{98BDB49B-93C9-4AB7-A5FC-395AE49E91C6}" dt="2026-08-17T15:54:42.472" v="179"/>
+          <ac:spMkLst>
+            <pc:docMk/>
+            <pc:sldMk cId="4284697073" sldId="257"/>
+            <ac:spMk id="10" creationId="{9B269BF9-C3B3-A2C9-E3BD-277ACB554CFA}"/>
+          </ac:spMkLst>
+        </pc:spChg>
+        <pc:spChg chg="mod">
+          <ac:chgData name="Ryan Mok" userId="2b5ff9b4bc27d924" providerId="LiveId" clId="{98BDB49B-93C9-4AB7-A5FC-395AE49E91C6}" dt="2026-08-16T00:21:39.298" v="123"/>
+          <ac:spMkLst>
+            <pc:docMk/>
+            <pc:sldMk cId="4284697073" sldId="257"/>
+            <ac:spMk id="10" creationId="{F4B3ABE4-3273-615F-DC47-BFBD578CD85A}"/>
+          </ac:spMkLst>
+        </pc:spChg>
+        <pc:spChg chg="mod">
+          <ac:chgData name="Ryan Mok" userId="2b5ff9b4bc27d924" providerId="LiveId" clId="{98BDB49B-93C9-4AB7-A5FC-395AE49E91C6}" dt="2026-08-16T00:21:39.298" v="123"/>
+          <ac:spMkLst>
+            <pc:docMk/>
+            <pc:sldMk cId="4284697073" sldId="257"/>
+            <ac:spMk id="11" creationId="{F5F85AD0-A4E7-7114-A4D0-B09FE0DEEB53}"/>
+          </ac:spMkLst>
+        </pc:spChg>
+        <pc:spChg chg="del mod">
+          <ac:chgData name="Ryan Mok" userId="2b5ff9b4bc27d924" providerId="LiveId" clId="{98BDB49B-93C9-4AB7-A5FC-395AE49E91C6}" dt="2026-08-16T00:21:43.872" v="125" actId="478"/>
           <ac:spMkLst>
             <pc:docMk/>
             <pc:sldMk cId="4284697073" sldId="257"/>
             <ac:spMk id="14" creationId="{9BFCBC3D-2EFC-CCF0-854D-98879A67B246}"/>
           </ac:spMkLst>
         </pc:spChg>
+        <pc:spChg chg="add del mod ord">
+          <ac:chgData name="Ryan Mok" userId="2b5ff9b4bc27d924" providerId="LiveId" clId="{98BDB49B-93C9-4AB7-A5FC-395AE49E91C6}" dt="2026-08-17T15:59:07.132" v="269" actId="478"/>
+          <ac:spMkLst>
+            <pc:docMk/>
+            <pc:sldMk cId="4284697073" sldId="257"/>
+            <ac:spMk id="14" creationId="{B2ABCC73-8EB5-706F-FD07-A64CE5DE5A62}"/>
+          </ac:spMkLst>
+        </pc:spChg>
+        <pc:spChg chg="del">
+          <ac:chgData name="Ryan Mok" userId="2b5ff9b4bc27d924" providerId="LiveId" clId="{98BDB49B-93C9-4AB7-A5FC-395AE49E91C6}" dt="2026-08-17T14:30:15.714" v="135" actId="931"/>
+          <ac:spMkLst>
+            <pc:docMk/>
+            <pc:sldMk cId="4284697073" sldId="257"/>
+            <ac:spMk id="19" creationId="{F595DB66-7B4C-C9B6-E479-317A8312D5A7}"/>
+          </ac:spMkLst>
+        </pc:spChg>
+        <pc:spChg chg="del">
+          <ac:chgData name="Ryan Mok" userId="2b5ff9b4bc27d924" providerId="LiveId" clId="{98BDB49B-93C9-4AB7-A5FC-395AE49E91C6}" dt="2026-08-17T15:58:01.113" v="251" actId="931"/>
+          <ac:spMkLst>
+            <pc:docMk/>
+            <pc:sldMk cId="4284697073" sldId="257"/>
+            <ac:spMk id="20" creationId="{13F20D06-2613-CD61-45CC-1376A7DC7CEA}"/>
+          </ac:spMkLst>
+        </pc:spChg>
+        <pc:spChg chg="mod">
+          <ac:chgData name="Ryan Mok" userId="2b5ff9b4bc27d924" providerId="LiveId" clId="{98BDB49B-93C9-4AB7-A5FC-395AE49E91C6}" dt="2026-08-16T00:27:48.832" v="132"/>
+          <ac:spMkLst>
+            <pc:docMk/>
+            <pc:sldMk cId="4284697073" sldId="257"/>
+            <ac:spMk id="24" creationId="{B585A51F-CF5B-017C-7401-ACE9EC6E5F97}"/>
+          </ac:spMkLst>
+        </pc:spChg>
+        <pc:spChg chg="mod">
+          <ac:chgData name="Ryan Mok" userId="2b5ff9b4bc27d924" providerId="LiveId" clId="{98BDB49B-93C9-4AB7-A5FC-395AE49E91C6}" dt="2026-08-16T00:27:48.832" v="132"/>
+          <ac:spMkLst>
+            <pc:docMk/>
+            <pc:sldMk cId="4284697073" sldId="257"/>
+            <ac:spMk id="26" creationId="{4E8F0C31-F325-E517-DF78-7DF30F8975B7}"/>
+          </ac:spMkLst>
+        </pc:spChg>
+        <pc:spChg chg="mod">
+          <ac:chgData name="Ryan Mok" userId="2b5ff9b4bc27d924" providerId="LiveId" clId="{98BDB49B-93C9-4AB7-A5FC-395AE49E91C6}" dt="2026-08-16T00:27:48.832" v="132"/>
+          <ac:spMkLst>
+            <pc:docMk/>
+            <pc:sldMk cId="4284697073" sldId="257"/>
+            <ac:spMk id="28" creationId="{BDFFD4A4-2CFB-3F78-09F9-63F5C1233FAD}"/>
+          </ac:spMkLst>
+        </pc:spChg>
+        <pc:spChg chg="mod">
+          <ac:chgData name="Ryan Mok" userId="2b5ff9b4bc27d924" providerId="LiveId" clId="{98BDB49B-93C9-4AB7-A5FC-395AE49E91C6}" dt="2026-08-16T00:27:48.832" v="132"/>
+          <ac:spMkLst>
+            <pc:docMk/>
+            <pc:sldMk cId="4284697073" sldId="257"/>
+            <ac:spMk id="29" creationId="{A3AB5137-41A4-92D9-7709-CBACFB59F3FF}"/>
+          </ac:spMkLst>
+        </pc:spChg>
+        <pc:spChg chg="mod">
+          <ac:chgData name="Ryan Mok" userId="2b5ff9b4bc27d924" providerId="LiveId" clId="{98BDB49B-93C9-4AB7-A5FC-395AE49E91C6}" dt="2026-08-16T00:27:48.832" v="132"/>
+          <ac:spMkLst>
+            <pc:docMk/>
+            <pc:sldMk cId="4284697073" sldId="257"/>
+            <ac:spMk id="30" creationId="{C8F7EE3F-0556-83B2-9D61-E939E3ACB9C1}"/>
+          </ac:spMkLst>
+        </pc:spChg>
+        <pc:spChg chg="mod">
+          <ac:chgData name="Ryan Mok" userId="2b5ff9b4bc27d924" providerId="LiveId" clId="{98BDB49B-93C9-4AB7-A5FC-395AE49E91C6}" dt="2026-08-16T00:27:48.832" v="132"/>
+          <ac:spMkLst>
+            <pc:docMk/>
+            <pc:sldMk cId="4284697073" sldId="257"/>
+            <ac:spMk id="31" creationId="{89BBEEB5-ACEE-A784-0DFF-E9EC93EE84D4}"/>
+          </ac:spMkLst>
+        </pc:spChg>
+        <pc:spChg chg="mod">
+          <ac:chgData name="Ryan Mok" userId="2b5ff9b4bc27d924" providerId="LiveId" clId="{98BDB49B-93C9-4AB7-A5FC-395AE49E91C6}" dt="2026-08-16T00:27:48.832" v="132"/>
+          <ac:spMkLst>
+            <pc:docMk/>
+            <pc:sldMk cId="4284697073" sldId="257"/>
+            <ac:spMk id="32" creationId="{2CF7DD42-5A6C-2283-9C82-033F1FDF8092}"/>
+          </ac:spMkLst>
+        </pc:spChg>
+        <pc:spChg chg="add mod">
+          <ac:chgData name="Ryan Mok" userId="2b5ff9b4bc27d924" providerId="LiveId" clId="{98BDB49B-93C9-4AB7-A5FC-395AE49E91C6}" dt="2026-08-17T15:55:27.179" v="231" actId="767"/>
+          <ac:spMkLst>
+            <pc:docMk/>
+            <pc:sldMk cId="4284697073" sldId="257"/>
+            <ac:spMk id="33" creationId="{F3451A55-FD32-5524-8E20-DA46787F8C64}"/>
+          </ac:spMkLst>
+        </pc:spChg>
+        <pc:spChg chg="add del mod">
+          <ac:chgData name="Ryan Mok" userId="2b5ff9b4bc27d924" providerId="LiveId" clId="{98BDB49B-93C9-4AB7-A5FC-395AE49E91C6}" dt="2026-08-17T15:57:35.997" v="242" actId="931"/>
+          <ac:spMkLst>
+            <pc:docMk/>
+            <pc:sldMk cId="4284697073" sldId="257"/>
+            <ac:spMk id="35" creationId="{EA40A50D-ACF8-E988-16F7-DD466DE9D444}"/>
+          </ac:spMkLst>
+        </pc:spChg>
+        <pc:spChg chg="add del mod">
+          <ac:chgData name="Ryan Mok" userId="2b5ff9b4bc27d924" providerId="LiveId" clId="{98BDB49B-93C9-4AB7-A5FC-395AE49E91C6}" dt="2026-08-17T15:57:55.342" v="250" actId="478"/>
+          <ac:spMkLst>
+            <pc:docMk/>
+            <pc:sldMk cId="4284697073" sldId="257"/>
+            <ac:spMk id="39" creationId="{4127441E-3447-9D9C-98C1-8653E4E416B1}"/>
+          </ac:spMkLst>
+        </pc:spChg>
+        <pc:spChg chg="add del mod">
+          <ac:chgData name="Ryan Mok" userId="2b5ff9b4bc27d924" providerId="LiveId" clId="{98BDB49B-93C9-4AB7-A5FC-395AE49E91C6}" dt="2026-08-17T15:58:35.905" v="259"/>
+          <ac:spMkLst>
+            <pc:docMk/>
+            <pc:sldMk cId="4284697073" sldId="257"/>
+            <ac:spMk id="42" creationId="{660888A8-753F-9444-FA9B-C98239589C9F}"/>
+          </ac:spMkLst>
+        </pc:spChg>
+        <pc:spChg chg="add del mod">
+          <ac:chgData name="Ryan Mok" userId="2b5ff9b4bc27d924" providerId="LiveId" clId="{98BDB49B-93C9-4AB7-A5FC-395AE49E91C6}" dt="2026-08-17T15:58:42.376" v="260" actId="931"/>
+          <ac:spMkLst>
+            <pc:docMk/>
+            <pc:sldMk cId="4284697073" sldId="257"/>
+            <ac:spMk id="44" creationId="{37D5DBF0-6006-858B-AFDC-44CEB4860E0E}"/>
+          </ac:spMkLst>
+        </pc:spChg>
+        <pc:grpChg chg="add del mod">
+          <ac:chgData name="Ryan Mok" userId="2b5ff9b4bc27d924" providerId="LiveId" clId="{98BDB49B-93C9-4AB7-A5FC-395AE49E91C6}" dt="2026-08-16T00:27:48.013" v="131" actId="478"/>
+          <ac:grpSpMkLst>
+            <pc:docMk/>
+            <pc:sldMk cId="4284697073" sldId="257"/>
+            <ac:grpSpMk id="2" creationId="{D7B82626-635E-4CD6-901D-6F24A170A7CB}"/>
+          </ac:grpSpMkLst>
+        </pc:grpChg>
+        <pc:grpChg chg="add mod">
+          <ac:chgData name="Ryan Mok" userId="2b5ff9b4bc27d924" providerId="LiveId" clId="{98BDB49B-93C9-4AB7-A5FC-395AE49E91C6}" dt="2026-08-17T15:55:16.750" v="207" actId="1076"/>
+          <ac:grpSpMkLst>
+            <pc:docMk/>
+            <pc:sldMk cId="4284697073" sldId="257"/>
+            <ac:grpSpMk id="12" creationId="{9A7236CB-1D08-1C61-8FA2-BA47FB251EB1}"/>
+          </ac:grpSpMkLst>
+        </pc:grpChg>
+        <pc:picChg chg="add del mod ord">
+          <ac:chgData name="Ryan Mok" userId="2b5ff9b4bc27d924" providerId="LiveId" clId="{98BDB49B-93C9-4AB7-A5FC-395AE49E91C6}" dt="2026-08-17T14:30:27.592" v="139" actId="478"/>
+          <ac:picMkLst>
+            <pc:docMk/>
+            <pc:sldMk cId="4284697073" sldId="257"/>
+            <ac:picMk id="3" creationId="{E039EA0B-9045-2E5F-BE08-F36737C7296C}"/>
+          </ac:picMkLst>
+        </pc:picChg>
+        <pc:picChg chg="add del mod ord">
+          <ac:chgData name="Ryan Mok" userId="2b5ff9b4bc27d924" providerId="LiveId" clId="{98BDB49B-93C9-4AB7-A5FC-395AE49E91C6}" dt="2026-08-17T15:57:30.316" v="240" actId="478"/>
+          <ac:picMkLst>
+            <pc:docMk/>
+            <pc:sldMk cId="4284697073" sldId="257"/>
+            <ac:picMk id="7" creationId="{2F08CAD1-B461-F24F-2F1D-9A55AB4139DF}"/>
+          </ac:picMkLst>
+        </pc:picChg>
+        <pc:picChg chg="add del mod">
+          <ac:chgData name="Ryan Mok" userId="2b5ff9b4bc27d924" providerId="LiveId" clId="{98BDB49B-93C9-4AB7-A5FC-395AE49E91C6}" dt="2026-08-17T15:57:31.719" v="241" actId="478"/>
+          <ac:picMkLst>
+            <pc:docMk/>
+            <pc:sldMk cId="4284697073" sldId="257"/>
+            <ac:picMk id="9" creationId="{7D279373-B5C9-A633-2C2F-D4E84FB66E68}"/>
+          </ac:picMkLst>
+        </pc:picChg>
+        <pc:picChg chg="add del mod ord">
+          <ac:chgData name="Ryan Mok" userId="2b5ff9b4bc27d924" providerId="LiveId" clId="{98BDB49B-93C9-4AB7-A5FC-395AE49E91C6}" dt="2026-08-17T15:57:49.730" v="249" actId="478"/>
+          <ac:picMkLst>
+            <pc:docMk/>
+            <pc:sldMk cId="4284697073" sldId="257"/>
+            <ac:picMk id="37" creationId="{48743B42-37B1-475D-81DD-E5745FBA9E16}"/>
+          </ac:picMkLst>
+        </pc:picChg>
+        <pc:picChg chg="add del mod ord modCrop">
+          <ac:chgData name="Ryan Mok" userId="2b5ff9b4bc27d924" providerId="LiveId" clId="{98BDB49B-93C9-4AB7-A5FC-395AE49E91C6}" dt="2026-08-17T15:58:35.905" v="257" actId="478"/>
+          <ac:picMkLst>
+            <pc:docMk/>
+            <pc:sldMk cId="4284697073" sldId="257"/>
+            <ac:picMk id="41" creationId="{7FE9D0B4-2C12-E89C-26E9-1B8139D275C1}"/>
+          </ac:picMkLst>
+        </pc:picChg>
+        <pc:picChg chg="add mod ord">
+          <ac:chgData name="Ryan Mok" userId="2b5ff9b4bc27d924" providerId="LiveId" clId="{98BDB49B-93C9-4AB7-A5FC-395AE49E91C6}" dt="2026-08-17T16:02:47.222" v="282" actId="1076"/>
+          <ac:picMkLst>
+            <pc:docMk/>
+            <pc:sldMk cId="4284697073" sldId="257"/>
+            <ac:picMk id="46" creationId="{648DE49E-2738-9E11-8AA2-69CDCF99E6F5}"/>
+          </ac:picMkLst>
+        </pc:picChg>
+        <pc:cxnChg chg="mod">
+          <ac:chgData name="Ryan Mok" userId="2b5ff9b4bc27d924" providerId="LiveId" clId="{98BDB49B-93C9-4AB7-A5FC-395AE49E91C6}" dt="2026-08-16T00:21:39.298" v="123"/>
+          <ac:cxnSpMkLst>
+            <pc:docMk/>
+            <pc:sldMk cId="4284697073" sldId="257"/>
+            <ac:cxnSpMk id="4" creationId="{0E4E6E85-0FE5-BCDC-AB08-47B65F5F2086}"/>
+          </ac:cxnSpMkLst>
+        </pc:cxnChg>
+        <pc:cxnChg chg="mod">
+          <ac:chgData name="Ryan Mok" userId="2b5ff9b4bc27d924" providerId="LiveId" clId="{98BDB49B-93C9-4AB7-A5FC-395AE49E91C6}" dt="2026-08-16T00:21:39.298" v="123"/>
+          <ac:cxnSpMkLst>
+            <pc:docMk/>
+            <pc:sldMk cId="4284697073" sldId="257"/>
+            <ac:cxnSpMk id="6" creationId="{018538C0-DFBB-0936-2169-6BFF73C591F3}"/>
+          </ac:cxnSpMkLst>
+        </pc:cxnChg>
+        <pc:cxnChg chg="mod">
+          <ac:chgData name="Ryan Mok" userId="2b5ff9b4bc27d924" providerId="LiveId" clId="{98BDB49B-93C9-4AB7-A5FC-395AE49E91C6}" dt="2026-08-16T00:27:48.832" v="132"/>
+          <ac:cxnSpMkLst>
+            <pc:docMk/>
+            <pc:sldMk cId="4284697073" sldId="257"/>
+            <ac:cxnSpMk id="25" creationId="{1BDE498B-0EBE-96E0-34F8-D8769226A488}"/>
+          </ac:cxnSpMkLst>
+        </pc:cxnChg>
+        <pc:cxnChg chg="mod">
+          <ac:chgData name="Ryan Mok" userId="2b5ff9b4bc27d924" providerId="LiveId" clId="{98BDB49B-93C9-4AB7-A5FC-395AE49E91C6}" dt="2026-08-16T00:27:48.832" v="132"/>
+          <ac:cxnSpMkLst>
+            <pc:docMk/>
+            <pc:sldMk cId="4284697073" sldId="257"/>
+            <ac:cxnSpMk id="27" creationId="{A23FE6D0-FA4A-FAF0-11FE-2D6EDAF52C05}"/>
+          </ac:cxnSpMkLst>
+        </pc:cxnChg>
       </pc:sldChg>
-      <pc:sldMasterChg chg="del delSldLayout">
-        <pc:chgData name="Ryan Mok" userId="2b5ff9b4bc27d924" providerId="LiveId" clId="{98BDB49B-93C9-4AB7-A5FC-395AE49E91C6}" dt="2026-08-14T16:50:13.628" v="0" actId="47"/>
-        <pc:sldMasterMkLst>
-          <pc:docMk/>
-          <pc:sldMasterMk cId="923524128" sldId="2147483660"/>
-        </pc:sldMasterMkLst>
-        <pc:sldLayoutChg chg="del">
-          <pc:chgData name="Ryan Mok" userId="2b5ff9b4bc27d924" providerId="LiveId" clId="{98BDB49B-93C9-4AB7-A5FC-395AE49E91C6}" dt="2026-08-14T16:50:13.628" v="0" actId="47"/>
-          <pc:sldLayoutMkLst>
-            <pc:docMk/>
-            <pc:sldMasterMk cId="923524128" sldId="2147483660"/>
-            <pc:sldLayoutMk cId="481391781" sldId="2147483661"/>
-          </pc:sldLayoutMkLst>
-        </pc:sldLayoutChg>
-        <pc:sldLayoutChg chg="del">
-          <pc:chgData name="Ryan Mok" userId="2b5ff9b4bc27d924" providerId="LiveId" clId="{98BDB49B-93C9-4AB7-A5FC-395AE49E91C6}" dt="2026-08-14T16:50:13.628" v="0" actId="47"/>
-          <pc:sldLayoutMkLst>
-            <pc:docMk/>
-            <pc:sldMasterMk cId="923524128" sldId="2147483660"/>
-            <pc:sldLayoutMk cId="3585393932" sldId="2147483662"/>
-          </pc:sldLayoutMkLst>
-        </pc:sldLayoutChg>
-        <pc:sldLayoutChg chg="del">
-          <pc:chgData name="Ryan Mok" userId="2b5ff9b4bc27d924" providerId="LiveId" clId="{98BDB49B-93C9-4AB7-A5FC-395AE49E91C6}" dt="2026-08-14T16:50:13.628" v="0" actId="47"/>
-          <pc:sldLayoutMkLst>
-            <pc:docMk/>
-            <pc:sldMasterMk cId="923524128" sldId="2147483660"/>
-            <pc:sldLayoutMk cId="3550616651" sldId="2147483663"/>
-          </pc:sldLayoutMkLst>
-        </pc:sldLayoutChg>
-        <pc:sldLayoutChg chg="del">
-          <pc:chgData name="Ryan Mok" userId="2b5ff9b4bc27d924" providerId="LiveId" clId="{98BDB49B-93C9-4AB7-A5FC-395AE49E91C6}" dt="2026-08-14T16:50:13.628" v="0" actId="47"/>
-          <pc:sldLayoutMkLst>
-            <pc:docMk/>
-            <pc:sldMasterMk cId="923524128" sldId="2147483660"/>
-            <pc:sldLayoutMk cId="2778667958" sldId="2147483664"/>
-          </pc:sldLayoutMkLst>
-        </pc:sldLayoutChg>
-        <pc:sldLayoutChg chg="del">
-          <pc:chgData name="Ryan Mok" userId="2b5ff9b4bc27d924" providerId="LiveId" clId="{98BDB49B-93C9-4AB7-A5FC-395AE49E91C6}" dt="2026-08-14T16:50:13.628" v="0" actId="47"/>
-          <pc:sldLayoutMkLst>
-            <pc:docMk/>
-            <pc:sldMasterMk cId="923524128" sldId="2147483660"/>
-            <pc:sldLayoutMk cId="96750265" sldId="2147483666"/>
-          </pc:sldLayoutMkLst>
-        </pc:sldLayoutChg>
-        <pc:sldLayoutChg chg="del">
-          <pc:chgData name="Ryan Mok" userId="2b5ff9b4bc27d924" providerId="LiveId" clId="{98BDB49B-93C9-4AB7-A5FC-395AE49E91C6}" dt="2026-08-14T16:50:13.628" v="0" actId="47"/>
-          <pc:sldLayoutMkLst>
-            <pc:docMk/>
-            <pc:sldMasterMk cId="923524128" sldId="2147483660"/>
-            <pc:sldLayoutMk cId="3840978937" sldId="2147483670"/>
-          </pc:sldLayoutMkLst>
-        </pc:sldLayoutChg>
-        <pc:sldLayoutChg chg="del">
-          <pc:chgData name="Ryan Mok" userId="2b5ff9b4bc27d924" providerId="LiveId" clId="{98BDB49B-93C9-4AB7-A5FC-395AE49E91C6}" dt="2026-08-14T16:50:13.628" v="0" actId="47"/>
-          <pc:sldLayoutMkLst>
-            <pc:docMk/>
-            <pc:sldMasterMk cId="923524128" sldId="2147483660"/>
-            <pc:sldLayoutMk cId="3567258044" sldId="2147483671"/>
-          </pc:sldLayoutMkLst>
-        </pc:sldLayoutChg>
-      </pc:sldMasterChg>
     </pc:docChg>
   </pc:docChgLst>
 </pc:chgInfo>
@@ -5964,6 +6207,14 @@
 <file path=ppt/slides/slide1.xml><?xml version="1.0" encoding="utf-8"?>
 <p:sld xmlns:a="http://schemas.openxmlformats.org/drawingml/2006/main" xmlns:r="http://schemas.openxmlformats.org/officeDocument/2006/relationships" xmlns:p="http://schemas.openxmlformats.org/presentationml/2006/main">
   <p:cSld>
+    <p:bg>
+      <p:bgPr>
+        <a:solidFill>
+          <a:schemeClr val="bg1"/>
+        </a:solidFill>
+        <a:effectLst/>
+      </p:bgPr>
+    </p:bg>
     <p:spTree>
       <p:nvGrpSpPr>
         <p:cNvPr id="1" name=""/>
@@ -5980,18 +6231,72 @@
       </p:grpSpPr>
       <p:sp>
         <p:nvSpPr>
-          <p:cNvPr id="14" name="Content Placeholder 13">
+          <p:cNvPr id="8" name="Rectangle 7">
             <a:extLst>
               <a:ext uri="{FF2B5EF4-FFF2-40B4-BE49-F238E27FC236}">
-                <a16:creationId xmlns:a16="http://schemas.microsoft.com/office/drawing/2014/main" id="{9BFCBC3D-2EFC-CCF0-854D-98879A67B246}"/>
+                <a16:creationId xmlns:a16="http://schemas.microsoft.com/office/drawing/2014/main" id="{7A734323-8DED-6057-40A5-62D55DC614A9}"/>
               </a:ext>
             </a:extLst>
           </p:cNvPr>
+          <p:cNvSpPr/>
+          <p:nvPr/>
+        </p:nvSpPr>
+        <p:spPr>
+          <a:xfrm>
+            <a:off x="674843" y="6521964"/>
+            <a:ext cx="10466932" cy="7129964"/>
+          </a:xfrm>
+          <a:prstGeom prst="rect">
+            <a:avLst/>
+          </a:prstGeom>
+          <a:solidFill>
+            <a:schemeClr val="bg1"/>
+          </a:solidFill>
+          <a:ln w="317500">
+            <a:solidFill>
+              <a:srgbClr val="240E3C"/>
+            </a:solidFill>
+          </a:ln>
+        </p:spPr>
+        <p:style>
+          <a:lnRef idx="2">
+            <a:schemeClr val="accent1">
+              <a:shade val="15000"/>
+            </a:schemeClr>
+          </a:lnRef>
+          <a:fillRef idx="1">
+            <a:schemeClr val="accent1"/>
+          </a:fillRef>
+          <a:effectRef idx="0">
+            <a:schemeClr val="accent1"/>
+          </a:effectRef>
+          <a:fontRef idx="minor">
+            <a:schemeClr val="lt1"/>
+          </a:fontRef>
+        </p:style>
+        <p:txBody>
+          <a:bodyPr rtlCol="0" anchor="ctr"/>
+          <a:lstStyle/>
+          <a:p>
+            <a:pPr algn="ctr"/>
+            <a:endParaRPr lang="en-GB" dirty="0"/>
+          </a:p>
+        </p:txBody>
+      </p:sp>
+      <p:sp>
+        <p:nvSpPr>
+          <p:cNvPr id="13" name="Title 12">
+            <a:extLst>
+              <a:ext uri="{FF2B5EF4-FFF2-40B4-BE49-F238E27FC236}">
+                <a16:creationId xmlns:a16="http://schemas.microsoft.com/office/drawing/2014/main" id="{9C238F35-E5A8-EDA3-2713-36239122DA92}"/>
+              </a:ext>
+            </a:extLst>
+          </p:cNvPr>
           <p:cNvSpPr>
             <a:spLocks noGrp="1"/>
           </p:cNvSpPr>
           <p:nvPr>
-            <p:ph sz="quarter" idx="10"/>
+            <p:ph type="title"/>
           </p:nvPr>
         </p:nvSpPr>
         <p:spPr/>
@@ -5999,16 +6304,28 @@
           <a:bodyPr/>
           <a:lstStyle/>
           <a:p>
-            <a:endParaRPr lang="en-US" dirty="0"/>
-          </a:p>
-        </p:txBody>
-      </p:sp>
-      <p:sp>
-        <p:nvSpPr>
-          <p:cNvPr id="13" name="Title 12">
+            <a:r>
+              <a:rPr lang="en-GB" sz="8000" dirty="0"/>
+              <a:t>An </a:t>
+            </a:r>
+            <a:r>
+              <a:rPr lang="en-GB" sz="8000" i="1" dirty="0"/>
+              <a:t>Ab Initio </a:t>
+            </a:r>
+            <a:r>
+              <a:rPr lang="en-GB" sz="8000" dirty="0"/>
+              <a:t>Rovibrational Linelist for HPO</a:t>
+            </a:r>
+            <a:endParaRPr lang="en-US" sz="8000" dirty="0"/>
+          </a:p>
+        </p:txBody>
+      </p:sp>
+      <p:sp>
+        <p:nvSpPr>
+          <p:cNvPr id="15" name="Text Placeholder 14">
             <a:extLst>
               <a:ext uri="{FF2B5EF4-FFF2-40B4-BE49-F238E27FC236}">
-                <a16:creationId xmlns:a16="http://schemas.microsoft.com/office/drawing/2014/main" id="{9C238F35-E5A8-EDA3-2713-36239122DA92}"/>
+                <a16:creationId xmlns:a16="http://schemas.microsoft.com/office/drawing/2014/main" id="{31916651-C81A-514E-B9EB-FD00EBC0F2C1}"/>
               </a:ext>
             </a:extLst>
           </p:cNvPr>
@@ -6016,7 +6333,7 @@
             <a:spLocks noGrp="1"/>
           </p:cNvSpPr>
           <p:nvPr>
-            <p:ph type="title"/>
+            <p:ph type="body" sz="quarter" idx="17"/>
           </p:nvPr>
         </p:nvSpPr>
         <p:spPr/>
@@ -6025,27 +6342,23 @@
           <a:lstStyle/>
           <a:p>
             <a:r>
-              <a:rPr lang="en-GB" sz="8000" dirty="0"/>
-              <a:t>An </a:t>
-            </a:r>
-            <a:r>
-              <a:rPr lang="en-GB" sz="8000" i="1" dirty="0"/>
-              <a:t>Ab Initio </a:t>
-            </a:r>
-            <a:r>
-              <a:rPr lang="en-GB" sz="8000" dirty="0"/>
-              <a:t>Rovibrational Linelist for HPO</a:t>
-            </a:r>
-            <a:endParaRPr lang="en-US" sz="8000" dirty="0"/>
-          </a:p>
-        </p:txBody>
-      </p:sp>
-      <p:sp>
-        <p:nvSpPr>
-          <p:cNvPr id="15" name="Text Placeholder 14">
+              <a:rPr lang="en-US" dirty="0"/>
+              <a:t>Ryan Mok, </a:t>
+            </a:r>
+            <a:r>
+              <a:rPr lang="en-GB" dirty="0"/>
+              <a:t>Fangping Liu, Sergei N. Yurchenko</a:t>
+            </a:r>
+            <a:endParaRPr lang="en-US" dirty="0"/>
+          </a:p>
+        </p:txBody>
+      </p:sp>
+      <p:sp>
+        <p:nvSpPr>
+          <p:cNvPr id="16" name="Text Placeholder 15">
             <a:extLst>
               <a:ext uri="{FF2B5EF4-FFF2-40B4-BE49-F238E27FC236}">
-                <a16:creationId xmlns:a16="http://schemas.microsoft.com/office/drawing/2014/main" id="{31916651-C81A-514E-B9EB-FD00EBC0F2C1}"/>
+                <a16:creationId xmlns:a16="http://schemas.microsoft.com/office/drawing/2014/main" id="{5E36AFFF-BFC1-723D-CB6A-9115FC6AABF8}"/>
               </a:ext>
             </a:extLst>
           </p:cNvPr>
@@ -6053,7 +6366,7 @@
             <a:spLocks noGrp="1"/>
           </p:cNvSpPr>
           <p:nvPr>
-            <p:ph type="body" sz="quarter" idx="17"/>
+            <p:ph type="body" sz="quarter" idx="20"/>
           </p:nvPr>
         </p:nvSpPr>
         <p:spPr/>
@@ -6061,24 +6374,16 @@
           <a:bodyPr/>
           <a:lstStyle/>
           <a:p>
-            <a:r>
-              <a:rPr lang="en-US" dirty="0"/>
-              <a:t>Ryan Mok, </a:t>
-            </a:r>
-            <a:r>
-              <a:rPr lang="en-GB" dirty="0"/>
-              <a:t>Fangping Liu, Sergei N. Yurchenko</a:t>
-            </a:r>
             <a:endParaRPr lang="en-US" dirty="0"/>
           </a:p>
         </p:txBody>
       </p:sp>
       <p:sp>
         <p:nvSpPr>
-          <p:cNvPr id="16" name="Text Placeholder 15">
+          <p:cNvPr id="17" name="Text Placeholder 16">
             <a:extLst>
               <a:ext uri="{FF2B5EF4-FFF2-40B4-BE49-F238E27FC236}">
-                <a16:creationId xmlns:a16="http://schemas.microsoft.com/office/drawing/2014/main" id="{5E36AFFF-BFC1-723D-CB6A-9115FC6AABF8}"/>
+                <a16:creationId xmlns:a16="http://schemas.microsoft.com/office/drawing/2014/main" id="{FCA8C5BA-1FF5-149B-9632-932DB9DA8EDF}"/>
               </a:ext>
             </a:extLst>
           </p:cNvPr>
@@ -6086,7 +6391,7 @@
             <a:spLocks noGrp="1"/>
           </p:cNvSpPr>
           <p:nvPr>
-            <p:ph type="body" sz="quarter" idx="20"/>
+            <p:ph type="body" sz="quarter" idx="21"/>
           </p:nvPr>
         </p:nvSpPr>
         <p:spPr/>
@@ -6094,16 +6399,16 @@
           <a:bodyPr/>
           <a:lstStyle/>
           <a:p>
-            <a:endParaRPr lang="en-US" dirty="0"/>
-          </a:p>
-        </p:txBody>
-      </p:sp>
-      <p:sp>
-        <p:nvSpPr>
-          <p:cNvPr id="17" name="Text Placeholder 16">
+            <a:endParaRPr lang="en-US"/>
+          </a:p>
+        </p:txBody>
+      </p:sp>
+      <p:sp>
+        <p:nvSpPr>
+          <p:cNvPr id="18" name="Text Placeholder 17">
             <a:extLst>
               <a:ext uri="{FF2B5EF4-FFF2-40B4-BE49-F238E27FC236}">
-                <a16:creationId xmlns:a16="http://schemas.microsoft.com/office/drawing/2014/main" id="{FCA8C5BA-1FF5-149B-9632-932DB9DA8EDF}"/>
+                <a16:creationId xmlns:a16="http://schemas.microsoft.com/office/drawing/2014/main" id="{9C763BC8-5523-6C28-2239-5EA255422EE0}"/>
               </a:ext>
             </a:extLst>
           </p:cNvPr>
@@ -6111,7 +6416,7 @@
             <a:spLocks noGrp="1"/>
           </p:cNvSpPr>
           <p:nvPr>
-            <p:ph type="body" sz="quarter" idx="21"/>
+            <p:ph type="body" sz="quarter" idx="22"/>
           </p:nvPr>
         </p:nvSpPr>
         <p:spPr/>
@@ -6119,16 +6424,20 @@
           <a:bodyPr/>
           <a:lstStyle/>
           <a:p>
-            <a:endParaRPr lang="en-US"/>
-          </a:p>
-        </p:txBody>
-      </p:sp>
-      <p:sp>
-        <p:nvSpPr>
-          <p:cNvPr id="18" name="Text Placeholder 17">
+            <a:r>
+              <a:rPr lang="en-GB" dirty="0"/>
+              <a:t>Department of Physics and Astronomy, University College London, WC1E 6BT, London, UK</a:t>
+            </a:r>
+            <a:endParaRPr lang="en-US" dirty="0"/>
+          </a:p>
+        </p:txBody>
+      </p:sp>
+      <p:sp>
+        <p:nvSpPr>
+          <p:cNvPr id="21" name="Content Placeholder 20">
             <a:extLst>
               <a:ext uri="{FF2B5EF4-FFF2-40B4-BE49-F238E27FC236}">
-                <a16:creationId xmlns:a16="http://schemas.microsoft.com/office/drawing/2014/main" id="{9C763BC8-5523-6C28-2239-5EA255422EE0}"/>
+                <a16:creationId xmlns:a16="http://schemas.microsoft.com/office/drawing/2014/main" id="{9678B249-83F4-209B-9C2A-C9BEB6C13020}"/>
               </a:ext>
             </a:extLst>
           </p:cNvPr>
@@ -6136,7 +6445,7 @@
             <a:spLocks noGrp="1"/>
           </p:cNvSpPr>
           <p:nvPr>
-            <p:ph type="body" sz="quarter" idx="22"/>
+            <p:ph sz="quarter" idx="25"/>
           </p:nvPr>
         </p:nvSpPr>
         <p:spPr/>
@@ -6144,20 +6453,16 @@
           <a:bodyPr/>
           <a:lstStyle/>
           <a:p>
-            <a:r>
-              <a:rPr lang="en-GB" dirty="0"/>
-              <a:t>Department of Physics and Astronomy, University College London, WC1E 6BT, London, UK</a:t>
-            </a:r>
-            <a:endParaRPr lang="en-US" dirty="0"/>
-          </a:p>
-        </p:txBody>
-      </p:sp>
-      <p:sp>
-        <p:nvSpPr>
-          <p:cNvPr id="19" name="Content Placeholder 18">
+            <a:endParaRPr lang="en-US"/>
+          </a:p>
+        </p:txBody>
+      </p:sp>
+      <p:sp>
+        <p:nvSpPr>
+          <p:cNvPr id="22" name="Content Placeholder 21">
             <a:extLst>
               <a:ext uri="{FF2B5EF4-FFF2-40B4-BE49-F238E27FC236}">
-                <a16:creationId xmlns:a16="http://schemas.microsoft.com/office/drawing/2014/main" id="{F595DB66-7B4C-C9B6-E479-317A8312D5A7}"/>
+                <a16:creationId xmlns:a16="http://schemas.microsoft.com/office/drawing/2014/main" id="{D6C21CA2-FD8B-96F0-F877-0F7A3134086A}"/>
               </a:ext>
             </a:extLst>
           </p:cNvPr>
@@ -6165,7 +6470,7 @@
             <a:spLocks noGrp="1"/>
           </p:cNvSpPr>
           <p:nvPr>
-            <p:ph sz="quarter" idx="23"/>
+            <p:ph sz="quarter" idx="26"/>
           </p:nvPr>
         </p:nvSpPr>
         <p:spPr/>
@@ -6179,10 +6484,10 @@
       </p:sp>
       <p:sp>
         <p:nvSpPr>
-          <p:cNvPr id="20" name="Content Placeholder 19">
+          <p:cNvPr id="23" name="Content Placeholder 22">
             <a:extLst>
               <a:ext uri="{FF2B5EF4-FFF2-40B4-BE49-F238E27FC236}">
-                <a16:creationId xmlns:a16="http://schemas.microsoft.com/office/drawing/2014/main" id="{13F20D06-2613-CD61-45CC-1376A7DC7CEA}"/>
+                <a16:creationId xmlns:a16="http://schemas.microsoft.com/office/drawing/2014/main" id="{81346889-22B2-6F9B-A0BE-03766389A0B4}"/>
               </a:ext>
             </a:extLst>
           </p:cNvPr>
@@ -6190,7 +6495,7 @@
             <a:spLocks noGrp="1"/>
           </p:cNvSpPr>
           <p:nvPr>
-            <p:ph sz="quarter" idx="24"/>
+            <p:ph sz="quarter" idx="27"/>
           </p:nvPr>
         </p:nvSpPr>
         <p:spPr/>
@@ -6202,81 +6507,715 @@
           </a:p>
         </p:txBody>
       </p:sp>
-      <p:sp>
-        <p:nvSpPr>
-          <p:cNvPr id="21" name="Content Placeholder 20">
+      <p:grpSp>
+        <p:nvGrpSpPr>
+          <p:cNvPr id="12" name="Group 11">
             <a:extLst>
               <a:ext uri="{FF2B5EF4-FFF2-40B4-BE49-F238E27FC236}">
-                <a16:creationId xmlns:a16="http://schemas.microsoft.com/office/drawing/2014/main" id="{9678B249-83F4-209B-9C2A-C9BEB6C13020}"/>
+                <a16:creationId xmlns:a16="http://schemas.microsoft.com/office/drawing/2014/main" id="{9A7236CB-1D08-1C61-8FA2-BA47FB251EB1}"/>
               </a:ext>
             </a:extLst>
           </p:cNvPr>
-          <p:cNvSpPr>
-            <a:spLocks noGrp="1"/>
-          </p:cNvSpPr>
-          <p:nvPr>
-            <p:ph sz="quarter" idx="25"/>
-          </p:nvPr>
-        </p:nvSpPr>
-        <p:spPr/>
-        <p:txBody>
-          <a:bodyPr/>
-          <a:lstStyle/>
-          <a:p>
-            <a:endParaRPr lang="en-US"/>
-          </a:p>
-        </p:txBody>
-      </p:sp>
-      <p:sp>
-        <p:nvSpPr>
-          <p:cNvPr id="22" name="Content Placeholder 21">
+          <p:cNvGrpSpPr/>
+          <p:nvPr/>
+        </p:nvGrpSpPr>
+        <p:grpSpPr>
+          <a:xfrm>
+            <a:off x="2270689" y="7885287"/>
+            <a:ext cx="7275240" cy="4403317"/>
+            <a:chOff x="2529884" y="1485419"/>
+            <a:chExt cx="4296945" cy="2600713"/>
+          </a:xfrm>
+        </p:grpSpPr>
+        <p:sp>
+          <p:nvSpPr>
+            <p:cNvPr id="24" name="Arc 23">
+              <a:extLst>
+                <a:ext uri="{FF2B5EF4-FFF2-40B4-BE49-F238E27FC236}">
+                  <a16:creationId xmlns:a16="http://schemas.microsoft.com/office/drawing/2014/main" id="{B585A51F-CF5B-017C-7401-ACE9EC6E5F97}"/>
+                </a:ext>
+              </a:extLst>
+            </p:cNvPr>
+            <p:cNvSpPr/>
+            <p:nvPr/>
+          </p:nvSpPr>
+          <p:spPr>
+            <a:xfrm rot="8449048">
+              <a:off x="3917299" y="1485419"/>
+              <a:ext cx="1451378" cy="1431365"/>
+            </a:xfrm>
+            <a:prstGeom prst="arc">
+              <a:avLst>
+                <a:gd name="adj1" fmla="val 15496379"/>
+                <a:gd name="adj2" fmla="val 21546438"/>
+              </a:avLst>
+            </a:prstGeom>
+            <a:ln w="38100">
+              <a:solidFill>
+                <a:srgbClr val="FF0000"/>
+              </a:solidFill>
+            </a:ln>
+          </p:spPr>
+          <p:style>
+            <a:lnRef idx="2">
+              <a:schemeClr val="accent1"/>
+            </a:lnRef>
+            <a:fillRef idx="0">
+              <a:schemeClr val="accent1"/>
+            </a:fillRef>
+            <a:effectRef idx="1">
+              <a:schemeClr val="accent1"/>
+            </a:effectRef>
+            <a:fontRef idx="minor">
+              <a:schemeClr val="tx1"/>
+            </a:fontRef>
+          </p:style>
+          <p:txBody>
+            <a:bodyPr rtlCol="0" anchor="ctr"/>
+            <a:lstStyle/>
+            <a:p>
+              <a:pPr algn="ctr"/>
+              <a:endParaRPr lang="en-GB" dirty="0"/>
+            </a:p>
+          </p:txBody>
+        </p:sp>
+        <p:cxnSp>
+          <p:nvCxnSpPr>
+            <p:cNvPr id="25" name="Straight Connector 24">
+              <a:extLst>
+                <a:ext uri="{FF2B5EF4-FFF2-40B4-BE49-F238E27FC236}">
+                  <a16:creationId xmlns:a16="http://schemas.microsoft.com/office/drawing/2014/main" id="{1BDE498B-0EBE-96E0-34F8-D8769226A488}"/>
+                </a:ext>
+              </a:extLst>
+            </p:cNvPr>
+            <p:cNvCxnSpPr>
+              <a:cxnSpLocks/>
+            </p:cNvCxnSpPr>
+            <p:nvPr/>
+          </p:nvCxnSpPr>
+          <p:spPr>
+            <a:xfrm flipV="1">
+              <a:off x="2966957" y="2201101"/>
+              <a:ext cx="1667245" cy="1419922"/>
+            </a:xfrm>
+            <a:prstGeom prst="line">
+              <a:avLst/>
+            </a:prstGeom>
+            <a:ln w="38100"/>
+          </p:spPr>
+          <p:style>
+            <a:lnRef idx="2">
+              <a:schemeClr val="dk1"/>
+            </a:lnRef>
+            <a:fillRef idx="0">
+              <a:schemeClr val="dk1"/>
+            </a:fillRef>
+            <a:effectRef idx="1">
+              <a:schemeClr val="dk1"/>
+            </a:effectRef>
+            <a:fontRef idx="minor">
+              <a:schemeClr val="tx1"/>
+            </a:fontRef>
+          </p:style>
+        </p:cxnSp>
+        <p:sp>
+          <p:nvSpPr>
+            <p:cNvPr id="26" name="Oval 25">
+              <a:extLst>
+                <a:ext uri="{FF2B5EF4-FFF2-40B4-BE49-F238E27FC236}">
+                  <a16:creationId xmlns:a16="http://schemas.microsoft.com/office/drawing/2014/main" id="{4E8F0C31-F325-E517-DF78-7DF30F8975B7}"/>
+                </a:ext>
+              </a:extLst>
+            </p:cNvPr>
+            <p:cNvSpPr/>
+            <p:nvPr/>
+          </p:nvSpPr>
+          <p:spPr>
+            <a:xfrm>
+              <a:off x="2529884" y="3146770"/>
+              <a:ext cx="874146" cy="930217"/>
+            </a:xfrm>
+            <a:prstGeom prst="ellipse">
+              <a:avLst/>
+            </a:prstGeom>
+            <a:solidFill>
+              <a:srgbClr val="F2F2F2"/>
+            </a:solidFill>
+            <a:ln>
+              <a:solidFill>
+                <a:schemeClr val="tx1"/>
+              </a:solidFill>
+            </a:ln>
+          </p:spPr>
+          <p:style>
+            <a:lnRef idx="2">
+              <a:schemeClr val="accent1">
+                <a:shade val="15000"/>
+              </a:schemeClr>
+            </a:lnRef>
+            <a:fillRef idx="1">
+              <a:schemeClr val="accent1"/>
+            </a:fillRef>
+            <a:effectRef idx="0">
+              <a:schemeClr val="accent1"/>
+            </a:effectRef>
+            <a:fontRef idx="minor">
+              <a:schemeClr val="lt1"/>
+            </a:fontRef>
+          </p:style>
+          <p:txBody>
+            <a:bodyPr rtlCol="0" anchor="ctr"/>
+            <a:lstStyle/>
+            <a:p>
+              <a:pPr algn="ctr"/>
+              <a:r>
+                <a:rPr lang="en-US" sz="3600" dirty="0">
+                  <a:solidFill>
+                    <a:schemeClr val="tx1"/>
+                  </a:solidFill>
+                  <a:latin typeface="Tahoma" panose="020B0604030504040204" pitchFamily="34" charset="0"/>
+                  <a:ea typeface="Tahoma" panose="020B0604030504040204" pitchFamily="34" charset="0"/>
+                  <a:cs typeface="Tahoma" panose="020B0604030504040204" pitchFamily="34" charset="0"/>
+                </a:rPr>
+                <a:t>H</a:t>
+              </a:r>
+            </a:p>
+          </p:txBody>
+        </p:sp>
+        <p:cxnSp>
+          <p:nvCxnSpPr>
+            <p:cNvPr id="27" name="Straight Connector 26">
+              <a:extLst>
+                <a:ext uri="{FF2B5EF4-FFF2-40B4-BE49-F238E27FC236}">
+                  <a16:creationId xmlns:a16="http://schemas.microsoft.com/office/drawing/2014/main" id="{A23FE6D0-FA4A-FAF0-11FE-2D6EDAF52C05}"/>
+                </a:ext>
+              </a:extLst>
+            </p:cNvPr>
+            <p:cNvCxnSpPr>
+              <a:cxnSpLocks/>
+            </p:cNvCxnSpPr>
+            <p:nvPr/>
+          </p:nvCxnSpPr>
+          <p:spPr>
+            <a:xfrm flipH="1" flipV="1">
+              <a:off x="4634202" y="2201101"/>
+              <a:ext cx="1755554" cy="1419922"/>
+            </a:xfrm>
+            <a:prstGeom prst="line">
+              <a:avLst/>
+            </a:prstGeom>
+            <a:ln w="38100"/>
+          </p:spPr>
+          <p:style>
+            <a:lnRef idx="2">
+              <a:schemeClr val="dk1"/>
+            </a:lnRef>
+            <a:fillRef idx="0">
+              <a:schemeClr val="dk1"/>
+            </a:fillRef>
+            <a:effectRef idx="1">
+              <a:schemeClr val="dk1"/>
+            </a:effectRef>
+            <a:fontRef idx="minor">
+              <a:schemeClr val="tx1"/>
+            </a:fontRef>
+          </p:style>
+        </p:cxnSp>
+        <p:sp>
+          <p:nvSpPr>
+            <p:cNvPr id="28" name="Oval 27">
+              <a:extLst>
+                <a:ext uri="{FF2B5EF4-FFF2-40B4-BE49-F238E27FC236}">
+                  <a16:creationId xmlns:a16="http://schemas.microsoft.com/office/drawing/2014/main" id="{BDFFD4A4-2CFB-3F78-09F9-63F5C1233FAD}"/>
+                </a:ext>
+              </a:extLst>
+            </p:cNvPr>
+            <p:cNvSpPr/>
+            <p:nvPr/>
+          </p:nvSpPr>
+          <p:spPr>
+            <a:xfrm>
+              <a:off x="4197129" y="1735993"/>
+              <a:ext cx="874146" cy="930217"/>
+            </a:xfrm>
+            <a:prstGeom prst="ellipse">
+              <a:avLst/>
+            </a:prstGeom>
+            <a:solidFill>
+              <a:srgbClr val="8826C5"/>
+            </a:solidFill>
+          </p:spPr>
+          <p:style>
+            <a:lnRef idx="2">
+              <a:schemeClr val="accent1">
+                <a:shade val="15000"/>
+              </a:schemeClr>
+            </a:lnRef>
+            <a:fillRef idx="1">
+              <a:schemeClr val="accent1"/>
+            </a:fillRef>
+            <a:effectRef idx="0">
+              <a:schemeClr val="accent1"/>
+            </a:effectRef>
+            <a:fontRef idx="minor">
+              <a:schemeClr val="lt1"/>
+            </a:fontRef>
+          </p:style>
+          <p:txBody>
+            <a:bodyPr rtlCol="0" anchor="ctr"/>
+            <a:lstStyle/>
+            <a:p>
+              <a:pPr algn="ctr"/>
+              <a:r>
+                <a:rPr lang="en-US" sz="3600" dirty="0">
+                  <a:solidFill>
+                    <a:schemeClr val="tx1"/>
+                  </a:solidFill>
+                  <a:latin typeface="Tahoma" panose="020B0604030504040204" pitchFamily="34" charset="0"/>
+                  <a:ea typeface="Tahoma" panose="020B0604030504040204" pitchFamily="34" charset="0"/>
+                  <a:cs typeface="Tahoma" panose="020B0604030504040204" pitchFamily="34" charset="0"/>
+                </a:rPr>
+                <a:t>P</a:t>
+              </a:r>
+            </a:p>
+          </p:txBody>
+        </p:sp>
+        <p:sp>
+          <p:nvSpPr>
+            <p:cNvPr id="29" name="Oval 28">
+              <a:extLst>
+                <a:ext uri="{FF2B5EF4-FFF2-40B4-BE49-F238E27FC236}">
+                  <a16:creationId xmlns:a16="http://schemas.microsoft.com/office/drawing/2014/main" id="{A3AB5137-41A4-92D9-7709-CBACFB59F3FF}"/>
+                </a:ext>
+              </a:extLst>
+            </p:cNvPr>
+            <p:cNvSpPr/>
+            <p:nvPr/>
+          </p:nvSpPr>
+          <p:spPr>
+            <a:xfrm>
+              <a:off x="5952683" y="3155915"/>
+              <a:ext cx="874146" cy="930217"/>
+            </a:xfrm>
+            <a:prstGeom prst="ellipse">
+              <a:avLst/>
+            </a:prstGeom>
+            <a:solidFill>
+              <a:srgbClr val="D93528"/>
+            </a:solidFill>
+          </p:spPr>
+          <p:style>
+            <a:lnRef idx="2">
+              <a:schemeClr val="accent1">
+                <a:shade val="15000"/>
+              </a:schemeClr>
+            </a:lnRef>
+            <a:fillRef idx="1">
+              <a:schemeClr val="accent1"/>
+            </a:fillRef>
+            <a:effectRef idx="0">
+              <a:schemeClr val="accent1"/>
+            </a:effectRef>
+            <a:fontRef idx="minor">
+              <a:schemeClr val="lt1"/>
+            </a:fontRef>
+          </p:style>
+          <p:txBody>
+            <a:bodyPr rtlCol="0" anchor="ctr"/>
+            <a:lstStyle/>
+            <a:p>
+              <a:pPr algn="ctr"/>
+              <a:r>
+                <a:rPr lang="en-US" sz="3600" dirty="0">
+                  <a:solidFill>
+                    <a:schemeClr val="tx1"/>
+                  </a:solidFill>
+                  <a:latin typeface="Tahoma" panose="020B0604030504040204" pitchFamily="34" charset="0"/>
+                  <a:ea typeface="Tahoma" panose="020B0604030504040204" pitchFamily="34" charset="0"/>
+                  <a:cs typeface="Tahoma" panose="020B0604030504040204" pitchFamily="34" charset="0"/>
+                </a:rPr>
+                <a:t>O</a:t>
+              </a:r>
+            </a:p>
+          </p:txBody>
+        </p:sp>
+        <mc:AlternateContent xmlns:mc="http://schemas.openxmlformats.org/markup-compatibility/2006" xmlns:a14="http://schemas.microsoft.com/office/drawing/2010/main">
+          <mc:Choice Requires="a14">
+            <p:sp>
+              <p:nvSpPr>
+                <p:cNvPr id="30" name="TextBox 29">
+                  <a:extLst>
+                    <a:ext uri="{FF2B5EF4-FFF2-40B4-BE49-F238E27FC236}">
+                      <a16:creationId xmlns:a16="http://schemas.microsoft.com/office/drawing/2014/main" id="{C8F7EE3F-0556-83B2-9D61-E939E3ACB9C1}"/>
+                    </a:ext>
+                  </a:extLst>
+                </p:cNvPr>
+                <p:cNvSpPr txBox="1"/>
+                <p:nvPr/>
+              </p:nvSpPr>
+              <p:spPr>
+                <a:xfrm>
+                  <a:off x="5247261" y="2536757"/>
+                  <a:ext cx="1005887" cy="283502"/>
+                </a:xfrm>
+                <a:prstGeom prst="rect">
+                  <a:avLst/>
+                </a:prstGeom>
+                <a:noFill/>
+              </p:spPr>
+              <p:txBody>
+                <a:bodyPr wrap="square" rtlCol="0">
+                  <a:spAutoFit/>
+                </a:bodyPr>
+                <a:lstStyle/>
+                <a:p>
+                  <a:pPr/>
+                  <a14:m>
+                    <m:oMathPara xmlns:m="http://schemas.openxmlformats.org/officeDocument/2006/math">
+                      <m:oMath>
+                        <m:r>
+                          <a:rPr lang="en-US" sz="2400" b="0" i="0" smtClean="0">
+                            <a:latin typeface="Cambria Math" panose="02040503050406030204" pitchFamily="18" charset="0"/>
+                            <a:cs typeface="Times New Roman" panose="02020603050405020304" pitchFamily="18" charset="0"/>
+                          </a:rPr>
+                          <m:t>1.484 </m:t>
+                        </m:r>
+                        <m:r>
+                          <m:rPr>
+                            <m:sty m:val="p"/>
+                          </m:rPr>
+                          <a:rPr lang="en-US" sz="2400" b="0" i="1" smtClean="0">
+                            <a:latin typeface="Cambria Math" panose="02040503050406030204" pitchFamily="18" charset="0"/>
+                            <a:cs typeface="Times New Roman" panose="02020603050405020304" pitchFamily="18" charset="0"/>
+                          </a:rPr>
+                          <m:t>Å</m:t>
+                        </m:r>
+                      </m:oMath>
+                    </m:oMathPara>
+                  </a14:m>
+                  <a:endParaRPr lang="en-GB" sz="2400" dirty="0">
+                    <a:latin typeface="Times New Roman" panose="02020603050405020304" pitchFamily="18" charset="0"/>
+                    <a:cs typeface="Times New Roman" panose="02020603050405020304" pitchFamily="18" charset="0"/>
+                  </a:endParaRPr>
+                </a:p>
+              </p:txBody>
+            </p:sp>
+          </mc:Choice>
+          <mc:Fallback xmlns="">
+            <p:sp>
+              <p:nvSpPr>
+                <p:cNvPr id="30" name="TextBox 29">
+                  <a:extLst>
+                    <a:ext uri="{FF2B5EF4-FFF2-40B4-BE49-F238E27FC236}">
+                      <a16:creationId xmlns:a16="http://schemas.microsoft.com/office/drawing/2014/main" id="{C8F7EE3F-0556-83B2-9D61-E939E3ACB9C1}"/>
+                    </a:ext>
+                  </a:extLst>
+                </p:cNvPr>
+                <p:cNvSpPr txBox="1">
+                  <a:spLocks noRot="1" noChangeAspect="1" noMove="1" noResize="1" noEditPoints="1" noAdjustHandles="1" noChangeArrowheads="1" noChangeShapeType="1" noTextEdit="1"/>
+                </p:cNvSpPr>
+                <p:nvPr/>
+              </p:nvSpPr>
+              <p:spPr>
+                <a:xfrm>
+                  <a:off x="5247261" y="2536757"/>
+                  <a:ext cx="1005887" cy="283502"/>
+                </a:xfrm>
+                <a:prstGeom prst="rect">
+                  <a:avLst/>
+                </a:prstGeom>
+                <a:blipFill>
+                  <a:blip r:embed="rId2"/>
+                  <a:stretch>
+                    <a:fillRect/>
+                  </a:stretch>
+                </a:blipFill>
+              </p:spPr>
+              <p:txBody>
+                <a:bodyPr/>
+                <a:lstStyle/>
+                <a:p>
+                  <a:r>
+                    <a:rPr lang="en-GB">
+                      <a:noFill/>
+                    </a:rPr>
+                    <a:t> </a:t>
+                  </a:r>
+                </a:p>
+              </p:txBody>
+            </p:sp>
+          </mc:Fallback>
+        </mc:AlternateContent>
+        <mc:AlternateContent xmlns:mc="http://schemas.openxmlformats.org/markup-compatibility/2006" xmlns:a14="http://schemas.microsoft.com/office/drawing/2010/main">
+          <mc:Choice Requires="a14">
+            <p:sp>
+              <p:nvSpPr>
+                <p:cNvPr id="31" name="TextBox 30">
+                  <a:extLst>
+                    <a:ext uri="{FF2B5EF4-FFF2-40B4-BE49-F238E27FC236}">
+                      <a16:creationId xmlns:a16="http://schemas.microsoft.com/office/drawing/2014/main" id="{89BBEEB5-ACEE-A784-0DFF-E9EC93EE84D4}"/>
+                    </a:ext>
+                  </a:extLst>
+                </p:cNvPr>
+                <p:cNvSpPr txBox="1"/>
+                <p:nvPr/>
+              </p:nvSpPr>
+              <p:spPr>
+                <a:xfrm>
+                  <a:off x="3032827" y="2481544"/>
+                  <a:ext cx="1005887" cy="283502"/>
+                </a:xfrm>
+                <a:prstGeom prst="rect">
+                  <a:avLst/>
+                </a:prstGeom>
+                <a:noFill/>
+              </p:spPr>
+              <p:txBody>
+                <a:bodyPr wrap="square" rtlCol="0">
+                  <a:spAutoFit/>
+                </a:bodyPr>
+                <a:lstStyle/>
+                <a:p>
+                  <a:pPr/>
+                  <a14:m>
+                    <m:oMathPara xmlns:m="http://schemas.openxmlformats.org/officeDocument/2006/math">
+                      <m:oMath>
+                        <m:r>
+                          <a:rPr lang="en-US" sz="2400" b="0" i="0" smtClean="0">
+                            <a:latin typeface="Cambria Math" panose="02040503050406030204" pitchFamily="18" charset="0"/>
+                            <a:cs typeface="Times New Roman" panose="02020603050405020304" pitchFamily="18" charset="0"/>
+                          </a:rPr>
+                          <m:t>1.455 </m:t>
+                        </m:r>
+                        <m:r>
+                          <m:rPr>
+                            <m:sty m:val="p"/>
+                          </m:rPr>
+                          <a:rPr lang="en-US" sz="2400" b="0" i="1" smtClean="0">
+                            <a:latin typeface="Cambria Math" panose="02040503050406030204" pitchFamily="18" charset="0"/>
+                            <a:cs typeface="Times New Roman" panose="02020603050405020304" pitchFamily="18" charset="0"/>
+                          </a:rPr>
+                          <m:t>Å</m:t>
+                        </m:r>
+                      </m:oMath>
+                    </m:oMathPara>
+                  </a14:m>
+                  <a:endParaRPr lang="en-GB" sz="2400" dirty="0">
+                    <a:latin typeface="Times New Roman" panose="02020603050405020304" pitchFamily="18" charset="0"/>
+                    <a:cs typeface="Times New Roman" panose="02020603050405020304" pitchFamily="18" charset="0"/>
+                  </a:endParaRPr>
+                </a:p>
+              </p:txBody>
+            </p:sp>
+          </mc:Choice>
+          <mc:Fallback xmlns="">
+            <p:sp>
+              <p:nvSpPr>
+                <p:cNvPr id="31" name="TextBox 30">
+                  <a:extLst>
+                    <a:ext uri="{FF2B5EF4-FFF2-40B4-BE49-F238E27FC236}">
+                      <a16:creationId xmlns:a16="http://schemas.microsoft.com/office/drawing/2014/main" id="{89BBEEB5-ACEE-A784-0DFF-E9EC93EE84D4}"/>
+                    </a:ext>
+                  </a:extLst>
+                </p:cNvPr>
+                <p:cNvSpPr txBox="1">
+                  <a:spLocks noRot="1" noChangeAspect="1" noMove="1" noResize="1" noEditPoints="1" noAdjustHandles="1" noChangeArrowheads="1" noChangeShapeType="1" noTextEdit="1"/>
+                </p:cNvSpPr>
+                <p:nvPr/>
+              </p:nvSpPr>
+              <p:spPr>
+                <a:xfrm>
+                  <a:off x="3032827" y="2481544"/>
+                  <a:ext cx="1005887" cy="283502"/>
+                </a:xfrm>
+                <a:prstGeom prst="rect">
+                  <a:avLst/>
+                </a:prstGeom>
+                <a:blipFill>
+                  <a:blip r:embed="rId3"/>
+                  <a:stretch>
+                    <a:fillRect/>
+                  </a:stretch>
+                </a:blipFill>
+              </p:spPr>
+              <p:txBody>
+                <a:bodyPr/>
+                <a:lstStyle/>
+                <a:p>
+                  <a:r>
+                    <a:rPr lang="en-GB">
+                      <a:noFill/>
+                    </a:rPr>
+                    <a:t> </a:t>
+                  </a:r>
+                </a:p>
+              </p:txBody>
+            </p:sp>
+          </mc:Fallback>
+        </mc:AlternateContent>
+        <mc:AlternateContent xmlns:mc="http://schemas.openxmlformats.org/markup-compatibility/2006" xmlns:a14="http://schemas.microsoft.com/office/drawing/2010/main">
+          <mc:Choice Requires="a14">
+            <p:sp>
+              <p:nvSpPr>
+                <p:cNvPr id="32" name="TextBox 31">
+                  <a:extLst>
+                    <a:ext uri="{FF2B5EF4-FFF2-40B4-BE49-F238E27FC236}">
+                      <a16:creationId xmlns:a16="http://schemas.microsoft.com/office/drawing/2014/main" id="{2CF7DD42-5A6C-2283-9C82-033F1FDF8092}"/>
+                    </a:ext>
+                  </a:extLst>
+                </p:cNvPr>
+                <p:cNvSpPr txBox="1"/>
+                <p:nvPr/>
+              </p:nvSpPr>
+              <p:spPr>
+                <a:xfrm>
+                  <a:off x="4175413" y="2932664"/>
+                  <a:ext cx="1005887" cy="272671"/>
+                </a:xfrm>
+                <a:prstGeom prst="rect">
+                  <a:avLst/>
+                </a:prstGeom>
+                <a:noFill/>
+              </p:spPr>
+              <p:txBody>
+                <a:bodyPr wrap="square" rtlCol="0">
+                  <a:spAutoFit/>
+                </a:bodyPr>
+                <a:lstStyle/>
+                <a:p>
+                  <a:pPr/>
+                  <a14:m>
+                    <m:oMathPara xmlns:m="http://schemas.openxmlformats.org/officeDocument/2006/math">
+                      <m:oMath>
+                        <m:sSup>
+                          <m:sSupPr>
+                            <m:ctrlPr>
+                              <a:rPr lang="en-US" sz="2400" b="0" i="1" smtClean="0">
+                                <a:latin typeface="Cambria Math" panose="02040503050406030204" pitchFamily="18" charset="0"/>
+                                <a:cs typeface="Times New Roman" panose="02020603050405020304" pitchFamily="18" charset="0"/>
+                              </a:rPr>
+                            </m:ctrlPr>
+                          </m:sSupPr>
+                          <m:e>
+                            <m:r>
+                              <a:rPr lang="en-US" sz="2400" b="0" i="1" smtClean="0">
+                                <a:latin typeface="Cambria Math" panose="02040503050406030204" pitchFamily="18" charset="0"/>
+                                <a:cs typeface="Times New Roman" panose="02020603050405020304" pitchFamily="18" charset="0"/>
+                              </a:rPr>
+                              <m:t>104.4</m:t>
+                            </m:r>
+                          </m:e>
+                          <m:sup>
+                            <m:r>
+                              <a:rPr lang="en-US" sz="2400" b="0" i="1" smtClean="0">
+                                <a:latin typeface="Cambria Math" panose="02040503050406030204" pitchFamily="18" charset="0"/>
+                                <a:cs typeface="Times New Roman" panose="02020603050405020304" pitchFamily="18" charset="0"/>
+                              </a:rPr>
+                              <m:t>∘</m:t>
+                            </m:r>
+                          </m:sup>
+                        </m:sSup>
+                      </m:oMath>
+                    </m:oMathPara>
+                  </a14:m>
+                  <a:endParaRPr lang="en-GB" sz="2400" dirty="0">
+                    <a:latin typeface="Times New Roman" panose="02020603050405020304" pitchFamily="18" charset="0"/>
+                    <a:cs typeface="Times New Roman" panose="02020603050405020304" pitchFamily="18" charset="0"/>
+                  </a:endParaRPr>
+                </a:p>
+              </p:txBody>
+            </p:sp>
+          </mc:Choice>
+          <mc:Fallback xmlns="">
+            <p:sp>
+              <p:nvSpPr>
+                <p:cNvPr id="32" name="TextBox 31">
+                  <a:extLst>
+                    <a:ext uri="{FF2B5EF4-FFF2-40B4-BE49-F238E27FC236}">
+                      <a16:creationId xmlns:a16="http://schemas.microsoft.com/office/drawing/2014/main" id="{2CF7DD42-5A6C-2283-9C82-033F1FDF8092}"/>
+                    </a:ext>
+                  </a:extLst>
+                </p:cNvPr>
+                <p:cNvSpPr txBox="1">
+                  <a:spLocks noRot="1" noChangeAspect="1" noMove="1" noResize="1" noEditPoints="1" noAdjustHandles="1" noChangeArrowheads="1" noChangeShapeType="1" noTextEdit="1"/>
+                </p:cNvSpPr>
+                <p:nvPr/>
+              </p:nvSpPr>
+              <p:spPr>
+                <a:xfrm>
+                  <a:off x="4175413" y="2932664"/>
+                  <a:ext cx="1005887" cy="272671"/>
+                </a:xfrm>
+                <a:prstGeom prst="rect">
+                  <a:avLst/>
+                </a:prstGeom>
+                <a:blipFill>
+                  <a:blip r:embed="rId4"/>
+                  <a:stretch>
+                    <a:fillRect/>
+                  </a:stretch>
+                </a:blipFill>
+              </p:spPr>
+              <p:txBody>
+                <a:bodyPr/>
+                <a:lstStyle/>
+                <a:p>
+                  <a:r>
+                    <a:rPr lang="en-GB">
+                      <a:noFill/>
+                    </a:rPr>
+                    <a:t> </a:t>
+                  </a:r>
+                </a:p>
+              </p:txBody>
+            </p:sp>
+          </mc:Fallback>
+        </mc:AlternateContent>
+      </p:grpSp>
+      <p:pic>
+        <p:nvPicPr>
+          <p:cNvPr id="46" name="Content Placeholder 45">
             <a:extLst>
               <a:ext uri="{FF2B5EF4-FFF2-40B4-BE49-F238E27FC236}">
-                <a16:creationId xmlns:a16="http://schemas.microsoft.com/office/drawing/2014/main" id="{D6C21CA2-FD8B-96F0-F877-0F7A3134086A}"/>
+                <a16:creationId xmlns:a16="http://schemas.microsoft.com/office/drawing/2014/main" id="{648DE49E-2738-9E11-8AA2-69CDCF99E6F5}"/>
               </a:ext>
             </a:extLst>
           </p:cNvPr>
-          <p:cNvSpPr>
-            <a:spLocks noGrp="1"/>
-          </p:cNvSpPr>
-          <p:nvPr>
-            <p:ph sz="quarter" idx="26"/>
-          </p:nvPr>
-        </p:nvSpPr>
-        <p:spPr/>
-        <p:txBody>
-          <a:bodyPr/>
-          <a:lstStyle/>
-          <a:p>
-            <a:endParaRPr lang="en-US"/>
-          </a:p>
-        </p:txBody>
-      </p:sp>
-      <p:sp>
-        <p:nvSpPr>
-          <p:cNvPr id="23" name="Content Placeholder 22">
-            <a:extLst>
-              <a:ext uri="{FF2B5EF4-FFF2-40B4-BE49-F238E27FC236}">
-                <a16:creationId xmlns:a16="http://schemas.microsoft.com/office/drawing/2014/main" id="{81346889-22B2-6F9B-A0BE-03766389A0B4}"/>
-              </a:ext>
-            </a:extLst>
-          </p:cNvPr>
-          <p:cNvSpPr>
-            <a:spLocks noGrp="1"/>
-          </p:cNvSpPr>
-          <p:nvPr>
-            <p:ph sz="quarter" idx="27"/>
-          </p:nvPr>
-        </p:nvSpPr>
-        <p:spPr/>
-        <p:txBody>
-          <a:bodyPr/>
-          <a:lstStyle/>
-          <a:p>
-            <a:endParaRPr lang="en-US"/>
-          </a:p>
-        </p:txBody>
-      </p:sp>
+          <p:cNvPicPr>
+            <a:picLocks noGrp="1" noChangeAspect="1"/>
+          </p:cNvPicPr>
+          <p:nvPr>
+            <p:ph sz="quarter" idx="24"/>
+          </p:nvPr>
+        </p:nvPicPr>
+        <p:blipFill>
+          <a:blip r:embed="rId5">
+            <a:extLst>
+              <a:ext uri="{28A0092B-C50C-407E-A947-70E740481C1C}">
+                <a14:useLocalDpi xmlns:a14="http://schemas.microsoft.com/office/drawing/2010/main" val="0"/>
+              </a:ext>
+            </a:extLst>
+          </a:blip>
+          <a:stretch>
+            <a:fillRect/>
+          </a:stretch>
+        </p:blipFill>
+        <p:spPr>
+          <a:xfrm>
+            <a:off x="11778275" y="6993627"/>
+            <a:ext cx="8165024" cy="5343401"/>
+          </a:xfrm>
+          <a:prstGeom prst="rect">
+            <a:avLst/>
+          </a:prstGeom>
+          <a:solidFill>
+            <a:schemeClr val="bg1"/>
+          </a:solidFill>
+          <a:ln>
+            <a:noFill/>
+          </a:ln>
+        </p:spPr>
+      </p:pic>
     </p:spTree>
     <p:extLst>
       <p:ext uri="{BB962C8B-B14F-4D97-AF65-F5344CB8AC3E}">

--- a/poster_draft.pptx
+++ b/poster_draft.pptx
@@ -150,7 +150,7 @@
 <file path=ppt/revisionInfo.xml><?xml version="1.0" encoding="utf-8"?>
 <p1510:revInfo xmlns:a="http://schemas.openxmlformats.org/drawingml/2006/main" xmlns:r="http://schemas.openxmlformats.org/officeDocument/2006/relationships" xmlns:p1510="http://schemas.microsoft.com/office/powerpoint/2015/10/main">
   <p1510:revLst>
-    <p1510:client id="{7F17B0CF-DC0F-479A-8BD4-09BA188B4891}" v="6" dt="2026-08-17T15:58:34.318"/>
+    <p1510:client id="{7F17B0CF-DC0F-479A-8BD4-09BA188B4891}" v="15" dt="2026-08-20T18:13:09.408"/>
   </p1510:revLst>
 </p1510:revInfo>
 </file>
@@ -160,130 +160,114 @@
   <pc:docChgLst>
     <pc:chgData name="Ryan Mok" userId="2b5ff9b4bc27d924" providerId="LiveId" clId="{98BDB49B-93C9-4AB7-A5FC-395AE49E91C6}"/>
     <pc:docChg chg="undo custSel delSld modSld delMainMaster">
-      <pc:chgData name="Ryan Mok" userId="2b5ff9b4bc27d924" providerId="LiveId" clId="{98BDB49B-93C9-4AB7-A5FC-395AE49E91C6}" dt="2026-08-17T17:37:30.005" v="285" actId="208"/>
+      <pc:chgData name="Ryan Mok" userId="2b5ff9b4bc27d924" providerId="LiveId" clId="{98BDB49B-93C9-4AB7-A5FC-395AE49E91C6}" dt="2026-08-20T18:46:43.468" v="6421" actId="14100"/>
       <pc:docMkLst>
         <pc:docMk/>
       </pc:docMkLst>
       <pc:sldChg chg="addSp delSp modSp mod setBg">
-        <pc:chgData name="Ryan Mok" userId="2b5ff9b4bc27d924" providerId="LiveId" clId="{98BDB49B-93C9-4AB7-A5FC-395AE49E91C6}" dt="2026-08-17T17:37:30.005" v="285" actId="208"/>
+        <pc:chgData name="Ryan Mok" userId="2b5ff9b4bc27d924" providerId="LiveId" clId="{98BDB49B-93C9-4AB7-A5FC-395AE49E91C6}" dt="2026-08-20T18:46:43.468" v="6421" actId="14100"/>
         <pc:sldMkLst>
           <pc:docMk/>
           <pc:sldMk cId="4284697073" sldId="257"/>
         </pc:sldMkLst>
-        <pc:spChg chg="mod">
-          <ac:chgData name="Ryan Mok" userId="2b5ff9b4bc27d924" providerId="LiveId" clId="{98BDB49B-93C9-4AB7-A5FC-395AE49E91C6}" dt="2026-08-16T00:21:57.819" v="128" actId="14100"/>
+        <pc:spChg chg="add mod">
+          <ac:chgData name="Ryan Mok" userId="2b5ff9b4bc27d924" providerId="LiveId" clId="{98BDB49B-93C9-4AB7-A5FC-395AE49E91C6}" dt="2026-08-20T18:11:46.427" v="5602" actId="2711"/>
           <ac:spMkLst>
             <pc:docMk/>
             <pc:sldMk cId="4284697073" sldId="257"/>
-            <ac:spMk id="3" creationId="{D224DBA9-3BCF-2968-5DEF-36775ABF4603}"/>
-          </ac:spMkLst>
-        </pc:spChg>
-        <pc:spChg chg="add del mod">
-          <ac:chgData name="Ryan Mok" userId="2b5ff9b4bc27d924" providerId="LiveId" clId="{98BDB49B-93C9-4AB7-A5FC-395AE49E91C6}" dt="2026-08-17T14:31:10.777" v="140" actId="931"/>
-          <ac:spMkLst>
-            <pc:docMk/>
-            <pc:sldMk cId="4284697073" sldId="257"/>
-            <ac:spMk id="5" creationId="{02A1B259-8E34-0716-DE3D-F153B9DE671D}"/>
+            <ac:spMk id="2" creationId="{2F22A643-DE8D-84E7-00F6-97D6EBB88D71}"/>
           </ac:spMkLst>
         </pc:spChg>
         <pc:spChg chg="mod">
-          <ac:chgData name="Ryan Mok" userId="2b5ff9b4bc27d924" providerId="LiveId" clId="{98BDB49B-93C9-4AB7-A5FC-395AE49E91C6}" dt="2026-08-16T00:21:39.298" v="123"/>
+          <ac:chgData name="Ryan Mok" userId="2b5ff9b4bc27d924" providerId="LiveId" clId="{98BDB49B-93C9-4AB7-A5FC-395AE49E91C6}" dt="2026-08-19T14:51:07.013" v="350"/>
           <ac:spMkLst>
             <pc:docMk/>
             <pc:sldMk cId="4284697073" sldId="257"/>
-            <ac:spMk id="5" creationId="{2EAF473D-2721-78EB-286D-5C65F138247A}"/>
+            <ac:spMk id="4" creationId="{DE6AA79A-E6CC-1DF4-ED15-B14D00BDB2EC}"/>
           </ac:spMkLst>
         </pc:spChg>
         <pc:spChg chg="mod">
-          <ac:chgData name="Ryan Mok" userId="2b5ff9b4bc27d924" providerId="LiveId" clId="{98BDB49B-93C9-4AB7-A5FC-395AE49E91C6}" dt="2026-08-16T00:21:39.298" v="123"/>
+          <ac:chgData name="Ryan Mok" userId="2b5ff9b4bc27d924" providerId="LiveId" clId="{98BDB49B-93C9-4AB7-A5FC-395AE49E91C6}" dt="2026-08-19T14:51:07.013" v="350"/>
           <ac:spMkLst>
             <pc:docMk/>
             <pc:sldMk cId="4284697073" sldId="257"/>
-            <ac:spMk id="7" creationId="{3C8F305D-6A2F-EC9A-FBDD-279BAFB0F101}"/>
-          </ac:spMkLst>
-        </pc:spChg>
-        <pc:spChg chg="add mod ord">
-          <ac:chgData name="Ryan Mok" userId="2b5ff9b4bc27d924" providerId="LiveId" clId="{98BDB49B-93C9-4AB7-A5FC-395AE49E91C6}" dt="2026-08-17T17:37:30.005" v="285" actId="208"/>
-          <ac:spMkLst>
-            <pc:docMk/>
-            <pc:sldMk cId="4284697073" sldId="257"/>
-            <ac:spMk id="8" creationId="{7A734323-8DED-6057-40A5-62D55DC614A9}"/>
+            <ac:spMk id="6" creationId="{A58A5169-A45A-164A-5DCC-4AB634FAE73B}"/>
           </ac:spMkLst>
         </pc:spChg>
         <pc:spChg chg="mod">
-          <ac:chgData name="Ryan Mok" userId="2b5ff9b4bc27d924" providerId="LiveId" clId="{98BDB49B-93C9-4AB7-A5FC-395AE49E91C6}" dt="2026-08-16T00:21:39.298" v="123"/>
+          <ac:chgData name="Ryan Mok" userId="2b5ff9b4bc27d924" providerId="LiveId" clId="{98BDB49B-93C9-4AB7-A5FC-395AE49E91C6}" dt="2026-08-19T14:51:07.013" v="350"/>
           <ac:spMkLst>
             <pc:docMk/>
             <pc:sldMk cId="4284697073" sldId="257"/>
-            <ac:spMk id="8" creationId="{C8056347-2A33-4CA4-13EF-D8E62D73CD0D}"/>
+            <ac:spMk id="9" creationId="{5EF34A64-51C9-1619-8B8C-9BAA844CE6C4}"/>
           </ac:spMkLst>
         </pc:spChg>
         <pc:spChg chg="mod">
-          <ac:chgData name="Ryan Mok" userId="2b5ff9b4bc27d924" providerId="LiveId" clId="{98BDB49B-93C9-4AB7-A5FC-395AE49E91C6}" dt="2026-08-16T00:21:39.298" v="123"/>
+          <ac:chgData name="Ryan Mok" userId="2b5ff9b4bc27d924" providerId="LiveId" clId="{98BDB49B-93C9-4AB7-A5FC-395AE49E91C6}" dt="2026-08-19T14:51:07.013" v="350"/>
           <ac:spMkLst>
             <pc:docMk/>
             <pc:sldMk cId="4284697073" sldId="257"/>
-            <ac:spMk id="9" creationId="{40592C98-735C-8DE6-F2A4-E78EE667D165}"/>
-          </ac:spMkLst>
-        </pc:spChg>
-        <pc:spChg chg="add del mod">
-          <ac:chgData name="Ryan Mok" userId="2b5ff9b4bc27d924" providerId="LiveId" clId="{98BDB49B-93C9-4AB7-A5FC-395AE49E91C6}" dt="2026-08-17T15:54:42.472" v="179"/>
-          <ac:spMkLst>
-            <pc:docMk/>
-            <pc:sldMk cId="4284697073" sldId="257"/>
-            <ac:spMk id="10" creationId="{9B269BF9-C3B3-A2C9-E3BD-277ACB554CFA}"/>
+            <ac:spMk id="10" creationId="{692577A6-3793-7A60-5629-8EBE3BBF3099}"/>
           </ac:spMkLst>
         </pc:spChg>
         <pc:spChg chg="mod">
-          <ac:chgData name="Ryan Mok" userId="2b5ff9b4bc27d924" providerId="LiveId" clId="{98BDB49B-93C9-4AB7-A5FC-395AE49E91C6}" dt="2026-08-16T00:21:39.298" v="123"/>
+          <ac:chgData name="Ryan Mok" userId="2b5ff9b4bc27d924" providerId="LiveId" clId="{98BDB49B-93C9-4AB7-A5FC-395AE49E91C6}" dt="2026-08-19T14:51:07.013" v="350"/>
           <ac:spMkLst>
             <pc:docMk/>
             <pc:sldMk cId="4284697073" sldId="257"/>
-            <ac:spMk id="10" creationId="{F4B3ABE4-3273-615F-DC47-BFBD578CD85A}"/>
+            <ac:spMk id="11" creationId="{24F25F76-B735-47B9-17AD-912F38C1E201}"/>
           </ac:spMkLst>
         </pc:spChg>
         <pc:spChg chg="mod">
-          <ac:chgData name="Ryan Mok" userId="2b5ff9b4bc27d924" providerId="LiveId" clId="{98BDB49B-93C9-4AB7-A5FC-395AE49E91C6}" dt="2026-08-16T00:21:39.298" v="123"/>
+          <ac:chgData name="Ryan Mok" userId="2b5ff9b4bc27d924" providerId="LiveId" clId="{98BDB49B-93C9-4AB7-A5FC-395AE49E91C6}" dt="2026-08-19T14:51:07.013" v="350"/>
           <ac:spMkLst>
             <pc:docMk/>
             <pc:sldMk cId="4284697073" sldId="257"/>
-            <ac:spMk id="11" creationId="{F5F85AD0-A4E7-7114-A4D0-B09FE0DEEB53}"/>
+            <ac:spMk id="14" creationId="{B96DAD34-B892-A690-B0F9-2D4BB9060B75}"/>
           </ac:spMkLst>
         </pc:spChg>
-        <pc:spChg chg="del mod">
-          <ac:chgData name="Ryan Mok" userId="2b5ff9b4bc27d924" providerId="LiveId" clId="{98BDB49B-93C9-4AB7-A5FC-395AE49E91C6}" dt="2026-08-16T00:21:43.872" v="125" actId="478"/>
+        <pc:spChg chg="mod">
+          <ac:chgData name="Ryan Mok" userId="2b5ff9b4bc27d924" providerId="LiveId" clId="{98BDB49B-93C9-4AB7-A5FC-395AE49E91C6}" dt="2026-08-20T18:11:25.533" v="5598" actId="20577"/>
           <ac:spMkLst>
             <pc:docMk/>
             <pc:sldMk cId="4284697073" sldId="257"/>
-            <ac:spMk id="14" creationId="{9BFCBC3D-2EFC-CCF0-854D-98879A67B246}"/>
+            <ac:spMk id="16" creationId="{5E36AFFF-BFC1-723D-CB6A-9115FC6AABF8}"/>
           </ac:spMkLst>
         </pc:spChg>
-        <pc:spChg chg="add del mod ord">
-          <ac:chgData name="Ryan Mok" userId="2b5ff9b4bc27d924" providerId="LiveId" clId="{98BDB49B-93C9-4AB7-A5FC-395AE49E91C6}" dt="2026-08-17T15:59:07.132" v="269" actId="478"/>
+        <pc:spChg chg="mod">
+          <ac:chgData name="Ryan Mok" userId="2b5ff9b4bc27d924" providerId="LiveId" clId="{98BDB49B-93C9-4AB7-A5FC-395AE49E91C6}" dt="2026-08-19T14:51:07.013" v="350"/>
           <ac:spMkLst>
             <pc:docMk/>
             <pc:sldMk cId="4284697073" sldId="257"/>
-            <ac:spMk id="14" creationId="{B2ABCC73-8EB5-706F-FD07-A64CE5DE5A62}"/>
+            <ac:spMk id="19" creationId="{A040BF02-FA75-C7E9-C4F3-F7704E26E427}"/>
           </ac:spMkLst>
         </pc:spChg>
         <pc:spChg chg="del">
-          <ac:chgData name="Ryan Mok" userId="2b5ff9b4bc27d924" providerId="LiveId" clId="{98BDB49B-93C9-4AB7-A5FC-395AE49E91C6}" dt="2026-08-17T14:30:15.714" v="135" actId="931"/>
+          <ac:chgData name="Ryan Mok" userId="2b5ff9b4bc27d924" providerId="LiveId" clId="{98BDB49B-93C9-4AB7-A5FC-395AE49E91C6}" dt="2026-08-19T14:58:13.518" v="352" actId="478"/>
           <ac:spMkLst>
             <pc:docMk/>
             <pc:sldMk cId="4284697073" sldId="257"/>
-            <ac:spMk id="19" creationId="{F595DB66-7B4C-C9B6-E479-317A8312D5A7}"/>
+            <ac:spMk id="21" creationId="{9678B249-83F4-209B-9C2A-C9BEB6C13020}"/>
           </ac:spMkLst>
         </pc:spChg>
         <pc:spChg chg="del">
-          <ac:chgData name="Ryan Mok" userId="2b5ff9b4bc27d924" providerId="LiveId" clId="{98BDB49B-93C9-4AB7-A5FC-395AE49E91C6}" dt="2026-08-17T15:58:01.113" v="251" actId="931"/>
+          <ac:chgData name="Ryan Mok" userId="2b5ff9b4bc27d924" providerId="LiveId" clId="{98BDB49B-93C9-4AB7-A5FC-395AE49E91C6}" dt="2026-08-19T14:58:14.483" v="353" actId="478"/>
           <ac:spMkLst>
             <pc:docMk/>
             <pc:sldMk cId="4284697073" sldId="257"/>
-            <ac:spMk id="20" creationId="{13F20D06-2613-CD61-45CC-1376A7DC7CEA}"/>
+            <ac:spMk id="22" creationId="{D6C21CA2-FD8B-96F0-F877-0F7A3134086A}"/>
+          </ac:spMkLst>
+        </pc:spChg>
+        <pc:spChg chg="del">
+          <ac:chgData name="Ryan Mok" userId="2b5ff9b4bc27d924" providerId="LiveId" clId="{98BDB49B-93C9-4AB7-A5FC-395AE49E91C6}" dt="2026-08-19T14:58:16.565" v="354" actId="478"/>
+          <ac:spMkLst>
+            <pc:docMk/>
+            <pc:sldMk cId="4284697073" sldId="257"/>
+            <ac:spMk id="23" creationId="{81346889-22B2-6F9B-A0BE-03766389A0B4}"/>
           </ac:spMkLst>
         </pc:spChg>
         <pc:spChg chg="mod">
-          <ac:chgData name="Ryan Mok" userId="2b5ff9b4bc27d924" providerId="LiveId" clId="{98BDB49B-93C9-4AB7-A5FC-395AE49E91C6}" dt="2026-08-16T00:27:48.832" v="132"/>
+          <ac:chgData name="Ryan Mok" userId="2b5ff9b4bc27d924" providerId="LiveId" clId="{98BDB49B-93C9-4AB7-A5FC-395AE49E91C6}" dt="2026-08-19T14:59:34.933" v="371" actId="34135"/>
           <ac:spMkLst>
             <pc:docMk/>
             <pc:sldMk cId="4284697073" sldId="257"/>
@@ -291,7 +275,7 @@
           </ac:spMkLst>
         </pc:spChg>
         <pc:spChg chg="mod">
-          <ac:chgData name="Ryan Mok" userId="2b5ff9b4bc27d924" providerId="LiveId" clId="{98BDB49B-93C9-4AB7-A5FC-395AE49E91C6}" dt="2026-08-16T00:27:48.832" v="132"/>
+          <ac:chgData name="Ryan Mok" userId="2b5ff9b4bc27d924" providerId="LiveId" clId="{98BDB49B-93C9-4AB7-A5FC-395AE49E91C6}" dt="2026-08-19T14:59:34.933" v="371" actId="34135"/>
           <ac:spMkLst>
             <pc:docMk/>
             <pc:sldMk cId="4284697073" sldId="257"/>
@@ -299,7 +283,7 @@
           </ac:spMkLst>
         </pc:spChg>
         <pc:spChg chg="mod">
-          <ac:chgData name="Ryan Mok" userId="2b5ff9b4bc27d924" providerId="LiveId" clId="{98BDB49B-93C9-4AB7-A5FC-395AE49E91C6}" dt="2026-08-16T00:27:48.832" v="132"/>
+          <ac:chgData name="Ryan Mok" userId="2b5ff9b4bc27d924" providerId="LiveId" clId="{98BDB49B-93C9-4AB7-A5FC-395AE49E91C6}" dt="2026-08-19T14:59:34.933" v="371" actId="34135"/>
           <ac:spMkLst>
             <pc:docMk/>
             <pc:sldMk cId="4284697073" sldId="257"/>
@@ -307,7 +291,7 @@
           </ac:spMkLst>
         </pc:spChg>
         <pc:spChg chg="mod">
-          <ac:chgData name="Ryan Mok" userId="2b5ff9b4bc27d924" providerId="LiveId" clId="{98BDB49B-93C9-4AB7-A5FC-395AE49E91C6}" dt="2026-08-16T00:27:48.832" v="132"/>
+          <ac:chgData name="Ryan Mok" userId="2b5ff9b4bc27d924" providerId="LiveId" clId="{98BDB49B-93C9-4AB7-A5FC-395AE49E91C6}" dt="2026-08-19T14:59:34.933" v="371" actId="34135"/>
           <ac:spMkLst>
             <pc:docMk/>
             <pc:sldMk cId="4284697073" sldId="257"/>
@@ -315,7 +299,7 @@
           </ac:spMkLst>
         </pc:spChg>
         <pc:spChg chg="mod">
-          <ac:chgData name="Ryan Mok" userId="2b5ff9b4bc27d924" providerId="LiveId" clId="{98BDB49B-93C9-4AB7-A5FC-395AE49E91C6}" dt="2026-08-16T00:27:48.832" v="132"/>
+          <ac:chgData name="Ryan Mok" userId="2b5ff9b4bc27d924" providerId="LiveId" clId="{98BDB49B-93C9-4AB7-A5FC-395AE49E91C6}" dt="2026-08-19T14:59:34.933" v="371" actId="34135"/>
           <ac:spMkLst>
             <pc:docMk/>
             <pc:sldMk cId="4284697073" sldId="257"/>
@@ -323,7 +307,7 @@
           </ac:spMkLst>
         </pc:spChg>
         <pc:spChg chg="mod">
-          <ac:chgData name="Ryan Mok" userId="2b5ff9b4bc27d924" providerId="LiveId" clId="{98BDB49B-93C9-4AB7-A5FC-395AE49E91C6}" dt="2026-08-16T00:27:48.832" v="132"/>
+          <ac:chgData name="Ryan Mok" userId="2b5ff9b4bc27d924" providerId="LiveId" clId="{98BDB49B-93C9-4AB7-A5FC-395AE49E91C6}" dt="2026-08-19T14:59:34.933" v="371" actId="34135"/>
           <ac:spMkLst>
             <pc:docMk/>
             <pc:sldMk cId="4284697073" sldId="257"/>
@@ -331,135 +315,711 @@
           </ac:spMkLst>
         </pc:spChg>
         <pc:spChg chg="mod">
-          <ac:chgData name="Ryan Mok" userId="2b5ff9b4bc27d924" providerId="LiveId" clId="{98BDB49B-93C9-4AB7-A5FC-395AE49E91C6}" dt="2026-08-16T00:27:48.832" v="132"/>
+          <ac:chgData name="Ryan Mok" userId="2b5ff9b4bc27d924" providerId="LiveId" clId="{98BDB49B-93C9-4AB7-A5FC-395AE49E91C6}" dt="2026-08-19T14:59:34.933" v="371" actId="34135"/>
           <ac:spMkLst>
             <pc:docMk/>
             <pc:sldMk cId="4284697073" sldId="257"/>
             <ac:spMk id="32" creationId="{2CF7DD42-5A6C-2283-9C82-033F1FDF8092}"/>
           </ac:spMkLst>
         </pc:spChg>
-        <pc:spChg chg="add mod">
-          <ac:chgData name="Ryan Mok" userId="2b5ff9b4bc27d924" providerId="LiveId" clId="{98BDB49B-93C9-4AB7-A5FC-395AE49E91C6}" dt="2026-08-17T15:55:27.179" v="231" actId="767"/>
+        <pc:spChg chg="mod">
+          <ac:chgData name="Ryan Mok" userId="2b5ff9b4bc27d924" providerId="LiveId" clId="{98BDB49B-93C9-4AB7-A5FC-395AE49E91C6}" dt="2026-08-19T14:51:07.013" v="350"/>
           <ac:spMkLst>
             <pc:docMk/>
             <pc:sldMk cId="4284697073" sldId="257"/>
-            <ac:spMk id="33" creationId="{F3451A55-FD32-5524-8E20-DA46787F8C64}"/>
+            <ac:spMk id="33" creationId="{DD11D703-A88D-45F2-1B23-A16BABC1579C}"/>
+          </ac:spMkLst>
+        </pc:spChg>
+        <pc:spChg chg="mod">
+          <ac:chgData name="Ryan Mok" userId="2b5ff9b4bc27d924" providerId="LiveId" clId="{98BDB49B-93C9-4AB7-A5FC-395AE49E91C6}" dt="2026-08-19T14:51:07.013" v="350"/>
+          <ac:spMkLst>
+            <pc:docMk/>
+            <pc:sldMk cId="4284697073" sldId="257"/>
+            <ac:spMk id="34" creationId="{43EE5CC4-6E3B-FD2D-7D7B-29AA66F948DA}"/>
           </ac:spMkLst>
         </pc:spChg>
         <pc:spChg chg="add del mod">
-          <ac:chgData name="Ryan Mok" userId="2b5ff9b4bc27d924" providerId="LiveId" clId="{98BDB49B-93C9-4AB7-A5FC-395AE49E91C6}" dt="2026-08-17T15:57:35.997" v="242" actId="931"/>
+          <ac:chgData name="Ryan Mok" userId="2b5ff9b4bc27d924" providerId="LiveId" clId="{98BDB49B-93C9-4AB7-A5FC-395AE49E91C6}" dt="2026-08-19T14:58:24.418" v="356" actId="478"/>
           <ac:spMkLst>
             <pc:docMk/>
             <pc:sldMk cId="4284697073" sldId="257"/>
-            <ac:spMk id="35" creationId="{EA40A50D-ACF8-E988-16F7-DD466DE9D444}"/>
+            <ac:spMk id="38" creationId="{2EE6155E-CC86-8839-5E88-21C0B1F87184}"/>
+          </ac:spMkLst>
+        </pc:spChg>
+        <pc:spChg chg="add del mod ord">
+          <ac:chgData name="Ryan Mok" userId="2b5ff9b4bc27d924" providerId="LiveId" clId="{98BDB49B-93C9-4AB7-A5FC-395AE49E91C6}" dt="2026-08-20T15:28:18.640" v="2671" actId="478"/>
+          <ac:spMkLst>
+            <pc:docMk/>
+            <pc:sldMk cId="4284697073" sldId="257"/>
+            <ac:spMk id="111" creationId="{AFA22BDD-2E53-AE1C-89A4-73FC21AF2BFD}"/>
           </ac:spMkLst>
         </pc:spChg>
         <pc:spChg chg="add del mod">
-          <ac:chgData name="Ryan Mok" userId="2b5ff9b4bc27d924" providerId="LiveId" clId="{98BDB49B-93C9-4AB7-A5FC-395AE49E91C6}" dt="2026-08-17T15:57:55.342" v="250" actId="478"/>
+          <ac:chgData name="Ryan Mok" userId="2b5ff9b4bc27d924" providerId="LiveId" clId="{98BDB49B-93C9-4AB7-A5FC-395AE49E91C6}" dt="2026-08-20T15:27:15.790" v="2657"/>
           <ac:spMkLst>
             <pc:docMk/>
             <pc:sldMk cId="4284697073" sldId="257"/>
-            <ac:spMk id="39" creationId="{4127441E-3447-9D9C-98C1-8653E4E416B1}"/>
+            <ac:spMk id="112" creationId="{1858FC5B-406C-0629-3A9C-F303EF1C2BF5}"/>
+          </ac:spMkLst>
+        </pc:spChg>
+        <pc:spChg chg="add del">
+          <ac:chgData name="Ryan Mok" userId="2b5ff9b4bc27d924" providerId="LiveId" clId="{98BDB49B-93C9-4AB7-A5FC-395AE49E91C6}" dt="2026-08-20T15:28:19.603" v="2672" actId="478"/>
+          <ac:spMkLst>
+            <pc:docMk/>
+            <pc:sldMk cId="4284697073" sldId="257"/>
+            <ac:spMk id="113" creationId="{DCA426F9-ACC4-34C9-7789-586AE0518FD5}"/>
+          </ac:spMkLst>
+        </pc:spChg>
+        <pc:spChg chg="add mod">
+          <ac:chgData name="Ryan Mok" userId="2b5ff9b4bc27d924" providerId="LiveId" clId="{98BDB49B-93C9-4AB7-A5FC-395AE49E91C6}" dt="2026-08-20T18:46:43.468" v="6421" actId="14100"/>
+          <ac:spMkLst>
+            <pc:docMk/>
+            <pc:sldMk cId="4284697073" sldId="257"/>
+            <ac:spMk id="122" creationId="{D8407765-B900-8615-E960-4F485E521845}"/>
+          </ac:spMkLst>
+        </pc:spChg>
+        <pc:spChg chg="add mod">
+          <ac:chgData name="Ryan Mok" userId="2b5ff9b4bc27d924" providerId="LiveId" clId="{98BDB49B-93C9-4AB7-A5FC-395AE49E91C6}" dt="2026-08-20T18:34:59.409" v="6162" actId="20577"/>
+          <ac:spMkLst>
+            <pc:docMk/>
+            <pc:sldMk cId="4284697073" sldId="257"/>
+            <ac:spMk id="124" creationId="{1D064F9A-7912-24CD-B39B-22E41FCF37BF}"/>
+          </ac:spMkLst>
+        </pc:spChg>
+        <pc:spChg chg="add mod">
+          <ac:chgData name="Ryan Mok" userId="2b5ff9b4bc27d924" providerId="LiveId" clId="{98BDB49B-93C9-4AB7-A5FC-395AE49E91C6}" dt="2026-08-20T18:17:50.260" v="5963" actId="20577"/>
+          <ac:spMkLst>
+            <pc:docMk/>
+            <pc:sldMk cId="4284697073" sldId="257"/>
+            <ac:spMk id="126" creationId="{E2A49FD0-0556-0FCA-8AE6-9CC8ACD65A06}"/>
+          </ac:spMkLst>
+        </pc:spChg>
+        <pc:spChg chg="add mod">
+          <ac:chgData name="Ryan Mok" userId="2b5ff9b4bc27d924" providerId="LiveId" clId="{98BDB49B-93C9-4AB7-A5FC-395AE49E91C6}" dt="2026-08-20T18:11:55.668" v="5603" actId="2711"/>
+          <ac:spMkLst>
+            <pc:docMk/>
+            <pc:sldMk cId="4284697073" sldId="257"/>
+            <ac:spMk id="130" creationId="{A0746360-9288-5B65-2758-EF1FE2B0E04A}"/>
+          </ac:spMkLst>
+        </pc:spChg>
+        <pc:spChg chg="add mod">
+          <ac:chgData name="Ryan Mok" userId="2b5ff9b4bc27d924" providerId="LiveId" clId="{98BDB49B-93C9-4AB7-A5FC-395AE49E91C6}" dt="2026-08-20T18:12:03.259" v="5604" actId="2711"/>
+          <ac:spMkLst>
+            <pc:docMk/>
+            <pc:sldMk cId="4284697073" sldId="257"/>
+            <ac:spMk id="132" creationId="{516C16C9-1626-D91A-CF2B-6969A6CEFED9}"/>
+          </ac:spMkLst>
+        </pc:spChg>
+        <pc:spChg chg="add del">
+          <ac:chgData name="Ryan Mok" userId="2b5ff9b4bc27d924" providerId="LiveId" clId="{98BDB49B-93C9-4AB7-A5FC-395AE49E91C6}" dt="2026-08-20T16:22:05.946" v="3805" actId="22"/>
+          <ac:spMkLst>
+            <pc:docMk/>
+            <pc:sldMk cId="4284697073" sldId="257"/>
+            <ac:spMk id="134" creationId="{218D03E4-F97B-8650-F739-C1A26AFF222D}"/>
+          </ac:spMkLst>
+        </pc:spChg>
+        <pc:spChg chg="add mod">
+          <ac:chgData name="Ryan Mok" userId="2b5ff9b4bc27d924" providerId="LiveId" clId="{98BDB49B-93C9-4AB7-A5FC-395AE49E91C6}" dt="2026-08-20T18:12:26.915" v="5609" actId="2711"/>
+          <ac:spMkLst>
+            <pc:docMk/>
+            <pc:sldMk cId="4284697073" sldId="257"/>
+            <ac:spMk id="136" creationId="{F4EF452A-4DA2-1AB6-CAE4-A54B11573821}"/>
+          </ac:spMkLst>
+        </pc:spChg>
+        <pc:spChg chg="add mod">
+          <ac:chgData name="Ryan Mok" userId="2b5ff9b4bc27d924" providerId="LiveId" clId="{98BDB49B-93C9-4AB7-A5FC-395AE49E91C6}" dt="2026-08-20T18:13:37.483" v="5634" actId="20577"/>
+          <ac:spMkLst>
+            <pc:docMk/>
+            <pc:sldMk cId="4284697073" sldId="257"/>
+            <ac:spMk id="138" creationId="{B375B841-8EB3-F0F1-A242-4003E08E4EC6}"/>
+          </ac:spMkLst>
+        </pc:spChg>
+        <pc:spChg chg="add del">
+          <ac:chgData name="Ryan Mok" userId="2b5ff9b4bc27d924" providerId="LiveId" clId="{98BDB49B-93C9-4AB7-A5FC-395AE49E91C6}" dt="2026-08-20T17:08:25.778" v="4324" actId="22"/>
+          <ac:spMkLst>
+            <pc:docMk/>
+            <pc:sldMk cId="4284697073" sldId="257"/>
+            <ac:spMk id="140" creationId="{8EDD8665-9686-BE20-478C-227F6AF3804C}"/>
+          </ac:spMkLst>
+        </pc:spChg>
+        <pc:spChg chg="add mod">
+          <ac:chgData name="Ryan Mok" userId="2b5ff9b4bc27d924" providerId="LiveId" clId="{98BDB49B-93C9-4AB7-A5FC-395AE49E91C6}" dt="2026-08-20T18:11:42.887" v="5601" actId="2711"/>
+          <ac:spMkLst>
+            <pc:docMk/>
+            <pc:sldMk cId="4284697073" sldId="257"/>
+            <ac:spMk id="142" creationId="{9EDD83B0-40A2-0632-433F-9045CB4B273E}"/>
+          </ac:spMkLst>
+        </pc:spChg>
+        <pc:spChg chg="add mod">
+          <ac:chgData name="Ryan Mok" userId="2b5ff9b4bc27d924" providerId="LiveId" clId="{98BDB49B-93C9-4AB7-A5FC-395AE49E91C6}" dt="2026-08-20T18:12:06.972" v="5605" actId="2711"/>
+          <ac:spMkLst>
+            <pc:docMk/>
+            <pc:sldMk cId="4284697073" sldId="257"/>
+            <ac:spMk id="144" creationId="{96199BD6-6C8F-8CCB-2FA9-7FDB19CAA5B5}"/>
           </ac:spMkLst>
         </pc:spChg>
         <pc:spChg chg="add del mod">
-          <ac:chgData name="Ryan Mok" userId="2b5ff9b4bc27d924" providerId="LiveId" clId="{98BDB49B-93C9-4AB7-A5FC-395AE49E91C6}" dt="2026-08-17T15:58:35.905" v="259"/>
+          <ac:chgData name="Ryan Mok" userId="2b5ff9b4bc27d924" providerId="LiveId" clId="{98BDB49B-93C9-4AB7-A5FC-395AE49E91C6}" dt="2026-08-20T17:27:05.954" v="4818"/>
           <ac:spMkLst>
             <pc:docMk/>
             <pc:sldMk cId="4284697073" sldId="257"/>
-            <ac:spMk id="42" creationId="{660888A8-753F-9444-FA9B-C98239589C9F}"/>
+            <ac:spMk id="146" creationId="{2EB9D2FA-AAB1-D682-967D-3E700F8378D5}"/>
           </ac:spMkLst>
         </pc:spChg>
-        <pc:spChg chg="add del mod">
-          <ac:chgData name="Ryan Mok" userId="2b5ff9b4bc27d924" providerId="LiveId" clId="{98BDB49B-93C9-4AB7-A5FC-395AE49E91C6}" dt="2026-08-17T15:58:42.376" v="260" actId="931"/>
+        <pc:spChg chg="add mod">
+          <ac:chgData name="Ryan Mok" userId="2b5ff9b4bc27d924" providerId="LiveId" clId="{98BDB49B-93C9-4AB7-A5FC-395AE49E91C6}" dt="2026-08-20T18:12:20.792" v="5608" actId="2711"/>
           <ac:spMkLst>
             <pc:docMk/>
             <pc:sldMk cId="4284697073" sldId="257"/>
-            <ac:spMk id="44" creationId="{37D5DBF0-6006-858B-AFDC-44CEB4860E0E}"/>
+            <ac:spMk id="148" creationId="{24883706-EECC-D3A3-0F66-2BDE6B4405DC}"/>
           </ac:spMkLst>
         </pc:spChg>
-        <pc:grpChg chg="add del mod">
-          <ac:chgData name="Ryan Mok" userId="2b5ff9b4bc27d924" providerId="LiveId" clId="{98BDB49B-93C9-4AB7-A5FC-395AE49E91C6}" dt="2026-08-16T00:27:48.013" v="131" actId="478"/>
+        <pc:spChg chg="add mod">
+          <ac:chgData name="Ryan Mok" userId="2b5ff9b4bc27d924" providerId="LiveId" clId="{98BDB49B-93C9-4AB7-A5FC-395AE49E91C6}" dt="2026-08-20T18:14:21.410" v="5654" actId="1076"/>
+          <ac:spMkLst>
+            <pc:docMk/>
+            <pc:sldMk cId="4284697073" sldId="257"/>
+            <ac:spMk id="150" creationId="{CD1DF30F-309F-9DC5-B2C9-7211FFA6AE3E}"/>
+          </ac:spMkLst>
+        </pc:spChg>
+        <pc:spChg chg="add mod">
+          <ac:chgData name="Ryan Mok" userId="2b5ff9b4bc27d924" providerId="LiveId" clId="{98BDB49B-93C9-4AB7-A5FC-395AE49E91C6}" dt="2026-08-20T18:35:02.343" v="6164" actId="20577"/>
+          <ac:spMkLst>
+            <pc:docMk/>
+            <pc:sldMk cId="4284697073" sldId="257"/>
+            <ac:spMk id="152" creationId="{AA5254B2-4677-A5F8-4213-BF2F405814E3}"/>
+          </ac:spMkLst>
+        </pc:spChg>
+        <pc:spChg chg="add mod">
+          <ac:chgData name="Ryan Mok" userId="2b5ff9b4bc27d924" providerId="LiveId" clId="{98BDB49B-93C9-4AB7-A5FC-395AE49E91C6}" dt="2026-08-20T18:12:17.629" v="5607" actId="2711"/>
+          <ac:spMkLst>
+            <pc:docMk/>
+            <pc:sldMk cId="4284697073" sldId="257"/>
+            <ac:spMk id="154" creationId="{E7F24C27-2DFA-996C-26A7-E7A3E3B7583F}"/>
+          </ac:spMkLst>
+        </pc:spChg>
+        <pc:spChg chg="add mod">
+          <ac:chgData name="Ryan Mok" userId="2b5ff9b4bc27d924" providerId="LiveId" clId="{98BDB49B-93C9-4AB7-A5FC-395AE49E91C6}" dt="2026-08-20T18:13:59.468" v="5652" actId="1036"/>
+          <ac:spMkLst>
+            <pc:docMk/>
+            <pc:sldMk cId="4284697073" sldId="257"/>
+            <ac:spMk id="156" creationId="{5829362F-B08F-4FBF-4EF7-5BBF774E6B93}"/>
+          </ac:spMkLst>
+        </pc:spChg>
+        <pc:spChg chg="add mod">
+          <ac:chgData name="Ryan Mok" userId="2b5ff9b4bc27d924" providerId="LiveId" clId="{98BDB49B-93C9-4AB7-A5FC-395AE49E91C6}" dt="2026-08-20T18:16:37.333" v="5927" actId="20577"/>
+          <ac:spMkLst>
+            <pc:docMk/>
+            <pc:sldMk cId="4284697073" sldId="257"/>
+            <ac:spMk id="158" creationId="{921CFE3D-2C64-682F-0F74-CB48C110ED37}"/>
+          </ac:spMkLst>
+        </pc:spChg>
+        <pc:spChg chg="add mod">
+          <ac:chgData name="Ryan Mok" userId="2b5ff9b4bc27d924" providerId="LiveId" clId="{98BDB49B-93C9-4AB7-A5FC-395AE49E91C6}" dt="2026-08-20T18:30:11.599" v="6147" actId="1076"/>
+          <ac:spMkLst>
+            <pc:docMk/>
+            <pc:sldMk cId="4284697073" sldId="257"/>
+            <ac:spMk id="162" creationId="{F31CBD7B-4CD3-4D28-1A2D-67E917A010A7}"/>
+          </ac:spMkLst>
+        </pc:spChg>
+        <pc:spChg chg="add mod">
+          <ac:chgData name="Ryan Mok" userId="2b5ff9b4bc27d924" providerId="LiveId" clId="{98BDB49B-93C9-4AB7-A5FC-395AE49E91C6}" dt="2026-08-20T18:45:12.227" v="6354" actId="20577"/>
+          <ac:spMkLst>
+            <pc:docMk/>
+            <pc:sldMk cId="4284697073" sldId="257"/>
+            <ac:spMk id="164" creationId="{B0659921-B3E1-7BBE-F94D-F1946E6E78D7}"/>
+          </ac:spMkLst>
+        </pc:spChg>
+        <pc:grpChg chg="add mod">
+          <ac:chgData name="Ryan Mok" userId="2b5ff9b4bc27d924" providerId="LiveId" clId="{98BDB49B-93C9-4AB7-A5FC-395AE49E91C6}" dt="2026-08-20T16:41:49.157" v="3991" actId="1035"/>
           <ac:grpSpMkLst>
             <pc:docMk/>
             <pc:sldMk cId="4284697073" sldId="257"/>
-            <ac:grpSpMk id="2" creationId="{D7B82626-635E-4CD6-901D-6F24A170A7CB}"/>
+            <ac:grpSpMk id="3" creationId="{560F710E-D540-FE2D-7C79-4F9730D2F883}"/>
           </ac:grpSpMkLst>
         </pc:grpChg>
         <pc:grpChg chg="add mod">
-          <ac:chgData name="Ryan Mok" userId="2b5ff9b4bc27d924" providerId="LiveId" clId="{98BDB49B-93C9-4AB7-A5FC-395AE49E91C6}" dt="2026-08-17T15:55:16.750" v="207" actId="1076"/>
+          <ac:chgData name="Ryan Mok" userId="2b5ff9b4bc27d924" providerId="LiveId" clId="{98BDB49B-93C9-4AB7-A5FC-395AE49E91C6}" dt="2026-08-20T16:41:49.157" v="3991" actId="1035"/>
           <ac:grpSpMkLst>
             <pc:docMk/>
             <pc:sldMk cId="4284697073" sldId="257"/>
             <ac:grpSpMk id="12" creationId="{9A7236CB-1D08-1C61-8FA2-BA47FB251EB1}"/>
           </ac:grpSpMkLst>
         </pc:grpChg>
-        <pc:picChg chg="add del mod ord">
-          <ac:chgData name="Ryan Mok" userId="2b5ff9b4bc27d924" providerId="LiveId" clId="{98BDB49B-93C9-4AB7-A5FC-395AE49E91C6}" dt="2026-08-17T14:30:27.592" v="139" actId="478"/>
+        <pc:grpChg chg="add del mod">
+          <ac:chgData name="Ryan Mok" userId="2b5ff9b4bc27d924" providerId="LiveId" clId="{98BDB49B-93C9-4AB7-A5FC-395AE49E91C6}" dt="2026-08-20T14:52:25.714" v="1217" actId="478"/>
+          <ac:grpSpMkLst>
+            <pc:docMk/>
+            <pc:sldMk cId="4284697073" sldId="257"/>
+            <ac:grpSpMk id="39" creationId="{D26EF15C-7A37-1909-BDC1-B3F4F08B44B4}"/>
+          </ac:grpSpMkLst>
+        </pc:grpChg>
+        <pc:grpChg chg="add del mod">
+          <ac:chgData name="Ryan Mok" userId="2b5ff9b4bc27d924" providerId="LiveId" clId="{98BDB49B-93C9-4AB7-A5FC-395AE49E91C6}" dt="2026-08-20T14:52:28.890" v="1218" actId="478"/>
+          <ac:grpSpMkLst>
+            <pc:docMk/>
+            <pc:sldMk cId="4284697073" sldId="257"/>
+            <ac:grpSpMk id="49" creationId="{4BD306FF-155C-E1B4-05CC-94D5B1DE0DD9}"/>
+          </ac:grpSpMkLst>
+        </pc:grpChg>
+        <pc:grpChg chg="add mod">
+          <ac:chgData name="Ryan Mok" userId="2b5ff9b4bc27d924" providerId="LiveId" clId="{98BDB49B-93C9-4AB7-A5FC-395AE49E91C6}" dt="2026-08-19T16:41:56.071" v="634" actId="164"/>
+          <ac:grpSpMkLst>
+            <pc:docMk/>
+            <pc:sldMk cId="4284697073" sldId="257"/>
+            <ac:grpSpMk id="70" creationId="{94C02973-051B-7BBD-8136-125FD8B98A51}"/>
+          </ac:grpSpMkLst>
+        </pc:grpChg>
+        <pc:grpChg chg="add mod">
+          <ac:chgData name="Ryan Mok" userId="2b5ff9b4bc27d924" providerId="LiveId" clId="{98BDB49B-93C9-4AB7-A5FC-395AE49E91C6}" dt="2026-08-20T17:08:45.040" v="4351" actId="1035"/>
+          <ac:grpSpMkLst>
+            <pc:docMk/>
+            <pc:sldMk cId="4284697073" sldId="257"/>
+            <ac:grpSpMk id="98" creationId="{70EDD302-18ED-C6AA-9E7D-27967A6ADEE2}"/>
+          </ac:grpSpMkLst>
+        </pc:grpChg>
+        <pc:grpChg chg="add mod">
+          <ac:chgData name="Ryan Mok" userId="2b5ff9b4bc27d924" providerId="LiveId" clId="{98BDB49B-93C9-4AB7-A5FC-395AE49E91C6}" dt="2026-08-20T15:22:20.272" v="2614" actId="164"/>
+          <ac:grpSpMkLst>
+            <pc:docMk/>
+            <pc:sldMk cId="4284697073" sldId="257"/>
+            <ac:grpSpMk id="109" creationId="{B56A29A5-C706-62D4-382F-F23E7EE689F5}"/>
+          </ac:grpSpMkLst>
+        </pc:grpChg>
+        <pc:grpChg chg="add mod">
+          <ac:chgData name="Ryan Mok" userId="2b5ff9b4bc27d924" providerId="LiveId" clId="{98BDB49B-93C9-4AB7-A5FC-395AE49E91C6}" dt="2026-08-20T17:08:45.040" v="4351" actId="1035"/>
+          <ac:grpSpMkLst>
+            <pc:docMk/>
+            <pc:sldMk cId="4284697073" sldId="257"/>
+            <ac:grpSpMk id="110" creationId="{FAAE2DBF-EC9C-C88B-C9D6-87E5697F5B99}"/>
+          </ac:grpSpMkLst>
+        </pc:grpChg>
+        <pc:grpChg chg="add mod">
+          <ac:chgData name="Ryan Mok" userId="2b5ff9b4bc27d924" providerId="LiveId" clId="{98BDB49B-93C9-4AB7-A5FC-395AE49E91C6}" dt="2026-08-20T17:08:45.040" v="4351" actId="1035"/>
+          <ac:grpSpMkLst>
+            <pc:docMk/>
+            <pc:sldMk cId="4284697073" sldId="257"/>
+            <ac:grpSpMk id="120" creationId="{002A3799-5903-3234-64B3-B834543B2289}"/>
+          </ac:grpSpMkLst>
+        </pc:grpChg>
+        <pc:picChg chg="add mod">
+          <ac:chgData name="Ryan Mok" userId="2b5ff9b4bc27d924" providerId="LiveId" clId="{98BDB49B-93C9-4AB7-A5FC-395AE49E91C6}" dt="2026-08-20T13:54:02.011" v="678" actId="164"/>
           <ac:picMkLst>
             <pc:docMk/>
             <pc:sldMk cId="4284697073" sldId="257"/>
-            <ac:picMk id="3" creationId="{E039EA0B-9045-2E5F-BE08-F36737C7296C}"/>
+            <ac:picMk id="21" creationId="{71BB6670-1370-7A3A-EC4F-0ACA2D212D32}"/>
+          </ac:picMkLst>
+        </pc:picChg>
+        <pc:picChg chg="add mod">
+          <ac:chgData name="Ryan Mok" userId="2b5ff9b4bc27d924" providerId="LiveId" clId="{98BDB49B-93C9-4AB7-A5FC-395AE49E91C6}" dt="2026-08-20T13:54:02.011" v="678" actId="164"/>
+          <ac:picMkLst>
+            <pc:docMk/>
+            <pc:sldMk cId="4284697073" sldId="257"/>
+            <ac:picMk id="23" creationId="{6C32794B-1F41-FB50-12E5-E5D1FA724390}"/>
+          </ac:picMkLst>
+        </pc:picChg>
+        <pc:picChg chg="add mod">
+          <ac:chgData name="Ryan Mok" userId="2b5ff9b4bc27d924" providerId="LiveId" clId="{98BDB49B-93C9-4AB7-A5FC-395AE49E91C6}" dt="2026-08-20T13:54:02.011" v="678" actId="164"/>
+          <ac:picMkLst>
+            <pc:docMk/>
+            <pc:sldMk cId="4284697073" sldId="257"/>
+            <ac:picMk id="38" creationId="{DA1D97CD-0E69-78FB-EB5C-01B5315E7823}"/>
+          </ac:picMkLst>
+        </pc:picChg>
+        <pc:picChg chg="add del mod">
+          <ac:chgData name="Ryan Mok" userId="2b5ff9b4bc27d924" providerId="LiveId" clId="{98BDB49B-93C9-4AB7-A5FC-395AE49E91C6}" dt="2026-08-20T13:52:34.434" v="654" actId="478"/>
+          <ac:picMkLst>
+            <pc:docMk/>
+            <pc:sldMk cId="4284697073" sldId="257"/>
+            <ac:picMk id="40" creationId="{89EB6FE9-C103-C595-ACB4-D27BB98C597F}"/>
+          </ac:picMkLst>
+        </pc:picChg>
+        <pc:picChg chg="add del mod">
+          <ac:chgData name="Ryan Mok" userId="2b5ff9b4bc27d924" providerId="LiveId" clId="{98BDB49B-93C9-4AB7-A5FC-395AE49E91C6}" dt="2026-08-20T13:52:34.434" v="654" actId="478"/>
+          <ac:picMkLst>
+            <pc:docMk/>
+            <pc:sldMk cId="4284697073" sldId="257"/>
+            <ac:picMk id="42" creationId="{E95697B9-305B-363F-3DBE-217A5EB61061}"/>
+          </ac:picMkLst>
+        </pc:picChg>
+        <pc:picChg chg="add mod">
+          <ac:chgData name="Ryan Mok" userId="2b5ff9b4bc27d924" providerId="LiveId" clId="{98BDB49B-93C9-4AB7-A5FC-395AE49E91C6}" dt="2026-08-20T13:56:41.582" v="708" actId="164"/>
+          <ac:picMkLst>
+            <pc:docMk/>
+            <pc:sldMk cId="4284697073" sldId="257"/>
+            <ac:picMk id="43" creationId="{1407338F-62CE-F038-FF50-9C4A7046FB13}"/>
+          </ac:picMkLst>
+        </pc:picChg>
+        <pc:picChg chg="add del mod">
+          <ac:chgData name="Ryan Mok" userId="2b5ff9b4bc27d924" providerId="LiveId" clId="{98BDB49B-93C9-4AB7-A5FC-395AE49E91C6}" dt="2026-08-20T13:52:34.434" v="654" actId="478"/>
+          <ac:picMkLst>
+            <pc:docMk/>
+            <pc:sldMk cId="4284697073" sldId="257"/>
+            <ac:picMk id="44" creationId="{35F6195A-35F8-B7F7-0C2F-E7886056B580}"/>
+          </ac:picMkLst>
+        </pc:picChg>
+        <pc:picChg chg="add mod">
+          <ac:chgData name="Ryan Mok" userId="2b5ff9b4bc27d924" providerId="LiveId" clId="{98BDB49B-93C9-4AB7-A5FC-395AE49E91C6}" dt="2026-08-20T13:56:41.582" v="708" actId="164"/>
+          <ac:picMkLst>
+            <pc:docMk/>
+            <pc:sldMk cId="4284697073" sldId="257"/>
+            <ac:picMk id="46" creationId="{25ED895A-1E99-2835-CC36-BD6AE647E269}"/>
           </ac:picMkLst>
         </pc:picChg>
         <pc:picChg chg="add del mod ord">
-          <ac:chgData name="Ryan Mok" userId="2b5ff9b4bc27d924" providerId="LiveId" clId="{98BDB49B-93C9-4AB7-A5FC-395AE49E91C6}" dt="2026-08-17T15:57:30.316" v="240" actId="478"/>
+          <ac:chgData name="Ryan Mok" userId="2b5ff9b4bc27d924" providerId="LiveId" clId="{98BDB49B-93C9-4AB7-A5FC-395AE49E91C6}" dt="2026-08-19T14:58:22.096" v="355" actId="478"/>
           <ac:picMkLst>
             <pc:docMk/>
             <pc:sldMk cId="4284697073" sldId="257"/>
-            <ac:picMk id="7" creationId="{2F08CAD1-B461-F24F-2F1D-9A55AB4139DF}"/>
+            <ac:picMk id="46" creationId="{648DE49E-2738-9E11-8AA2-69CDCF99E6F5}"/>
           </ac:picMkLst>
         </pc:picChg>
         <pc:picChg chg="add del mod">
-          <ac:chgData name="Ryan Mok" userId="2b5ff9b4bc27d924" providerId="LiveId" clId="{98BDB49B-93C9-4AB7-A5FC-395AE49E91C6}" dt="2026-08-17T15:57:31.719" v="241" actId="478"/>
+          <ac:chgData name="Ryan Mok" userId="2b5ff9b4bc27d924" providerId="LiveId" clId="{98BDB49B-93C9-4AB7-A5FC-395AE49E91C6}" dt="2026-08-19T16:33:33.473" v="599" actId="478"/>
           <ac:picMkLst>
             <pc:docMk/>
             <pc:sldMk cId="4284697073" sldId="257"/>
-            <ac:picMk id="9" creationId="{7D279373-B5C9-A633-2C2F-D4E84FB66E68}"/>
+            <ac:picMk id="47" creationId="{A7126727-5A2A-F505-1B41-ABFBB8ACF049}"/>
           </ac:picMkLst>
         </pc:picChg>
-        <pc:picChg chg="add del mod ord">
-          <ac:chgData name="Ryan Mok" userId="2b5ff9b4bc27d924" providerId="LiveId" clId="{98BDB49B-93C9-4AB7-A5FC-395AE49E91C6}" dt="2026-08-17T15:57:49.730" v="249" actId="478"/>
+        <pc:picChg chg="add mod">
+          <ac:chgData name="Ryan Mok" userId="2b5ff9b4bc27d924" providerId="LiveId" clId="{98BDB49B-93C9-4AB7-A5FC-395AE49E91C6}" dt="2026-08-20T13:56:41.582" v="708" actId="164"/>
           <ac:picMkLst>
             <pc:docMk/>
             <pc:sldMk cId="4284697073" sldId="257"/>
-            <ac:picMk id="37" creationId="{48743B42-37B1-475D-81DD-E5745FBA9E16}"/>
+            <ac:picMk id="48" creationId="{A57E28DC-5F0F-F0FF-F7F8-AA980264D27A}"/>
           </ac:picMkLst>
         </pc:picChg>
-        <pc:picChg chg="add del mod ord modCrop">
-          <ac:chgData name="Ryan Mok" userId="2b5ff9b4bc27d924" providerId="LiveId" clId="{98BDB49B-93C9-4AB7-A5FC-395AE49E91C6}" dt="2026-08-17T15:58:35.905" v="257" actId="478"/>
+        <pc:picChg chg="add del mod">
+          <ac:chgData name="Ryan Mok" userId="2b5ff9b4bc27d924" providerId="LiveId" clId="{98BDB49B-93C9-4AB7-A5FC-395AE49E91C6}" dt="2026-08-19T16:33:33.473" v="599" actId="478"/>
           <ac:picMkLst>
             <pc:docMk/>
             <pc:sldMk cId="4284697073" sldId="257"/>
-            <ac:picMk id="41" creationId="{7FE9D0B4-2C12-E89C-26E9-1B8139D275C1}"/>
+            <ac:picMk id="49" creationId="{5E16DF56-4C1A-B6E6-FA82-011A9DC779C4}"/>
           </ac:picMkLst>
         </pc:picChg>
-        <pc:picChg chg="add mod ord">
-          <ac:chgData name="Ryan Mok" userId="2b5ff9b4bc27d924" providerId="LiveId" clId="{98BDB49B-93C9-4AB7-A5FC-395AE49E91C6}" dt="2026-08-17T16:02:47.222" v="282" actId="1076"/>
+        <pc:picChg chg="add del mod">
+          <ac:chgData name="Ryan Mok" userId="2b5ff9b4bc27d924" providerId="LiveId" clId="{98BDB49B-93C9-4AB7-A5FC-395AE49E91C6}" dt="2026-08-20T13:58:27.319" v="717" actId="478"/>
           <ac:picMkLst>
             <pc:docMk/>
             <pc:sldMk cId="4284697073" sldId="257"/>
-            <ac:picMk id="46" creationId="{648DE49E-2738-9E11-8AA2-69CDCF99E6F5}"/>
+            <ac:picMk id="51" creationId="{150094DC-0617-1D5D-CED1-53E83A6D679F}"/>
+          </ac:picMkLst>
+        </pc:picChg>
+        <pc:picChg chg="add del mod">
+          <ac:chgData name="Ryan Mok" userId="2b5ff9b4bc27d924" providerId="LiveId" clId="{98BDB49B-93C9-4AB7-A5FC-395AE49E91C6}" dt="2026-08-19T16:33:33.473" v="599" actId="478"/>
+          <ac:picMkLst>
+            <pc:docMk/>
+            <pc:sldMk cId="4284697073" sldId="257"/>
+            <ac:picMk id="51" creationId="{C8B36003-7DA0-180E-F5C7-BCA0816FA3CC}"/>
+          </ac:picMkLst>
+        </pc:picChg>
+        <pc:picChg chg="add del mod">
+          <ac:chgData name="Ryan Mok" userId="2b5ff9b4bc27d924" providerId="LiveId" clId="{98BDB49B-93C9-4AB7-A5FC-395AE49E91C6}" dt="2026-08-20T13:59:22.273" v="724" actId="478"/>
+          <ac:picMkLst>
+            <pc:docMk/>
+            <pc:sldMk cId="4284697073" sldId="257"/>
+            <ac:picMk id="53" creationId="{05D07929-AA32-9EC4-0E89-43EE4BDE474B}"/>
+          </ac:picMkLst>
+        </pc:picChg>
+        <pc:picChg chg="add del mod">
+          <ac:chgData name="Ryan Mok" userId="2b5ff9b4bc27d924" providerId="LiveId" clId="{98BDB49B-93C9-4AB7-A5FC-395AE49E91C6}" dt="2026-08-19T15:53:19.335" v="591" actId="478"/>
+          <ac:picMkLst>
+            <pc:docMk/>
+            <pc:sldMk cId="4284697073" sldId="257"/>
+            <ac:picMk id="53" creationId="{8EB495DA-F087-17E2-99F4-BF554BE35F30}"/>
+          </ac:picMkLst>
+        </pc:picChg>
+        <pc:picChg chg="add del mod">
+          <ac:chgData name="Ryan Mok" userId="2b5ff9b4bc27d924" providerId="LiveId" clId="{98BDB49B-93C9-4AB7-A5FC-395AE49E91C6}" dt="2026-08-20T13:52:29.894" v="653" actId="478"/>
+          <ac:picMkLst>
+            <pc:docMk/>
+            <pc:sldMk cId="4284697073" sldId="257"/>
+            <ac:picMk id="55" creationId="{A3117651-4418-73B3-D523-23ED871F2717}"/>
+          </ac:picMkLst>
+        </pc:picChg>
+        <pc:picChg chg="add del mod">
+          <ac:chgData name="Ryan Mok" userId="2b5ff9b4bc27d924" providerId="LiveId" clId="{98BDB49B-93C9-4AB7-A5FC-395AE49E91C6}" dt="2026-08-20T14:16:55.460" v="1145" actId="478"/>
+          <ac:picMkLst>
+            <pc:docMk/>
+            <pc:sldMk cId="4284697073" sldId="257"/>
+            <ac:picMk id="56" creationId="{AB5B08B7-EB76-DE8F-C85C-046A80F03B22}"/>
+          </ac:picMkLst>
+        </pc:picChg>
+        <pc:picChg chg="add del mod">
+          <ac:chgData name="Ryan Mok" userId="2b5ff9b4bc27d924" providerId="LiveId" clId="{98BDB49B-93C9-4AB7-A5FC-395AE49E91C6}" dt="2026-08-20T13:52:28.410" v="652" actId="478"/>
+          <ac:picMkLst>
+            <pc:docMk/>
+            <pc:sldMk cId="4284697073" sldId="257"/>
+            <ac:picMk id="57" creationId="{B34B3B36-8C5A-B9A3-9937-E5C37EFB49B8}"/>
+          </ac:picMkLst>
+        </pc:picChg>
+        <pc:picChg chg="add del mod">
+          <ac:chgData name="Ryan Mok" userId="2b5ff9b4bc27d924" providerId="LiveId" clId="{98BDB49B-93C9-4AB7-A5FC-395AE49E91C6}" dt="2026-08-20T13:52:28.012" v="651" actId="478"/>
+          <ac:picMkLst>
+            <pc:docMk/>
+            <pc:sldMk cId="4284697073" sldId="257"/>
+            <ac:picMk id="59" creationId="{323DE8DF-0A04-1185-F467-393E78376154}"/>
+          </ac:picMkLst>
+        </pc:picChg>
+        <pc:picChg chg="add del mod">
+          <ac:chgData name="Ryan Mok" userId="2b5ff9b4bc27d924" providerId="LiveId" clId="{98BDB49B-93C9-4AB7-A5FC-395AE49E91C6}" dt="2026-08-20T14:02:01.558" v="738" actId="478"/>
+          <ac:picMkLst>
+            <pc:docMk/>
+            <pc:sldMk cId="4284697073" sldId="257"/>
+            <ac:picMk id="60" creationId="{B4F264C6-550D-92AA-289A-970D8BA90A4B}"/>
+          </ac:picMkLst>
+        </pc:picChg>
+        <pc:picChg chg="add del mod">
+          <ac:chgData name="Ryan Mok" userId="2b5ff9b4bc27d924" providerId="LiveId" clId="{98BDB49B-93C9-4AB7-A5FC-395AE49E91C6}" dt="2026-08-20T13:52:27.149" v="649" actId="478"/>
+          <ac:picMkLst>
+            <pc:docMk/>
+            <pc:sldMk cId="4284697073" sldId="257"/>
+            <ac:picMk id="61" creationId="{F3D6347B-FECF-CD0B-224C-0D24E026C1C0}"/>
+          </ac:picMkLst>
+        </pc:picChg>
+        <pc:picChg chg="add del mod">
+          <ac:chgData name="Ryan Mok" userId="2b5ff9b4bc27d924" providerId="LiveId" clId="{98BDB49B-93C9-4AB7-A5FC-395AE49E91C6}" dt="2026-08-20T13:52:27.587" v="650" actId="478"/>
+          <ac:picMkLst>
+            <pc:docMk/>
+            <pc:sldMk cId="4284697073" sldId="257"/>
+            <ac:picMk id="63" creationId="{CF4F2C01-603A-5CE3-B4E3-1865A6E68874}"/>
+          </ac:picMkLst>
+        </pc:picChg>
+        <pc:picChg chg="add del mod">
+          <ac:chgData name="Ryan Mok" userId="2b5ff9b4bc27d924" providerId="LiveId" clId="{98BDB49B-93C9-4AB7-A5FC-395AE49E91C6}" dt="2026-08-20T14:03:13.687" v="885" actId="478"/>
+          <ac:picMkLst>
+            <pc:docMk/>
+            <pc:sldMk cId="4284697073" sldId="257"/>
+            <ac:picMk id="64" creationId="{C2F5AB3D-5821-10F9-809A-19ADA4C9460B}"/>
+          </ac:picMkLst>
+        </pc:picChg>
+        <pc:picChg chg="add del mod">
+          <ac:chgData name="Ryan Mok" userId="2b5ff9b4bc27d924" providerId="LiveId" clId="{98BDB49B-93C9-4AB7-A5FC-395AE49E91C6}" dt="2026-08-20T13:52:34.434" v="654" actId="478"/>
+          <ac:picMkLst>
+            <pc:docMk/>
+            <pc:sldMk cId="4284697073" sldId="257"/>
+            <ac:picMk id="65" creationId="{93043CB5-E759-84E0-CC5B-80C1B60EFBD9}"/>
+          </ac:picMkLst>
+        </pc:picChg>
+        <pc:picChg chg="add del mod">
+          <ac:chgData name="Ryan Mok" userId="2b5ff9b4bc27d924" providerId="LiveId" clId="{98BDB49B-93C9-4AB7-A5FC-395AE49E91C6}" dt="2026-08-20T13:52:34.434" v="654" actId="478"/>
+          <ac:picMkLst>
+            <pc:docMk/>
+            <pc:sldMk cId="4284697073" sldId="257"/>
+            <ac:picMk id="67" creationId="{F0BA53D3-66B2-A4B9-EE6A-45F91AD75CCB}"/>
+          </ac:picMkLst>
+        </pc:picChg>
+        <pc:picChg chg="add del mod">
+          <ac:chgData name="Ryan Mok" userId="2b5ff9b4bc27d924" providerId="LiveId" clId="{98BDB49B-93C9-4AB7-A5FC-395AE49E91C6}" dt="2026-08-20T14:04:38.977" v="897" actId="478"/>
+          <ac:picMkLst>
+            <pc:docMk/>
+            <pc:sldMk cId="4284697073" sldId="257"/>
+            <ac:picMk id="68" creationId="{6ADBE5CD-1701-B4B5-A31E-E54280C42521}"/>
+          </ac:picMkLst>
+        </pc:picChg>
+        <pc:picChg chg="add del mod">
+          <ac:chgData name="Ryan Mok" userId="2b5ff9b4bc27d924" providerId="LiveId" clId="{98BDB49B-93C9-4AB7-A5FC-395AE49E91C6}" dt="2026-08-20T13:52:34.434" v="654" actId="478"/>
+          <ac:picMkLst>
+            <pc:docMk/>
+            <pc:sldMk cId="4284697073" sldId="257"/>
+            <ac:picMk id="69" creationId="{B632A67D-463A-F13A-B69B-4AC38D587FDD}"/>
+          </ac:picMkLst>
+        </pc:picChg>
+        <pc:picChg chg="add del mod">
+          <ac:chgData name="Ryan Mok" userId="2b5ff9b4bc27d924" providerId="LiveId" clId="{98BDB49B-93C9-4AB7-A5FC-395AE49E91C6}" dt="2026-08-20T14:07:09.019" v="934" actId="478"/>
+          <ac:picMkLst>
+            <pc:docMk/>
+            <pc:sldMk cId="4284697073" sldId="257"/>
+            <ac:picMk id="71" creationId="{DF1649D8-608E-BE00-72BF-0D0C8F253A66}"/>
+          </ac:picMkLst>
+        </pc:picChg>
+        <pc:picChg chg="add del mod">
+          <ac:chgData name="Ryan Mok" userId="2b5ff9b4bc27d924" providerId="LiveId" clId="{98BDB49B-93C9-4AB7-A5FC-395AE49E91C6}" dt="2026-08-20T14:10:05.131" v="978" actId="478"/>
+          <ac:picMkLst>
+            <pc:docMk/>
+            <pc:sldMk cId="4284697073" sldId="257"/>
+            <ac:picMk id="73" creationId="{D3202F49-07D3-A434-C4BA-5F61883F35FD}"/>
+          </ac:picMkLst>
+        </pc:picChg>
+        <pc:picChg chg="add del mod">
+          <ac:chgData name="Ryan Mok" userId="2b5ff9b4bc27d924" providerId="LiveId" clId="{98BDB49B-93C9-4AB7-A5FC-395AE49E91C6}" dt="2026-08-20T15:02:13.350" v="1230" actId="478"/>
+          <ac:picMkLst>
+            <pc:docMk/>
+            <pc:sldMk cId="4284697073" sldId="257"/>
+            <ac:picMk id="75" creationId="{D334B1A9-6F62-37A3-F1E5-DC8545CF89CB}"/>
+          </ac:picMkLst>
+        </pc:picChg>
+        <pc:picChg chg="add del mod">
+          <ac:chgData name="Ryan Mok" userId="2b5ff9b4bc27d924" providerId="LiveId" clId="{98BDB49B-93C9-4AB7-A5FC-395AE49E91C6}" dt="2026-08-20T15:02:10.054" v="1227" actId="478"/>
+          <ac:picMkLst>
+            <pc:docMk/>
+            <pc:sldMk cId="4284697073" sldId="257"/>
+            <ac:picMk id="77" creationId="{CB6DF1F2-85DA-5629-4E4B-C1091BCFF702}"/>
+          </ac:picMkLst>
+        </pc:picChg>
+        <pc:picChg chg="add del mod">
+          <ac:chgData name="Ryan Mok" userId="2b5ff9b4bc27d924" providerId="LiveId" clId="{98BDB49B-93C9-4AB7-A5FC-395AE49E91C6}" dt="2026-08-20T15:02:13.746" v="1231" actId="478"/>
+          <ac:picMkLst>
+            <pc:docMk/>
+            <pc:sldMk cId="4284697073" sldId="257"/>
+            <ac:picMk id="79" creationId="{30B39351-6F8D-5A7B-7979-7011CBE3CBC6}"/>
+          </ac:picMkLst>
+        </pc:picChg>
+        <pc:picChg chg="add del mod">
+          <ac:chgData name="Ryan Mok" userId="2b5ff9b4bc27d924" providerId="LiveId" clId="{98BDB49B-93C9-4AB7-A5FC-395AE49E91C6}" dt="2026-08-20T14:50:44.344" v="1189" actId="478"/>
+          <ac:picMkLst>
+            <pc:docMk/>
+            <pc:sldMk cId="4284697073" sldId="257"/>
+            <ac:picMk id="81" creationId="{200B4050-C536-FE01-9F5A-9B587CA3B768}"/>
+          </ac:picMkLst>
+        </pc:picChg>
+        <pc:picChg chg="add del mod">
+          <ac:chgData name="Ryan Mok" userId="2b5ff9b4bc27d924" providerId="LiveId" clId="{98BDB49B-93C9-4AB7-A5FC-395AE49E91C6}" dt="2026-08-20T14:50:25.757" v="1187" actId="22"/>
+          <ac:picMkLst>
+            <pc:docMk/>
+            <pc:sldMk cId="4284697073" sldId="257"/>
+            <ac:picMk id="83" creationId="{5EEE771B-21E0-1B65-3BDB-923E6D7210EB}"/>
+          </ac:picMkLst>
+        </pc:picChg>
+        <pc:picChg chg="add del mod">
+          <ac:chgData name="Ryan Mok" userId="2b5ff9b4bc27d924" providerId="LiveId" clId="{98BDB49B-93C9-4AB7-A5FC-395AE49E91C6}" dt="2026-08-20T14:50:21.895" v="1182" actId="22"/>
+          <ac:picMkLst>
+            <pc:docMk/>
+            <pc:sldMk cId="4284697073" sldId="257"/>
+            <ac:picMk id="85" creationId="{EE57ACDC-6F0E-2F04-984A-5B39BB77F6F2}"/>
+          </ac:picMkLst>
+        </pc:picChg>
+        <pc:picChg chg="add del mod">
+          <ac:chgData name="Ryan Mok" userId="2b5ff9b4bc27d924" providerId="LiveId" clId="{98BDB49B-93C9-4AB7-A5FC-395AE49E91C6}" dt="2026-08-20T15:11:01.030" v="1402" actId="478"/>
+          <ac:picMkLst>
+            <pc:docMk/>
+            <pc:sldMk cId="4284697073" sldId="257"/>
+            <ac:picMk id="87" creationId="{F3DB1F39-52C3-D998-05D6-28C6C7F92E61}"/>
+          </ac:picMkLst>
+        </pc:picChg>
+        <pc:picChg chg="add del mod">
+          <ac:chgData name="Ryan Mok" userId="2b5ff9b4bc27d924" providerId="LiveId" clId="{98BDB49B-93C9-4AB7-A5FC-395AE49E91C6}" dt="2026-08-20T15:02:10.593" v="1228" actId="478"/>
+          <ac:picMkLst>
+            <pc:docMk/>
+            <pc:sldMk cId="4284697073" sldId="257"/>
+            <ac:picMk id="89" creationId="{04538F8A-D9B7-4366-423C-E1396E20D697}"/>
+          </ac:picMkLst>
+        </pc:picChg>
+        <pc:picChg chg="add del mod">
+          <ac:chgData name="Ryan Mok" userId="2b5ff9b4bc27d924" providerId="LiveId" clId="{98BDB49B-93C9-4AB7-A5FC-395AE49E91C6}" dt="2026-08-20T15:02:09.659" v="1226" actId="478"/>
+          <ac:picMkLst>
+            <pc:docMk/>
+            <pc:sldMk cId="4284697073" sldId="257"/>
+            <ac:picMk id="91" creationId="{742C6BD1-E135-5913-23F4-4A86C197AA13}"/>
+          </ac:picMkLst>
+        </pc:picChg>
+        <pc:picChg chg="add mod">
+          <ac:chgData name="Ryan Mok" userId="2b5ff9b4bc27d924" providerId="LiveId" clId="{98BDB49B-93C9-4AB7-A5FC-395AE49E91C6}" dt="2026-08-20T15:06:29.353" v="1397" actId="164"/>
+          <ac:picMkLst>
+            <pc:docMk/>
+            <pc:sldMk cId="4284697073" sldId="257"/>
+            <ac:picMk id="93" creationId="{9DE9A554-6170-1FB0-5AE6-E7B4A65BB537}"/>
+          </ac:picMkLst>
+        </pc:picChg>
+        <pc:picChg chg="add mod">
+          <ac:chgData name="Ryan Mok" userId="2b5ff9b4bc27d924" providerId="LiveId" clId="{98BDB49B-93C9-4AB7-A5FC-395AE49E91C6}" dt="2026-08-20T15:06:29.353" v="1397" actId="164"/>
+          <ac:picMkLst>
+            <pc:docMk/>
+            <pc:sldMk cId="4284697073" sldId="257"/>
+            <ac:picMk id="95" creationId="{EE9BC05F-B7E3-CA11-DC00-15C950FA7D23}"/>
+          </ac:picMkLst>
+        </pc:picChg>
+        <pc:picChg chg="add mod">
+          <ac:chgData name="Ryan Mok" userId="2b5ff9b4bc27d924" providerId="LiveId" clId="{98BDB49B-93C9-4AB7-A5FC-395AE49E91C6}" dt="2026-08-20T15:06:29.353" v="1397" actId="164"/>
+          <ac:picMkLst>
+            <pc:docMk/>
+            <pc:sldMk cId="4284697073" sldId="257"/>
+            <ac:picMk id="97" creationId="{794851A6-82D4-39F5-1845-5DDF13F7AA74}"/>
+          </ac:picMkLst>
+        </pc:picChg>
+        <pc:picChg chg="add mod">
+          <ac:chgData name="Ryan Mok" userId="2b5ff9b4bc27d924" providerId="LiveId" clId="{98BDB49B-93C9-4AB7-A5FC-395AE49E91C6}" dt="2026-08-20T15:22:20.272" v="2614" actId="164"/>
+          <ac:picMkLst>
+            <pc:docMk/>
+            <pc:sldMk cId="4284697073" sldId="257"/>
+            <ac:picMk id="100" creationId="{1B28F01E-BDE3-52AD-4093-67C1EF6A1087}"/>
+          </ac:picMkLst>
+        </pc:picChg>
+        <pc:picChg chg="add mod modCrop">
+          <ac:chgData name="Ryan Mok" userId="2b5ff9b4bc27d924" providerId="LiveId" clId="{98BDB49B-93C9-4AB7-A5FC-395AE49E91C6}" dt="2026-08-20T15:20:25.691" v="2540" actId="1037"/>
+          <ac:picMkLst>
+            <pc:docMk/>
+            <pc:sldMk cId="4284697073" sldId="257"/>
+            <ac:picMk id="102" creationId="{C081D37A-3F34-CEE6-7DF1-5F1F3CD99C8F}"/>
+          </ac:picMkLst>
+        </pc:picChg>
+        <pc:picChg chg="add mod">
+          <ac:chgData name="Ryan Mok" userId="2b5ff9b4bc27d924" providerId="LiveId" clId="{98BDB49B-93C9-4AB7-A5FC-395AE49E91C6}" dt="2026-08-20T15:22:20.272" v="2614" actId="164"/>
+          <ac:picMkLst>
+            <pc:docMk/>
+            <pc:sldMk cId="4284697073" sldId="257"/>
+            <ac:picMk id="104" creationId="{9507A142-E620-ECAA-B88A-B067DBD071DF}"/>
+          </ac:picMkLst>
+        </pc:picChg>
+        <pc:picChg chg="add del mod">
+          <ac:chgData name="Ryan Mok" userId="2b5ff9b4bc27d924" providerId="LiveId" clId="{98BDB49B-93C9-4AB7-A5FC-395AE49E91C6}" dt="2026-08-20T15:16:23.956" v="2076" actId="478"/>
+          <ac:picMkLst>
+            <pc:docMk/>
+            <pc:sldMk cId="4284697073" sldId="257"/>
+            <ac:picMk id="106" creationId="{8735528E-1305-0B3F-41EA-2D4955B8F78C}"/>
+          </ac:picMkLst>
+        </pc:picChg>
+        <pc:picChg chg="add mod modCrop">
+          <ac:chgData name="Ryan Mok" userId="2b5ff9b4bc27d924" providerId="LiveId" clId="{98BDB49B-93C9-4AB7-A5FC-395AE49E91C6}" dt="2026-08-20T15:17:55.052" v="2377" actId="164"/>
+          <ac:picMkLst>
+            <pc:docMk/>
+            <pc:sldMk cId="4284697073" sldId="257"/>
+            <ac:picMk id="108" creationId="{CFCC7DEF-BBEC-AE27-044B-9962CF97977D}"/>
+          </ac:picMkLst>
+        </pc:picChg>
+        <pc:picChg chg="add mod">
+          <ac:chgData name="Ryan Mok" userId="2b5ff9b4bc27d924" providerId="LiveId" clId="{98BDB49B-93C9-4AB7-A5FC-395AE49E91C6}" dt="2026-08-20T15:38:24.564" v="3234" actId="164"/>
+          <ac:picMkLst>
+            <pc:docMk/>
+            <pc:sldMk cId="4284697073" sldId="257"/>
+            <ac:picMk id="115" creationId="{45C465AF-A32D-E5BD-4910-FD76854046B2}"/>
+          </ac:picMkLst>
+        </pc:picChg>
+        <pc:picChg chg="add mod">
+          <ac:chgData name="Ryan Mok" userId="2b5ff9b4bc27d924" providerId="LiveId" clId="{98BDB49B-93C9-4AB7-A5FC-395AE49E91C6}" dt="2026-08-20T15:38:24.564" v="3234" actId="164"/>
+          <ac:picMkLst>
+            <pc:docMk/>
+            <pc:sldMk cId="4284697073" sldId="257"/>
+            <ac:picMk id="117" creationId="{473FE8C4-79D5-CFD5-CD80-AFDDCC556867}"/>
+          </ac:picMkLst>
+        </pc:picChg>
+        <pc:picChg chg="add mod">
+          <ac:chgData name="Ryan Mok" userId="2b5ff9b4bc27d924" providerId="LiveId" clId="{98BDB49B-93C9-4AB7-A5FC-395AE49E91C6}" dt="2026-08-20T15:38:24.564" v="3234" actId="164"/>
+          <ac:picMkLst>
+            <pc:docMk/>
+            <pc:sldMk cId="4284697073" sldId="257"/>
+            <ac:picMk id="119" creationId="{68896298-5E3F-7709-5EF4-9050D41EFA1B}"/>
+          </ac:picMkLst>
+        </pc:picChg>
+        <pc:picChg chg="add mod">
+          <ac:chgData name="Ryan Mok" userId="2b5ff9b4bc27d924" providerId="LiveId" clId="{98BDB49B-93C9-4AB7-A5FC-395AE49E91C6}" dt="2026-08-20T18:18:09.558" v="5981" actId="1038"/>
+          <ac:picMkLst>
+            <pc:docMk/>
+            <pc:sldMk cId="4284697073" sldId="257"/>
+            <ac:picMk id="128" creationId="{D7009208-CC3F-BADB-A338-3C3DDCD5B861}"/>
+          </ac:picMkLst>
+        </pc:picChg>
+        <pc:picChg chg="add mod">
+          <ac:chgData name="Ryan Mok" userId="2b5ff9b4bc27d924" providerId="LiveId" clId="{98BDB49B-93C9-4AB7-A5FC-395AE49E91C6}" dt="2026-08-20T18:21:39.982" v="5986" actId="1076"/>
+          <ac:picMkLst>
+            <pc:docMk/>
+            <pc:sldMk cId="4284697073" sldId="257"/>
+            <ac:picMk id="160" creationId="{EB415472-1A49-1599-EE17-227300B70D7D}"/>
           </ac:picMkLst>
         </pc:picChg>
         <pc:cxnChg chg="mod">
-          <ac:chgData name="Ryan Mok" userId="2b5ff9b4bc27d924" providerId="LiveId" clId="{98BDB49B-93C9-4AB7-A5FC-395AE49E91C6}" dt="2026-08-16T00:21:39.298" v="123"/>
-          <ac:cxnSpMkLst>
-            <pc:docMk/>
-            <pc:sldMk cId="4284697073" sldId="257"/>
-            <ac:cxnSpMk id="4" creationId="{0E4E6E85-0FE5-BCDC-AB08-47B65F5F2086}"/>
-          </ac:cxnSpMkLst>
-        </pc:cxnChg>
-        <pc:cxnChg chg="mod">
-          <ac:chgData name="Ryan Mok" userId="2b5ff9b4bc27d924" providerId="LiveId" clId="{98BDB49B-93C9-4AB7-A5FC-395AE49E91C6}" dt="2026-08-16T00:21:39.298" v="123"/>
-          <ac:cxnSpMkLst>
-            <pc:docMk/>
-            <pc:sldMk cId="4284697073" sldId="257"/>
-            <ac:cxnSpMk id="6" creationId="{018538C0-DFBB-0936-2169-6BFF73C591F3}"/>
-          </ac:cxnSpMkLst>
-        </pc:cxnChg>
-        <pc:cxnChg chg="mod">
-          <ac:chgData name="Ryan Mok" userId="2b5ff9b4bc27d924" providerId="LiveId" clId="{98BDB49B-93C9-4AB7-A5FC-395AE49E91C6}" dt="2026-08-16T00:27:48.832" v="132"/>
+          <ac:chgData name="Ryan Mok" userId="2b5ff9b4bc27d924" providerId="LiveId" clId="{98BDB49B-93C9-4AB7-A5FC-395AE49E91C6}" dt="2026-08-19T14:59:34.933" v="371" actId="34135"/>
           <ac:cxnSpMkLst>
             <pc:docMk/>
             <pc:sldMk cId="4284697073" sldId="257"/>
@@ -467,7 +1027,7 @@
           </ac:cxnSpMkLst>
         </pc:cxnChg>
         <pc:cxnChg chg="mod">
-          <ac:chgData name="Ryan Mok" userId="2b5ff9b4bc27d924" providerId="LiveId" clId="{98BDB49B-93C9-4AB7-A5FC-395AE49E91C6}" dt="2026-08-16T00:27:48.832" v="132"/>
+          <ac:chgData name="Ryan Mok" userId="2b5ff9b4bc27d924" providerId="LiveId" clId="{98BDB49B-93C9-4AB7-A5FC-395AE49E91C6}" dt="2026-08-19T14:59:34.933" v="371" actId="34135"/>
           <ac:cxnSpMkLst>
             <pc:docMk/>
             <pc:sldMk cId="4284697073" sldId="257"/>
@@ -6231,60 +6791,6 @@
       </p:grpSpPr>
       <p:sp>
         <p:nvSpPr>
-          <p:cNvPr id="8" name="Rectangle 7">
-            <a:extLst>
-              <a:ext uri="{FF2B5EF4-FFF2-40B4-BE49-F238E27FC236}">
-                <a16:creationId xmlns:a16="http://schemas.microsoft.com/office/drawing/2014/main" id="{7A734323-8DED-6057-40A5-62D55DC614A9}"/>
-              </a:ext>
-            </a:extLst>
-          </p:cNvPr>
-          <p:cNvSpPr/>
-          <p:nvPr/>
-        </p:nvSpPr>
-        <p:spPr>
-          <a:xfrm>
-            <a:off x="674843" y="6521964"/>
-            <a:ext cx="10466932" cy="7129964"/>
-          </a:xfrm>
-          <a:prstGeom prst="rect">
-            <a:avLst/>
-          </a:prstGeom>
-          <a:solidFill>
-            <a:schemeClr val="bg1"/>
-          </a:solidFill>
-          <a:ln w="317500">
-            <a:solidFill>
-              <a:srgbClr val="240E3C"/>
-            </a:solidFill>
-          </a:ln>
-        </p:spPr>
-        <p:style>
-          <a:lnRef idx="2">
-            <a:schemeClr val="accent1">
-              <a:shade val="15000"/>
-            </a:schemeClr>
-          </a:lnRef>
-          <a:fillRef idx="1">
-            <a:schemeClr val="accent1"/>
-          </a:fillRef>
-          <a:effectRef idx="0">
-            <a:schemeClr val="accent1"/>
-          </a:effectRef>
-          <a:fontRef idx="minor">
-            <a:schemeClr val="lt1"/>
-          </a:fontRef>
-        </p:style>
-        <p:txBody>
-          <a:bodyPr rtlCol="0" anchor="ctr"/>
-          <a:lstStyle/>
-          <a:p>
-            <a:pPr algn="ctr"/>
-            <a:endParaRPr lang="en-GB" dirty="0"/>
-          </a:p>
-        </p:txBody>
-      </p:sp>
-      <p:sp>
-        <p:nvSpPr>
           <p:cNvPr id="13" name="Title 12">
             <a:extLst>
               <a:ext uri="{FF2B5EF4-FFF2-40B4-BE49-F238E27FC236}">
@@ -6432,81 +6938,6 @@
           </a:p>
         </p:txBody>
       </p:sp>
-      <p:sp>
-        <p:nvSpPr>
-          <p:cNvPr id="21" name="Content Placeholder 20">
-            <a:extLst>
-              <a:ext uri="{FF2B5EF4-FFF2-40B4-BE49-F238E27FC236}">
-                <a16:creationId xmlns:a16="http://schemas.microsoft.com/office/drawing/2014/main" id="{9678B249-83F4-209B-9C2A-C9BEB6C13020}"/>
-              </a:ext>
-            </a:extLst>
-          </p:cNvPr>
-          <p:cNvSpPr>
-            <a:spLocks noGrp="1"/>
-          </p:cNvSpPr>
-          <p:nvPr>
-            <p:ph sz="quarter" idx="25"/>
-          </p:nvPr>
-        </p:nvSpPr>
-        <p:spPr/>
-        <p:txBody>
-          <a:bodyPr/>
-          <a:lstStyle/>
-          <a:p>
-            <a:endParaRPr lang="en-US"/>
-          </a:p>
-        </p:txBody>
-      </p:sp>
-      <p:sp>
-        <p:nvSpPr>
-          <p:cNvPr id="22" name="Content Placeholder 21">
-            <a:extLst>
-              <a:ext uri="{FF2B5EF4-FFF2-40B4-BE49-F238E27FC236}">
-                <a16:creationId xmlns:a16="http://schemas.microsoft.com/office/drawing/2014/main" id="{D6C21CA2-FD8B-96F0-F877-0F7A3134086A}"/>
-              </a:ext>
-            </a:extLst>
-          </p:cNvPr>
-          <p:cNvSpPr>
-            <a:spLocks noGrp="1"/>
-          </p:cNvSpPr>
-          <p:nvPr>
-            <p:ph sz="quarter" idx="26"/>
-          </p:nvPr>
-        </p:nvSpPr>
-        <p:spPr/>
-        <p:txBody>
-          <a:bodyPr/>
-          <a:lstStyle/>
-          <a:p>
-            <a:endParaRPr lang="en-US"/>
-          </a:p>
-        </p:txBody>
-      </p:sp>
-      <p:sp>
-        <p:nvSpPr>
-          <p:cNvPr id="23" name="Content Placeholder 22">
-            <a:extLst>
-              <a:ext uri="{FF2B5EF4-FFF2-40B4-BE49-F238E27FC236}">
-                <a16:creationId xmlns:a16="http://schemas.microsoft.com/office/drawing/2014/main" id="{81346889-22B2-6F9B-A0BE-03766389A0B4}"/>
-              </a:ext>
-            </a:extLst>
-          </p:cNvPr>
-          <p:cNvSpPr>
-            <a:spLocks noGrp="1"/>
-          </p:cNvSpPr>
-          <p:nvPr>
-            <p:ph sz="quarter" idx="27"/>
-          </p:nvPr>
-        </p:nvSpPr>
-        <p:spPr/>
-        <p:txBody>
-          <a:bodyPr/>
-          <a:lstStyle/>
-          <a:p>
-            <a:endParaRPr lang="en-US"/>
-          </a:p>
-        </p:txBody>
-      </p:sp>
       <p:grpSp>
         <p:nvGrpSpPr>
           <p:cNvPr id="12" name="Group 11">
@@ -6516,13 +6947,15 @@
               </a:ext>
             </a:extLst>
           </p:cNvPr>
-          <p:cNvGrpSpPr/>
+          <p:cNvGrpSpPr>
+            <a:grpSpLocks/>
+          </p:cNvGrpSpPr>
           <p:nvPr/>
         </p:nvGrpSpPr>
         <p:grpSpPr>
           <a:xfrm>
-            <a:off x="2270689" y="7885287"/>
-            <a:ext cx="7275240" cy="4403317"/>
+            <a:off x="1010365" y="12511660"/>
+            <a:ext cx="6243647" cy="3778948"/>
             <a:chOff x="2529884" y="1485419"/>
             <a:chExt cx="4296945" cy="2600713"/>
           </a:xfrm>
@@ -6536,7 +6969,9 @@
                 </a:ext>
               </a:extLst>
             </p:cNvPr>
-            <p:cNvSpPr/>
+            <p:cNvSpPr>
+              <a:spLocks/>
+            </p:cNvSpPr>
             <p:nvPr/>
           </p:nvSpPr>
           <p:spPr>
@@ -6627,7 +7062,9 @@
                 </a:ext>
               </a:extLst>
             </p:cNvPr>
-            <p:cNvSpPr/>
+            <p:cNvSpPr>
+              <a:spLocks/>
+            </p:cNvSpPr>
             <p:nvPr/>
           </p:nvSpPr>
           <p:spPr>
@@ -6730,7 +7167,9 @@
                 </a:ext>
               </a:extLst>
             </p:cNvPr>
-            <p:cNvSpPr/>
+            <p:cNvSpPr>
+              <a:spLocks/>
+            </p:cNvSpPr>
             <p:nvPr/>
           </p:nvSpPr>
           <p:spPr>
@@ -6789,7 +7228,9 @@
                 </a:ext>
               </a:extLst>
             </p:cNvPr>
-            <p:cNvSpPr/>
+            <p:cNvSpPr>
+              <a:spLocks/>
+            </p:cNvSpPr>
             <p:nvPr/>
           </p:nvSpPr>
           <p:spPr>
@@ -6850,7 +7291,9 @@
                     </a:ext>
                   </a:extLst>
                 </p:cNvPr>
-                <p:cNvSpPr txBox="1"/>
+                <p:cNvSpPr txBox="1">
+                  <a:spLocks/>
+                </p:cNvSpPr>
                 <p:nvPr/>
               </p:nvSpPr>
               <p:spPr>
@@ -6957,7 +7400,9 @@
                     </a:ext>
                   </a:extLst>
                 </p:cNvPr>
-                <p:cNvSpPr txBox="1"/>
+                <p:cNvSpPr txBox="1">
+                  <a:spLocks/>
+                </p:cNvSpPr>
                 <p:nvPr/>
               </p:nvSpPr>
               <p:spPr>
@@ -7064,7 +7509,9 @@
                     </a:ext>
                   </a:extLst>
                 </p:cNvPr>
-                <p:cNvSpPr txBox="1"/>
+                <p:cNvSpPr txBox="1">
+                  <a:spLocks/>
+                </p:cNvSpPr>
                 <p:nvPr/>
               </p:nvSpPr>
               <p:spPr>
@@ -7152,6 +7599,1029 @@
                 <a:blipFill>
                   <a:blip r:embed="rId4"/>
                   <a:stretch>
+                    <a:fillRect b="-12308"/>
+                  </a:stretch>
+                </a:blipFill>
+              </p:spPr>
+              <p:txBody>
+                <a:bodyPr/>
+                <a:lstStyle/>
+                <a:p>
+                  <a:r>
+                    <a:rPr lang="en-GB">
+                      <a:noFill/>
+                    </a:rPr>
+                    <a:t> </a:t>
+                  </a:r>
+                </a:p>
+              </p:txBody>
+            </p:sp>
+          </mc:Fallback>
+        </mc:AlternateContent>
+      </p:grpSp>
+      <p:sp>
+        <p:nvSpPr>
+          <p:cNvPr id="2" name="TextBox 1">
+            <a:extLst>
+              <a:ext uri="{FF2B5EF4-FFF2-40B4-BE49-F238E27FC236}">
+                <a16:creationId xmlns:a16="http://schemas.microsoft.com/office/drawing/2014/main" id="{2F22A643-DE8D-84E7-00F6-97D6EBB88D71}"/>
+              </a:ext>
+            </a:extLst>
+          </p:cNvPr>
+          <p:cNvSpPr txBox="1"/>
+          <p:nvPr/>
+        </p:nvSpPr>
+        <p:spPr>
+          <a:xfrm>
+            <a:off x="764373" y="6827017"/>
+            <a:ext cx="6083717" cy="769441"/>
+          </a:xfrm>
+          <a:prstGeom prst="rect">
+            <a:avLst/>
+          </a:prstGeom>
+          <a:noFill/>
+        </p:spPr>
+        <p:txBody>
+          <a:bodyPr wrap="none" rtlCol="0">
+            <a:spAutoFit/>
+          </a:bodyPr>
+          <a:lstStyle/>
+          <a:p>
+            <a:r>
+              <a:rPr lang="en-US" sz="4400" dirty="0">
+                <a:latin typeface="UCL Sans" panose="020B0604020202020204" charset="0"/>
+                <a:ea typeface="Sans Serif Collection" panose="020B0502040504020204" pitchFamily="34" charset="0"/>
+                <a:cs typeface="Sans Serif Collection" panose="020B0502040504020204" pitchFamily="34" charset="0"/>
+              </a:rPr>
+              <a:t>Motivation: Why HPO?</a:t>
+            </a:r>
+            <a:endParaRPr lang="en-GB" sz="4400" dirty="0">
+              <a:latin typeface="UCL Sans" panose="020B0604020202020204" charset="0"/>
+              <a:ea typeface="Sans Serif Collection" panose="020B0502040504020204" pitchFamily="34" charset="0"/>
+              <a:cs typeface="Sans Serif Collection" panose="020B0502040504020204" pitchFamily="34" charset="0"/>
+            </a:endParaRPr>
+          </a:p>
+        </p:txBody>
+      </p:sp>
+      <p:grpSp>
+        <p:nvGrpSpPr>
+          <p:cNvPr id="3" name="Group 2">
+            <a:extLst>
+              <a:ext uri="{FF2B5EF4-FFF2-40B4-BE49-F238E27FC236}">
+                <a16:creationId xmlns:a16="http://schemas.microsoft.com/office/drawing/2014/main" id="{560F710E-D540-FE2D-7C79-4F9730D2F883}"/>
+              </a:ext>
+            </a:extLst>
+          </p:cNvPr>
+          <p:cNvGrpSpPr/>
+          <p:nvPr/>
+        </p:nvGrpSpPr>
+        <p:grpSpPr>
+          <a:xfrm>
+            <a:off x="1545067" y="17984890"/>
+            <a:ext cx="4662417" cy="4886198"/>
+            <a:chOff x="3599376" y="899191"/>
+            <a:chExt cx="5178253" cy="5426792"/>
+          </a:xfrm>
+        </p:grpSpPr>
+        <p:sp>
+          <p:nvSpPr>
+            <p:cNvPr id="4" name="Arc 3">
+              <a:extLst>
+                <a:ext uri="{FF2B5EF4-FFF2-40B4-BE49-F238E27FC236}">
+                  <a16:creationId xmlns:a16="http://schemas.microsoft.com/office/drawing/2014/main" id="{DE6AA79A-E6CC-1DF4-ED15-B14D00BDB2EC}"/>
+                </a:ext>
+              </a:extLst>
+            </p:cNvPr>
+            <p:cNvSpPr/>
+            <p:nvPr/>
+          </p:nvSpPr>
+          <p:spPr>
+            <a:xfrm rot="5144585">
+              <a:off x="3582434" y="1481558"/>
+              <a:ext cx="2457356" cy="2423472"/>
+            </a:xfrm>
+            <a:prstGeom prst="arc">
+              <a:avLst>
+                <a:gd name="adj1" fmla="val 15496379"/>
+                <a:gd name="adj2" fmla="val 21546438"/>
+              </a:avLst>
+            </a:prstGeom>
+            <a:ln w="38100">
+              <a:solidFill>
+                <a:srgbClr val="FF0000"/>
+              </a:solidFill>
+            </a:ln>
+          </p:spPr>
+          <p:style>
+            <a:lnRef idx="2">
+              <a:schemeClr val="accent1"/>
+            </a:lnRef>
+            <a:fillRef idx="0">
+              <a:schemeClr val="accent1"/>
+            </a:fillRef>
+            <a:effectRef idx="1">
+              <a:schemeClr val="accent1"/>
+            </a:effectRef>
+            <a:fontRef idx="minor">
+              <a:schemeClr val="tx1"/>
+            </a:fontRef>
+          </p:style>
+          <p:txBody>
+            <a:bodyPr rtlCol="0" anchor="ctr"/>
+            <a:lstStyle/>
+            <a:p>
+              <a:pPr algn="ctr"/>
+              <a:endParaRPr lang="en-GB" dirty="0"/>
+            </a:p>
+          </p:txBody>
+        </p:sp>
+        <p:cxnSp>
+          <p:nvCxnSpPr>
+            <p:cNvPr id="5" name="Straight Connector 4">
+              <a:extLst>
+                <a:ext uri="{FF2B5EF4-FFF2-40B4-BE49-F238E27FC236}">
+                  <a16:creationId xmlns:a16="http://schemas.microsoft.com/office/drawing/2014/main" id="{BD09E57A-F4D5-9271-7F21-3AC1588A9487}"/>
+                </a:ext>
+              </a:extLst>
+            </p:cNvPr>
+            <p:cNvCxnSpPr>
+              <a:cxnSpLocks/>
+            </p:cNvCxnSpPr>
+            <p:nvPr/>
+          </p:nvCxnSpPr>
+          <p:spPr>
+            <a:xfrm flipV="1">
+              <a:off x="4937969" y="1686675"/>
+              <a:ext cx="3099643" cy="1010479"/>
+            </a:xfrm>
+            <a:prstGeom prst="line">
+              <a:avLst/>
+            </a:prstGeom>
+            <a:ln w="38100"/>
+          </p:spPr>
+          <p:style>
+            <a:lnRef idx="2">
+              <a:schemeClr val="dk1"/>
+            </a:lnRef>
+            <a:fillRef idx="0">
+              <a:schemeClr val="dk1"/>
+            </a:fillRef>
+            <a:effectRef idx="1">
+              <a:schemeClr val="dk1"/>
+            </a:effectRef>
+            <a:fontRef idx="minor">
+              <a:schemeClr val="tx1"/>
+            </a:fontRef>
+          </p:style>
+        </p:cxnSp>
+        <p:sp>
+          <p:nvSpPr>
+            <p:cNvPr id="6" name="Oval 5">
+              <a:extLst>
+                <a:ext uri="{FF2B5EF4-FFF2-40B4-BE49-F238E27FC236}">
+                  <a16:creationId xmlns:a16="http://schemas.microsoft.com/office/drawing/2014/main" id="{A58A5169-A45A-164A-5DCC-4AB634FAE73B}"/>
+                </a:ext>
+              </a:extLst>
+            </p:cNvPr>
+            <p:cNvSpPr/>
+            <p:nvPr/>
+          </p:nvSpPr>
+          <p:spPr>
+            <a:xfrm>
+              <a:off x="7297596" y="899191"/>
+              <a:ext cx="1480033" cy="1574968"/>
+            </a:xfrm>
+            <a:prstGeom prst="ellipse">
+              <a:avLst/>
+            </a:prstGeom>
+            <a:solidFill>
+              <a:srgbClr val="F2F2F2"/>
+            </a:solidFill>
+            <a:ln>
+              <a:solidFill>
+                <a:schemeClr val="tx1"/>
+              </a:solidFill>
+            </a:ln>
+          </p:spPr>
+          <p:style>
+            <a:lnRef idx="2">
+              <a:schemeClr val="accent1">
+                <a:shade val="15000"/>
+              </a:schemeClr>
+            </a:lnRef>
+            <a:fillRef idx="1">
+              <a:schemeClr val="accent1"/>
+            </a:fillRef>
+            <a:effectRef idx="0">
+              <a:schemeClr val="accent1"/>
+            </a:effectRef>
+            <a:fontRef idx="minor">
+              <a:schemeClr val="lt1"/>
+            </a:fontRef>
+          </p:style>
+          <p:txBody>
+            <a:bodyPr rtlCol="0" anchor="ctr"/>
+            <a:lstStyle/>
+            <a:p>
+              <a:pPr algn="ctr"/>
+              <a:r>
+                <a:rPr lang="en-US" sz="3600" dirty="0">
+                  <a:solidFill>
+                    <a:schemeClr val="tx1"/>
+                  </a:solidFill>
+                  <a:latin typeface="Tahoma" panose="020B0604030504040204" pitchFamily="34" charset="0"/>
+                  <a:ea typeface="Tahoma" panose="020B0604030504040204" pitchFamily="34" charset="0"/>
+                  <a:cs typeface="Tahoma" panose="020B0604030504040204" pitchFamily="34" charset="0"/>
+                </a:rPr>
+                <a:t>H</a:t>
+              </a:r>
+            </a:p>
+          </p:txBody>
+        </p:sp>
+        <p:cxnSp>
+          <p:nvCxnSpPr>
+            <p:cNvPr id="7" name="Straight Connector 6">
+              <a:extLst>
+                <a:ext uri="{FF2B5EF4-FFF2-40B4-BE49-F238E27FC236}">
+                  <a16:creationId xmlns:a16="http://schemas.microsoft.com/office/drawing/2014/main" id="{EDCBAC77-6273-4FD5-0C3E-F19AF89FBC9A}"/>
+                </a:ext>
+              </a:extLst>
+            </p:cNvPr>
+            <p:cNvCxnSpPr>
+              <a:cxnSpLocks/>
+            </p:cNvCxnSpPr>
+            <p:nvPr/>
+          </p:nvCxnSpPr>
+          <p:spPr>
+            <a:xfrm flipH="1" flipV="1">
+              <a:off x="4931455" y="2697154"/>
+              <a:ext cx="6514" cy="2926406"/>
+            </a:xfrm>
+            <a:prstGeom prst="line">
+              <a:avLst/>
+            </a:prstGeom>
+            <a:ln w="38100"/>
+          </p:spPr>
+          <p:style>
+            <a:lnRef idx="2">
+              <a:schemeClr val="dk1"/>
+            </a:lnRef>
+            <a:fillRef idx="0">
+              <a:schemeClr val="dk1"/>
+            </a:fillRef>
+            <a:effectRef idx="1">
+              <a:schemeClr val="dk1"/>
+            </a:effectRef>
+            <a:fontRef idx="minor">
+              <a:schemeClr val="tx1"/>
+            </a:fontRef>
+          </p:style>
+        </p:cxnSp>
+        <p:sp>
+          <p:nvSpPr>
+            <p:cNvPr id="9" name="Oval 8">
+              <a:extLst>
+                <a:ext uri="{FF2B5EF4-FFF2-40B4-BE49-F238E27FC236}">
+                  <a16:creationId xmlns:a16="http://schemas.microsoft.com/office/drawing/2014/main" id="{5EF34A64-51C9-1619-8B8C-9BAA844CE6C4}"/>
+                </a:ext>
+              </a:extLst>
+            </p:cNvPr>
+            <p:cNvSpPr/>
+            <p:nvPr/>
+          </p:nvSpPr>
+          <p:spPr>
+            <a:xfrm>
+              <a:off x="4191440" y="1909671"/>
+              <a:ext cx="1480033" cy="1574968"/>
+            </a:xfrm>
+            <a:prstGeom prst="ellipse">
+              <a:avLst/>
+            </a:prstGeom>
+            <a:solidFill>
+              <a:srgbClr val="8826C5"/>
+            </a:solidFill>
+          </p:spPr>
+          <p:style>
+            <a:lnRef idx="2">
+              <a:schemeClr val="accent1">
+                <a:shade val="15000"/>
+              </a:schemeClr>
+            </a:lnRef>
+            <a:fillRef idx="1">
+              <a:schemeClr val="accent1"/>
+            </a:fillRef>
+            <a:effectRef idx="0">
+              <a:schemeClr val="accent1"/>
+            </a:effectRef>
+            <a:fontRef idx="minor">
+              <a:schemeClr val="lt1"/>
+            </a:fontRef>
+          </p:style>
+          <p:txBody>
+            <a:bodyPr rtlCol="0" anchor="ctr"/>
+            <a:lstStyle/>
+            <a:p>
+              <a:pPr algn="ctr"/>
+              <a:r>
+                <a:rPr lang="en-US" sz="3600" dirty="0">
+                  <a:solidFill>
+                    <a:schemeClr val="tx1"/>
+                  </a:solidFill>
+                  <a:latin typeface="Tahoma" panose="020B0604030504040204" pitchFamily="34" charset="0"/>
+                  <a:ea typeface="Tahoma" panose="020B0604030504040204" pitchFamily="34" charset="0"/>
+                  <a:cs typeface="Tahoma" panose="020B0604030504040204" pitchFamily="34" charset="0"/>
+                </a:rPr>
+                <a:t>P</a:t>
+              </a:r>
+            </a:p>
+          </p:txBody>
+        </p:sp>
+        <p:sp>
+          <p:nvSpPr>
+            <p:cNvPr id="10" name="Oval 9">
+              <a:extLst>
+                <a:ext uri="{FF2B5EF4-FFF2-40B4-BE49-F238E27FC236}">
+                  <a16:creationId xmlns:a16="http://schemas.microsoft.com/office/drawing/2014/main" id="{692577A6-3793-7A60-5629-8EBE3BBF3099}"/>
+                </a:ext>
+              </a:extLst>
+            </p:cNvPr>
+            <p:cNvSpPr/>
+            <p:nvPr/>
+          </p:nvSpPr>
+          <p:spPr>
+            <a:xfrm>
+              <a:off x="4191439" y="4751015"/>
+              <a:ext cx="1480033" cy="1574968"/>
+            </a:xfrm>
+            <a:prstGeom prst="ellipse">
+              <a:avLst/>
+            </a:prstGeom>
+            <a:solidFill>
+              <a:srgbClr val="D93528"/>
+            </a:solidFill>
+          </p:spPr>
+          <p:style>
+            <a:lnRef idx="2">
+              <a:schemeClr val="accent1">
+                <a:shade val="15000"/>
+              </a:schemeClr>
+            </a:lnRef>
+            <a:fillRef idx="1">
+              <a:schemeClr val="accent1"/>
+            </a:fillRef>
+            <a:effectRef idx="0">
+              <a:schemeClr val="accent1"/>
+            </a:effectRef>
+            <a:fontRef idx="minor">
+              <a:schemeClr val="lt1"/>
+            </a:fontRef>
+          </p:style>
+          <p:txBody>
+            <a:bodyPr rtlCol="0" anchor="ctr"/>
+            <a:lstStyle/>
+            <a:p>
+              <a:pPr algn="ctr"/>
+              <a:r>
+                <a:rPr lang="en-US" sz="3600" dirty="0">
+                  <a:solidFill>
+                    <a:schemeClr val="tx1"/>
+                  </a:solidFill>
+                  <a:latin typeface="Tahoma" panose="020B0604030504040204" pitchFamily="34" charset="0"/>
+                  <a:ea typeface="Tahoma" panose="020B0604030504040204" pitchFamily="34" charset="0"/>
+                  <a:cs typeface="Tahoma" panose="020B0604030504040204" pitchFamily="34" charset="0"/>
+                </a:rPr>
+                <a:t>O</a:t>
+              </a:r>
+            </a:p>
+          </p:txBody>
+        </p:sp>
+        <mc:AlternateContent xmlns:mc="http://schemas.openxmlformats.org/markup-compatibility/2006" xmlns:a14="http://schemas.microsoft.com/office/drawing/2010/main">
+          <mc:Choice Requires="a14">
+            <p:sp>
+              <p:nvSpPr>
+                <p:cNvPr id="11" name="TextBox 10">
+                  <a:extLst>
+                    <a:ext uri="{FF2B5EF4-FFF2-40B4-BE49-F238E27FC236}">
+                      <a16:creationId xmlns:a16="http://schemas.microsoft.com/office/drawing/2014/main" id="{24F25F76-B735-47B9-17AD-912F38C1E201}"/>
+                    </a:ext>
+                  </a:extLst>
+                </p:cNvPr>
+                <p:cNvSpPr txBox="1"/>
+                <p:nvPr/>
+              </p:nvSpPr>
+              <p:spPr>
+                <a:xfrm>
+                  <a:off x="3728498" y="3670814"/>
+                  <a:ext cx="1703087" cy="584775"/>
+                </a:xfrm>
+                <a:prstGeom prst="rect">
+                  <a:avLst/>
+                </a:prstGeom>
+                <a:noFill/>
+              </p:spPr>
+              <p:txBody>
+                <a:bodyPr wrap="square" rtlCol="0">
+                  <a:spAutoFit/>
+                </a:bodyPr>
+                <a:lstStyle/>
+                <a:p>
+                  <a:pPr/>
+                  <a14:m>
+                    <m:oMathPara xmlns:m="http://schemas.openxmlformats.org/officeDocument/2006/math">
+                      <m:oMath>
+                        <m:sSub>
+                          <m:sSubPr>
+                            <m:ctrlPr>
+                              <a:rPr lang="en-US" sz="3200" b="0" i="1" smtClean="0">
+                                <a:latin typeface="Cambria Math" panose="02040503050406030204" pitchFamily="18" charset="0"/>
+                                <a:cs typeface="Times New Roman" panose="02020603050405020304" pitchFamily="18" charset="0"/>
+                              </a:rPr>
+                            </m:ctrlPr>
+                          </m:sSubPr>
+                          <m:e>
+                            <m:r>
+                              <a:rPr lang="en-US" sz="3200" b="0" i="1" smtClean="0">
+                                <a:latin typeface="Cambria Math" panose="02040503050406030204" pitchFamily="18" charset="0"/>
+                                <a:cs typeface="Times New Roman" panose="02020603050405020304" pitchFamily="18" charset="0"/>
+                              </a:rPr>
+                              <m:t>𝑟</m:t>
+                            </m:r>
+                          </m:e>
+                          <m:sub>
+                            <m:r>
+                              <a:rPr lang="en-US" sz="3200" b="0" i="1" smtClean="0">
+                                <a:latin typeface="Cambria Math" panose="02040503050406030204" pitchFamily="18" charset="0"/>
+                                <a:cs typeface="Times New Roman" panose="02020603050405020304" pitchFamily="18" charset="0"/>
+                              </a:rPr>
+                              <m:t>1</m:t>
+                            </m:r>
+                          </m:sub>
+                        </m:sSub>
+                      </m:oMath>
+                    </m:oMathPara>
+                  </a14:m>
+                  <a:endParaRPr lang="en-GB" sz="3200" dirty="0">
+                    <a:latin typeface="Times New Roman" panose="02020603050405020304" pitchFamily="18" charset="0"/>
+                    <a:cs typeface="Times New Roman" panose="02020603050405020304" pitchFamily="18" charset="0"/>
+                  </a:endParaRPr>
+                </a:p>
+              </p:txBody>
+            </p:sp>
+          </mc:Choice>
+          <mc:Fallback xmlns="">
+            <p:sp>
+              <p:nvSpPr>
+                <p:cNvPr id="11" name="TextBox 10">
+                  <a:extLst>
+                    <a:ext uri="{FF2B5EF4-FFF2-40B4-BE49-F238E27FC236}">
+                      <a16:creationId xmlns:a16="http://schemas.microsoft.com/office/drawing/2014/main" id="{24F25F76-B735-47B9-17AD-912F38C1E201}"/>
+                    </a:ext>
+                  </a:extLst>
+                </p:cNvPr>
+                <p:cNvSpPr txBox="1">
+                  <a:spLocks noRot="1" noChangeAspect="1" noMove="1" noResize="1" noEditPoints="1" noAdjustHandles="1" noChangeArrowheads="1" noChangeShapeType="1" noTextEdit="1"/>
+                </p:cNvSpPr>
+                <p:nvPr/>
+              </p:nvSpPr>
+              <p:spPr>
+                <a:xfrm>
+                  <a:off x="3728498" y="3670814"/>
+                  <a:ext cx="1703087" cy="584775"/>
+                </a:xfrm>
+                <a:prstGeom prst="rect">
+                  <a:avLst/>
+                </a:prstGeom>
+                <a:blipFill>
+                  <a:blip r:embed="rId5"/>
+                  <a:stretch>
+                    <a:fillRect/>
+                  </a:stretch>
+                </a:blipFill>
+              </p:spPr>
+              <p:txBody>
+                <a:bodyPr/>
+                <a:lstStyle/>
+                <a:p>
+                  <a:r>
+                    <a:rPr lang="en-GB">
+                      <a:noFill/>
+                    </a:rPr>
+                    <a:t> </a:t>
+                  </a:r>
+                </a:p>
+              </p:txBody>
+            </p:sp>
+          </mc:Fallback>
+        </mc:AlternateContent>
+        <mc:AlternateContent xmlns:mc="http://schemas.openxmlformats.org/markup-compatibility/2006" xmlns:a14="http://schemas.microsoft.com/office/drawing/2010/main">
+          <mc:Choice Requires="a14">
+            <p:sp>
+              <p:nvSpPr>
+                <p:cNvPr id="14" name="TextBox 13">
+                  <a:extLst>
+                    <a:ext uri="{FF2B5EF4-FFF2-40B4-BE49-F238E27FC236}">
+                      <a16:creationId xmlns:a16="http://schemas.microsoft.com/office/drawing/2014/main" id="{B96DAD34-B892-A690-B0F9-2D4BB9060B75}"/>
+                    </a:ext>
+                  </a:extLst>
+                </p:cNvPr>
+                <p:cNvSpPr txBox="1"/>
+                <p:nvPr/>
+              </p:nvSpPr>
+              <p:spPr>
+                <a:xfrm>
+                  <a:off x="5449922" y="1500500"/>
+                  <a:ext cx="1703087" cy="584775"/>
+                </a:xfrm>
+                <a:prstGeom prst="rect">
+                  <a:avLst/>
+                </a:prstGeom>
+                <a:noFill/>
+              </p:spPr>
+              <p:txBody>
+                <a:bodyPr wrap="square" rtlCol="0">
+                  <a:spAutoFit/>
+                </a:bodyPr>
+                <a:lstStyle/>
+                <a:p>
+                  <a:pPr/>
+                  <a14:m>
+                    <m:oMathPara xmlns:m="http://schemas.openxmlformats.org/officeDocument/2006/math">
+                      <m:oMath>
+                        <m:sSub>
+                          <m:sSubPr>
+                            <m:ctrlPr>
+                              <a:rPr lang="en-US" sz="3200" b="0" i="1" smtClean="0">
+                                <a:latin typeface="Cambria Math" panose="02040503050406030204" pitchFamily="18" charset="0"/>
+                                <a:cs typeface="Times New Roman" panose="02020603050405020304" pitchFamily="18" charset="0"/>
+                              </a:rPr>
+                            </m:ctrlPr>
+                          </m:sSubPr>
+                          <m:e>
+                            <m:r>
+                              <a:rPr lang="en-US" sz="3200" b="0" i="1" smtClean="0">
+                                <a:latin typeface="Cambria Math" panose="02040503050406030204" pitchFamily="18" charset="0"/>
+                                <a:cs typeface="Times New Roman" panose="02020603050405020304" pitchFamily="18" charset="0"/>
+                              </a:rPr>
+                              <m:t>𝑟</m:t>
+                            </m:r>
+                          </m:e>
+                          <m:sub>
+                            <m:r>
+                              <a:rPr lang="en-US" sz="3200" b="0" i="1" smtClean="0">
+                                <a:latin typeface="Cambria Math" panose="02040503050406030204" pitchFamily="18" charset="0"/>
+                                <a:cs typeface="Times New Roman" panose="02020603050405020304" pitchFamily="18" charset="0"/>
+                              </a:rPr>
+                              <m:t>2</m:t>
+                            </m:r>
+                          </m:sub>
+                        </m:sSub>
+                      </m:oMath>
+                    </m:oMathPara>
+                  </a14:m>
+                  <a:endParaRPr lang="en-GB" sz="3200" dirty="0">
+                    <a:latin typeface="Times New Roman" panose="02020603050405020304" pitchFamily="18" charset="0"/>
+                    <a:cs typeface="Times New Roman" panose="02020603050405020304" pitchFamily="18" charset="0"/>
+                  </a:endParaRPr>
+                </a:p>
+              </p:txBody>
+            </p:sp>
+          </mc:Choice>
+          <mc:Fallback xmlns="">
+            <p:sp>
+              <p:nvSpPr>
+                <p:cNvPr id="14" name="TextBox 13">
+                  <a:extLst>
+                    <a:ext uri="{FF2B5EF4-FFF2-40B4-BE49-F238E27FC236}">
+                      <a16:creationId xmlns:a16="http://schemas.microsoft.com/office/drawing/2014/main" id="{B96DAD34-B892-A690-B0F9-2D4BB9060B75}"/>
+                    </a:ext>
+                  </a:extLst>
+                </p:cNvPr>
+                <p:cNvSpPr txBox="1">
+                  <a:spLocks noRot="1" noChangeAspect="1" noMove="1" noResize="1" noEditPoints="1" noAdjustHandles="1" noChangeArrowheads="1" noChangeShapeType="1" noTextEdit="1"/>
+                </p:cNvSpPr>
+                <p:nvPr/>
+              </p:nvSpPr>
+              <p:spPr>
+                <a:xfrm>
+                  <a:off x="5449922" y="1500500"/>
+                  <a:ext cx="1703087" cy="584775"/>
+                </a:xfrm>
+                <a:prstGeom prst="rect">
+                  <a:avLst/>
+                </a:prstGeom>
+                <a:blipFill>
+                  <a:blip r:embed="rId6"/>
+                  <a:stretch>
+                    <a:fillRect/>
+                  </a:stretch>
+                </a:blipFill>
+              </p:spPr>
+              <p:txBody>
+                <a:bodyPr/>
+                <a:lstStyle/>
+                <a:p>
+                  <a:r>
+                    <a:rPr lang="en-GB">
+                      <a:noFill/>
+                    </a:rPr>
+                    <a:t> </a:t>
+                  </a:r>
+                </a:p>
+              </p:txBody>
+            </p:sp>
+          </mc:Fallback>
+        </mc:AlternateContent>
+        <mc:AlternateContent xmlns:mc="http://schemas.openxmlformats.org/markup-compatibility/2006" xmlns:a14="http://schemas.microsoft.com/office/drawing/2010/main">
+          <mc:Choice Requires="a14">
+            <p:sp>
+              <p:nvSpPr>
+                <p:cNvPr id="19" name="TextBox 18">
+                  <a:extLst>
+                    <a:ext uri="{FF2B5EF4-FFF2-40B4-BE49-F238E27FC236}">
+                      <a16:creationId xmlns:a16="http://schemas.microsoft.com/office/drawing/2014/main" id="{A040BF02-FA75-C7E9-C4F3-F7704E26E427}"/>
+                    </a:ext>
+                  </a:extLst>
+                </p:cNvPr>
+                <p:cNvSpPr txBox="1"/>
+                <p:nvPr/>
+              </p:nvSpPr>
+              <p:spPr>
+                <a:xfrm>
+                  <a:off x="5186681" y="3192580"/>
+                  <a:ext cx="1703087" cy="584775"/>
+                </a:xfrm>
+                <a:prstGeom prst="rect">
+                  <a:avLst/>
+                </a:prstGeom>
+                <a:noFill/>
+              </p:spPr>
+              <p:txBody>
+                <a:bodyPr wrap="square" rtlCol="0">
+                  <a:spAutoFit/>
+                </a:bodyPr>
+                <a:lstStyle/>
+                <a:p>
+                  <a:pPr/>
+                  <a14:m>
+                    <m:oMathPara xmlns:m="http://schemas.openxmlformats.org/officeDocument/2006/math">
+                      <m:oMath>
+                        <m:r>
+                          <a:rPr lang="en-US" sz="3200" b="0" i="1" smtClean="0">
+                            <a:latin typeface="Cambria Math" panose="02040503050406030204" pitchFamily="18" charset="0"/>
+                            <a:cs typeface="Times New Roman" panose="02020603050405020304" pitchFamily="18" charset="0"/>
+                          </a:rPr>
+                          <m:t>𝜃</m:t>
+                        </m:r>
+                      </m:oMath>
+                    </m:oMathPara>
+                  </a14:m>
+                  <a:endParaRPr lang="en-GB" sz="3200" dirty="0">
+                    <a:latin typeface="Times New Roman" panose="02020603050405020304" pitchFamily="18" charset="0"/>
+                    <a:cs typeface="Times New Roman" panose="02020603050405020304" pitchFamily="18" charset="0"/>
+                  </a:endParaRPr>
+                </a:p>
+              </p:txBody>
+            </p:sp>
+          </mc:Choice>
+          <mc:Fallback xmlns="">
+            <p:sp>
+              <p:nvSpPr>
+                <p:cNvPr id="19" name="TextBox 18">
+                  <a:extLst>
+                    <a:ext uri="{FF2B5EF4-FFF2-40B4-BE49-F238E27FC236}">
+                      <a16:creationId xmlns:a16="http://schemas.microsoft.com/office/drawing/2014/main" id="{A040BF02-FA75-C7E9-C4F3-F7704E26E427}"/>
+                    </a:ext>
+                  </a:extLst>
+                </p:cNvPr>
+                <p:cNvSpPr txBox="1">
+                  <a:spLocks noRot="1" noChangeAspect="1" noMove="1" noResize="1" noEditPoints="1" noAdjustHandles="1" noChangeArrowheads="1" noChangeShapeType="1" noTextEdit="1"/>
+                </p:cNvSpPr>
+                <p:nvPr/>
+              </p:nvSpPr>
+              <p:spPr>
+                <a:xfrm>
+                  <a:off x="5186681" y="3192580"/>
+                  <a:ext cx="1703087" cy="584775"/>
+                </a:xfrm>
+                <a:prstGeom prst="rect">
+                  <a:avLst/>
+                </a:prstGeom>
+                <a:blipFill>
+                  <a:blip r:embed="rId7"/>
+                  <a:stretch>
+                    <a:fillRect/>
+                  </a:stretch>
+                </a:blipFill>
+              </p:spPr>
+              <p:txBody>
+                <a:bodyPr/>
+                <a:lstStyle/>
+                <a:p>
+                  <a:r>
+                    <a:rPr lang="en-GB">
+                      <a:noFill/>
+                    </a:rPr>
+                    <a:t> </a:t>
+                  </a:r>
+                </a:p>
+              </p:txBody>
+            </p:sp>
+          </mc:Fallback>
+        </mc:AlternateContent>
+        <p:grpSp>
+          <p:nvGrpSpPr>
+            <p:cNvPr id="20" name="Group 19">
+              <a:extLst>
+                <a:ext uri="{FF2B5EF4-FFF2-40B4-BE49-F238E27FC236}">
+                  <a16:creationId xmlns:a16="http://schemas.microsoft.com/office/drawing/2014/main" id="{5E4FD398-420B-9178-32F9-2E931CDD7D21}"/>
+                </a:ext>
+              </a:extLst>
+            </p:cNvPr>
+            <p:cNvGrpSpPr/>
+            <p:nvPr/>
+          </p:nvGrpSpPr>
+          <p:grpSpPr>
+            <a:xfrm>
+              <a:off x="6748363" y="3746943"/>
+              <a:ext cx="990759" cy="1022926"/>
+              <a:chOff x="6595459" y="3777355"/>
+              <a:chExt cx="990759" cy="1022926"/>
+            </a:xfrm>
+          </p:grpSpPr>
+          <p:cxnSp>
+            <p:nvCxnSpPr>
+              <p:cNvPr id="35" name="Straight Connector 34">
+                <a:extLst>
+                  <a:ext uri="{FF2B5EF4-FFF2-40B4-BE49-F238E27FC236}">
+                    <a16:creationId xmlns:a16="http://schemas.microsoft.com/office/drawing/2014/main" id="{3AA39738-F57F-2D51-1B3A-E4155C761457}"/>
+                  </a:ext>
+                </a:extLst>
+              </p:cNvPr>
+              <p:cNvCxnSpPr>
+                <a:cxnSpLocks/>
+              </p:cNvCxnSpPr>
+              <p:nvPr/>
+            </p:nvCxnSpPr>
+            <p:spPr>
+              <a:xfrm>
+                <a:off x="6601809" y="3777355"/>
+                <a:ext cx="0" cy="1022926"/>
+              </a:xfrm>
+              <a:prstGeom prst="line">
+                <a:avLst/>
+              </a:prstGeom>
+              <a:ln w="28575">
+                <a:headEnd type="triangle"/>
+              </a:ln>
+            </p:spPr>
+            <p:style>
+              <a:lnRef idx="2">
+                <a:schemeClr val="dk1"/>
+              </a:lnRef>
+              <a:fillRef idx="0">
+                <a:schemeClr val="dk1"/>
+              </a:fillRef>
+              <a:effectRef idx="1">
+                <a:schemeClr val="dk1"/>
+              </a:effectRef>
+              <a:fontRef idx="minor">
+                <a:schemeClr val="tx1"/>
+              </a:fontRef>
+            </p:style>
+          </p:cxnSp>
+          <p:cxnSp>
+            <p:nvCxnSpPr>
+              <p:cNvPr id="36" name="Straight Connector 35">
+                <a:extLst>
+                  <a:ext uri="{FF2B5EF4-FFF2-40B4-BE49-F238E27FC236}">
+                    <a16:creationId xmlns:a16="http://schemas.microsoft.com/office/drawing/2014/main" id="{F1488C26-D6B8-EE86-E3C3-34E8BF410AA3}"/>
+                  </a:ext>
+                </a:extLst>
+              </p:cNvPr>
+              <p:cNvCxnSpPr>
+                <a:cxnSpLocks/>
+              </p:cNvCxnSpPr>
+              <p:nvPr/>
+            </p:nvCxnSpPr>
+            <p:spPr>
+              <a:xfrm flipH="1">
+                <a:off x="6595459" y="4793931"/>
+                <a:ext cx="990759" cy="0"/>
+              </a:xfrm>
+              <a:prstGeom prst="line">
+                <a:avLst/>
+              </a:prstGeom>
+              <a:ln w="28575">
+                <a:headEnd type="triangle"/>
+              </a:ln>
+            </p:spPr>
+            <p:style>
+              <a:lnRef idx="2">
+                <a:schemeClr val="dk1"/>
+              </a:lnRef>
+              <a:fillRef idx="0">
+                <a:schemeClr val="dk1"/>
+              </a:fillRef>
+              <a:effectRef idx="1">
+                <a:schemeClr val="dk1"/>
+              </a:effectRef>
+              <a:fontRef idx="minor">
+                <a:schemeClr val="tx1"/>
+              </a:fontRef>
+            </p:style>
+          </p:cxnSp>
+        </p:grpSp>
+        <mc:AlternateContent xmlns:mc="http://schemas.openxmlformats.org/markup-compatibility/2006" xmlns:a14="http://schemas.microsoft.com/office/drawing/2010/main">
+          <mc:Choice Requires="a14">
+            <p:sp>
+              <p:nvSpPr>
+                <p:cNvPr id="33" name="TextBox 32">
+                  <a:extLst>
+                    <a:ext uri="{FF2B5EF4-FFF2-40B4-BE49-F238E27FC236}">
+                      <a16:creationId xmlns:a16="http://schemas.microsoft.com/office/drawing/2014/main" id="{DD11D703-A88D-45F2-1B23-A16BABC1579C}"/>
+                    </a:ext>
+                  </a:extLst>
+                </p:cNvPr>
+                <p:cNvSpPr txBox="1"/>
+                <p:nvPr/>
+              </p:nvSpPr>
+              <p:spPr>
+                <a:xfrm>
+                  <a:off x="6748139" y="3523948"/>
+                  <a:ext cx="687958" cy="580344"/>
+                </a:xfrm>
+                <a:prstGeom prst="rect">
+                  <a:avLst/>
+                </a:prstGeom>
+                <a:noFill/>
+              </p:spPr>
+              <p:txBody>
+                <a:bodyPr wrap="square">
+                  <a:spAutoFit/>
+                </a:bodyPr>
+                <a:lstStyle/>
+                <a:p>
+                  <a:pPr algn="ctr"/>
+                  <a14:m>
+                    <m:oMathPara xmlns:m="http://schemas.openxmlformats.org/officeDocument/2006/math">
+                      <m:oMath>
+                        <m:r>
+                          <a:rPr lang="en-US" sz="2800" b="0" i="1" smtClean="0">
+                            <a:solidFill>
+                              <a:schemeClr val="tx1"/>
+                            </a:solidFill>
+                            <a:latin typeface="Cambria Math" panose="02040503050406030204" pitchFamily="18" charset="0"/>
+                            <a:ea typeface="Tahoma" panose="020B0604030504040204" pitchFamily="34" charset="0"/>
+                            <a:cs typeface="Tahoma" panose="020B0604030504040204" pitchFamily="34" charset="0"/>
+                          </a:rPr>
+                          <m:t>𝑧</m:t>
+                        </m:r>
+                      </m:oMath>
+                    </m:oMathPara>
+                  </a14:m>
+                  <a:endParaRPr lang="en-US" sz="3200" dirty="0">
+                    <a:solidFill>
+                      <a:schemeClr val="tx1"/>
+                    </a:solidFill>
+                    <a:latin typeface="Tahoma" panose="020B0604030504040204" pitchFamily="34" charset="0"/>
+                    <a:ea typeface="Tahoma" panose="020B0604030504040204" pitchFamily="34" charset="0"/>
+                    <a:cs typeface="Tahoma" panose="020B0604030504040204" pitchFamily="34" charset="0"/>
+                  </a:endParaRPr>
+                </a:p>
+              </p:txBody>
+            </p:sp>
+          </mc:Choice>
+          <mc:Fallback xmlns="">
+            <p:sp>
+              <p:nvSpPr>
+                <p:cNvPr id="33" name="TextBox 32">
+                  <a:extLst>
+                    <a:ext uri="{FF2B5EF4-FFF2-40B4-BE49-F238E27FC236}">
+                      <a16:creationId xmlns:a16="http://schemas.microsoft.com/office/drawing/2014/main" id="{DD11D703-A88D-45F2-1B23-A16BABC1579C}"/>
+                    </a:ext>
+                  </a:extLst>
+                </p:cNvPr>
+                <p:cNvSpPr txBox="1">
+                  <a:spLocks noRot="1" noChangeAspect="1" noMove="1" noResize="1" noEditPoints="1" noAdjustHandles="1" noChangeArrowheads="1" noChangeShapeType="1" noTextEdit="1"/>
+                </p:cNvSpPr>
+                <p:nvPr/>
+              </p:nvSpPr>
+              <p:spPr>
+                <a:xfrm>
+                  <a:off x="6748139" y="3523948"/>
+                  <a:ext cx="687958" cy="580344"/>
+                </a:xfrm>
+                <a:prstGeom prst="rect">
+                  <a:avLst/>
+                </a:prstGeom>
+                <a:blipFill>
+                  <a:blip r:embed="rId8"/>
+                  <a:stretch>
+                    <a:fillRect/>
+                  </a:stretch>
+                </a:blipFill>
+              </p:spPr>
+              <p:txBody>
+                <a:bodyPr/>
+                <a:lstStyle/>
+                <a:p>
+                  <a:r>
+                    <a:rPr lang="en-GB">
+                      <a:noFill/>
+                    </a:rPr>
+                    <a:t> </a:t>
+                  </a:r>
+                </a:p>
+              </p:txBody>
+            </p:sp>
+          </mc:Fallback>
+        </mc:AlternateContent>
+        <mc:AlternateContent xmlns:mc="http://schemas.openxmlformats.org/markup-compatibility/2006" xmlns:a14="http://schemas.microsoft.com/office/drawing/2010/main">
+          <mc:Choice Requires="a14">
+            <p:sp>
+              <p:nvSpPr>
+                <p:cNvPr id="34" name="TextBox 33">
+                  <a:extLst>
+                    <a:ext uri="{FF2B5EF4-FFF2-40B4-BE49-F238E27FC236}">
+                      <a16:creationId xmlns:a16="http://schemas.microsoft.com/office/drawing/2014/main" id="{43EE5CC4-6E3B-FD2D-7D7B-29AA66F948DA}"/>
+                    </a:ext>
+                  </a:extLst>
+                </p:cNvPr>
+                <p:cNvSpPr txBox="1"/>
+                <p:nvPr/>
+              </p:nvSpPr>
+              <p:spPr>
+                <a:xfrm>
+                  <a:off x="7488216" y="4612321"/>
+                  <a:ext cx="687958" cy="584775"/>
+                </a:xfrm>
+                <a:prstGeom prst="rect">
+                  <a:avLst/>
+                </a:prstGeom>
+                <a:noFill/>
+              </p:spPr>
+              <p:txBody>
+                <a:bodyPr wrap="square">
+                  <a:spAutoFit/>
+                </a:bodyPr>
+                <a:lstStyle/>
+                <a:p>
+                  <a:pPr algn="ctr"/>
+                  <a14:m>
+                    <m:oMathPara xmlns:m="http://schemas.openxmlformats.org/officeDocument/2006/math">
+                      <m:oMath>
+                        <m:r>
+                          <a:rPr lang="en-US" sz="3200" b="0" i="1" smtClean="0">
+                            <a:solidFill>
+                              <a:schemeClr val="tx1"/>
+                            </a:solidFill>
+                            <a:latin typeface="Cambria Math" panose="02040503050406030204" pitchFamily="18" charset="0"/>
+                            <a:ea typeface="Tahoma" panose="020B0604030504040204" pitchFamily="34" charset="0"/>
+                            <a:cs typeface="Tahoma" panose="020B0604030504040204" pitchFamily="34" charset="0"/>
+                          </a:rPr>
+                          <m:t>𝑥</m:t>
+                        </m:r>
+                      </m:oMath>
+                    </m:oMathPara>
+                  </a14:m>
+                  <a:endParaRPr lang="en-US" sz="3200" dirty="0">
+                    <a:solidFill>
+                      <a:schemeClr val="tx1"/>
+                    </a:solidFill>
+                    <a:latin typeface="Tahoma" panose="020B0604030504040204" pitchFamily="34" charset="0"/>
+                    <a:ea typeface="Tahoma" panose="020B0604030504040204" pitchFamily="34" charset="0"/>
+                    <a:cs typeface="Tahoma" panose="020B0604030504040204" pitchFamily="34" charset="0"/>
+                  </a:endParaRPr>
+                </a:p>
+              </p:txBody>
+            </p:sp>
+          </mc:Choice>
+          <mc:Fallback xmlns="">
+            <p:sp>
+              <p:nvSpPr>
+                <p:cNvPr id="34" name="TextBox 33">
+                  <a:extLst>
+                    <a:ext uri="{FF2B5EF4-FFF2-40B4-BE49-F238E27FC236}">
+                      <a16:creationId xmlns:a16="http://schemas.microsoft.com/office/drawing/2014/main" id="{43EE5CC4-6E3B-FD2D-7D7B-29AA66F948DA}"/>
+                    </a:ext>
+                  </a:extLst>
+                </p:cNvPr>
+                <p:cNvSpPr txBox="1">
+                  <a:spLocks noRot="1" noChangeAspect="1" noMove="1" noResize="1" noEditPoints="1" noAdjustHandles="1" noChangeArrowheads="1" noChangeShapeType="1" noTextEdit="1"/>
+                </p:cNvSpPr>
+                <p:nvPr/>
+              </p:nvSpPr>
+              <p:spPr>
+                <a:xfrm>
+                  <a:off x="7488216" y="4612321"/>
+                  <a:ext cx="687958" cy="584775"/>
+                </a:xfrm>
+                <a:prstGeom prst="rect">
+                  <a:avLst/>
+                </a:prstGeom>
+                <a:blipFill>
+                  <a:blip r:embed="rId9"/>
+                  <a:stretch>
                     <a:fillRect/>
                   </a:stretch>
                 </a:blipFill>
@@ -7172,24 +8642,649 @@
           </mc:Fallback>
         </mc:AlternateContent>
       </p:grpSp>
+      <p:grpSp>
+        <p:nvGrpSpPr>
+          <p:cNvPr id="98" name="Group 97">
+            <a:extLst>
+              <a:ext uri="{FF2B5EF4-FFF2-40B4-BE49-F238E27FC236}">
+                <a16:creationId xmlns:a16="http://schemas.microsoft.com/office/drawing/2014/main" id="{70EDD302-18ED-C6AA-9E7D-27967A6ADEE2}"/>
+              </a:ext>
+            </a:extLst>
+          </p:cNvPr>
+          <p:cNvGrpSpPr/>
+          <p:nvPr/>
+        </p:nvGrpSpPr>
+        <p:grpSpPr>
+          <a:xfrm>
+            <a:off x="8110659" y="8841867"/>
+            <a:ext cx="7164163" cy="15847007"/>
+            <a:chOff x="10860170" y="9150571"/>
+            <a:chExt cx="7164163" cy="15847007"/>
+          </a:xfrm>
+        </p:grpSpPr>
+        <p:pic>
+          <p:nvPicPr>
+            <p:cNvPr id="93" name="Picture 92">
+              <a:extLst>
+                <a:ext uri="{FF2B5EF4-FFF2-40B4-BE49-F238E27FC236}">
+                  <a16:creationId xmlns:a16="http://schemas.microsoft.com/office/drawing/2014/main" id="{9DE9A554-6170-1FB0-5AE6-E7B4A65BB537}"/>
+                </a:ext>
+              </a:extLst>
+            </p:cNvPr>
+            <p:cNvPicPr>
+              <a:picLocks noChangeAspect="1"/>
+            </p:cNvPicPr>
+            <p:nvPr/>
+          </p:nvPicPr>
+          <p:blipFill>
+            <a:blip r:embed="rId10">
+              <a:extLst>
+                <a:ext uri="{28A0092B-C50C-407E-A947-70E740481C1C}">
+                  <a14:useLocalDpi xmlns:a14="http://schemas.microsoft.com/office/drawing/2010/main" val="0"/>
+                </a:ext>
+              </a:extLst>
+            </a:blip>
+            <a:stretch>
+              <a:fillRect/>
+            </a:stretch>
+          </p:blipFill>
+          <p:spPr>
+            <a:xfrm>
+              <a:off x="10860170" y="9150571"/>
+              <a:ext cx="7000254" cy="5246749"/>
+            </a:xfrm>
+            <a:prstGeom prst="rect">
+              <a:avLst/>
+            </a:prstGeom>
+          </p:spPr>
+        </p:pic>
+        <p:pic>
+          <p:nvPicPr>
+            <p:cNvPr id="95" name="Picture 94">
+              <a:extLst>
+                <a:ext uri="{FF2B5EF4-FFF2-40B4-BE49-F238E27FC236}">
+                  <a16:creationId xmlns:a16="http://schemas.microsoft.com/office/drawing/2014/main" id="{EE9BC05F-B7E3-CA11-DC00-15C950FA7D23}"/>
+                </a:ext>
+              </a:extLst>
+            </p:cNvPr>
+            <p:cNvPicPr>
+              <a:picLocks noChangeAspect="1"/>
+            </p:cNvPicPr>
+            <p:nvPr/>
+          </p:nvPicPr>
+          <p:blipFill>
+            <a:blip r:embed="rId11">
+              <a:extLst>
+                <a:ext uri="{28A0092B-C50C-407E-A947-70E740481C1C}">
+                  <a14:useLocalDpi xmlns:a14="http://schemas.microsoft.com/office/drawing/2010/main" val="0"/>
+                </a:ext>
+              </a:extLst>
+            </a:blip>
+            <a:stretch>
+              <a:fillRect/>
+            </a:stretch>
+          </p:blipFill>
+          <p:spPr>
+            <a:xfrm>
+              <a:off x="10860170" y="14397320"/>
+              <a:ext cx="7164163" cy="5309131"/>
+            </a:xfrm>
+            <a:prstGeom prst="rect">
+              <a:avLst/>
+            </a:prstGeom>
+          </p:spPr>
+        </p:pic>
+        <p:pic>
+          <p:nvPicPr>
+            <p:cNvPr id="97" name="Picture 96">
+              <a:extLst>
+                <a:ext uri="{FF2B5EF4-FFF2-40B4-BE49-F238E27FC236}">
+                  <a16:creationId xmlns:a16="http://schemas.microsoft.com/office/drawing/2014/main" id="{794851A6-82D4-39F5-1845-5DDF13F7AA74}"/>
+                </a:ext>
+              </a:extLst>
+            </p:cNvPr>
+            <p:cNvPicPr>
+              <a:picLocks noChangeAspect="1"/>
+            </p:cNvPicPr>
+            <p:nvPr/>
+          </p:nvPicPr>
+          <p:blipFill>
+            <a:blip r:embed="rId12">
+              <a:extLst>
+                <a:ext uri="{28A0092B-C50C-407E-A947-70E740481C1C}">
+                  <a14:useLocalDpi xmlns:a14="http://schemas.microsoft.com/office/drawing/2010/main" val="0"/>
+                </a:ext>
+              </a:extLst>
+            </a:blip>
+            <a:stretch>
+              <a:fillRect/>
+            </a:stretch>
+          </p:blipFill>
+          <p:spPr>
+            <a:xfrm>
+              <a:off x="10860170" y="19808636"/>
+              <a:ext cx="7000254" cy="5188942"/>
+            </a:xfrm>
+            <a:prstGeom prst="rect">
+              <a:avLst/>
+            </a:prstGeom>
+          </p:spPr>
+        </p:pic>
+      </p:grpSp>
+      <p:grpSp>
+        <p:nvGrpSpPr>
+          <p:cNvPr id="110" name="Group 109">
+            <a:extLst>
+              <a:ext uri="{FF2B5EF4-FFF2-40B4-BE49-F238E27FC236}">
+                <a16:creationId xmlns:a16="http://schemas.microsoft.com/office/drawing/2014/main" id="{FAAE2DBF-EC9C-C88B-C9D6-87E5697F5B99}"/>
+              </a:ext>
+            </a:extLst>
+          </p:cNvPr>
+          <p:cNvGrpSpPr/>
+          <p:nvPr/>
+        </p:nvGrpSpPr>
+        <p:grpSpPr>
+          <a:xfrm>
+            <a:off x="15145204" y="8862176"/>
+            <a:ext cx="6777654" cy="15834238"/>
+            <a:chOff x="16550641" y="7751918"/>
+            <a:chExt cx="6777654" cy="15834238"/>
+          </a:xfrm>
+        </p:grpSpPr>
+        <p:pic>
+          <p:nvPicPr>
+            <p:cNvPr id="100" name="Picture 99">
+              <a:extLst>
+                <a:ext uri="{FF2B5EF4-FFF2-40B4-BE49-F238E27FC236}">
+                  <a16:creationId xmlns:a16="http://schemas.microsoft.com/office/drawing/2014/main" id="{1B28F01E-BDE3-52AD-4093-67C1EF6A1087}"/>
+                </a:ext>
+              </a:extLst>
+            </p:cNvPr>
+            <p:cNvPicPr>
+              <a:picLocks noChangeAspect="1"/>
+            </p:cNvPicPr>
+            <p:nvPr/>
+          </p:nvPicPr>
+          <p:blipFill>
+            <a:blip r:embed="rId13">
+              <a:extLst>
+                <a:ext uri="{28A0092B-C50C-407E-A947-70E740481C1C}">
+                  <a14:useLocalDpi xmlns:a14="http://schemas.microsoft.com/office/drawing/2010/main" val="0"/>
+                </a:ext>
+              </a:extLst>
+            </a:blip>
+            <a:stretch>
+              <a:fillRect/>
+            </a:stretch>
+          </p:blipFill>
+          <p:spPr>
+            <a:xfrm>
+              <a:off x="16587985" y="7751918"/>
+              <a:ext cx="6649560" cy="5242975"/>
+            </a:xfrm>
+            <a:prstGeom prst="rect">
+              <a:avLst/>
+            </a:prstGeom>
+          </p:spPr>
+        </p:pic>
+        <p:pic>
+          <p:nvPicPr>
+            <p:cNvPr id="104" name="Picture 103">
+              <a:extLst>
+                <a:ext uri="{FF2B5EF4-FFF2-40B4-BE49-F238E27FC236}">
+                  <a16:creationId xmlns:a16="http://schemas.microsoft.com/office/drawing/2014/main" id="{9507A142-E620-ECAA-B88A-B067DBD071DF}"/>
+                </a:ext>
+              </a:extLst>
+            </p:cNvPr>
+            <p:cNvPicPr>
+              <a:picLocks noChangeAspect="1"/>
+            </p:cNvPicPr>
+            <p:nvPr/>
+          </p:nvPicPr>
+          <p:blipFill>
+            <a:blip r:embed="rId14">
+              <a:extLst>
+                <a:ext uri="{28A0092B-C50C-407E-A947-70E740481C1C}">
+                  <a14:useLocalDpi xmlns:a14="http://schemas.microsoft.com/office/drawing/2010/main" val="0"/>
+                </a:ext>
+              </a:extLst>
+            </a:blip>
+            <a:stretch>
+              <a:fillRect/>
+            </a:stretch>
+          </p:blipFill>
+          <p:spPr>
+            <a:xfrm>
+              <a:off x="16550641" y="18382133"/>
+              <a:ext cx="6777654" cy="5204023"/>
+            </a:xfrm>
+            <a:prstGeom prst="rect">
+              <a:avLst/>
+            </a:prstGeom>
+          </p:spPr>
+        </p:pic>
+        <p:grpSp>
+          <p:nvGrpSpPr>
+            <p:cNvPr id="109" name="Group 108">
+              <a:extLst>
+                <a:ext uri="{FF2B5EF4-FFF2-40B4-BE49-F238E27FC236}">
+                  <a16:creationId xmlns:a16="http://schemas.microsoft.com/office/drawing/2014/main" id="{B56A29A5-C706-62D4-382F-F23E7EE689F5}"/>
+                </a:ext>
+              </a:extLst>
+            </p:cNvPr>
+            <p:cNvGrpSpPr/>
+            <p:nvPr/>
+          </p:nvGrpSpPr>
+          <p:grpSpPr>
+            <a:xfrm>
+              <a:off x="16550641" y="13040740"/>
+              <a:ext cx="6686904" cy="5246749"/>
+              <a:chOff x="16550640" y="13040740"/>
+              <a:chExt cx="6686904" cy="5246749"/>
+            </a:xfrm>
+          </p:grpSpPr>
+          <p:pic>
+            <p:nvPicPr>
+              <p:cNvPr id="102" name="Picture 101">
+                <a:extLst>
+                  <a:ext uri="{FF2B5EF4-FFF2-40B4-BE49-F238E27FC236}">
+                    <a16:creationId xmlns:a16="http://schemas.microsoft.com/office/drawing/2014/main" id="{C081D37A-3F34-CEE6-7DF1-5F1F3CD99C8F}"/>
+                  </a:ext>
+                </a:extLst>
+              </p:cNvPr>
+              <p:cNvPicPr>
+                <a:picLocks noChangeAspect="1"/>
+              </p:cNvPicPr>
+              <p:nvPr/>
+            </p:nvPicPr>
+            <p:blipFill>
+              <a:blip r:embed="rId15">
+                <a:extLst>
+                  <a:ext uri="{28A0092B-C50C-407E-A947-70E740481C1C}">
+                    <a14:useLocalDpi xmlns:a14="http://schemas.microsoft.com/office/drawing/2010/main" val="0"/>
+                  </a:ext>
+                </a:extLst>
+              </a:blip>
+              <a:srcRect l="4971"/>
+              <a:stretch>
+                <a:fillRect/>
+              </a:stretch>
+            </p:blipFill>
+            <p:spPr>
+              <a:xfrm>
+                <a:off x="16748759" y="13040740"/>
+                <a:ext cx="6488785" cy="5246749"/>
+              </a:xfrm>
+              <a:prstGeom prst="rect">
+                <a:avLst/>
+              </a:prstGeom>
+            </p:spPr>
+          </p:pic>
+          <p:pic>
+            <p:nvPicPr>
+              <p:cNvPr id="108" name="Picture 107">
+                <a:extLst>
+                  <a:ext uri="{FF2B5EF4-FFF2-40B4-BE49-F238E27FC236}">
+                    <a16:creationId xmlns:a16="http://schemas.microsoft.com/office/drawing/2014/main" id="{CFCC7DEF-BBEC-AE27-044B-9962CF97977D}"/>
+                  </a:ext>
+                </a:extLst>
+              </p:cNvPr>
+              <p:cNvPicPr>
+                <a:picLocks noChangeAspect="1"/>
+              </p:cNvPicPr>
+              <p:nvPr/>
+            </p:nvPicPr>
+            <p:blipFill>
+              <a:blip r:embed="rId15">
+                <a:extLst>
+                  <a:ext uri="{28A0092B-C50C-407E-A947-70E740481C1C}">
+                    <a14:useLocalDpi xmlns:a14="http://schemas.microsoft.com/office/drawing/2010/main" val="0"/>
+                  </a:ext>
+                </a:extLst>
+              </a:blip>
+              <a:srcRect l="-163" t="28555" r="93913" b="39203"/>
+              <a:stretch>
+                <a:fillRect/>
+              </a:stretch>
+            </p:blipFill>
+            <p:spPr>
+              <a:xfrm>
+                <a:off x="16550640" y="14538961"/>
+                <a:ext cx="426719" cy="1691640"/>
+              </a:xfrm>
+              <a:prstGeom prst="rect">
+                <a:avLst/>
+              </a:prstGeom>
+            </p:spPr>
+          </p:pic>
+        </p:grpSp>
+      </p:grpSp>
+      <p:grpSp>
+        <p:nvGrpSpPr>
+          <p:cNvPr id="120" name="Group 119">
+            <a:extLst>
+              <a:ext uri="{FF2B5EF4-FFF2-40B4-BE49-F238E27FC236}">
+                <a16:creationId xmlns:a16="http://schemas.microsoft.com/office/drawing/2014/main" id="{002A3799-5903-3234-64B3-B834543B2289}"/>
+              </a:ext>
+            </a:extLst>
+          </p:cNvPr>
+          <p:cNvGrpSpPr/>
+          <p:nvPr/>
+        </p:nvGrpSpPr>
+        <p:grpSpPr>
+          <a:xfrm>
+            <a:off x="21941824" y="8834468"/>
+            <a:ext cx="6838565" cy="15820229"/>
+            <a:chOff x="22108078" y="7545441"/>
+            <a:chExt cx="6838565" cy="15820229"/>
+          </a:xfrm>
+        </p:grpSpPr>
+        <p:pic>
+          <p:nvPicPr>
+            <p:cNvPr id="115" name="Picture 114">
+              <a:extLst>
+                <a:ext uri="{FF2B5EF4-FFF2-40B4-BE49-F238E27FC236}">
+                  <a16:creationId xmlns:a16="http://schemas.microsoft.com/office/drawing/2014/main" id="{45C465AF-A32D-E5BD-4910-FD76854046B2}"/>
+                </a:ext>
+              </a:extLst>
+            </p:cNvPr>
+            <p:cNvPicPr>
+              <a:picLocks noChangeAspect="1"/>
+            </p:cNvPicPr>
+            <p:nvPr/>
+          </p:nvPicPr>
+          <p:blipFill>
+            <a:blip r:embed="rId16">
+              <a:extLst>
+                <a:ext uri="{28A0092B-C50C-407E-A947-70E740481C1C}">
+                  <a14:useLocalDpi xmlns:a14="http://schemas.microsoft.com/office/drawing/2010/main" val="0"/>
+                </a:ext>
+              </a:extLst>
+            </a:blip>
+            <a:stretch>
+              <a:fillRect/>
+            </a:stretch>
+          </p:blipFill>
+          <p:spPr>
+            <a:xfrm>
+              <a:off x="22108078" y="7545441"/>
+              <a:ext cx="6649560" cy="5191178"/>
+            </a:xfrm>
+            <a:prstGeom prst="rect">
+              <a:avLst/>
+            </a:prstGeom>
+          </p:spPr>
+        </p:pic>
+        <p:pic>
+          <p:nvPicPr>
+            <p:cNvPr id="117" name="Picture 116">
+              <a:extLst>
+                <a:ext uri="{FF2B5EF4-FFF2-40B4-BE49-F238E27FC236}">
+                  <a16:creationId xmlns:a16="http://schemas.microsoft.com/office/drawing/2014/main" id="{473FE8C4-79D5-CFD5-CD80-AFDDCC556867}"/>
+                </a:ext>
+              </a:extLst>
+            </p:cNvPr>
+            <p:cNvPicPr>
+              <a:picLocks noChangeAspect="1"/>
+            </p:cNvPicPr>
+            <p:nvPr/>
+          </p:nvPicPr>
+          <p:blipFill>
+            <a:blip r:embed="rId17">
+              <a:extLst>
+                <a:ext uri="{28A0092B-C50C-407E-A947-70E740481C1C}">
+                  <a14:useLocalDpi xmlns:a14="http://schemas.microsoft.com/office/drawing/2010/main" val="0"/>
+                </a:ext>
+              </a:extLst>
+            </a:blip>
+            <a:stretch>
+              <a:fillRect/>
+            </a:stretch>
+          </p:blipFill>
+          <p:spPr>
+            <a:xfrm>
+              <a:off x="22173470" y="12852409"/>
+              <a:ext cx="6773173" cy="5192950"/>
+            </a:xfrm>
+            <a:prstGeom prst="rect">
+              <a:avLst/>
+            </a:prstGeom>
+          </p:spPr>
+        </p:pic>
+        <p:pic>
+          <p:nvPicPr>
+            <p:cNvPr id="119" name="Picture 118">
+              <a:extLst>
+                <a:ext uri="{FF2B5EF4-FFF2-40B4-BE49-F238E27FC236}">
+                  <a16:creationId xmlns:a16="http://schemas.microsoft.com/office/drawing/2014/main" id="{68896298-5E3F-7709-5EF4-9050D41EFA1B}"/>
+                </a:ext>
+              </a:extLst>
+            </p:cNvPr>
+            <p:cNvPicPr>
+              <a:picLocks noChangeAspect="1"/>
+            </p:cNvPicPr>
+            <p:nvPr/>
+          </p:nvPicPr>
+          <p:blipFill>
+            <a:blip r:embed="rId18">
+              <a:extLst>
+                <a:ext uri="{28A0092B-C50C-407E-A947-70E740481C1C}">
+                  <a14:useLocalDpi xmlns:a14="http://schemas.microsoft.com/office/drawing/2010/main" val="0"/>
+                </a:ext>
+              </a:extLst>
+            </a:blip>
+            <a:stretch>
+              <a:fillRect/>
+            </a:stretch>
+          </p:blipFill>
+          <p:spPr>
+            <a:xfrm>
+              <a:off x="22163999" y="18174590"/>
+              <a:ext cx="6677002" cy="5191080"/>
+            </a:xfrm>
+            <a:prstGeom prst="rect">
+              <a:avLst/>
+            </a:prstGeom>
+          </p:spPr>
+        </p:pic>
+      </p:grpSp>
+      <p:sp>
+        <p:nvSpPr>
+          <p:cNvPr id="122" name="TextBox 121">
+            <a:extLst>
+              <a:ext uri="{FF2B5EF4-FFF2-40B4-BE49-F238E27FC236}">
+                <a16:creationId xmlns:a16="http://schemas.microsoft.com/office/drawing/2014/main" id="{D8407765-B900-8615-E960-4F485E521845}"/>
+              </a:ext>
+            </a:extLst>
+          </p:cNvPr>
+          <p:cNvSpPr txBox="1"/>
+          <p:nvPr/>
+        </p:nvSpPr>
+        <p:spPr>
+          <a:xfrm>
+            <a:off x="641959" y="7877029"/>
+            <a:ext cx="6612054" cy="3539430"/>
+          </a:xfrm>
+          <a:prstGeom prst="rect">
+            <a:avLst/>
+          </a:prstGeom>
+          <a:noFill/>
+        </p:spPr>
+        <p:txBody>
+          <a:bodyPr wrap="square" rtlCol="0">
+            <a:spAutoFit/>
+          </a:bodyPr>
+          <a:lstStyle/>
+          <a:p>
+            <a:pPr algn="just"/>
+            <a:r>
+              <a:rPr lang="en-US" sz="2800" dirty="0">
+                <a:latin typeface="UCL Sans" panose="020B0604020202020204" charset="0"/>
+                <a:ea typeface="Sans Serif Collection" panose="020B0502040504020204" pitchFamily="34" charset="0"/>
+                <a:cs typeface="Sans Serif Collection" panose="020B0502040504020204" pitchFamily="34" charset="0"/>
+              </a:rPr>
+              <a:t>HPO appears as a precursor molecule in proposed abiotic mechanisms to form phosphine on Venus. It was predicted to be detectable in the interstellar medium.</a:t>
+            </a:r>
+          </a:p>
+          <a:p>
+            <a:pPr algn="just"/>
+            <a:endParaRPr lang="en-US" sz="2800" dirty="0">
+              <a:latin typeface="UCL Sans" panose="020B0604020202020204" charset="0"/>
+              <a:ea typeface="Sans Serif Collection" panose="020B0502040504020204" pitchFamily="34" charset="0"/>
+              <a:cs typeface="Sans Serif Collection" panose="020B0502040504020204" pitchFamily="34" charset="0"/>
+            </a:endParaRPr>
+          </a:p>
+          <a:p>
+            <a:pPr algn="just"/>
+            <a:r>
+              <a:rPr lang="en-US" sz="2800" dirty="0">
+                <a:latin typeface="UCL Sans" panose="020B0604020202020204" charset="0"/>
+                <a:ea typeface="Sans Serif Collection" panose="020B0502040504020204" pitchFamily="34" charset="0"/>
+                <a:cs typeface="Sans Serif Collection" panose="020B0502040504020204" pitchFamily="34" charset="0"/>
+              </a:rPr>
+              <a:t>Can HPO play a role on lava or rocky exoplanets?</a:t>
+            </a:r>
+            <a:endParaRPr lang="en-GB" sz="2800" dirty="0">
+              <a:latin typeface="UCL Sans" panose="020B0604020202020204" charset="0"/>
+              <a:ea typeface="Sans Serif Collection" panose="020B0502040504020204" pitchFamily="34" charset="0"/>
+              <a:cs typeface="Sans Serif Collection" panose="020B0502040504020204" pitchFamily="34" charset="0"/>
+            </a:endParaRPr>
+          </a:p>
+        </p:txBody>
+      </p:sp>
+      <p:sp>
+        <p:nvSpPr>
+          <p:cNvPr id="124" name="TextBox 123">
+            <a:extLst>
+              <a:ext uri="{FF2B5EF4-FFF2-40B4-BE49-F238E27FC236}">
+                <a16:creationId xmlns:a16="http://schemas.microsoft.com/office/drawing/2014/main" id="{1D064F9A-7912-24CD-B39B-22E41FCF37BF}"/>
+              </a:ext>
+            </a:extLst>
+          </p:cNvPr>
+          <p:cNvSpPr txBox="1"/>
+          <p:nvPr/>
+        </p:nvSpPr>
+        <p:spPr>
+          <a:xfrm>
+            <a:off x="783828" y="16831981"/>
+            <a:ext cx="6604524" cy="954107"/>
+          </a:xfrm>
+          <a:prstGeom prst="rect">
+            <a:avLst/>
+          </a:prstGeom>
+          <a:noFill/>
+        </p:spPr>
+        <p:txBody>
+          <a:bodyPr wrap="square" rtlCol="0">
+            <a:spAutoFit/>
+          </a:bodyPr>
+          <a:lstStyle/>
+          <a:p>
+            <a:r>
+              <a:rPr lang="en-US" sz="2800" dirty="0">
+                <a:latin typeface="UCL Sans" panose="020B0604020202020204" charset="0"/>
+                <a:ea typeface="Sans Serif Collection" panose="020B0502040504020204" pitchFamily="34" charset="0"/>
+                <a:cs typeface="Sans Serif Collection" panose="020B0502040504020204" pitchFamily="34" charset="0"/>
+              </a:rPr>
+              <a:t>We use the internal coordinates and Cartesian axis as presented:</a:t>
+            </a:r>
+            <a:endParaRPr lang="en-GB" sz="2800" dirty="0">
+              <a:latin typeface="UCL Sans" panose="020B0604020202020204" charset="0"/>
+              <a:ea typeface="Sans Serif Collection" panose="020B0502040504020204" pitchFamily="34" charset="0"/>
+              <a:cs typeface="Sans Serif Collection" panose="020B0502040504020204" pitchFamily="34" charset="0"/>
+            </a:endParaRPr>
+          </a:p>
+        </p:txBody>
+      </p:sp>
+      <p:sp>
+        <p:nvSpPr>
+          <p:cNvPr id="126" name="TextBox 125">
+            <a:extLst>
+              <a:ext uri="{FF2B5EF4-FFF2-40B4-BE49-F238E27FC236}">
+                <a16:creationId xmlns:a16="http://schemas.microsoft.com/office/drawing/2014/main" id="{E2A49FD0-0556-0FCA-8AE6-9CC8ACD65A06}"/>
+              </a:ext>
+            </a:extLst>
+          </p:cNvPr>
+          <p:cNvSpPr txBox="1"/>
+          <p:nvPr/>
+        </p:nvSpPr>
+        <p:spPr>
+          <a:xfrm>
+            <a:off x="641958" y="24578797"/>
+            <a:ext cx="6525674" cy="2246769"/>
+          </a:xfrm>
+          <a:prstGeom prst="rect">
+            <a:avLst/>
+          </a:prstGeom>
+          <a:noFill/>
+        </p:spPr>
+        <p:txBody>
+          <a:bodyPr wrap="square" rtlCol="0">
+            <a:spAutoFit/>
+          </a:bodyPr>
+          <a:lstStyle/>
+          <a:p>
+            <a:pPr marL="457200" indent="-457200">
+              <a:buFont typeface="Arial" panose="020B0604020202020204" pitchFamily="34" charset="0"/>
+              <a:buChar char="•"/>
+            </a:pPr>
+            <a:r>
+              <a:rPr lang="en-US" sz="2800" dirty="0">
+                <a:latin typeface="UCL Sans" panose="020B0604020202020204" charset="0"/>
+                <a:ea typeface="Sans Serif Collection" panose="020B0502040504020204" pitchFamily="34" charset="0"/>
+                <a:cs typeface="Sans Serif Collection" panose="020B0502040504020204" pitchFamily="34" charset="0"/>
+              </a:rPr>
+              <a:t>Produce a rovibrational linelist for HPO (electronic ground state only).</a:t>
+            </a:r>
+          </a:p>
+          <a:p>
+            <a:pPr marL="457200" indent="-457200">
+              <a:buFont typeface="Arial" panose="020B0604020202020204" pitchFamily="34" charset="0"/>
+              <a:buChar char="•"/>
+            </a:pPr>
+            <a:endParaRPr lang="en-US" sz="2800" dirty="0">
+              <a:latin typeface="UCL Sans" panose="020B0604020202020204" charset="0"/>
+              <a:ea typeface="Sans Serif Collection" panose="020B0502040504020204" pitchFamily="34" charset="0"/>
+              <a:cs typeface="Sans Serif Collection" panose="020B0502040504020204" pitchFamily="34" charset="0"/>
+            </a:endParaRPr>
+          </a:p>
+          <a:p>
+            <a:pPr marL="457200" indent="-457200">
+              <a:buFont typeface="Arial" panose="020B0604020202020204" pitchFamily="34" charset="0"/>
+              <a:buChar char="•"/>
+            </a:pPr>
+            <a:r>
+              <a:rPr lang="en-US" sz="2800" dirty="0">
+                <a:latin typeface="UCL Sans" panose="020B0604020202020204" charset="0"/>
+                <a:ea typeface="Sans Serif Collection" panose="020B0502040504020204" pitchFamily="34" charset="0"/>
+                <a:cs typeface="Sans Serif Collection" panose="020B0502040504020204" pitchFamily="34" charset="0"/>
+              </a:rPr>
+              <a:t>Evaluate potential for HPO detection on exoplanets/planets.</a:t>
+            </a:r>
+            <a:endParaRPr lang="en-GB" sz="2800" dirty="0">
+              <a:latin typeface="UCL Sans" panose="020B0604020202020204" charset="0"/>
+              <a:ea typeface="Sans Serif Collection" panose="020B0502040504020204" pitchFamily="34" charset="0"/>
+              <a:cs typeface="Sans Serif Collection" panose="020B0502040504020204" pitchFamily="34" charset="0"/>
+            </a:endParaRPr>
+          </a:p>
+        </p:txBody>
+      </p:sp>
       <p:pic>
         <p:nvPicPr>
-          <p:cNvPr id="46" name="Content Placeholder 45">
+          <p:cNvPr id="128" name="Picture 127">
             <a:extLst>
               <a:ext uri="{FF2B5EF4-FFF2-40B4-BE49-F238E27FC236}">
-                <a16:creationId xmlns:a16="http://schemas.microsoft.com/office/drawing/2014/main" id="{648DE49E-2738-9E11-8AA2-69CDCF99E6F5}"/>
+                <a16:creationId xmlns:a16="http://schemas.microsoft.com/office/drawing/2014/main" id="{D7009208-CC3F-BADB-A338-3C3DDCD5B861}"/>
               </a:ext>
             </a:extLst>
           </p:cNvPr>
           <p:cNvPicPr>
-            <a:picLocks noGrp="1" noChangeAspect="1"/>
+            <a:picLocks noChangeAspect="1"/>
           </p:cNvPicPr>
-          <p:nvPr>
-            <p:ph sz="quarter" idx="24"/>
-          </p:nvPr>
+          <p:nvPr/>
         </p:nvPicPr>
         <p:blipFill>
-          <a:blip r:embed="rId5">
+          <a:blip r:embed="rId19">
             <a:extLst>
               <a:ext uri="{28A0092B-C50C-407E-A947-70E740481C1C}">
                 <a14:useLocalDpi xmlns:a14="http://schemas.microsoft.com/office/drawing/2010/main" val="0"/>
@@ -7202,20 +9297,797 @@
         </p:blipFill>
         <p:spPr>
           <a:xfrm>
-            <a:off x="11778275" y="6993627"/>
-            <a:ext cx="8165024" cy="5343401"/>
+            <a:off x="29779473" y="8862176"/>
+            <a:ext cx="10982810" cy="7640054"/>
           </a:xfrm>
           <a:prstGeom prst="rect">
             <a:avLst/>
           </a:prstGeom>
-          <a:solidFill>
-            <a:schemeClr val="bg1"/>
-          </a:solidFill>
-          <a:ln>
-            <a:noFill/>
-          </a:ln>
         </p:spPr>
       </p:pic>
+      <p:sp>
+        <p:nvSpPr>
+          <p:cNvPr id="130" name="TextBox 129">
+            <a:extLst>
+              <a:ext uri="{FF2B5EF4-FFF2-40B4-BE49-F238E27FC236}">
+                <a16:creationId xmlns:a16="http://schemas.microsoft.com/office/drawing/2014/main" id="{A0746360-9288-5B65-2758-EF1FE2B0E04A}"/>
+              </a:ext>
+            </a:extLst>
+          </p:cNvPr>
+          <p:cNvSpPr txBox="1"/>
+          <p:nvPr/>
+        </p:nvSpPr>
+        <p:spPr>
+          <a:xfrm>
+            <a:off x="8550652" y="6887494"/>
+            <a:ext cx="6096541" cy="707886"/>
+          </a:xfrm>
+          <a:prstGeom prst="rect">
+            <a:avLst/>
+          </a:prstGeom>
+          <a:noFill/>
+        </p:spPr>
+        <p:txBody>
+          <a:bodyPr wrap="none" rtlCol="0">
+            <a:spAutoFit/>
+          </a:bodyPr>
+          <a:lstStyle/>
+          <a:p>
+            <a:r>
+              <a:rPr lang="en-US" sz="4000" dirty="0">
+                <a:latin typeface="UCL Sans" panose="020B0604020202020204" charset="0"/>
+                <a:ea typeface="Sans Serif Collection" panose="020B0502040504020204" pitchFamily="34" charset="0"/>
+                <a:cs typeface="Sans Serif Collection" panose="020B0502040504020204" pitchFamily="34" charset="0"/>
+              </a:rPr>
+              <a:t>Potential Energy Surface</a:t>
+            </a:r>
+            <a:endParaRPr lang="en-GB" sz="4000" dirty="0">
+              <a:latin typeface="UCL Sans" panose="020B0604020202020204" charset="0"/>
+              <a:ea typeface="Sans Serif Collection" panose="020B0502040504020204" pitchFamily="34" charset="0"/>
+              <a:cs typeface="Sans Serif Collection" panose="020B0502040504020204" pitchFamily="34" charset="0"/>
+            </a:endParaRPr>
+          </a:p>
+        </p:txBody>
+      </p:sp>
+      <p:sp>
+        <p:nvSpPr>
+          <p:cNvPr id="132" name="TextBox 131">
+            <a:extLst>
+              <a:ext uri="{FF2B5EF4-FFF2-40B4-BE49-F238E27FC236}">
+                <a16:creationId xmlns:a16="http://schemas.microsoft.com/office/drawing/2014/main" id="{516C16C9-1626-D91A-CF2B-6969A6CEFED9}"/>
+              </a:ext>
+            </a:extLst>
+          </p:cNvPr>
+          <p:cNvSpPr txBox="1"/>
+          <p:nvPr/>
+        </p:nvSpPr>
+        <p:spPr>
+          <a:xfrm>
+            <a:off x="15775123" y="6898051"/>
+            <a:ext cx="6110968" cy="707886"/>
+          </a:xfrm>
+          <a:prstGeom prst="rect">
+            <a:avLst/>
+          </a:prstGeom>
+          <a:noFill/>
+        </p:spPr>
+        <p:txBody>
+          <a:bodyPr wrap="none" rtlCol="0">
+            <a:spAutoFit/>
+          </a:bodyPr>
+          <a:lstStyle/>
+          <a:p>
+            <a:r>
+              <a:rPr lang="en-US" sz="4000" dirty="0">
+                <a:latin typeface="UCL Sans" panose="020B0604020202020204" charset="0"/>
+                <a:ea typeface="Sans Serif Collection" panose="020B0502040504020204" pitchFamily="34" charset="0"/>
+                <a:cs typeface="Sans Serif Collection" panose="020B0502040504020204" pitchFamily="34" charset="0"/>
+              </a:rPr>
+              <a:t>Dipole Moment Surfaces</a:t>
+            </a:r>
+            <a:endParaRPr lang="en-GB" sz="4000" dirty="0">
+              <a:latin typeface="UCL Sans" panose="020B0604020202020204" charset="0"/>
+              <a:ea typeface="Sans Serif Collection" panose="020B0502040504020204" pitchFamily="34" charset="0"/>
+              <a:cs typeface="Sans Serif Collection" panose="020B0502040504020204" pitchFamily="34" charset="0"/>
+            </a:endParaRPr>
+          </a:p>
+        </p:txBody>
+      </p:sp>
+      <p:sp>
+        <p:nvSpPr>
+          <p:cNvPr id="136" name="TextBox 135">
+            <a:extLst>
+              <a:ext uri="{FF2B5EF4-FFF2-40B4-BE49-F238E27FC236}">
+                <a16:creationId xmlns:a16="http://schemas.microsoft.com/office/drawing/2014/main" id="{F4EF452A-4DA2-1AB6-CAE4-A54B11573821}"/>
+              </a:ext>
+            </a:extLst>
+          </p:cNvPr>
+          <p:cNvSpPr txBox="1"/>
+          <p:nvPr/>
+        </p:nvSpPr>
+        <p:spPr>
+          <a:xfrm>
+            <a:off x="23742924" y="6869888"/>
+            <a:ext cx="3398687" cy="707886"/>
+          </a:xfrm>
+          <a:prstGeom prst="rect">
+            <a:avLst/>
+          </a:prstGeom>
+          <a:noFill/>
+        </p:spPr>
+        <p:txBody>
+          <a:bodyPr wrap="none" rtlCol="0">
+            <a:spAutoFit/>
+          </a:bodyPr>
+          <a:lstStyle/>
+          <a:p>
+            <a:r>
+              <a:rPr lang="en-US" sz="4000" dirty="0">
+                <a:latin typeface="UCL Sans" panose="020B0604020202020204" charset="0"/>
+                <a:ea typeface="Sans Serif Collection" panose="020B0502040504020204" pitchFamily="34" charset="0"/>
+                <a:cs typeface="Sans Serif Collection" panose="020B0502040504020204" pitchFamily="34" charset="0"/>
+              </a:rPr>
+              <a:t>Stick Spectra</a:t>
+            </a:r>
+            <a:endParaRPr lang="en-GB" sz="4000" dirty="0">
+              <a:latin typeface="UCL Sans" panose="020B0604020202020204" charset="0"/>
+              <a:ea typeface="Sans Serif Collection" panose="020B0502040504020204" pitchFamily="34" charset="0"/>
+              <a:cs typeface="Sans Serif Collection" panose="020B0502040504020204" pitchFamily="34" charset="0"/>
+            </a:endParaRPr>
+          </a:p>
+        </p:txBody>
+      </p:sp>
+      <p:sp>
+        <p:nvSpPr>
+          <p:cNvPr id="138" name="TextBox 137">
+            <a:extLst>
+              <a:ext uri="{FF2B5EF4-FFF2-40B4-BE49-F238E27FC236}">
+                <a16:creationId xmlns:a16="http://schemas.microsoft.com/office/drawing/2014/main" id="{B375B841-8EB3-F0F1-A242-4003E08E4EC6}"/>
+              </a:ext>
+            </a:extLst>
+          </p:cNvPr>
+          <p:cNvSpPr txBox="1"/>
+          <p:nvPr/>
+        </p:nvSpPr>
+        <p:spPr>
+          <a:xfrm>
+            <a:off x="7902099" y="24798599"/>
+            <a:ext cx="7164163" cy="2739211"/>
+          </a:xfrm>
+          <a:prstGeom prst="rect">
+            <a:avLst/>
+          </a:prstGeom>
+          <a:noFill/>
+        </p:spPr>
+        <p:txBody>
+          <a:bodyPr wrap="square" rtlCol="0">
+            <a:spAutoFit/>
+          </a:bodyPr>
+          <a:lstStyle/>
+          <a:p>
+            <a:pPr marL="457200" indent="-457200" algn="just">
+              <a:buFont typeface="Arial" panose="020B0604020202020204" pitchFamily="34" charset="0"/>
+              <a:buChar char="•"/>
+            </a:pPr>
+            <a:r>
+              <a:rPr lang="en-US" sz="2400" dirty="0">
+                <a:latin typeface="UCL Sans" panose="020B0604020202020204" charset="0"/>
+                <a:ea typeface="Sans Serif Collection" panose="020B0502040504020204" pitchFamily="34" charset="0"/>
+                <a:cs typeface="Sans Serif Collection" panose="020B0502040504020204" pitchFamily="34" charset="0"/>
+              </a:rPr>
+              <a:t>Fit PES has root-mean-square error of 2 cm</a:t>
+            </a:r>
+            <a:r>
+              <a:rPr lang="en-US" sz="2400" baseline="30000" dirty="0">
+                <a:latin typeface="UCL Sans" panose="020B0604020202020204" charset="0"/>
+                <a:ea typeface="Sans Serif Collection" panose="020B0502040504020204" pitchFamily="34" charset="0"/>
+                <a:cs typeface="Sans Serif Collection" panose="020B0502040504020204" pitchFamily="34" charset="0"/>
+              </a:rPr>
+              <a:t>-1</a:t>
+            </a:r>
+            <a:r>
+              <a:rPr lang="en-US" sz="2400" dirty="0">
+                <a:latin typeface="UCL Sans" panose="020B0604020202020204" charset="0"/>
+                <a:ea typeface="Sans Serif Collection" panose="020B0502040504020204" pitchFamily="34" charset="0"/>
+                <a:cs typeface="Sans Serif Collection" panose="020B0502040504020204" pitchFamily="34" charset="0"/>
+              </a:rPr>
+              <a:t> for energies under 18,000 cm</a:t>
+            </a:r>
+            <a:r>
+              <a:rPr lang="en-US" sz="2400" baseline="30000" dirty="0">
+                <a:latin typeface="UCL Sans" panose="020B0604020202020204" charset="0"/>
+                <a:ea typeface="Sans Serif Collection" panose="020B0502040504020204" pitchFamily="34" charset="0"/>
+                <a:cs typeface="Sans Serif Collection" panose="020B0502040504020204" pitchFamily="34" charset="0"/>
+              </a:rPr>
+              <a:t>-1</a:t>
+            </a:r>
+            <a:r>
+              <a:rPr lang="en-US" sz="2400" dirty="0">
+                <a:latin typeface="UCL Sans" panose="020B0604020202020204" charset="0"/>
+                <a:ea typeface="Sans Serif Collection" panose="020B0502040504020204" pitchFamily="34" charset="0"/>
+                <a:cs typeface="Sans Serif Collection" panose="020B0502040504020204" pitchFamily="34" charset="0"/>
+              </a:rPr>
+              <a:t> </a:t>
+            </a:r>
+          </a:p>
+          <a:p>
+            <a:pPr marL="457200" indent="-457200" algn="just">
+              <a:buFont typeface="Arial" panose="020B0604020202020204" pitchFamily="34" charset="0"/>
+              <a:buChar char="•"/>
+            </a:pPr>
+            <a:endParaRPr lang="en-US" sz="2400" dirty="0">
+              <a:latin typeface="UCL Sans" panose="020B0604020202020204" charset="0"/>
+              <a:ea typeface="Sans Serif Collection" panose="020B0502040504020204" pitchFamily="34" charset="0"/>
+              <a:cs typeface="Sans Serif Collection" panose="020B0502040504020204" pitchFamily="34" charset="0"/>
+            </a:endParaRPr>
+          </a:p>
+          <a:p>
+            <a:pPr marL="457200" indent="-457200" algn="just">
+              <a:buFont typeface="Arial" panose="020B0604020202020204" pitchFamily="34" charset="0"/>
+              <a:buChar char="•"/>
+            </a:pPr>
+            <a:r>
+              <a:rPr lang="en-US" sz="2400" dirty="0">
+                <a:latin typeface="UCL Sans" panose="020B0604020202020204" charset="0"/>
+                <a:ea typeface="Sans Serif Collection" panose="020B0502040504020204" pitchFamily="34" charset="0"/>
+                <a:cs typeface="Sans Serif Collection" panose="020B0502040504020204" pitchFamily="34" charset="0"/>
+              </a:rPr>
+              <a:t>Molecule appears relatively rigid (stiff bending), we can use non-singular methods to perform variational calculations.  </a:t>
+            </a:r>
+          </a:p>
+          <a:p>
+            <a:pPr marL="457200" indent="-457200" algn="just">
+              <a:buFont typeface="Arial" panose="020B0604020202020204" pitchFamily="34" charset="0"/>
+              <a:buChar char="•"/>
+            </a:pPr>
+            <a:endParaRPr lang="en-GB" sz="2800" dirty="0">
+              <a:latin typeface="UCL Sans" panose="020B0604020202020204" charset="0"/>
+              <a:ea typeface="Sans Serif Collection" panose="020B0502040504020204" pitchFamily="34" charset="0"/>
+              <a:cs typeface="Sans Serif Collection" panose="020B0502040504020204" pitchFamily="34" charset="0"/>
+            </a:endParaRPr>
+          </a:p>
+        </p:txBody>
+      </p:sp>
+      <p:sp>
+        <p:nvSpPr>
+          <p:cNvPr id="142" name="TextBox 141">
+            <a:extLst>
+              <a:ext uri="{FF2B5EF4-FFF2-40B4-BE49-F238E27FC236}">
+                <a16:creationId xmlns:a16="http://schemas.microsoft.com/office/drawing/2014/main" id="{9EDD83B0-40A2-0632-433F-9045CB4B273E}"/>
+              </a:ext>
+            </a:extLst>
+          </p:cNvPr>
+          <p:cNvSpPr txBox="1"/>
+          <p:nvPr/>
+        </p:nvSpPr>
+        <p:spPr>
+          <a:xfrm>
+            <a:off x="8550652" y="7762121"/>
+            <a:ext cx="6096541" cy="954107"/>
+          </a:xfrm>
+          <a:prstGeom prst="rect">
+            <a:avLst/>
+          </a:prstGeom>
+          <a:noFill/>
+        </p:spPr>
+        <p:txBody>
+          <a:bodyPr wrap="square" rtlCol="0">
+            <a:spAutoFit/>
+          </a:bodyPr>
+          <a:lstStyle/>
+          <a:p>
+            <a:pPr algn="just"/>
+            <a:r>
+              <a:rPr lang="en-US" sz="2800" dirty="0">
+                <a:latin typeface="UCL Sans" panose="020B0604020202020204" charset="0"/>
+                <a:ea typeface="Sans Serif Collection" panose="020B0502040504020204" pitchFamily="34" charset="0"/>
+                <a:cs typeface="Sans Serif Collection" panose="020B0502040504020204" pitchFamily="34" charset="0"/>
+              </a:rPr>
+              <a:t>7770 </a:t>
+            </a:r>
+            <a:r>
+              <a:rPr lang="en-US" sz="2800" i="1" dirty="0">
+                <a:latin typeface="UCL Sans" panose="020B0604020202020204" charset="0"/>
+                <a:ea typeface="Sans Serif Collection" panose="020B0502040504020204" pitchFamily="34" charset="0"/>
+                <a:cs typeface="Sans Serif Collection" panose="020B0502040504020204" pitchFamily="34" charset="0"/>
+              </a:rPr>
+              <a:t>ab initio </a:t>
+            </a:r>
+            <a:r>
+              <a:rPr lang="en-US" sz="2800" dirty="0">
+                <a:latin typeface="UCL Sans" panose="020B0604020202020204" charset="0"/>
+                <a:ea typeface="Sans Serif Collection" panose="020B0502040504020204" pitchFamily="34" charset="0"/>
+                <a:cs typeface="Sans Serif Collection" panose="020B0502040504020204" pitchFamily="34" charset="0"/>
+              </a:rPr>
+              <a:t>points computed with CCSD(T)-F12/cc-pVQZ-F12a</a:t>
+            </a:r>
+          </a:p>
+        </p:txBody>
+      </p:sp>
+      <p:sp>
+        <p:nvSpPr>
+          <p:cNvPr id="144" name="TextBox 143">
+            <a:extLst>
+              <a:ext uri="{FF2B5EF4-FFF2-40B4-BE49-F238E27FC236}">
+                <a16:creationId xmlns:a16="http://schemas.microsoft.com/office/drawing/2014/main" id="{96199BD6-6C8F-8CCB-2FA9-7FDB19CAA5B5}"/>
+              </a:ext>
+            </a:extLst>
+          </p:cNvPr>
+          <p:cNvSpPr txBox="1"/>
+          <p:nvPr/>
+        </p:nvSpPr>
+        <p:spPr>
+          <a:xfrm>
+            <a:off x="15845283" y="7762121"/>
+            <a:ext cx="6096541" cy="954107"/>
+          </a:xfrm>
+          <a:prstGeom prst="rect">
+            <a:avLst/>
+          </a:prstGeom>
+          <a:noFill/>
+        </p:spPr>
+        <p:txBody>
+          <a:bodyPr wrap="square" rtlCol="0">
+            <a:spAutoFit/>
+          </a:bodyPr>
+          <a:lstStyle/>
+          <a:p>
+            <a:pPr algn="just"/>
+            <a:r>
+              <a:rPr lang="en-US" sz="2800" dirty="0">
+                <a:latin typeface="UCL Sans" panose="020B0604020202020204" charset="0"/>
+                <a:ea typeface="Sans Serif Collection" panose="020B0502040504020204" pitchFamily="34" charset="0"/>
+                <a:cs typeface="Sans Serif Collection" panose="020B0502040504020204" pitchFamily="34" charset="0"/>
+              </a:rPr>
+              <a:t>Same grid as the PES computed with CCSD(T)/aug-cc-pV(5+d)Z</a:t>
+            </a:r>
+          </a:p>
+        </p:txBody>
+      </p:sp>
+      <p:sp>
+        <p:nvSpPr>
+          <p:cNvPr id="148" name="TextBox 147">
+            <a:extLst>
+              <a:ext uri="{FF2B5EF4-FFF2-40B4-BE49-F238E27FC236}">
+                <a16:creationId xmlns:a16="http://schemas.microsoft.com/office/drawing/2014/main" id="{24883706-EECC-D3A3-0F66-2BDE6B4405DC}"/>
+              </a:ext>
+            </a:extLst>
+          </p:cNvPr>
+          <p:cNvSpPr txBox="1"/>
+          <p:nvPr/>
+        </p:nvSpPr>
+        <p:spPr>
+          <a:xfrm>
+            <a:off x="22525986" y="7756000"/>
+            <a:ext cx="5630585" cy="949238"/>
+          </a:xfrm>
+          <a:prstGeom prst="rect">
+            <a:avLst/>
+          </a:prstGeom>
+          <a:noFill/>
+        </p:spPr>
+        <p:txBody>
+          <a:bodyPr wrap="square" rtlCol="0">
+            <a:spAutoFit/>
+          </a:bodyPr>
+          <a:lstStyle/>
+          <a:p>
+            <a:pPr algn="just"/>
+            <a:r>
+              <a:rPr lang="en-US" sz="2800" dirty="0">
+                <a:latin typeface="UCL Sans" panose="020B0604020202020204" charset="0"/>
+                <a:ea typeface="Sans Serif Collection" panose="020B0502040504020204" pitchFamily="34" charset="0"/>
+                <a:cs typeface="Sans Serif Collection" panose="020B0502040504020204" pitchFamily="34" charset="0"/>
+              </a:rPr>
+              <a:t>Rotational stick spectra of the fundamental vibrational modes</a:t>
+            </a:r>
+          </a:p>
+        </p:txBody>
+      </p:sp>
+      <p:sp>
+        <p:nvSpPr>
+          <p:cNvPr id="150" name="TextBox 149">
+            <a:extLst>
+              <a:ext uri="{FF2B5EF4-FFF2-40B4-BE49-F238E27FC236}">
+                <a16:creationId xmlns:a16="http://schemas.microsoft.com/office/drawing/2014/main" id="{CD1DF30F-309F-9DC5-B2C9-7211FFA6AE3E}"/>
+              </a:ext>
+            </a:extLst>
+          </p:cNvPr>
+          <p:cNvSpPr txBox="1"/>
+          <p:nvPr/>
+        </p:nvSpPr>
+        <p:spPr>
+          <a:xfrm>
+            <a:off x="30397568" y="6900756"/>
+            <a:ext cx="3855543" cy="707886"/>
+          </a:xfrm>
+          <a:prstGeom prst="rect">
+            <a:avLst/>
+          </a:prstGeom>
+          <a:noFill/>
+        </p:spPr>
+        <p:txBody>
+          <a:bodyPr wrap="none" rtlCol="0">
+            <a:spAutoFit/>
+          </a:bodyPr>
+          <a:lstStyle/>
+          <a:p>
+            <a:r>
+              <a:rPr lang="en-US" sz="4000" dirty="0">
+                <a:latin typeface="UCL Sans" panose="020B0604020202020204" charset="0"/>
+                <a:ea typeface="Sans Serif Collection" panose="020B0502040504020204" pitchFamily="34" charset="0"/>
+                <a:cs typeface="Sans Serif Collection" panose="020B0502040504020204" pitchFamily="34" charset="0"/>
+              </a:rPr>
+              <a:t>Cross-sections</a:t>
+            </a:r>
+            <a:endParaRPr lang="en-GB" sz="4000" dirty="0">
+              <a:latin typeface="UCL Sans" panose="020B0604020202020204" charset="0"/>
+              <a:ea typeface="Sans Serif Collection" panose="020B0502040504020204" pitchFamily="34" charset="0"/>
+              <a:cs typeface="Sans Serif Collection" panose="020B0502040504020204" pitchFamily="34" charset="0"/>
+            </a:endParaRPr>
+          </a:p>
+        </p:txBody>
+      </p:sp>
+      <p:sp>
+        <p:nvSpPr>
+          <p:cNvPr id="152" name="TextBox 151">
+            <a:extLst>
+              <a:ext uri="{FF2B5EF4-FFF2-40B4-BE49-F238E27FC236}">
+                <a16:creationId xmlns:a16="http://schemas.microsoft.com/office/drawing/2014/main" id="{AA5254B2-4677-A5F8-4213-BF2F405814E3}"/>
+              </a:ext>
+            </a:extLst>
+          </p:cNvPr>
+          <p:cNvSpPr txBox="1"/>
+          <p:nvPr/>
+        </p:nvSpPr>
+        <p:spPr>
+          <a:xfrm>
+            <a:off x="15306427" y="24798685"/>
+            <a:ext cx="6525681" cy="2000548"/>
+          </a:xfrm>
+          <a:prstGeom prst="rect">
+            <a:avLst/>
+          </a:prstGeom>
+          <a:noFill/>
+        </p:spPr>
+        <p:txBody>
+          <a:bodyPr wrap="square" rtlCol="0">
+            <a:spAutoFit/>
+          </a:bodyPr>
+          <a:lstStyle/>
+          <a:p>
+            <a:pPr marL="457200" indent="-457200" algn="just">
+              <a:buFont typeface="Arial" panose="020B0604020202020204" pitchFamily="34" charset="0"/>
+              <a:buChar char="•"/>
+            </a:pPr>
+            <a:r>
+              <a:rPr lang="en-US" sz="2400" dirty="0">
+                <a:latin typeface="UCL Sans" panose="020B0604020202020204" charset="0"/>
+                <a:ea typeface="Sans Serif Collection" panose="020B0502040504020204" pitchFamily="34" charset="0"/>
+                <a:cs typeface="Sans Serif Collection" panose="020B0502040504020204" pitchFamily="34" charset="0"/>
+              </a:rPr>
+              <a:t>Dipole values calculated oriented with respect to the Cartesian axis given. </a:t>
+            </a:r>
+          </a:p>
+          <a:p>
+            <a:pPr marL="457200" indent="-457200" algn="just">
+              <a:buFont typeface="Arial" panose="020B0604020202020204" pitchFamily="34" charset="0"/>
+              <a:buChar char="•"/>
+            </a:pPr>
+            <a:endParaRPr lang="en-US" sz="2400" dirty="0">
+              <a:latin typeface="UCL Sans" panose="020B0604020202020204" charset="0"/>
+              <a:ea typeface="Sans Serif Collection" panose="020B0502040504020204" pitchFamily="34" charset="0"/>
+              <a:cs typeface="Sans Serif Collection" panose="020B0502040504020204" pitchFamily="34" charset="0"/>
+            </a:endParaRPr>
+          </a:p>
+          <a:p>
+            <a:pPr marL="457200" indent="-457200" algn="just">
+              <a:buFont typeface="Arial" panose="020B0604020202020204" pitchFamily="34" charset="0"/>
+              <a:buChar char="•"/>
+            </a:pPr>
+            <a:r>
+              <a:rPr lang="en-US" sz="2400" dirty="0">
+                <a:latin typeface="UCL Sans" panose="020B0604020202020204" charset="0"/>
+                <a:ea typeface="Sans Serif Collection" panose="020B0502040504020204" pitchFamily="34" charset="0"/>
+                <a:cs typeface="Sans Serif Collection" panose="020B0502040504020204" pitchFamily="34" charset="0"/>
+              </a:rPr>
+              <a:t>Fitted to a Taylor-series type expansion.</a:t>
+            </a:r>
+          </a:p>
+          <a:p>
+            <a:pPr marL="457200" indent="-457200" algn="just">
+              <a:buFont typeface="Arial" panose="020B0604020202020204" pitchFamily="34" charset="0"/>
+              <a:buChar char="•"/>
+            </a:pPr>
+            <a:endParaRPr lang="en-GB" sz="2800" dirty="0">
+              <a:latin typeface="UCL Sans" panose="020B0604020202020204" charset="0"/>
+              <a:ea typeface="Sans Serif Collection" panose="020B0502040504020204" pitchFamily="34" charset="0"/>
+              <a:cs typeface="Sans Serif Collection" panose="020B0502040504020204" pitchFamily="34" charset="0"/>
+            </a:endParaRPr>
+          </a:p>
+        </p:txBody>
+      </p:sp>
+      <p:sp>
+        <p:nvSpPr>
+          <p:cNvPr id="154" name="TextBox 153">
+            <a:extLst>
+              <a:ext uri="{FF2B5EF4-FFF2-40B4-BE49-F238E27FC236}">
+                <a16:creationId xmlns:a16="http://schemas.microsoft.com/office/drawing/2014/main" id="{E7F24C27-2DFA-996C-26A7-E7A3E3B7583F}"/>
+              </a:ext>
+            </a:extLst>
+          </p:cNvPr>
+          <p:cNvSpPr txBox="1"/>
+          <p:nvPr/>
+        </p:nvSpPr>
+        <p:spPr>
+          <a:xfrm>
+            <a:off x="22007216" y="24798599"/>
+            <a:ext cx="6525681" cy="1569660"/>
+          </a:xfrm>
+          <a:prstGeom prst="rect">
+            <a:avLst/>
+          </a:prstGeom>
+          <a:noFill/>
+        </p:spPr>
+        <p:txBody>
+          <a:bodyPr wrap="square" rtlCol="0">
+            <a:spAutoFit/>
+          </a:bodyPr>
+          <a:lstStyle/>
+          <a:p>
+            <a:pPr marL="457200" indent="-457200" algn="just">
+              <a:buFont typeface="Arial" panose="020B0604020202020204" pitchFamily="34" charset="0"/>
+              <a:buChar char="•"/>
+            </a:pPr>
+            <a:r>
+              <a:rPr lang="en-US" sz="2400" dirty="0">
+                <a:latin typeface="UCL Sans" panose="020B0604020202020204" charset="0"/>
+                <a:ea typeface="Sans Serif Collection" panose="020B0502040504020204" pitchFamily="34" charset="0"/>
+                <a:cs typeface="Sans Serif Collection" panose="020B0502040504020204" pitchFamily="34" charset="0"/>
+              </a:rPr>
+              <a:t>The first and third fundamental modes have been experimentally measured, but not the second, despite intensity seeming higher.</a:t>
+            </a:r>
+            <a:endParaRPr lang="en-GB" sz="2400" dirty="0">
+              <a:latin typeface="UCL Sans" panose="020B0604020202020204" charset="0"/>
+              <a:ea typeface="Sans Serif Collection" panose="020B0502040504020204" pitchFamily="34" charset="0"/>
+              <a:cs typeface="Sans Serif Collection" panose="020B0502040504020204" pitchFamily="34" charset="0"/>
+            </a:endParaRPr>
+          </a:p>
+        </p:txBody>
+      </p:sp>
+      <p:sp>
+        <p:nvSpPr>
+          <p:cNvPr id="156" name="TextBox 155">
+            <a:extLst>
+              <a:ext uri="{FF2B5EF4-FFF2-40B4-BE49-F238E27FC236}">
+                <a16:creationId xmlns:a16="http://schemas.microsoft.com/office/drawing/2014/main" id="{5829362F-B08F-4FBF-4EF7-5BBF774E6B93}"/>
+              </a:ext>
+            </a:extLst>
+          </p:cNvPr>
+          <p:cNvSpPr txBox="1"/>
+          <p:nvPr/>
+        </p:nvSpPr>
+        <p:spPr>
+          <a:xfrm>
+            <a:off x="829926" y="23608216"/>
+            <a:ext cx="1369286" cy="707886"/>
+          </a:xfrm>
+          <a:prstGeom prst="rect">
+            <a:avLst/>
+          </a:prstGeom>
+          <a:noFill/>
+        </p:spPr>
+        <p:txBody>
+          <a:bodyPr wrap="none" rtlCol="0">
+            <a:spAutoFit/>
+          </a:bodyPr>
+          <a:lstStyle/>
+          <a:p>
+            <a:r>
+              <a:rPr lang="en-US" sz="4000" dirty="0">
+                <a:latin typeface="UCL Sans" panose="020B0604020202020204" charset="0"/>
+                <a:ea typeface="Sans Serif Collection" panose="020B0502040504020204" pitchFamily="34" charset="0"/>
+                <a:cs typeface="Sans Serif Collection" panose="020B0502040504020204" pitchFamily="34" charset="0"/>
+              </a:rPr>
+              <a:t>Aims</a:t>
+            </a:r>
+            <a:endParaRPr lang="en-GB" sz="4000" dirty="0">
+              <a:latin typeface="UCL Sans" panose="020B0604020202020204" charset="0"/>
+              <a:ea typeface="Sans Serif Collection" panose="020B0502040504020204" pitchFamily="34" charset="0"/>
+              <a:cs typeface="Sans Serif Collection" panose="020B0502040504020204" pitchFamily="34" charset="0"/>
+            </a:endParaRPr>
+          </a:p>
+        </p:txBody>
+      </p:sp>
+      <p:sp>
+        <p:nvSpPr>
+          <p:cNvPr id="158" name="TextBox 157">
+            <a:extLst>
+              <a:ext uri="{FF2B5EF4-FFF2-40B4-BE49-F238E27FC236}">
+                <a16:creationId xmlns:a16="http://schemas.microsoft.com/office/drawing/2014/main" id="{921CFE3D-2C64-682F-0F74-CB48C110ED37}"/>
+              </a:ext>
+            </a:extLst>
+          </p:cNvPr>
+          <p:cNvSpPr txBox="1"/>
+          <p:nvPr/>
+        </p:nvSpPr>
+        <p:spPr>
+          <a:xfrm>
+            <a:off x="29278024" y="7746773"/>
+            <a:ext cx="12761366" cy="1384995"/>
+          </a:xfrm>
+          <a:prstGeom prst="rect">
+            <a:avLst/>
+          </a:prstGeom>
+          <a:noFill/>
+        </p:spPr>
+        <p:txBody>
+          <a:bodyPr wrap="square" rtlCol="0">
+            <a:spAutoFit/>
+          </a:bodyPr>
+          <a:lstStyle/>
+          <a:p>
+            <a:pPr algn="just"/>
+            <a:r>
+              <a:rPr lang="en-US" sz="2800" dirty="0">
+                <a:latin typeface="UCL Sans" panose="020B0604020202020204" charset="0"/>
+                <a:ea typeface="Sans Serif Collection" panose="020B0502040504020204" pitchFamily="34" charset="0"/>
+                <a:cs typeface="Sans Serif Collection" panose="020B0502040504020204" pitchFamily="34" charset="0"/>
+              </a:rPr>
+              <a:t>Rovibrational energies and wavefunctions are computed with variational nuclear motion program TROVE, then used to compute stick spectra and cross sections.</a:t>
+            </a:r>
+            <a:endParaRPr lang="en-GB" sz="2800" dirty="0">
+              <a:latin typeface="UCL Sans" panose="020B0604020202020204" charset="0"/>
+              <a:ea typeface="Sans Serif Collection" panose="020B0502040504020204" pitchFamily="34" charset="0"/>
+              <a:cs typeface="Sans Serif Collection" panose="020B0502040504020204" pitchFamily="34" charset="0"/>
+            </a:endParaRPr>
+          </a:p>
+        </p:txBody>
+      </p:sp>
+      <p:pic>
+        <p:nvPicPr>
+          <p:cNvPr id="160" name="Picture 159">
+            <a:extLst>
+              <a:ext uri="{FF2B5EF4-FFF2-40B4-BE49-F238E27FC236}">
+                <a16:creationId xmlns:a16="http://schemas.microsoft.com/office/drawing/2014/main" id="{EB415472-1A49-1599-EE17-227300B70D7D}"/>
+              </a:ext>
+            </a:extLst>
+          </p:cNvPr>
+          <p:cNvPicPr>
+            <a:picLocks noChangeAspect="1"/>
+          </p:cNvPicPr>
+          <p:nvPr/>
+        </p:nvPicPr>
+        <p:blipFill>
+          <a:blip r:embed="rId20">
+            <a:extLst>
+              <a:ext uri="{28A0092B-C50C-407E-A947-70E740481C1C}">
+                <a14:useLocalDpi xmlns:a14="http://schemas.microsoft.com/office/drawing/2010/main" val="0"/>
+              </a:ext>
+            </a:extLst>
+          </a:blip>
+          <a:stretch>
+            <a:fillRect/>
+          </a:stretch>
+        </p:blipFill>
+        <p:spPr>
+          <a:xfrm>
+            <a:off x="35260507" y="16780718"/>
+            <a:ext cx="5336740" cy="3712515"/>
+          </a:xfrm>
+          <a:prstGeom prst="rect">
+            <a:avLst/>
+          </a:prstGeom>
+        </p:spPr>
+      </p:pic>
+      <p:sp>
+        <p:nvSpPr>
+          <p:cNvPr id="162" name="TextBox 161">
+            <a:extLst>
+              <a:ext uri="{FF2B5EF4-FFF2-40B4-BE49-F238E27FC236}">
+                <a16:creationId xmlns:a16="http://schemas.microsoft.com/office/drawing/2014/main" id="{F31CBD7B-4CD3-4D28-1A2D-67E917A010A7}"/>
+              </a:ext>
+            </a:extLst>
+          </p:cNvPr>
+          <p:cNvSpPr txBox="1"/>
+          <p:nvPr/>
+        </p:nvSpPr>
+        <p:spPr>
+          <a:xfrm>
+            <a:off x="29818125" y="17077227"/>
+            <a:ext cx="5336740" cy="2677656"/>
+          </a:xfrm>
+          <a:prstGeom prst="rect">
+            <a:avLst/>
+          </a:prstGeom>
+          <a:noFill/>
+        </p:spPr>
+        <p:txBody>
+          <a:bodyPr wrap="square" rtlCol="0">
+            <a:spAutoFit/>
+          </a:bodyPr>
+          <a:lstStyle/>
+          <a:p>
+            <a:pPr algn="just"/>
+            <a:r>
+              <a:rPr lang="en-US" sz="2800" dirty="0">
+                <a:latin typeface="UCL Sans" panose="020B0604020202020204" charset="0"/>
+                <a:ea typeface="Sans Serif Collection" panose="020B0502040504020204" pitchFamily="34" charset="0"/>
+                <a:cs typeface="Sans Serif Collection" panose="020B0502040504020204" pitchFamily="34" charset="0"/>
+              </a:rPr>
+              <a:t>Cross-section plot computed with states up to J=141. </a:t>
+            </a:r>
+          </a:p>
+          <a:p>
+            <a:pPr algn="just"/>
+            <a:endParaRPr lang="en-US" sz="2800" dirty="0">
+              <a:latin typeface="UCL Sans" panose="020B0604020202020204" charset="0"/>
+              <a:ea typeface="Sans Serif Collection" panose="020B0502040504020204" pitchFamily="34" charset="0"/>
+              <a:cs typeface="Sans Serif Collection" panose="020B0502040504020204" pitchFamily="34" charset="0"/>
+            </a:endParaRPr>
+          </a:p>
+          <a:p>
+            <a:pPr algn="just"/>
+            <a:r>
+              <a:rPr lang="en-US" sz="2800" dirty="0">
+                <a:latin typeface="UCL Sans" panose="020B0604020202020204" charset="0"/>
+                <a:ea typeface="Sans Serif Collection" panose="020B0502040504020204" pitchFamily="34" charset="0"/>
+                <a:cs typeface="Sans Serif Collection" panose="020B0502040504020204" pitchFamily="34" charset="0"/>
+              </a:rPr>
+              <a:t>Partition function convergence suggests J=120 could be sufficient.</a:t>
+            </a:r>
+            <a:endParaRPr lang="en-GB" sz="2800" dirty="0">
+              <a:latin typeface="UCL Sans" panose="020B0604020202020204" charset="0"/>
+              <a:ea typeface="Sans Serif Collection" panose="020B0502040504020204" pitchFamily="34" charset="0"/>
+              <a:cs typeface="Sans Serif Collection" panose="020B0502040504020204" pitchFamily="34" charset="0"/>
+            </a:endParaRPr>
+          </a:p>
+        </p:txBody>
+      </p:sp>
+      <p:sp>
+        <p:nvSpPr>
+          <p:cNvPr id="164" name="TextBox 163">
+            <a:extLst>
+              <a:ext uri="{FF2B5EF4-FFF2-40B4-BE49-F238E27FC236}">
+                <a16:creationId xmlns:a16="http://schemas.microsoft.com/office/drawing/2014/main" id="{B0659921-B3E1-7BBE-F94D-F1946E6E78D7}"/>
+              </a:ext>
+            </a:extLst>
+          </p:cNvPr>
+          <p:cNvSpPr txBox="1"/>
+          <p:nvPr/>
+        </p:nvSpPr>
+        <p:spPr>
+          <a:xfrm>
+            <a:off x="649488" y="11743615"/>
+            <a:ext cx="6604524" cy="954107"/>
+          </a:xfrm>
+          <a:prstGeom prst="rect">
+            <a:avLst/>
+          </a:prstGeom>
+          <a:noFill/>
+        </p:spPr>
+        <p:txBody>
+          <a:bodyPr wrap="square" rtlCol="0">
+            <a:spAutoFit/>
+          </a:bodyPr>
+          <a:lstStyle/>
+          <a:p>
+            <a:r>
+              <a:rPr lang="en-US" sz="2800" dirty="0">
+                <a:latin typeface="UCL Sans" panose="020B0604020202020204" charset="0"/>
+                <a:ea typeface="Sans Serif Collection" panose="020B0502040504020204" pitchFamily="34" charset="0"/>
+                <a:cs typeface="Sans Serif Collection" panose="020B0502040504020204" pitchFamily="34" charset="0"/>
+              </a:rPr>
+              <a:t>Equilibrium bond lengths and angles at the electronic ground state:</a:t>
+            </a:r>
+            <a:endParaRPr lang="en-GB" sz="2800" dirty="0">
+              <a:latin typeface="UCL Sans" panose="020B0604020202020204" charset="0"/>
+              <a:ea typeface="Sans Serif Collection" panose="020B0502040504020204" pitchFamily="34" charset="0"/>
+              <a:cs typeface="Sans Serif Collection" panose="020B0502040504020204" pitchFamily="34" charset="0"/>
+            </a:endParaRPr>
+          </a:p>
+        </p:txBody>
+      </p:sp>
     </p:spTree>
     <p:extLst>
       <p:ext uri="{BB962C8B-B14F-4D97-AF65-F5344CB8AC3E}">

--- a/poster_draft.pptx
+++ b/poster_draft.pptx
@@ -150,7 +150,7 @@
 <file path=ppt/revisionInfo.xml><?xml version="1.0" encoding="utf-8"?>
 <p1510:revInfo xmlns:a="http://schemas.openxmlformats.org/drawingml/2006/main" xmlns:r="http://schemas.openxmlformats.org/officeDocument/2006/relationships" xmlns:p1510="http://schemas.microsoft.com/office/powerpoint/2015/10/main">
   <p1510:revLst>
-    <p1510:client id="{7F17B0CF-DC0F-479A-8BD4-09BA188B4891}" v="15" dt="2026-08-20T18:13:09.408"/>
+    <p1510:client id="{7F17B0CF-DC0F-479A-8BD4-09BA188B4891}" v="19" dt="2026-08-21T14:28:29.711"/>
   </p1510:revLst>
 </p1510:revInfo>
 </file>
@@ -159,13 +159,13 @@
 <pc:chgInfo xmlns:a="http://schemas.openxmlformats.org/drawingml/2006/main" xmlns:r="http://schemas.openxmlformats.org/officeDocument/2006/relationships" xmlns:ac="http://schemas.microsoft.com/office/drawing/2013/main/command" xmlns:pc="http://schemas.microsoft.com/office/powerpoint/2013/main/command">
   <pc:docChgLst>
     <pc:chgData name="Ryan Mok" userId="2b5ff9b4bc27d924" providerId="LiveId" clId="{98BDB49B-93C9-4AB7-A5FC-395AE49E91C6}"/>
-    <pc:docChg chg="undo custSel delSld modSld delMainMaster">
-      <pc:chgData name="Ryan Mok" userId="2b5ff9b4bc27d924" providerId="LiveId" clId="{98BDB49B-93C9-4AB7-A5FC-395AE49E91C6}" dt="2026-08-20T18:46:43.468" v="6421" actId="14100"/>
+    <pc:docChg chg="undo custSel addSld delSld modSld delMainMaster">
+      <pc:chgData name="Ryan Mok" userId="2b5ff9b4bc27d924" providerId="LiveId" clId="{98BDB49B-93C9-4AB7-A5FC-395AE49E91C6}" dt="2026-08-21T14:28:37.744" v="7501" actId="47"/>
       <pc:docMkLst>
         <pc:docMk/>
       </pc:docMkLst>
       <pc:sldChg chg="addSp delSp modSp mod setBg">
-        <pc:chgData name="Ryan Mok" userId="2b5ff9b4bc27d924" providerId="LiveId" clId="{98BDB49B-93C9-4AB7-A5FC-395AE49E91C6}" dt="2026-08-20T18:46:43.468" v="6421" actId="14100"/>
+        <pc:chgData name="Ryan Mok" userId="2b5ff9b4bc27d924" providerId="LiveId" clId="{98BDB49B-93C9-4AB7-A5FC-395AE49E91C6}" dt="2026-08-21T01:11:05.012" v="7499" actId="1036"/>
         <pc:sldMkLst>
           <pc:docMk/>
           <pc:sldMk cId="4284697073" sldId="257"/>
@@ -179,7 +179,7 @@
           </ac:spMkLst>
         </pc:spChg>
         <pc:spChg chg="mod">
-          <ac:chgData name="Ryan Mok" userId="2b5ff9b4bc27d924" providerId="LiveId" clId="{98BDB49B-93C9-4AB7-A5FC-395AE49E91C6}" dt="2026-08-19T14:51:07.013" v="350"/>
+          <ac:chgData name="Ryan Mok" userId="2b5ff9b4bc27d924" providerId="LiveId" clId="{98BDB49B-93C9-4AB7-A5FC-395AE49E91C6}" dt="2026-08-20T22:41:33.102" v="6472" actId="165"/>
           <ac:spMkLst>
             <pc:docMk/>
             <pc:sldMk cId="4284697073" sldId="257"/>
@@ -195,7 +195,7 @@
           </ac:spMkLst>
         </pc:spChg>
         <pc:spChg chg="mod">
-          <ac:chgData name="Ryan Mok" userId="2b5ff9b4bc27d924" providerId="LiveId" clId="{98BDB49B-93C9-4AB7-A5FC-395AE49E91C6}" dt="2026-08-19T14:51:07.013" v="350"/>
+          <ac:chgData name="Ryan Mok" userId="2b5ff9b4bc27d924" providerId="LiveId" clId="{98BDB49B-93C9-4AB7-A5FC-395AE49E91C6}" dt="2026-08-20T22:41:33.102" v="6472" actId="165"/>
           <ac:spMkLst>
             <pc:docMk/>
             <pc:sldMk cId="4284697073" sldId="257"/>
@@ -211,7 +211,7 @@
           </ac:spMkLst>
         </pc:spChg>
         <pc:spChg chg="mod">
-          <ac:chgData name="Ryan Mok" userId="2b5ff9b4bc27d924" providerId="LiveId" clId="{98BDB49B-93C9-4AB7-A5FC-395AE49E91C6}" dt="2026-08-19T14:51:07.013" v="350"/>
+          <ac:chgData name="Ryan Mok" userId="2b5ff9b4bc27d924" providerId="LiveId" clId="{98BDB49B-93C9-4AB7-A5FC-395AE49E91C6}" dt="2026-08-20T22:41:33.102" v="6472" actId="165"/>
           <ac:spMkLst>
             <pc:docMk/>
             <pc:sldMk cId="4284697073" sldId="257"/>
@@ -219,7 +219,7 @@
           </ac:spMkLst>
         </pc:spChg>
         <pc:spChg chg="mod">
-          <ac:chgData name="Ryan Mok" userId="2b5ff9b4bc27d924" providerId="LiveId" clId="{98BDB49B-93C9-4AB7-A5FC-395AE49E91C6}" dt="2026-08-19T14:51:07.013" v="350"/>
+          <ac:chgData name="Ryan Mok" userId="2b5ff9b4bc27d924" providerId="LiveId" clId="{98BDB49B-93C9-4AB7-A5FC-395AE49E91C6}" dt="2026-08-20T22:41:33.102" v="6472" actId="165"/>
           <ac:spMkLst>
             <pc:docMk/>
             <pc:sldMk cId="4284697073" sldId="257"/>
@@ -242,32 +242,8 @@
             <ac:spMk id="19" creationId="{A040BF02-FA75-C7E9-C4F3-F7704E26E427}"/>
           </ac:spMkLst>
         </pc:spChg>
-        <pc:spChg chg="del">
-          <ac:chgData name="Ryan Mok" userId="2b5ff9b4bc27d924" providerId="LiveId" clId="{98BDB49B-93C9-4AB7-A5FC-395AE49E91C6}" dt="2026-08-19T14:58:13.518" v="352" actId="478"/>
-          <ac:spMkLst>
-            <pc:docMk/>
-            <pc:sldMk cId="4284697073" sldId="257"/>
-            <ac:spMk id="21" creationId="{9678B249-83F4-209B-9C2A-C9BEB6C13020}"/>
-          </ac:spMkLst>
-        </pc:spChg>
-        <pc:spChg chg="del">
-          <ac:chgData name="Ryan Mok" userId="2b5ff9b4bc27d924" providerId="LiveId" clId="{98BDB49B-93C9-4AB7-A5FC-395AE49E91C6}" dt="2026-08-19T14:58:14.483" v="353" actId="478"/>
-          <ac:spMkLst>
-            <pc:docMk/>
-            <pc:sldMk cId="4284697073" sldId="257"/>
-            <ac:spMk id="22" creationId="{D6C21CA2-FD8B-96F0-F877-0F7A3134086A}"/>
-          </ac:spMkLst>
-        </pc:spChg>
-        <pc:spChg chg="del">
-          <ac:chgData name="Ryan Mok" userId="2b5ff9b4bc27d924" providerId="LiveId" clId="{98BDB49B-93C9-4AB7-A5FC-395AE49E91C6}" dt="2026-08-19T14:58:16.565" v="354" actId="478"/>
-          <ac:spMkLst>
-            <pc:docMk/>
-            <pc:sldMk cId="4284697073" sldId="257"/>
-            <ac:spMk id="23" creationId="{81346889-22B2-6F9B-A0BE-03766389A0B4}"/>
-          </ac:spMkLst>
-        </pc:spChg>
         <pc:spChg chg="mod">
-          <ac:chgData name="Ryan Mok" userId="2b5ff9b4bc27d924" providerId="LiveId" clId="{98BDB49B-93C9-4AB7-A5FC-395AE49E91C6}" dt="2026-08-19T14:59:34.933" v="371" actId="34135"/>
+          <ac:chgData name="Ryan Mok" userId="2b5ff9b4bc27d924" providerId="LiveId" clId="{98BDB49B-93C9-4AB7-A5FC-395AE49E91C6}" dt="2026-08-20T22:41:33.102" v="6472" actId="165"/>
           <ac:spMkLst>
             <pc:docMk/>
             <pc:sldMk cId="4284697073" sldId="257"/>
@@ -283,7 +259,7 @@
           </ac:spMkLst>
         </pc:spChg>
         <pc:spChg chg="mod">
-          <ac:chgData name="Ryan Mok" userId="2b5ff9b4bc27d924" providerId="LiveId" clId="{98BDB49B-93C9-4AB7-A5FC-395AE49E91C6}" dt="2026-08-19T14:59:34.933" v="371" actId="34135"/>
+          <ac:chgData name="Ryan Mok" userId="2b5ff9b4bc27d924" providerId="LiveId" clId="{98BDB49B-93C9-4AB7-A5FC-395AE49E91C6}" dt="2026-08-20T22:41:33.102" v="6472" actId="165"/>
           <ac:spMkLst>
             <pc:docMk/>
             <pc:sldMk cId="4284697073" sldId="257"/>
@@ -291,7 +267,7 @@
           </ac:spMkLst>
         </pc:spChg>
         <pc:spChg chg="mod">
-          <ac:chgData name="Ryan Mok" userId="2b5ff9b4bc27d924" providerId="LiveId" clId="{98BDB49B-93C9-4AB7-A5FC-395AE49E91C6}" dt="2026-08-19T14:59:34.933" v="371" actId="34135"/>
+          <ac:chgData name="Ryan Mok" userId="2b5ff9b4bc27d924" providerId="LiveId" clId="{98BDB49B-93C9-4AB7-A5FC-395AE49E91C6}" dt="2026-08-20T22:41:33.102" v="6472" actId="165"/>
           <ac:spMkLst>
             <pc:docMk/>
             <pc:sldMk cId="4284697073" sldId="257"/>
@@ -315,7 +291,7 @@
           </ac:spMkLst>
         </pc:spChg>
         <pc:spChg chg="mod">
-          <ac:chgData name="Ryan Mok" userId="2b5ff9b4bc27d924" providerId="LiveId" clId="{98BDB49B-93C9-4AB7-A5FC-395AE49E91C6}" dt="2026-08-19T14:59:34.933" v="371" actId="34135"/>
+          <ac:chgData name="Ryan Mok" userId="2b5ff9b4bc27d924" providerId="LiveId" clId="{98BDB49B-93C9-4AB7-A5FC-395AE49E91C6}" dt="2026-08-20T22:41:33.102" v="6472" actId="165"/>
           <ac:spMkLst>
             <pc:docMk/>
             <pc:sldMk cId="4284697073" sldId="257"/>
@@ -331,19 +307,11 @@
           </ac:spMkLst>
         </pc:spChg>
         <pc:spChg chg="mod">
-          <ac:chgData name="Ryan Mok" userId="2b5ff9b4bc27d924" providerId="LiveId" clId="{98BDB49B-93C9-4AB7-A5FC-395AE49E91C6}" dt="2026-08-19T14:51:07.013" v="350"/>
+          <ac:chgData name="Ryan Mok" userId="2b5ff9b4bc27d924" providerId="LiveId" clId="{98BDB49B-93C9-4AB7-A5FC-395AE49E91C6}" dt="2026-08-20T22:41:33.102" v="6472" actId="165"/>
           <ac:spMkLst>
             <pc:docMk/>
             <pc:sldMk cId="4284697073" sldId="257"/>
             <ac:spMk id="34" creationId="{43EE5CC4-6E3B-FD2D-7D7B-29AA66F948DA}"/>
-          </ac:spMkLst>
-        </pc:spChg>
-        <pc:spChg chg="add del mod">
-          <ac:chgData name="Ryan Mok" userId="2b5ff9b4bc27d924" providerId="LiveId" clId="{98BDB49B-93C9-4AB7-A5FC-395AE49E91C6}" dt="2026-08-19T14:58:24.418" v="356" actId="478"/>
-          <ac:spMkLst>
-            <pc:docMk/>
-            <pc:sldMk cId="4284697073" sldId="257"/>
-            <ac:spMk id="38" creationId="{2EE6155E-CC86-8839-5E88-21C0B1F87184}"/>
           </ac:spMkLst>
         </pc:spChg>
         <pc:spChg chg="add del mod ord">
@@ -378,8 +346,8 @@
             <ac:spMk id="122" creationId="{D8407765-B900-8615-E960-4F485E521845}"/>
           </ac:spMkLst>
         </pc:spChg>
-        <pc:spChg chg="add mod">
-          <ac:chgData name="Ryan Mok" userId="2b5ff9b4bc27d924" providerId="LiveId" clId="{98BDB49B-93C9-4AB7-A5FC-395AE49E91C6}" dt="2026-08-20T18:34:59.409" v="6162" actId="20577"/>
+        <pc:spChg chg="add mod topLvl">
+          <ac:chgData name="Ryan Mok" userId="2b5ff9b4bc27d924" providerId="LiveId" clId="{98BDB49B-93C9-4AB7-A5FC-395AE49E91C6}" dt="2026-08-20T22:41:33.102" v="6472" actId="165"/>
           <ac:spMkLst>
             <pc:docMk/>
             <pc:sldMk cId="4284697073" sldId="257"/>
@@ -387,7 +355,7 @@
           </ac:spMkLst>
         </pc:spChg>
         <pc:spChg chg="add mod">
-          <ac:chgData name="Ryan Mok" userId="2b5ff9b4bc27d924" providerId="LiveId" clId="{98BDB49B-93C9-4AB7-A5FC-395AE49E91C6}" dt="2026-08-20T18:17:50.260" v="5963" actId="20577"/>
+          <ac:chgData name="Ryan Mok" userId="2b5ff9b4bc27d924" providerId="LiveId" clId="{98BDB49B-93C9-4AB7-A5FC-395AE49E91C6}" dt="2026-08-20T22:40:21.607" v="6425" actId="164"/>
           <ac:spMkLst>
             <pc:docMk/>
             <pc:sldMk cId="4284697073" sldId="257"/>
@@ -427,7 +395,7 @@
           </ac:spMkLst>
         </pc:spChg>
         <pc:spChg chg="add mod">
-          <ac:chgData name="Ryan Mok" userId="2b5ff9b4bc27d924" providerId="LiveId" clId="{98BDB49B-93C9-4AB7-A5FC-395AE49E91C6}" dt="2026-08-20T18:13:37.483" v="5634" actId="20577"/>
+          <ac:chgData name="Ryan Mok" userId="2b5ff9b4bc27d924" providerId="LiveId" clId="{98BDB49B-93C9-4AB7-A5FC-395AE49E91C6}" dt="2026-08-20T22:33:57.698" v="6424" actId="20577"/>
           <ac:spMkLst>
             <pc:docMk/>
             <pc:sldMk cId="4284697073" sldId="257"/>
@@ -475,7 +443,7 @@
           </ac:spMkLst>
         </pc:spChg>
         <pc:spChg chg="add mod">
-          <ac:chgData name="Ryan Mok" userId="2b5ff9b4bc27d924" providerId="LiveId" clId="{98BDB49B-93C9-4AB7-A5FC-395AE49E91C6}" dt="2026-08-20T18:14:21.410" v="5654" actId="1076"/>
+          <ac:chgData name="Ryan Mok" userId="2b5ff9b4bc27d924" providerId="LiveId" clId="{98BDB49B-93C9-4AB7-A5FC-395AE49E91C6}" dt="2026-08-21T01:11:05.012" v="7499" actId="1036"/>
           <ac:spMkLst>
             <pc:docMk/>
             <pc:sldMk cId="4284697073" sldId="257"/>
@@ -491,7 +459,7 @@
           </ac:spMkLst>
         </pc:spChg>
         <pc:spChg chg="add mod">
-          <ac:chgData name="Ryan Mok" userId="2b5ff9b4bc27d924" providerId="LiveId" clId="{98BDB49B-93C9-4AB7-A5FC-395AE49E91C6}" dt="2026-08-20T18:12:17.629" v="5607" actId="2711"/>
+          <ac:chgData name="Ryan Mok" userId="2b5ff9b4bc27d924" providerId="LiveId" clId="{98BDB49B-93C9-4AB7-A5FC-395AE49E91C6}" dt="2026-08-20T22:12:08.514" v="6423" actId="14100"/>
           <ac:spMkLst>
             <pc:docMk/>
             <pc:sldMk cId="4284697073" sldId="257"/>
@@ -499,7 +467,7 @@
           </ac:spMkLst>
         </pc:spChg>
         <pc:spChg chg="add mod">
-          <ac:chgData name="Ryan Mok" userId="2b5ff9b4bc27d924" providerId="LiveId" clId="{98BDB49B-93C9-4AB7-A5FC-395AE49E91C6}" dt="2026-08-20T18:13:59.468" v="5652" actId="1036"/>
+          <ac:chgData name="Ryan Mok" userId="2b5ff9b4bc27d924" providerId="LiveId" clId="{98BDB49B-93C9-4AB7-A5FC-395AE49E91C6}" dt="2026-08-20T22:40:21.607" v="6425" actId="164"/>
           <ac:spMkLst>
             <pc:docMk/>
             <pc:sldMk cId="4284697073" sldId="257"/>
@@ -515,7 +483,7 @@
           </ac:spMkLst>
         </pc:spChg>
         <pc:spChg chg="add mod">
-          <ac:chgData name="Ryan Mok" userId="2b5ff9b4bc27d924" providerId="LiveId" clId="{98BDB49B-93C9-4AB7-A5FC-395AE49E91C6}" dt="2026-08-20T18:30:11.599" v="6147" actId="1076"/>
+          <ac:chgData name="Ryan Mok" userId="2b5ff9b4bc27d924" providerId="LiveId" clId="{98BDB49B-93C9-4AB7-A5FC-395AE49E91C6}" dt="2026-08-21T00:47:52.733" v="6491" actId="20577"/>
           <ac:spMkLst>
             <pc:docMk/>
             <pc:sldMk cId="4284697073" sldId="257"/>
@@ -523,15 +491,47 @@
           </ac:spMkLst>
         </pc:spChg>
         <pc:spChg chg="add mod">
-          <ac:chgData name="Ryan Mok" userId="2b5ff9b4bc27d924" providerId="LiveId" clId="{98BDB49B-93C9-4AB7-A5FC-395AE49E91C6}" dt="2026-08-20T18:45:12.227" v="6354" actId="20577"/>
+          <ac:chgData name="Ryan Mok" userId="2b5ff9b4bc27d924" providerId="LiveId" clId="{98BDB49B-93C9-4AB7-A5FC-395AE49E91C6}" dt="2026-08-20T22:40:29.184" v="6427" actId="164"/>
           <ac:spMkLst>
             <pc:docMk/>
             <pc:sldMk cId="4284697073" sldId="257"/>
             <ac:spMk id="164" creationId="{B0659921-B3E1-7BBE-F94D-F1946E6E78D7}"/>
           </ac:spMkLst>
         </pc:spChg>
+        <pc:spChg chg="add mod">
+          <ac:chgData name="Ryan Mok" userId="2b5ff9b4bc27d924" providerId="LiveId" clId="{98BDB49B-93C9-4AB7-A5FC-395AE49E91C6}" dt="2026-08-21T01:08:11.374" v="7208" actId="20577"/>
+          <ac:spMkLst>
+            <pc:docMk/>
+            <pc:sldMk cId="4284697073" sldId="257"/>
+            <ac:spMk id="172" creationId="{95893D50-B6C1-E420-02C3-190327F57E9B}"/>
+          </ac:spMkLst>
+        </pc:spChg>
+        <pc:spChg chg="add mod">
+          <ac:chgData name="Ryan Mok" userId="2b5ff9b4bc27d924" providerId="LiveId" clId="{98BDB49B-93C9-4AB7-A5FC-395AE49E91C6}" dt="2026-08-21T01:05:50.045" v="6991" actId="1076"/>
+          <ac:spMkLst>
+            <pc:docMk/>
+            <pc:sldMk cId="4284697073" sldId="257"/>
+            <ac:spMk id="174" creationId="{980858E8-683A-2577-D40D-F2E523E6DEFE}"/>
+          </ac:spMkLst>
+        </pc:spChg>
+        <pc:spChg chg="add mod">
+          <ac:chgData name="Ryan Mok" userId="2b5ff9b4bc27d924" providerId="LiveId" clId="{98BDB49B-93C9-4AB7-A5FC-395AE49E91C6}" dt="2026-08-21T01:08:59.311" v="7239" actId="1076"/>
+          <ac:spMkLst>
+            <pc:docMk/>
+            <pc:sldMk cId="4284697073" sldId="257"/>
+            <ac:spMk id="176" creationId="{FE9BCABD-D78F-9529-5E63-8C6CA3571D5A}"/>
+          </ac:spMkLst>
+        </pc:spChg>
+        <pc:spChg chg="add mod">
+          <ac:chgData name="Ryan Mok" userId="2b5ff9b4bc27d924" providerId="LiveId" clId="{98BDB49B-93C9-4AB7-A5FC-395AE49E91C6}" dt="2026-08-21T01:10:38.393" v="7491" actId="20577"/>
+          <ac:spMkLst>
+            <pc:docMk/>
+            <pc:sldMk cId="4284697073" sldId="257"/>
+            <ac:spMk id="178" creationId="{1269B754-7CEA-2333-DCE1-5FA63413416B}"/>
+          </ac:spMkLst>
+        </pc:spChg>
         <pc:grpChg chg="add mod">
-          <ac:chgData name="Ryan Mok" userId="2b5ff9b4bc27d924" providerId="LiveId" clId="{98BDB49B-93C9-4AB7-A5FC-395AE49E91C6}" dt="2026-08-20T16:41:49.157" v="3991" actId="1035"/>
+          <ac:chgData name="Ryan Mok" userId="2b5ff9b4bc27d924" providerId="LiveId" clId="{98BDB49B-93C9-4AB7-A5FC-395AE49E91C6}" dt="2026-08-20T22:41:36.627" v="6476" actId="1038"/>
           <ac:grpSpMkLst>
             <pc:docMk/>
             <pc:sldMk cId="4284697073" sldId="257"/>
@@ -539,7 +539,7 @@
           </ac:grpSpMkLst>
         </pc:grpChg>
         <pc:grpChg chg="add mod">
-          <ac:chgData name="Ryan Mok" userId="2b5ff9b4bc27d924" providerId="LiveId" clId="{98BDB49B-93C9-4AB7-A5FC-395AE49E91C6}" dt="2026-08-20T16:41:49.157" v="3991" actId="1035"/>
+          <ac:chgData name="Ryan Mok" userId="2b5ff9b4bc27d924" providerId="LiveId" clId="{98BDB49B-93C9-4AB7-A5FC-395AE49E91C6}" dt="2026-08-20T22:40:29.184" v="6427" actId="164"/>
           <ac:grpSpMkLst>
             <pc:docMk/>
             <pc:sldMk cId="4284697073" sldId="257"/>
@@ -560,14 +560,6 @@
             <pc:docMk/>
             <pc:sldMk cId="4284697073" sldId="257"/>
             <ac:grpSpMk id="49" creationId="{4BD306FF-155C-E1B4-05CC-94D5B1DE0DD9}"/>
-          </ac:grpSpMkLst>
-        </pc:grpChg>
-        <pc:grpChg chg="add mod">
-          <ac:chgData name="Ryan Mok" userId="2b5ff9b4bc27d924" providerId="LiveId" clId="{98BDB49B-93C9-4AB7-A5FC-395AE49E91C6}" dt="2026-08-19T16:41:56.071" v="634" actId="164"/>
-          <ac:grpSpMkLst>
-            <pc:docMk/>
-            <pc:sldMk cId="4284697073" sldId="257"/>
-            <ac:grpSpMk id="70" creationId="{94C02973-051B-7BBD-8136-125FD8B98A51}"/>
           </ac:grpSpMkLst>
         </pc:grpChg>
         <pc:grpChg chg="add mod">
@@ -600,6 +592,22 @@
             <pc:docMk/>
             <pc:sldMk cId="4284697073" sldId="257"/>
             <ac:grpSpMk id="120" creationId="{002A3799-5903-3234-64B3-B834543B2289}"/>
+          </ac:grpSpMkLst>
+        </pc:grpChg>
+        <pc:grpChg chg="add mod">
+          <ac:chgData name="Ryan Mok" userId="2b5ff9b4bc27d924" providerId="LiveId" clId="{98BDB49B-93C9-4AB7-A5FC-395AE49E91C6}" dt="2026-08-20T22:40:44.609" v="6471" actId="1035"/>
+          <ac:grpSpMkLst>
+            <pc:docMk/>
+            <pc:sldMk cId="4284697073" sldId="257"/>
+            <ac:grpSpMk id="165" creationId="{FD28D386-BC71-BB40-E109-EA3559B36BD6}"/>
+          </ac:grpSpMkLst>
+        </pc:grpChg>
+        <pc:grpChg chg="add mod">
+          <ac:chgData name="Ryan Mok" userId="2b5ff9b4bc27d924" providerId="LiveId" clId="{98BDB49B-93C9-4AB7-A5FC-395AE49E91C6}" dt="2026-08-20T22:40:32.913" v="6468" actId="1036"/>
+          <ac:grpSpMkLst>
+            <pc:docMk/>
+            <pc:sldMk cId="4284697073" sldId="257"/>
+            <ac:grpSpMk id="166" creationId="{50563207-36B7-20A4-5C6C-368D891BF695}"/>
           </ac:grpSpMkLst>
         </pc:grpChg>
         <pc:picChg chg="add mod">
@@ -666,36 +674,12 @@
             <ac:picMk id="46" creationId="{25ED895A-1E99-2835-CC36-BD6AE647E269}"/>
           </ac:picMkLst>
         </pc:picChg>
-        <pc:picChg chg="add del mod ord">
-          <ac:chgData name="Ryan Mok" userId="2b5ff9b4bc27d924" providerId="LiveId" clId="{98BDB49B-93C9-4AB7-A5FC-395AE49E91C6}" dt="2026-08-19T14:58:22.096" v="355" actId="478"/>
-          <ac:picMkLst>
-            <pc:docMk/>
-            <pc:sldMk cId="4284697073" sldId="257"/>
-            <ac:picMk id="46" creationId="{648DE49E-2738-9E11-8AA2-69CDCF99E6F5}"/>
-          </ac:picMkLst>
-        </pc:picChg>
-        <pc:picChg chg="add del mod">
-          <ac:chgData name="Ryan Mok" userId="2b5ff9b4bc27d924" providerId="LiveId" clId="{98BDB49B-93C9-4AB7-A5FC-395AE49E91C6}" dt="2026-08-19T16:33:33.473" v="599" actId="478"/>
-          <ac:picMkLst>
-            <pc:docMk/>
-            <pc:sldMk cId="4284697073" sldId="257"/>
-            <ac:picMk id="47" creationId="{A7126727-5A2A-F505-1B41-ABFBB8ACF049}"/>
-          </ac:picMkLst>
-        </pc:picChg>
         <pc:picChg chg="add mod">
           <ac:chgData name="Ryan Mok" userId="2b5ff9b4bc27d924" providerId="LiveId" clId="{98BDB49B-93C9-4AB7-A5FC-395AE49E91C6}" dt="2026-08-20T13:56:41.582" v="708" actId="164"/>
           <ac:picMkLst>
             <pc:docMk/>
             <pc:sldMk cId="4284697073" sldId="257"/>
             <ac:picMk id="48" creationId="{A57E28DC-5F0F-F0FF-F7F8-AA980264D27A}"/>
-          </ac:picMkLst>
-        </pc:picChg>
-        <pc:picChg chg="add del mod">
-          <ac:chgData name="Ryan Mok" userId="2b5ff9b4bc27d924" providerId="LiveId" clId="{98BDB49B-93C9-4AB7-A5FC-395AE49E91C6}" dt="2026-08-19T16:33:33.473" v="599" actId="478"/>
-          <ac:picMkLst>
-            <pc:docMk/>
-            <pc:sldMk cId="4284697073" sldId="257"/>
-            <ac:picMk id="49" creationId="{5E16DF56-4C1A-B6E6-FA82-011A9DC779C4}"/>
           </ac:picMkLst>
         </pc:picChg>
         <pc:picChg chg="add del mod">
@@ -707,27 +691,11 @@
           </ac:picMkLst>
         </pc:picChg>
         <pc:picChg chg="add del mod">
-          <ac:chgData name="Ryan Mok" userId="2b5ff9b4bc27d924" providerId="LiveId" clId="{98BDB49B-93C9-4AB7-A5FC-395AE49E91C6}" dt="2026-08-19T16:33:33.473" v="599" actId="478"/>
-          <ac:picMkLst>
-            <pc:docMk/>
-            <pc:sldMk cId="4284697073" sldId="257"/>
-            <ac:picMk id="51" creationId="{C8B36003-7DA0-180E-F5C7-BCA0816FA3CC}"/>
-          </ac:picMkLst>
-        </pc:picChg>
-        <pc:picChg chg="add del mod">
           <ac:chgData name="Ryan Mok" userId="2b5ff9b4bc27d924" providerId="LiveId" clId="{98BDB49B-93C9-4AB7-A5FC-395AE49E91C6}" dt="2026-08-20T13:59:22.273" v="724" actId="478"/>
           <ac:picMkLst>
             <pc:docMk/>
             <pc:sldMk cId="4284697073" sldId="257"/>
             <ac:picMk id="53" creationId="{05D07929-AA32-9EC4-0E89-43EE4BDE474B}"/>
-          </ac:picMkLst>
-        </pc:picChg>
-        <pc:picChg chg="add del mod">
-          <ac:chgData name="Ryan Mok" userId="2b5ff9b4bc27d924" providerId="LiveId" clId="{98BDB49B-93C9-4AB7-A5FC-395AE49E91C6}" dt="2026-08-19T15:53:19.335" v="591" actId="478"/>
-          <ac:picMkLst>
-            <pc:docMk/>
-            <pc:sldMk cId="4284697073" sldId="257"/>
-            <ac:picMk id="53" creationId="{8EB495DA-F087-17E2-99F4-BF554BE35F30}"/>
           </ac:picMkLst>
         </pc:picChg>
         <pc:picChg chg="add del mod">
@@ -1003,7 +971,7 @@
           </ac:picMkLst>
         </pc:picChg>
         <pc:picChg chg="add mod">
-          <ac:chgData name="Ryan Mok" userId="2b5ff9b4bc27d924" providerId="LiveId" clId="{98BDB49B-93C9-4AB7-A5FC-395AE49E91C6}" dt="2026-08-20T18:18:09.558" v="5981" actId="1038"/>
+          <ac:chgData name="Ryan Mok" userId="2b5ff9b4bc27d924" providerId="LiveId" clId="{98BDB49B-93C9-4AB7-A5FC-395AE49E91C6}" dt="2026-08-21T00:47:38.717" v="6486" actId="1076"/>
           <ac:picMkLst>
             <pc:docMk/>
             <pc:sldMk cId="4284697073" sldId="257"/>
@@ -1011,11 +979,27 @@
           </ac:picMkLst>
         </pc:picChg>
         <pc:picChg chg="add mod">
-          <ac:chgData name="Ryan Mok" userId="2b5ff9b4bc27d924" providerId="LiveId" clId="{98BDB49B-93C9-4AB7-A5FC-395AE49E91C6}" dt="2026-08-20T18:21:39.982" v="5986" actId="1076"/>
+          <ac:chgData name="Ryan Mok" userId="2b5ff9b4bc27d924" providerId="LiveId" clId="{98BDB49B-93C9-4AB7-A5FC-395AE49E91C6}" dt="2026-08-21T00:47:43.897" v="6487" actId="1076"/>
           <ac:picMkLst>
             <pc:docMk/>
             <pc:sldMk cId="4284697073" sldId="257"/>
             <ac:picMk id="160" creationId="{EB415472-1A49-1599-EE17-227300B70D7D}"/>
+          </ac:picMkLst>
+        </pc:picChg>
+        <pc:picChg chg="add mod">
+          <ac:chgData name="Ryan Mok" userId="2b5ff9b4bc27d924" providerId="LiveId" clId="{98BDB49B-93C9-4AB7-A5FC-395AE49E91C6}" dt="2026-08-21T00:48:11.859" v="6499" actId="1076"/>
+          <ac:picMkLst>
+            <pc:docMk/>
+            <pc:sldMk cId="4284697073" sldId="257"/>
+            <ac:picMk id="168" creationId="{5EC106AB-5B2D-BBCE-AF51-5032489B7332}"/>
+          </ac:picMkLst>
+        </pc:picChg>
+        <pc:picChg chg="add mod">
+          <ac:chgData name="Ryan Mok" userId="2b5ff9b4bc27d924" providerId="LiveId" clId="{98BDB49B-93C9-4AB7-A5FC-395AE49E91C6}" dt="2026-08-21T00:59:26.650" v="6503" actId="14100"/>
+          <ac:picMkLst>
+            <pc:docMk/>
+            <pc:sldMk cId="4284697073" sldId="257"/>
+            <ac:picMk id="170" creationId="{59B91E42-0FF0-7E80-97A1-4BCBA412972C}"/>
           </ac:picMkLst>
         </pc:picChg>
         <pc:cxnChg chg="mod">
@@ -1035,6 +1019,28 @@
           </ac:cxnSpMkLst>
         </pc:cxnChg>
       </pc:sldChg>
+      <pc:sldChg chg="add del">
+        <pc:chgData name="Ryan Mok" userId="2b5ff9b4bc27d924" providerId="LiveId" clId="{98BDB49B-93C9-4AB7-A5FC-395AE49E91C6}" dt="2026-08-21T14:28:37.744" v="7501" actId="47"/>
+        <pc:sldMkLst>
+          <pc:docMk/>
+          <pc:sldMk cId="4292117653" sldId="258"/>
+        </pc:sldMkLst>
+      </pc:sldChg>
+      <pc:sldMasterChg chg="delSldLayout">
+        <pc:chgData name="Ryan Mok" userId="2b5ff9b4bc27d924" providerId="LiveId" clId="{98BDB49B-93C9-4AB7-A5FC-395AE49E91C6}" dt="2026-08-21T14:28:37.744" v="7501" actId="47"/>
+        <pc:sldMasterMkLst>
+          <pc:docMk/>
+          <pc:sldMasterMk cId="2027117327" sldId="2147483672"/>
+        </pc:sldMasterMkLst>
+        <pc:sldLayoutChg chg="del">
+          <pc:chgData name="Ryan Mok" userId="2b5ff9b4bc27d924" providerId="LiveId" clId="{98BDB49B-93C9-4AB7-A5FC-395AE49E91C6}" dt="2026-08-21T14:28:37.744" v="7501" actId="47"/>
+          <pc:sldLayoutMkLst>
+            <pc:docMk/>
+            <pc:sldMasterMk cId="2027117327" sldId="2147483672"/>
+            <pc:sldLayoutMk cId="2681548933" sldId="2147483680"/>
+          </pc:sldLayoutMkLst>
+        </pc:sldLayoutChg>
+      </pc:sldMasterChg>
     </pc:docChg>
   </pc:docChgLst>
 </pc:chgInfo>
@@ -6905,7 +6911,7 @@
           <a:bodyPr/>
           <a:lstStyle/>
           <a:p>
-            <a:endParaRPr lang="en-US"/>
+            <a:endParaRPr lang="en-US" dirty="0"/>
           </a:p>
         </p:txBody>
       </p:sp>
@@ -6938,6 +6944,1410 @@
           </a:p>
         </p:txBody>
       </p:sp>
+      <p:sp>
+        <p:nvSpPr>
+          <p:cNvPr id="2" name="TextBox 1">
+            <a:extLst>
+              <a:ext uri="{FF2B5EF4-FFF2-40B4-BE49-F238E27FC236}">
+                <a16:creationId xmlns:a16="http://schemas.microsoft.com/office/drawing/2014/main" id="{2F22A643-DE8D-84E7-00F6-97D6EBB88D71}"/>
+              </a:ext>
+            </a:extLst>
+          </p:cNvPr>
+          <p:cNvSpPr txBox="1"/>
+          <p:nvPr/>
+        </p:nvSpPr>
+        <p:spPr>
+          <a:xfrm>
+            <a:off x="764373" y="6827017"/>
+            <a:ext cx="6083717" cy="769441"/>
+          </a:xfrm>
+          <a:prstGeom prst="rect">
+            <a:avLst/>
+          </a:prstGeom>
+          <a:noFill/>
+        </p:spPr>
+        <p:txBody>
+          <a:bodyPr wrap="none" rtlCol="0">
+            <a:spAutoFit/>
+          </a:bodyPr>
+          <a:lstStyle/>
+          <a:p>
+            <a:r>
+              <a:rPr lang="en-US" sz="4400" dirty="0">
+                <a:latin typeface="UCL Sans" panose="020B0604020202020204" charset="0"/>
+                <a:ea typeface="Sans Serif Collection" panose="020B0502040504020204" pitchFamily="34" charset="0"/>
+                <a:cs typeface="Sans Serif Collection" panose="020B0502040504020204" pitchFamily="34" charset="0"/>
+              </a:rPr>
+              <a:t>Motivation: Why HPO?</a:t>
+            </a:r>
+            <a:endParaRPr lang="en-GB" sz="4400" dirty="0">
+              <a:latin typeface="UCL Sans" panose="020B0604020202020204" charset="0"/>
+              <a:ea typeface="Sans Serif Collection" panose="020B0502040504020204" pitchFamily="34" charset="0"/>
+              <a:cs typeface="Sans Serif Collection" panose="020B0502040504020204" pitchFamily="34" charset="0"/>
+            </a:endParaRPr>
+          </a:p>
+        </p:txBody>
+      </p:sp>
+      <p:grpSp>
+        <p:nvGrpSpPr>
+          <p:cNvPr id="98" name="Group 97">
+            <a:extLst>
+              <a:ext uri="{FF2B5EF4-FFF2-40B4-BE49-F238E27FC236}">
+                <a16:creationId xmlns:a16="http://schemas.microsoft.com/office/drawing/2014/main" id="{70EDD302-18ED-C6AA-9E7D-27967A6ADEE2}"/>
+              </a:ext>
+            </a:extLst>
+          </p:cNvPr>
+          <p:cNvGrpSpPr/>
+          <p:nvPr/>
+        </p:nvGrpSpPr>
+        <p:grpSpPr>
+          <a:xfrm>
+            <a:off x="8110659" y="8841867"/>
+            <a:ext cx="7164163" cy="15847007"/>
+            <a:chOff x="10860170" y="9150571"/>
+            <a:chExt cx="7164163" cy="15847007"/>
+          </a:xfrm>
+        </p:grpSpPr>
+        <p:pic>
+          <p:nvPicPr>
+            <p:cNvPr id="93" name="Picture 92">
+              <a:extLst>
+                <a:ext uri="{FF2B5EF4-FFF2-40B4-BE49-F238E27FC236}">
+                  <a16:creationId xmlns:a16="http://schemas.microsoft.com/office/drawing/2014/main" id="{9DE9A554-6170-1FB0-5AE6-E7B4A65BB537}"/>
+                </a:ext>
+              </a:extLst>
+            </p:cNvPr>
+            <p:cNvPicPr>
+              <a:picLocks noChangeAspect="1"/>
+            </p:cNvPicPr>
+            <p:nvPr/>
+          </p:nvPicPr>
+          <p:blipFill>
+            <a:blip r:embed="rId2">
+              <a:extLst>
+                <a:ext uri="{28A0092B-C50C-407E-A947-70E740481C1C}">
+                  <a14:useLocalDpi xmlns:a14="http://schemas.microsoft.com/office/drawing/2010/main" val="0"/>
+                </a:ext>
+              </a:extLst>
+            </a:blip>
+            <a:stretch>
+              <a:fillRect/>
+            </a:stretch>
+          </p:blipFill>
+          <p:spPr>
+            <a:xfrm>
+              <a:off x="10860170" y="9150571"/>
+              <a:ext cx="7000254" cy="5246749"/>
+            </a:xfrm>
+            <a:prstGeom prst="rect">
+              <a:avLst/>
+            </a:prstGeom>
+          </p:spPr>
+        </p:pic>
+        <p:pic>
+          <p:nvPicPr>
+            <p:cNvPr id="95" name="Picture 94">
+              <a:extLst>
+                <a:ext uri="{FF2B5EF4-FFF2-40B4-BE49-F238E27FC236}">
+                  <a16:creationId xmlns:a16="http://schemas.microsoft.com/office/drawing/2014/main" id="{EE9BC05F-B7E3-CA11-DC00-15C950FA7D23}"/>
+                </a:ext>
+              </a:extLst>
+            </p:cNvPr>
+            <p:cNvPicPr>
+              <a:picLocks noChangeAspect="1"/>
+            </p:cNvPicPr>
+            <p:nvPr/>
+          </p:nvPicPr>
+          <p:blipFill>
+            <a:blip r:embed="rId3">
+              <a:extLst>
+                <a:ext uri="{28A0092B-C50C-407E-A947-70E740481C1C}">
+                  <a14:useLocalDpi xmlns:a14="http://schemas.microsoft.com/office/drawing/2010/main" val="0"/>
+                </a:ext>
+              </a:extLst>
+            </a:blip>
+            <a:stretch>
+              <a:fillRect/>
+            </a:stretch>
+          </p:blipFill>
+          <p:spPr>
+            <a:xfrm>
+              <a:off x="10860170" y="14397320"/>
+              <a:ext cx="7164163" cy="5309131"/>
+            </a:xfrm>
+            <a:prstGeom prst="rect">
+              <a:avLst/>
+            </a:prstGeom>
+          </p:spPr>
+        </p:pic>
+        <p:pic>
+          <p:nvPicPr>
+            <p:cNvPr id="97" name="Picture 96">
+              <a:extLst>
+                <a:ext uri="{FF2B5EF4-FFF2-40B4-BE49-F238E27FC236}">
+                  <a16:creationId xmlns:a16="http://schemas.microsoft.com/office/drawing/2014/main" id="{794851A6-82D4-39F5-1845-5DDF13F7AA74}"/>
+                </a:ext>
+              </a:extLst>
+            </p:cNvPr>
+            <p:cNvPicPr>
+              <a:picLocks noChangeAspect="1"/>
+            </p:cNvPicPr>
+            <p:nvPr/>
+          </p:nvPicPr>
+          <p:blipFill>
+            <a:blip r:embed="rId4">
+              <a:extLst>
+                <a:ext uri="{28A0092B-C50C-407E-A947-70E740481C1C}">
+                  <a14:useLocalDpi xmlns:a14="http://schemas.microsoft.com/office/drawing/2010/main" val="0"/>
+                </a:ext>
+              </a:extLst>
+            </a:blip>
+            <a:stretch>
+              <a:fillRect/>
+            </a:stretch>
+          </p:blipFill>
+          <p:spPr>
+            <a:xfrm>
+              <a:off x="10860170" y="19808636"/>
+              <a:ext cx="7000254" cy="5188942"/>
+            </a:xfrm>
+            <a:prstGeom prst="rect">
+              <a:avLst/>
+            </a:prstGeom>
+          </p:spPr>
+        </p:pic>
+      </p:grpSp>
+      <p:grpSp>
+        <p:nvGrpSpPr>
+          <p:cNvPr id="110" name="Group 109">
+            <a:extLst>
+              <a:ext uri="{FF2B5EF4-FFF2-40B4-BE49-F238E27FC236}">
+                <a16:creationId xmlns:a16="http://schemas.microsoft.com/office/drawing/2014/main" id="{FAAE2DBF-EC9C-C88B-C9D6-87E5697F5B99}"/>
+              </a:ext>
+            </a:extLst>
+          </p:cNvPr>
+          <p:cNvGrpSpPr/>
+          <p:nvPr/>
+        </p:nvGrpSpPr>
+        <p:grpSpPr>
+          <a:xfrm>
+            <a:off x="15145204" y="8862176"/>
+            <a:ext cx="6777654" cy="15834238"/>
+            <a:chOff x="16550641" y="7751918"/>
+            <a:chExt cx="6777654" cy="15834238"/>
+          </a:xfrm>
+        </p:grpSpPr>
+        <p:pic>
+          <p:nvPicPr>
+            <p:cNvPr id="100" name="Picture 99">
+              <a:extLst>
+                <a:ext uri="{FF2B5EF4-FFF2-40B4-BE49-F238E27FC236}">
+                  <a16:creationId xmlns:a16="http://schemas.microsoft.com/office/drawing/2014/main" id="{1B28F01E-BDE3-52AD-4093-67C1EF6A1087}"/>
+                </a:ext>
+              </a:extLst>
+            </p:cNvPr>
+            <p:cNvPicPr>
+              <a:picLocks noChangeAspect="1"/>
+            </p:cNvPicPr>
+            <p:nvPr/>
+          </p:nvPicPr>
+          <p:blipFill>
+            <a:blip r:embed="rId5">
+              <a:extLst>
+                <a:ext uri="{28A0092B-C50C-407E-A947-70E740481C1C}">
+                  <a14:useLocalDpi xmlns:a14="http://schemas.microsoft.com/office/drawing/2010/main" val="0"/>
+                </a:ext>
+              </a:extLst>
+            </a:blip>
+            <a:stretch>
+              <a:fillRect/>
+            </a:stretch>
+          </p:blipFill>
+          <p:spPr>
+            <a:xfrm>
+              <a:off x="16587985" y="7751918"/>
+              <a:ext cx="6649560" cy="5242975"/>
+            </a:xfrm>
+            <a:prstGeom prst="rect">
+              <a:avLst/>
+            </a:prstGeom>
+          </p:spPr>
+        </p:pic>
+        <p:pic>
+          <p:nvPicPr>
+            <p:cNvPr id="104" name="Picture 103">
+              <a:extLst>
+                <a:ext uri="{FF2B5EF4-FFF2-40B4-BE49-F238E27FC236}">
+                  <a16:creationId xmlns:a16="http://schemas.microsoft.com/office/drawing/2014/main" id="{9507A142-E620-ECAA-B88A-B067DBD071DF}"/>
+                </a:ext>
+              </a:extLst>
+            </p:cNvPr>
+            <p:cNvPicPr>
+              <a:picLocks noChangeAspect="1"/>
+            </p:cNvPicPr>
+            <p:nvPr/>
+          </p:nvPicPr>
+          <p:blipFill>
+            <a:blip r:embed="rId6">
+              <a:extLst>
+                <a:ext uri="{28A0092B-C50C-407E-A947-70E740481C1C}">
+                  <a14:useLocalDpi xmlns:a14="http://schemas.microsoft.com/office/drawing/2010/main" val="0"/>
+                </a:ext>
+              </a:extLst>
+            </a:blip>
+            <a:stretch>
+              <a:fillRect/>
+            </a:stretch>
+          </p:blipFill>
+          <p:spPr>
+            <a:xfrm>
+              <a:off x="16550641" y="18382133"/>
+              <a:ext cx="6777654" cy="5204023"/>
+            </a:xfrm>
+            <a:prstGeom prst="rect">
+              <a:avLst/>
+            </a:prstGeom>
+          </p:spPr>
+        </p:pic>
+        <p:grpSp>
+          <p:nvGrpSpPr>
+            <p:cNvPr id="109" name="Group 108">
+              <a:extLst>
+                <a:ext uri="{FF2B5EF4-FFF2-40B4-BE49-F238E27FC236}">
+                  <a16:creationId xmlns:a16="http://schemas.microsoft.com/office/drawing/2014/main" id="{B56A29A5-C706-62D4-382F-F23E7EE689F5}"/>
+                </a:ext>
+              </a:extLst>
+            </p:cNvPr>
+            <p:cNvGrpSpPr/>
+            <p:nvPr/>
+          </p:nvGrpSpPr>
+          <p:grpSpPr>
+            <a:xfrm>
+              <a:off x="16550641" y="13040740"/>
+              <a:ext cx="6686904" cy="5246749"/>
+              <a:chOff x="16550640" y="13040740"/>
+              <a:chExt cx="6686904" cy="5246749"/>
+            </a:xfrm>
+          </p:grpSpPr>
+          <p:pic>
+            <p:nvPicPr>
+              <p:cNvPr id="102" name="Picture 101">
+                <a:extLst>
+                  <a:ext uri="{FF2B5EF4-FFF2-40B4-BE49-F238E27FC236}">
+                    <a16:creationId xmlns:a16="http://schemas.microsoft.com/office/drawing/2014/main" id="{C081D37A-3F34-CEE6-7DF1-5F1F3CD99C8F}"/>
+                  </a:ext>
+                </a:extLst>
+              </p:cNvPr>
+              <p:cNvPicPr>
+                <a:picLocks noChangeAspect="1"/>
+              </p:cNvPicPr>
+              <p:nvPr/>
+            </p:nvPicPr>
+            <p:blipFill>
+              <a:blip r:embed="rId7">
+                <a:extLst>
+                  <a:ext uri="{28A0092B-C50C-407E-A947-70E740481C1C}">
+                    <a14:useLocalDpi xmlns:a14="http://schemas.microsoft.com/office/drawing/2010/main" val="0"/>
+                  </a:ext>
+                </a:extLst>
+              </a:blip>
+              <a:srcRect l="4971"/>
+              <a:stretch>
+                <a:fillRect/>
+              </a:stretch>
+            </p:blipFill>
+            <p:spPr>
+              <a:xfrm>
+                <a:off x="16748759" y="13040740"/>
+                <a:ext cx="6488785" cy="5246749"/>
+              </a:xfrm>
+              <a:prstGeom prst="rect">
+                <a:avLst/>
+              </a:prstGeom>
+            </p:spPr>
+          </p:pic>
+          <p:pic>
+            <p:nvPicPr>
+              <p:cNvPr id="108" name="Picture 107">
+                <a:extLst>
+                  <a:ext uri="{FF2B5EF4-FFF2-40B4-BE49-F238E27FC236}">
+                    <a16:creationId xmlns:a16="http://schemas.microsoft.com/office/drawing/2014/main" id="{CFCC7DEF-BBEC-AE27-044B-9962CF97977D}"/>
+                  </a:ext>
+                </a:extLst>
+              </p:cNvPr>
+              <p:cNvPicPr>
+                <a:picLocks noChangeAspect="1"/>
+              </p:cNvPicPr>
+              <p:nvPr/>
+            </p:nvPicPr>
+            <p:blipFill>
+              <a:blip r:embed="rId7">
+                <a:extLst>
+                  <a:ext uri="{28A0092B-C50C-407E-A947-70E740481C1C}">
+                    <a14:useLocalDpi xmlns:a14="http://schemas.microsoft.com/office/drawing/2010/main" val="0"/>
+                  </a:ext>
+                </a:extLst>
+              </a:blip>
+              <a:srcRect l="-163" t="28555" r="93913" b="39203"/>
+              <a:stretch>
+                <a:fillRect/>
+              </a:stretch>
+            </p:blipFill>
+            <p:spPr>
+              <a:xfrm>
+                <a:off x="16550640" y="14538961"/>
+                <a:ext cx="426719" cy="1691640"/>
+              </a:xfrm>
+              <a:prstGeom prst="rect">
+                <a:avLst/>
+              </a:prstGeom>
+            </p:spPr>
+          </p:pic>
+        </p:grpSp>
+      </p:grpSp>
+      <p:grpSp>
+        <p:nvGrpSpPr>
+          <p:cNvPr id="120" name="Group 119">
+            <a:extLst>
+              <a:ext uri="{FF2B5EF4-FFF2-40B4-BE49-F238E27FC236}">
+                <a16:creationId xmlns:a16="http://schemas.microsoft.com/office/drawing/2014/main" id="{002A3799-5903-3234-64B3-B834543B2289}"/>
+              </a:ext>
+            </a:extLst>
+          </p:cNvPr>
+          <p:cNvGrpSpPr/>
+          <p:nvPr/>
+        </p:nvGrpSpPr>
+        <p:grpSpPr>
+          <a:xfrm>
+            <a:off x="21941824" y="8834468"/>
+            <a:ext cx="6838565" cy="15820229"/>
+            <a:chOff x="22108078" y="7545441"/>
+            <a:chExt cx="6838565" cy="15820229"/>
+          </a:xfrm>
+        </p:grpSpPr>
+        <p:pic>
+          <p:nvPicPr>
+            <p:cNvPr id="115" name="Picture 114">
+              <a:extLst>
+                <a:ext uri="{FF2B5EF4-FFF2-40B4-BE49-F238E27FC236}">
+                  <a16:creationId xmlns:a16="http://schemas.microsoft.com/office/drawing/2014/main" id="{45C465AF-A32D-E5BD-4910-FD76854046B2}"/>
+                </a:ext>
+              </a:extLst>
+            </p:cNvPr>
+            <p:cNvPicPr>
+              <a:picLocks noChangeAspect="1"/>
+            </p:cNvPicPr>
+            <p:nvPr/>
+          </p:nvPicPr>
+          <p:blipFill>
+            <a:blip r:embed="rId8">
+              <a:extLst>
+                <a:ext uri="{28A0092B-C50C-407E-A947-70E740481C1C}">
+                  <a14:useLocalDpi xmlns:a14="http://schemas.microsoft.com/office/drawing/2010/main" val="0"/>
+                </a:ext>
+              </a:extLst>
+            </a:blip>
+            <a:stretch>
+              <a:fillRect/>
+            </a:stretch>
+          </p:blipFill>
+          <p:spPr>
+            <a:xfrm>
+              <a:off x="22108078" y="7545441"/>
+              <a:ext cx="6649560" cy="5191178"/>
+            </a:xfrm>
+            <a:prstGeom prst="rect">
+              <a:avLst/>
+            </a:prstGeom>
+          </p:spPr>
+        </p:pic>
+        <p:pic>
+          <p:nvPicPr>
+            <p:cNvPr id="117" name="Picture 116">
+              <a:extLst>
+                <a:ext uri="{FF2B5EF4-FFF2-40B4-BE49-F238E27FC236}">
+                  <a16:creationId xmlns:a16="http://schemas.microsoft.com/office/drawing/2014/main" id="{473FE8C4-79D5-CFD5-CD80-AFDDCC556867}"/>
+                </a:ext>
+              </a:extLst>
+            </p:cNvPr>
+            <p:cNvPicPr>
+              <a:picLocks noChangeAspect="1"/>
+            </p:cNvPicPr>
+            <p:nvPr/>
+          </p:nvPicPr>
+          <p:blipFill>
+            <a:blip r:embed="rId9">
+              <a:extLst>
+                <a:ext uri="{28A0092B-C50C-407E-A947-70E740481C1C}">
+                  <a14:useLocalDpi xmlns:a14="http://schemas.microsoft.com/office/drawing/2010/main" val="0"/>
+                </a:ext>
+              </a:extLst>
+            </a:blip>
+            <a:stretch>
+              <a:fillRect/>
+            </a:stretch>
+          </p:blipFill>
+          <p:spPr>
+            <a:xfrm>
+              <a:off x="22173470" y="12852409"/>
+              <a:ext cx="6773173" cy="5192950"/>
+            </a:xfrm>
+            <a:prstGeom prst="rect">
+              <a:avLst/>
+            </a:prstGeom>
+          </p:spPr>
+        </p:pic>
+        <p:pic>
+          <p:nvPicPr>
+            <p:cNvPr id="119" name="Picture 118">
+              <a:extLst>
+                <a:ext uri="{FF2B5EF4-FFF2-40B4-BE49-F238E27FC236}">
+                  <a16:creationId xmlns:a16="http://schemas.microsoft.com/office/drawing/2014/main" id="{68896298-5E3F-7709-5EF4-9050D41EFA1B}"/>
+                </a:ext>
+              </a:extLst>
+            </p:cNvPr>
+            <p:cNvPicPr>
+              <a:picLocks noChangeAspect="1"/>
+            </p:cNvPicPr>
+            <p:nvPr/>
+          </p:nvPicPr>
+          <p:blipFill>
+            <a:blip r:embed="rId10">
+              <a:extLst>
+                <a:ext uri="{28A0092B-C50C-407E-A947-70E740481C1C}">
+                  <a14:useLocalDpi xmlns:a14="http://schemas.microsoft.com/office/drawing/2010/main" val="0"/>
+                </a:ext>
+              </a:extLst>
+            </a:blip>
+            <a:stretch>
+              <a:fillRect/>
+            </a:stretch>
+          </p:blipFill>
+          <p:spPr>
+            <a:xfrm>
+              <a:off x="22163999" y="18174590"/>
+              <a:ext cx="6677002" cy="5191080"/>
+            </a:xfrm>
+            <a:prstGeom prst="rect">
+              <a:avLst/>
+            </a:prstGeom>
+          </p:spPr>
+        </p:pic>
+      </p:grpSp>
+      <p:sp>
+        <p:nvSpPr>
+          <p:cNvPr id="122" name="TextBox 121">
+            <a:extLst>
+              <a:ext uri="{FF2B5EF4-FFF2-40B4-BE49-F238E27FC236}">
+                <a16:creationId xmlns:a16="http://schemas.microsoft.com/office/drawing/2014/main" id="{D8407765-B900-8615-E960-4F485E521845}"/>
+              </a:ext>
+            </a:extLst>
+          </p:cNvPr>
+          <p:cNvSpPr txBox="1"/>
+          <p:nvPr/>
+        </p:nvSpPr>
+        <p:spPr>
+          <a:xfrm>
+            <a:off x="641959" y="7877029"/>
+            <a:ext cx="6612054" cy="3539430"/>
+          </a:xfrm>
+          <a:prstGeom prst="rect">
+            <a:avLst/>
+          </a:prstGeom>
+          <a:noFill/>
+        </p:spPr>
+        <p:txBody>
+          <a:bodyPr wrap="square" rtlCol="0">
+            <a:spAutoFit/>
+          </a:bodyPr>
+          <a:lstStyle/>
+          <a:p>
+            <a:pPr algn="just"/>
+            <a:r>
+              <a:rPr lang="en-US" sz="2800" dirty="0">
+                <a:latin typeface="UCL Sans" panose="020B0604020202020204" charset="0"/>
+                <a:ea typeface="Sans Serif Collection" panose="020B0502040504020204" pitchFamily="34" charset="0"/>
+                <a:cs typeface="Sans Serif Collection" panose="020B0502040504020204" pitchFamily="34" charset="0"/>
+              </a:rPr>
+              <a:t>HPO appears as a precursor molecule in proposed abiotic mechanisms to form phosphine on Venus. It was predicted to be detectable in the interstellar medium.</a:t>
+            </a:r>
+          </a:p>
+          <a:p>
+            <a:pPr algn="just"/>
+            <a:endParaRPr lang="en-US" sz="2800" dirty="0">
+              <a:latin typeface="UCL Sans" panose="020B0604020202020204" charset="0"/>
+              <a:ea typeface="Sans Serif Collection" panose="020B0502040504020204" pitchFamily="34" charset="0"/>
+              <a:cs typeface="Sans Serif Collection" panose="020B0502040504020204" pitchFamily="34" charset="0"/>
+            </a:endParaRPr>
+          </a:p>
+          <a:p>
+            <a:pPr algn="just"/>
+            <a:r>
+              <a:rPr lang="en-US" sz="2800" dirty="0">
+                <a:latin typeface="UCL Sans" panose="020B0604020202020204" charset="0"/>
+                <a:ea typeface="Sans Serif Collection" panose="020B0502040504020204" pitchFamily="34" charset="0"/>
+                <a:cs typeface="Sans Serif Collection" panose="020B0502040504020204" pitchFamily="34" charset="0"/>
+              </a:rPr>
+              <a:t>Can HPO play a role on lava or rocky exoplanets?</a:t>
+            </a:r>
+            <a:endParaRPr lang="en-GB" sz="2800" dirty="0">
+              <a:latin typeface="UCL Sans" panose="020B0604020202020204" charset="0"/>
+              <a:ea typeface="Sans Serif Collection" panose="020B0502040504020204" pitchFamily="34" charset="0"/>
+              <a:cs typeface="Sans Serif Collection" panose="020B0502040504020204" pitchFamily="34" charset="0"/>
+            </a:endParaRPr>
+          </a:p>
+        </p:txBody>
+      </p:sp>
+      <p:pic>
+        <p:nvPicPr>
+          <p:cNvPr id="128" name="Picture 127">
+            <a:extLst>
+              <a:ext uri="{FF2B5EF4-FFF2-40B4-BE49-F238E27FC236}">
+                <a16:creationId xmlns:a16="http://schemas.microsoft.com/office/drawing/2014/main" id="{D7009208-CC3F-BADB-A338-3C3DDCD5B861}"/>
+              </a:ext>
+            </a:extLst>
+          </p:cNvPr>
+          <p:cNvPicPr>
+            <a:picLocks noChangeAspect="1"/>
+          </p:cNvPicPr>
+          <p:nvPr/>
+        </p:nvPicPr>
+        <p:blipFill>
+          <a:blip r:embed="rId11">
+            <a:extLst>
+              <a:ext uri="{28A0092B-C50C-407E-A947-70E740481C1C}">
+                <a14:useLocalDpi xmlns:a14="http://schemas.microsoft.com/office/drawing/2010/main" val="0"/>
+              </a:ext>
+            </a:extLst>
+          </a:blip>
+          <a:stretch>
+            <a:fillRect/>
+          </a:stretch>
+        </p:blipFill>
+        <p:spPr>
+          <a:xfrm>
+            <a:off x="29278024" y="9435111"/>
+            <a:ext cx="7331507" cy="5100071"/>
+          </a:xfrm>
+          <a:prstGeom prst="rect">
+            <a:avLst/>
+          </a:prstGeom>
+        </p:spPr>
+      </p:pic>
+      <p:sp>
+        <p:nvSpPr>
+          <p:cNvPr id="130" name="TextBox 129">
+            <a:extLst>
+              <a:ext uri="{FF2B5EF4-FFF2-40B4-BE49-F238E27FC236}">
+                <a16:creationId xmlns:a16="http://schemas.microsoft.com/office/drawing/2014/main" id="{A0746360-9288-5B65-2758-EF1FE2B0E04A}"/>
+              </a:ext>
+            </a:extLst>
+          </p:cNvPr>
+          <p:cNvSpPr txBox="1"/>
+          <p:nvPr/>
+        </p:nvSpPr>
+        <p:spPr>
+          <a:xfrm>
+            <a:off x="8550652" y="6887494"/>
+            <a:ext cx="6096541" cy="707886"/>
+          </a:xfrm>
+          <a:prstGeom prst="rect">
+            <a:avLst/>
+          </a:prstGeom>
+          <a:noFill/>
+        </p:spPr>
+        <p:txBody>
+          <a:bodyPr wrap="none" rtlCol="0">
+            <a:spAutoFit/>
+          </a:bodyPr>
+          <a:lstStyle/>
+          <a:p>
+            <a:r>
+              <a:rPr lang="en-US" sz="4000" dirty="0">
+                <a:latin typeface="UCL Sans" panose="020B0604020202020204" charset="0"/>
+                <a:ea typeface="Sans Serif Collection" panose="020B0502040504020204" pitchFamily="34" charset="0"/>
+                <a:cs typeface="Sans Serif Collection" panose="020B0502040504020204" pitchFamily="34" charset="0"/>
+              </a:rPr>
+              <a:t>Potential Energy Surface</a:t>
+            </a:r>
+            <a:endParaRPr lang="en-GB" sz="4000" dirty="0">
+              <a:latin typeface="UCL Sans" panose="020B0604020202020204" charset="0"/>
+              <a:ea typeface="Sans Serif Collection" panose="020B0502040504020204" pitchFamily="34" charset="0"/>
+              <a:cs typeface="Sans Serif Collection" panose="020B0502040504020204" pitchFamily="34" charset="0"/>
+            </a:endParaRPr>
+          </a:p>
+        </p:txBody>
+      </p:sp>
+      <p:sp>
+        <p:nvSpPr>
+          <p:cNvPr id="132" name="TextBox 131">
+            <a:extLst>
+              <a:ext uri="{FF2B5EF4-FFF2-40B4-BE49-F238E27FC236}">
+                <a16:creationId xmlns:a16="http://schemas.microsoft.com/office/drawing/2014/main" id="{516C16C9-1626-D91A-CF2B-6969A6CEFED9}"/>
+              </a:ext>
+            </a:extLst>
+          </p:cNvPr>
+          <p:cNvSpPr txBox="1"/>
+          <p:nvPr/>
+        </p:nvSpPr>
+        <p:spPr>
+          <a:xfrm>
+            <a:off x="15775123" y="6898051"/>
+            <a:ext cx="6110968" cy="707886"/>
+          </a:xfrm>
+          <a:prstGeom prst="rect">
+            <a:avLst/>
+          </a:prstGeom>
+          <a:noFill/>
+        </p:spPr>
+        <p:txBody>
+          <a:bodyPr wrap="none" rtlCol="0">
+            <a:spAutoFit/>
+          </a:bodyPr>
+          <a:lstStyle/>
+          <a:p>
+            <a:r>
+              <a:rPr lang="en-US" sz="4000" dirty="0">
+                <a:latin typeface="UCL Sans" panose="020B0604020202020204" charset="0"/>
+                <a:ea typeface="Sans Serif Collection" panose="020B0502040504020204" pitchFamily="34" charset="0"/>
+                <a:cs typeface="Sans Serif Collection" panose="020B0502040504020204" pitchFamily="34" charset="0"/>
+              </a:rPr>
+              <a:t>Dipole Moment Surfaces</a:t>
+            </a:r>
+            <a:endParaRPr lang="en-GB" sz="4000" dirty="0">
+              <a:latin typeface="UCL Sans" panose="020B0604020202020204" charset="0"/>
+              <a:ea typeface="Sans Serif Collection" panose="020B0502040504020204" pitchFamily="34" charset="0"/>
+              <a:cs typeface="Sans Serif Collection" panose="020B0502040504020204" pitchFamily="34" charset="0"/>
+            </a:endParaRPr>
+          </a:p>
+        </p:txBody>
+      </p:sp>
+      <p:sp>
+        <p:nvSpPr>
+          <p:cNvPr id="136" name="TextBox 135">
+            <a:extLst>
+              <a:ext uri="{FF2B5EF4-FFF2-40B4-BE49-F238E27FC236}">
+                <a16:creationId xmlns:a16="http://schemas.microsoft.com/office/drawing/2014/main" id="{F4EF452A-4DA2-1AB6-CAE4-A54B11573821}"/>
+              </a:ext>
+            </a:extLst>
+          </p:cNvPr>
+          <p:cNvSpPr txBox="1"/>
+          <p:nvPr/>
+        </p:nvSpPr>
+        <p:spPr>
+          <a:xfrm>
+            <a:off x="23742924" y="6869888"/>
+            <a:ext cx="3398687" cy="707886"/>
+          </a:xfrm>
+          <a:prstGeom prst="rect">
+            <a:avLst/>
+          </a:prstGeom>
+          <a:noFill/>
+        </p:spPr>
+        <p:txBody>
+          <a:bodyPr wrap="none" rtlCol="0">
+            <a:spAutoFit/>
+          </a:bodyPr>
+          <a:lstStyle/>
+          <a:p>
+            <a:r>
+              <a:rPr lang="en-US" sz="4000" dirty="0">
+                <a:latin typeface="UCL Sans" panose="020B0604020202020204" charset="0"/>
+                <a:ea typeface="Sans Serif Collection" panose="020B0502040504020204" pitchFamily="34" charset="0"/>
+                <a:cs typeface="Sans Serif Collection" panose="020B0502040504020204" pitchFamily="34" charset="0"/>
+              </a:rPr>
+              <a:t>Stick Spectra</a:t>
+            </a:r>
+            <a:endParaRPr lang="en-GB" sz="4000" dirty="0">
+              <a:latin typeface="UCL Sans" panose="020B0604020202020204" charset="0"/>
+              <a:ea typeface="Sans Serif Collection" panose="020B0502040504020204" pitchFamily="34" charset="0"/>
+              <a:cs typeface="Sans Serif Collection" panose="020B0502040504020204" pitchFamily="34" charset="0"/>
+            </a:endParaRPr>
+          </a:p>
+        </p:txBody>
+      </p:sp>
+      <p:sp>
+        <p:nvSpPr>
+          <p:cNvPr id="138" name="TextBox 137">
+            <a:extLst>
+              <a:ext uri="{FF2B5EF4-FFF2-40B4-BE49-F238E27FC236}">
+                <a16:creationId xmlns:a16="http://schemas.microsoft.com/office/drawing/2014/main" id="{B375B841-8EB3-F0F1-A242-4003E08E4EC6}"/>
+              </a:ext>
+            </a:extLst>
+          </p:cNvPr>
+          <p:cNvSpPr txBox="1"/>
+          <p:nvPr/>
+        </p:nvSpPr>
+        <p:spPr>
+          <a:xfrm>
+            <a:off x="7902099" y="24798599"/>
+            <a:ext cx="7164163" cy="2739211"/>
+          </a:xfrm>
+          <a:prstGeom prst="rect">
+            <a:avLst/>
+          </a:prstGeom>
+          <a:noFill/>
+        </p:spPr>
+        <p:txBody>
+          <a:bodyPr wrap="square" rtlCol="0">
+            <a:spAutoFit/>
+          </a:bodyPr>
+          <a:lstStyle/>
+          <a:p>
+            <a:pPr marL="457200" indent="-457200" algn="just">
+              <a:buFont typeface="Arial" panose="020B0604020202020204" pitchFamily="34" charset="0"/>
+              <a:buChar char="•"/>
+            </a:pPr>
+            <a:r>
+              <a:rPr lang="en-US" sz="2400" dirty="0">
+                <a:latin typeface="UCL Sans" panose="020B0604020202020204" charset="0"/>
+                <a:ea typeface="Sans Serif Collection" panose="020B0502040504020204" pitchFamily="34" charset="0"/>
+                <a:cs typeface="Sans Serif Collection" panose="020B0502040504020204" pitchFamily="34" charset="0"/>
+              </a:rPr>
+              <a:t>Fit PES has root-mean-square error of 2 cm</a:t>
+            </a:r>
+            <a:r>
+              <a:rPr lang="en-US" sz="2400" baseline="30000" dirty="0">
+                <a:latin typeface="UCL Sans" panose="020B0604020202020204" charset="0"/>
+                <a:ea typeface="Sans Serif Collection" panose="020B0502040504020204" pitchFamily="34" charset="0"/>
+                <a:cs typeface="Sans Serif Collection" panose="020B0502040504020204" pitchFamily="34" charset="0"/>
+              </a:rPr>
+              <a:t>-1</a:t>
+            </a:r>
+            <a:r>
+              <a:rPr lang="en-US" sz="2400" dirty="0">
+                <a:latin typeface="UCL Sans" panose="020B0604020202020204" charset="0"/>
+                <a:ea typeface="Sans Serif Collection" panose="020B0502040504020204" pitchFamily="34" charset="0"/>
+                <a:cs typeface="Sans Serif Collection" panose="020B0502040504020204" pitchFamily="34" charset="0"/>
+              </a:rPr>
+              <a:t> for energies under 18,000 cm</a:t>
+            </a:r>
+            <a:r>
+              <a:rPr lang="en-US" sz="2400" baseline="30000" dirty="0">
+                <a:latin typeface="UCL Sans" panose="020B0604020202020204" charset="0"/>
+                <a:ea typeface="Sans Serif Collection" panose="020B0502040504020204" pitchFamily="34" charset="0"/>
+                <a:cs typeface="Sans Serif Collection" panose="020B0502040504020204" pitchFamily="34" charset="0"/>
+              </a:rPr>
+              <a:t>-1</a:t>
+            </a:r>
+            <a:r>
+              <a:rPr lang="en-US" sz="2400" dirty="0">
+                <a:latin typeface="UCL Sans" panose="020B0604020202020204" charset="0"/>
+                <a:ea typeface="Sans Serif Collection" panose="020B0502040504020204" pitchFamily="34" charset="0"/>
+                <a:cs typeface="Sans Serif Collection" panose="020B0502040504020204" pitchFamily="34" charset="0"/>
+              </a:rPr>
+              <a:t> .</a:t>
+            </a:r>
+          </a:p>
+          <a:p>
+            <a:pPr marL="457200" indent="-457200" algn="just">
+              <a:buFont typeface="Arial" panose="020B0604020202020204" pitchFamily="34" charset="0"/>
+              <a:buChar char="•"/>
+            </a:pPr>
+            <a:endParaRPr lang="en-US" sz="2400" dirty="0">
+              <a:latin typeface="UCL Sans" panose="020B0604020202020204" charset="0"/>
+              <a:ea typeface="Sans Serif Collection" panose="020B0502040504020204" pitchFamily="34" charset="0"/>
+              <a:cs typeface="Sans Serif Collection" panose="020B0502040504020204" pitchFamily="34" charset="0"/>
+            </a:endParaRPr>
+          </a:p>
+          <a:p>
+            <a:pPr marL="457200" indent="-457200" algn="just">
+              <a:buFont typeface="Arial" panose="020B0604020202020204" pitchFamily="34" charset="0"/>
+              <a:buChar char="•"/>
+            </a:pPr>
+            <a:r>
+              <a:rPr lang="en-US" sz="2400" dirty="0">
+                <a:latin typeface="UCL Sans" panose="020B0604020202020204" charset="0"/>
+                <a:ea typeface="Sans Serif Collection" panose="020B0502040504020204" pitchFamily="34" charset="0"/>
+                <a:cs typeface="Sans Serif Collection" panose="020B0502040504020204" pitchFamily="34" charset="0"/>
+              </a:rPr>
+              <a:t>Molecule appears relatively rigid (stiff bending), we can use non-singular methods to perform variational calculations.  </a:t>
+            </a:r>
+          </a:p>
+          <a:p>
+            <a:pPr marL="457200" indent="-457200" algn="just">
+              <a:buFont typeface="Arial" panose="020B0604020202020204" pitchFamily="34" charset="0"/>
+              <a:buChar char="•"/>
+            </a:pPr>
+            <a:endParaRPr lang="en-GB" sz="2800" dirty="0">
+              <a:latin typeface="UCL Sans" panose="020B0604020202020204" charset="0"/>
+              <a:ea typeface="Sans Serif Collection" panose="020B0502040504020204" pitchFamily="34" charset="0"/>
+              <a:cs typeface="Sans Serif Collection" panose="020B0502040504020204" pitchFamily="34" charset="0"/>
+            </a:endParaRPr>
+          </a:p>
+        </p:txBody>
+      </p:sp>
+      <p:sp>
+        <p:nvSpPr>
+          <p:cNvPr id="142" name="TextBox 141">
+            <a:extLst>
+              <a:ext uri="{FF2B5EF4-FFF2-40B4-BE49-F238E27FC236}">
+                <a16:creationId xmlns:a16="http://schemas.microsoft.com/office/drawing/2014/main" id="{9EDD83B0-40A2-0632-433F-9045CB4B273E}"/>
+              </a:ext>
+            </a:extLst>
+          </p:cNvPr>
+          <p:cNvSpPr txBox="1"/>
+          <p:nvPr/>
+        </p:nvSpPr>
+        <p:spPr>
+          <a:xfrm>
+            <a:off x="8550652" y="7762121"/>
+            <a:ext cx="6096541" cy="954107"/>
+          </a:xfrm>
+          <a:prstGeom prst="rect">
+            <a:avLst/>
+          </a:prstGeom>
+          <a:noFill/>
+        </p:spPr>
+        <p:txBody>
+          <a:bodyPr wrap="square" rtlCol="0">
+            <a:spAutoFit/>
+          </a:bodyPr>
+          <a:lstStyle/>
+          <a:p>
+            <a:pPr algn="just"/>
+            <a:r>
+              <a:rPr lang="en-US" sz="2800" dirty="0">
+                <a:latin typeface="UCL Sans" panose="020B0604020202020204" charset="0"/>
+                <a:ea typeface="Sans Serif Collection" panose="020B0502040504020204" pitchFamily="34" charset="0"/>
+                <a:cs typeface="Sans Serif Collection" panose="020B0502040504020204" pitchFamily="34" charset="0"/>
+              </a:rPr>
+              <a:t>7770 </a:t>
+            </a:r>
+            <a:r>
+              <a:rPr lang="en-US" sz="2800" i="1" dirty="0">
+                <a:latin typeface="UCL Sans" panose="020B0604020202020204" charset="0"/>
+                <a:ea typeface="Sans Serif Collection" panose="020B0502040504020204" pitchFamily="34" charset="0"/>
+                <a:cs typeface="Sans Serif Collection" panose="020B0502040504020204" pitchFamily="34" charset="0"/>
+              </a:rPr>
+              <a:t>ab initio </a:t>
+            </a:r>
+            <a:r>
+              <a:rPr lang="en-US" sz="2800" dirty="0">
+                <a:latin typeface="UCL Sans" panose="020B0604020202020204" charset="0"/>
+                <a:ea typeface="Sans Serif Collection" panose="020B0502040504020204" pitchFamily="34" charset="0"/>
+                <a:cs typeface="Sans Serif Collection" panose="020B0502040504020204" pitchFamily="34" charset="0"/>
+              </a:rPr>
+              <a:t>points computed with CCSD(T)-F12/cc-pVQZ-F12a</a:t>
+            </a:r>
+          </a:p>
+        </p:txBody>
+      </p:sp>
+      <p:sp>
+        <p:nvSpPr>
+          <p:cNvPr id="144" name="TextBox 143">
+            <a:extLst>
+              <a:ext uri="{FF2B5EF4-FFF2-40B4-BE49-F238E27FC236}">
+                <a16:creationId xmlns:a16="http://schemas.microsoft.com/office/drawing/2014/main" id="{96199BD6-6C8F-8CCB-2FA9-7FDB19CAA5B5}"/>
+              </a:ext>
+            </a:extLst>
+          </p:cNvPr>
+          <p:cNvSpPr txBox="1"/>
+          <p:nvPr/>
+        </p:nvSpPr>
+        <p:spPr>
+          <a:xfrm>
+            <a:off x="15845283" y="7762121"/>
+            <a:ext cx="6096541" cy="954107"/>
+          </a:xfrm>
+          <a:prstGeom prst="rect">
+            <a:avLst/>
+          </a:prstGeom>
+          <a:noFill/>
+        </p:spPr>
+        <p:txBody>
+          <a:bodyPr wrap="square" rtlCol="0">
+            <a:spAutoFit/>
+          </a:bodyPr>
+          <a:lstStyle/>
+          <a:p>
+            <a:pPr algn="just"/>
+            <a:r>
+              <a:rPr lang="en-US" sz="2800" dirty="0">
+                <a:latin typeface="UCL Sans" panose="020B0604020202020204" charset="0"/>
+                <a:ea typeface="Sans Serif Collection" panose="020B0502040504020204" pitchFamily="34" charset="0"/>
+                <a:cs typeface="Sans Serif Collection" panose="020B0502040504020204" pitchFamily="34" charset="0"/>
+              </a:rPr>
+              <a:t>Same grid as the PES computed with CCSD(T)/aug-cc-pV(5+d)Z</a:t>
+            </a:r>
+          </a:p>
+        </p:txBody>
+      </p:sp>
+      <p:sp>
+        <p:nvSpPr>
+          <p:cNvPr id="148" name="TextBox 147">
+            <a:extLst>
+              <a:ext uri="{FF2B5EF4-FFF2-40B4-BE49-F238E27FC236}">
+                <a16:creationId xmlns:a16="http://schemas.microsoft.com/office/drawing/2014/main" id="{24883706-EECC-D3A3-0F66-2BDE6B4405DC}"/>
+              </a:ext>
+            </a:extLst>
+          </p:cNvPr>
+          <p:cNvSpPr txBox="1"/>
+          <p:nvPr/>
+        </p:nvSpPr>
+        <p:spPr>
+          <a:xfrm>
+            <a:off x="22525986" y="7756000"/>
+            <a:ext cx="5630585" cy="949238"/>
+          </a:xfrm>
+          <a:prstGeom prst="rect">
+            <a:avLst/>
+          </a:prstGeom>
+          <a:noFill/>
+        </p:spPr>
+        <p:txBody>
+          <a:bodyPr wrap="square" rtlCol="0">
+            <a:spAutoFit/>
+          </a:bodyPr>
+          <a:lstStyle/>
+          <a:p>
+            <a:pPr algn="just"/>
+            <a:r>
+              <a:rPr lang="en-US" sz="2800" dirty="0">
+                <a:latin typeface="UCL Sans" panose="020B0604020202020204" charset="0"/>
+                <a:ea typeface="Sans Serif Collection" panose="020B0502040504020204" pitchFamily="34" charset="0"/>
+                <a:cs typeface="Sans Serif Collection" panose="020B0502040504020204" pitchFamily="34" charset="0"/>
+              </a:rPr>
+              <a:t>Rotational stick spectra of the fundamental vibrational modes</a:t>
+            </a:r>
+          </a:p>
+        </p:txBody>
+      </p:sp>
+      <p:sp>
+        <p:nvSpPr>
+          <p:cNvPr id="150" name="TextBox 149">
+            <a:extLst>
+              <a:ext uri="{FF2B5EF4-FFF2-40B4-BE49-F238E27FC236}">
+                <a16:creationId xmlns:a16="http://schemas.microsoft.com/office/drawing/2014/main" id="{CD1DF30F-309F-9DC5-B2C9-7211FFA6AE3E}"/>
+              </a:ext>
+            </a:extLst>
+          </p:cNvPr>
+          <p:cNvSpPr txBox="1"/>
+          <p:nvPr/>
+        </p:nvSpPr>
+        <p:spPr>
+          <a:xfrm>
+            <a:off x="30397568" y="6791028"/>
+            <a:ext cx="4222631" cy="769441"/>
+          </a:xfrm>
+          <a:prstGeom prst="rect">
+            <a:avLst/>
+          </a:prstGeom>
+          <a:noFill/>
+        </p:spPr>
+        <p:txBody>
+          <a:bodyPr wrap="none" rtlCol="0">
+            <a:spAutoFit/>
+          </a:bodyPr>
+          <a:lstStyle/>
+          <a:p>
+            <a:r>
+              <a:rPr lang="en-US" sz="4400" dirty="0">
+                <a:latin typeface="UCL Sans" panose="020B0604020202020204" charset="0"/>
+                <a:ea typeface="Sans Serif Collection" panose="020B0502040504020204" pitchFamily="34" charset="0"/>
+                <a:cs typeface="Sans Serif Collection" panose="020B0502040504020204" pitchFamily="34" charset="0"/>
+              </a:rPr>
+              <a:t>Cross-sections</a:t>
+            </a:r>
+            <a:endParaRPr lang="en-GB" sz="4400" dirty="0">
+              <a:latin typeface="UCL Sans" panose="020B0604020202020204" charset="0"/>
+              <a:ea typeface="Sans Serif Collection" panose="020B0502040504020204" pitchFamily="34" charset="0"/>
+              <a:cs typeface="Sans Serif Collection" panose="020B0502040504020204" pitchFamily="34" charset="0"/>
+            </a:endParaRPr>
+          </a:p>
+        </p:txBody>
+      </p:sp>
+      <p:sp>
+        <p:nvSpPr>
+          <p:cNvPr id="152" name="TextBox 151">
+            <a:extLst>
+              <a:ext uri="{FF2B5EF4-FFF2-40B4-BE49-F238E27FC236}">
+                <a16:creationId xmlns:a16="http://schemas.microsoft.com/office/drawing/2014/main" id="{AA5254B2-4677-A5F8-4213-BF2F405814E3}"/>
+              </a:ext>
+            </a:extLst>
+          </p:cNvPr>
+          <p:cNvSpPr txBox="1"/>
+          <p:nvPr/>
+        </p:nvSpPr>
+        <p:spPr>
+          <a:xfrm>
+            <a:off x="15306427" y="24798685"/>
+            <a:ext cx="6525681" cy="2000548"/>
+          </a:xfrm>
+          <a:prstGeom prst="rect">
+            <a:avLst/>
+          </a:prstGeom>
+          <a:noFill/>
+        </p:spPr>
+        <p:txBody>
+          <a:bodyPr wrap="square" rtlCol="0">
+            <a:spAutoFit/>
+          </a:bodyPr>
+          <a:lstStyle/>
+          <a:p>
+            <a:pPr marL="457200" indent="-457200" algn="just">
+              <a:buFont typeface="Arial" panose="020B0604020202020204" pitchFamily="34" charset="0"/>
+              <a:buChar char="•"/>
+            </a:pPr>
+            <a:r>
+              <a:rPr lang="en-US" sz="2400" dirty="0">
+                <a:latin typeface="UCL Sans" panose="020B0604020202020204" charset="0"/>
+                <a:ea typeface="Sans Serif Collection" panose="020B0502040504020204" pitchFamily="34" charset="0"/>
+                <a:cs typeface="Sans Serif Collection" panose="020B0502040504020204" pitchFamily="34" charset="0"/>
+              </a:rPr>
+              <a:t>Dipole values calculated oriented with respect to the Cartesian axis given. </a:t>
+            </a:r>
+          </a:p>
+          <a:p>
+            <a:pPr marL="457200" indent="-457200" algn="just">
+              <a:buFont typeface="Arial" panose="020B0604020202020204" pitchFamily="34" charset="0"/>
+              <a:buChar char="•"/>
+            </a:pPr>
+            <a:endParaRPr lang="en-US" sz="2400" dirty="0">
+              <a:latin typeface="UCL Sans" panose="020B0604020202020204" charset="0"/>
+              <a:ea typeface="Sans Serif Collection" panose="020B0502040504020204" pitchFamily="34" charset="0"/>
+              <a:cs typeface="Sans Serif Collection" panose="020B0502040504020204" pitchFamily="34" charset="0"/>
+            </a:endParaRPr>
+          </a:p>
+          <a:p>
+            <a:pPr marL="457200" indent="-457200" algn="just">
+              <a:buFont typeface="Arial" panose="020B0604020202020204" pitchFamily="34" charset="0"/>
+              <a:buChar char="•"/>
+            </a:pPr>
+            <a:r>
+              <a:rPr lang="en-US" sz="2400" dirty="0">
+                <a:latin typeface="UCL Sans" panose="020B0604020202020204" charset="0"/>
+                <a:ea typeface="Sans Serif Collection" panose="020B0502040504020204" pitchFamily="34" charset="0"/>
+                <a:cs typeface="Sans Serif Collection" panose="020B0502040504020204" pitchFamily="34" charset="0"/>
+              </a:rPr>
+              <a:t>Fitted to a Taylor-series type expansion.</a:t>
+            </a:r>
+          </a:p>
+          <a:p>
+            <a:pPr marL="457200" indent="-457200" algn="just">
+              <a:buFont typeface="Arial" panose="020B0604020202020204" pitchFamily="34" charset="0"/>
+              <a:buChar char="•"/>
+            </a:pPr>
+            <a:endParaRPr lang="en-GB" sz="2800" dirty="0">
+              <a:latin typeface="UCL Sans" panose="020B0604020202020204" charset="0"/>
+              <a:ea typeface="Sans Serif Collection" panose="020B0502040504020204" pitchFamily="34" charset="0"/>
+              <a:cs typeface="Sans Serif Collection" panose="020B0502040504020204" pitchFamily="34" charset="0"/>
+            </a:endParaRPr>
+          </a:p>
+        </p:txBody>
+      </p:sp>
+      <p:sp>
+        <p:nvSpPr>
+          <p:cNvPr id="154" name="TextBox 153">
+            <a:extLst>
+              <a:ext uri="{FF2B5EF4-FFF2-40B4-BE49-F238E27FC236}">
+                <a16:creationId xmlns:a16="http://schemas.microsoft.com/office/drawing/2014/main" id="{E7F24C27-2DFA-996C-26A7-E7A3E3B7583F}"/>
+              </a:ext>
+            </a:extLst>
+          </p:cNvPr>
+          <p:cNvSpPr txBox="1"/>
+          <p:nvPr/>
+        </p:nvSpPr>
+        <p:spPr>
+          <a:xfrm>
+            <a:off x="21897094" y="24798599"/>
+            <a:ext cx="6777654" cy="1569660"/>
+          </a:xfrm>
+          <a:prstGeom prst="rect">
+            <a:avLst/>
+          </a:prstGeom>
+          <a:noFill/>
+        </p:spPr>
+        <p:txBody>
+          <a:bodyPr wrap="square" rtlCol="0">
+            <a:spAutoFit/>
+          </a:bodyPr>
+          <a:lstStyle/>
+          <a:p>
+            <a:pPr marL="457200" indent="-457200" algn="just">
+              <a:buFont typeface="Arial" panose="020B0604020202020204" pitchFamily="34" charset="0"/>
+              <a:buChar char="•"/>
+            </a:pPr>
+            <a:r>
+              <a:rPr lang="en-US" sz="2400" dirty="0">
+                <a:latin typeface="UCL Sans" panose="020B0604020202020204" charset="0"/>
+                <a:ea typeface="Sans Serif Collection" panose="020B0502040504020204" pitchFamily="34" charset="0"/>
+                <a:cs typeface="Sans Serif Collection" panose="020B0502040504020204" pitchFamily="34" charset="0"/>
+              </a:rPr>
+              <a:t>The first and third fundamental modes have been experimentally measured, but not the second, despite intensity seeming higher.</a:t>
+            </a:r>
+            <a:endParaRPr lang="en-GB" sz="2400" dirty="0">
+              <a:latin typeface="UCL Sans" panose="020B0604020202020204" charset="0"/>
+              <a:ea typeface="Sans Serif Collection" panose="020B0502040504020204" pitchFamily="34" charset="0"/>
+              <a:cs typeface="Sans Serif Collection" panose="020B0502040504020204" pitchFamily="34" charset="0"/>
+            </a:endParaRPr>
+          </a:p>
+        </p:txBody>
+      </p:sp>
+      <p:grpSp>
+        <p:nvGrpSpPr>
+          <p:cNvPr id="165" name="Group 164">
+            <a:extLst>
+              <a:ext uri="{FF2B5EF4-FFF2-40B4-BE49-F238E27FC236}">
+                <a16:creationId xmlns:a16="http://schemas.microsoft.com/office/drawing/2014/main" id="{FD28D386-BC71-BB40-E109-EA3559B36BD6}"/>
+              </a:ext>
+            </a:extLst>
+          </p:cNvPr>
+          <p:cNvGrpSpPr/>
+          <p:nvPr/>
+        </p:nvGrpSpPr>
+        <p:grpSpPr>
+          <a:xfrm>
+            <a:off x="788462" y="11797618"/>
+            <a:ext cx="6525674" cy="3217350"/>
+            <a:chOff x="641958" y="23608216"/>
+            <a:chExt cx="6525674" cy="3217350"/>
+          </a:xfrm>
+        </p:grpSpPr>
+        <p:sp>
+          <p:nvSpPr>
+            <p:cNvPr id="126" name="TextBox 125">
+              <a:extLst>
+                <a:ext uri="{FF2B5EF4-FFF2-40B4-BE49-F238E27FC236}">
+                  <a16:creationId xmlns:a16="http://schemas.microsoft.com/office/drawing/2014/main" id="{E2A49FD0-0556-0FCA-8AE6-9CC8ACD65A06}"/>
+                </a:ext>
+              </a:extLst>
+            </p:cNvPr>
+            <p:cNvSpPr txBox="1"/>
+            <p:nvPr/>
+          </p:nvSpPr>
+          <p:spPr>
+            <a:xfrm>
+              <a:off x="641958" y="24578797"/>
+              <a:ext cx="6525674" cy="2246769"/>
+            </a:xfrm>
+            <a:prstGeom prst="rect">
+              <a:avLst/>
+            </a:prstGeom>
+            <a:noFill/>
+          </p:spPr>
+          <p:txBody>
+            <a:bodyPr wrap="square" rtlCol="0">
+              <a:spAutoFit/>
+            </a:bodyPr>
+            <a:lstStyle/>
+            <a:p>
+              <a:pPr marL="457200" indent="-457200">
+                <a:buFont typeface="Arial" panose="020B0604020202020204" pitchFamily="34" charset="0"/>
+                <a:buChar char="•"/>
+              </a:pPr>
+              <a:r>
+                <a:rPr lang="en-US" sz="2800" dirty="0">
+                  <a:latin typeface="UCL Sans" panose="020B0604020202020204" charset="0"/>
+                  <a:ea typeface="Sans Serif Collection" panose="020B0502040504020204" pitchFamily="34" charset="0"/>
+                  <a:cs typeface="Sans Serif Collection" panose="020B0502040504020204" pitchFamily="34" charset="0"/>
+                </a:rPr>
+                <a:t>Produce a rovibrational linelist for HPO (electronic ground state only).</a:t>
+              </a:r>
+            </a:p>
+            <a:p>
+              <a:pPr marL="457200" indent="-457200">
+                <a:buFont typeface="Arial" panose="020B0604020202020204" pitchFamily="34" charset="0"/>
+                <a:buChar char="•"/>
+              </a:pPr>
+              <a:endParaRPr lang="en-US" sz="2800" dirty="0">
+                <a:latin typeface="UCL Sans" panose="020B0604020202020204" charset="0"/>
+                <a:ea typeface="Sans Serif Collection" panose="020B0502040504020204" pitchFamily="34" charset="0"/>
+                <a:cs typeface="Sans Serif Collection" panose="020B0502040504020204" pitchFamily="34" charset="0"/>
+              </a:endParaRPr>
+            </a:p>
+            <a:p>
+              <a:pPr marL="457200" indent="-457200">
+                <a:buFont typeface="Arial" panose="020B0604020202020204" pitchFamily="34" charset="0"/>
+                <a:buChar char="•"/>
+              </a:pPr>
+              <a:r>
+                <a:rPr lang="en-US" sz="2800" dirty="0">
+                  <a:latin typeface="UCL Sans" panose="020B0604020202020204" charset="0"/>
+                  <a:ea typeface="Sans Serif Collection" panose="020B0502040504020204" pitchFamily="34" charset="0"/>
+                  <a:cs typeface="Sans Serif Collection" panose="020B0502040504020204" pitchFamily="34" charset="0"/>
+                </a:rPr>
+                <a:t>Evaluate potential for HPO detection on exoplanets/planets.</a:t>
+              </a:r>
+              <a:endParaRPr lang="en-GB" sz="2800" dirty="0">
+                <a:latin typeface="UCL Sans" panose="020B0604020202020204" charset="0"/>
+                <a:ea typeface="Sans Serif Collection" panose="020B0502040504020204" pitchFamily="34" charset="0"/>
+                <a:cs typeface="Sans Serif Collection" panose="020B0502040504020204" pitchFamily="34" charset="0"/>
+              </a:endParaRPr>
+            </a:p>
+          </p:txBody>
+        </p:sp>
+        <p:sp>
+          <p:nvSpPr>
+            <p:cNvPr id="156" name="TextBox 155">
+              <a:extLst>
+                <a:ext uri="{FF2B5EF4-FFF2-40B4-BE49-F238E27FC236}">
+                  <a16:creationId xmlns:a16="http://schemas.microsoft.com/office/drawing/2014/main" id="{5829362F-B08F-4FBF-4EF7-5BBF774E6B93}"/>
+                </a:ext>
+              </a:extLst>
+            </p:cNvPr>
+            <p:cNvSpPr txBox="1"/>
+            <p:nvPr/>
+          </p:nvSpPr>
+          <p:spPr>
+            <a:xfrm>
+              <a:off x="829926" y="23608216"/>
+              <a:ext cx="1369286" cy="707886"/>
+            </a:xfrm>
+            <a:prstGeom prst="rect">
+              <a:avLst/>
+            </a:prstGeom>
+            <a:noFill/>
+          </p:spPr>
+          <p:txBody>
+            <a:bodyPr wrap="none" rtlCol="0">
+              <a:spAutoFit/>
+            </a:bodyPr>
+            <a:lstStyle/>
+            <a:p>
+              <a:r>
+                <a:rPr lang="en-US" sz="4000" dirty="0">
+                  <a:latin typeface="UCL Sans" panose="020B0604020202020204" charset="0"/>
+                  <a:ea typeface="Sans Serif Collection" panose="020B0502040504020204" pitchFamily="34" charset="0"/>
+                  <a:cs typeface="Sans Serif Collection" panose="020B0502040504020204" pitchFamily="34" charset="0"/>
+                </a:rPr>
+                <a:t>Aims</a:t>
+              </a:r>
+              <a:endParaRPr lang="en-GB" sz="4000" dirty="0">
+                <a:latin typeface="UCL Sans" panose="020B0604020202020204" charset="0"/>
+                <a:ea typeface="Sans Serif Collection" panose="020B0502040504020204" pitchFamily="34" charset="0"/>
+                <a:cs typeface="Sans Serif Collection" panose="020B0502040504020204" pitchFamily="34" charset="0"/>
+              </a:endParaRPr>
+            </a:p>
+          </p:txBody>
+        </p:sp>
+      </p:grpSp>
+      <p:sp>
+        <p:nvSpPr>
+          <p:cNvPr id="158" name="TextBox 157">
+            <a:extLst>
+              <a:ext uri="{FF2B5EF4-FFF2-40B4-BE49-F238E27FC236}">
+                <a16:creationId xmlns:a16="http://schemas.microsoft.com/office/drawing/2014/main" id="{921CFE3D-2C64-682F-0F74-CB48C110ED37}"/>
+              </a:ext>
+            </a:extLst>
+          </p:cNvPr>
+          <p:cNvSpPr txBox="1"/>
+          <p:nvPr/>
+        </p:nvSpPr>
+        <p:spPr>
+          <a:xfrm>
+            <a:off x="29278024" y="7746773"/>
+            <a:ext cx="12761366" cy="1384995"/>
+          </a:xfrm>
+          <a:prstGeom prst="rect">
+            <a:avLst/>
+          </a:prstGeom>
+          <a:noFill/>
+        </p:spPr>
+        <p:txBody>
+          <a:bodyPr wrap="square" rtlCol="0">
+            <a:spAutoFit/>
+          </a:bodyPr>
+          <a:lstStyle/>
+          <a:p>
+            <a:pPr algn="just"/>
+            <a:r>
+              <a:rPr lang="en-US" sz="2800" dirty="0">
+                <a:latin typeface="UCL Sans" panose="020B0604020202020204" charset="0"/>
+                <a:ea typeface="Sans Serif Collection" panose="020B0502040504020204" pitchFamily="34" charset="0"/>
+                <a:cs typeface="Sans Serif Collection" panose="020B0502040504020204" pitchFamily="34" charset="0"/>
+              </a:rPr>
+              <a:t>Rovibrational energies and wavefunctions are computed with variational nuclear motion program TROVE, then used to compute stick spectra and cross sections.</a:t>
+            </a:r>
+            <a:endParaRPr lang="en-GB" sz="2800" dirty="0">
+              <a:latin typeface="UCL Sans" panose="020B0604020202020204" charset="0"/>
+              <a:ea typeface="Sans Serif Collection" panose="020B0502040504020204" pitchFamily="34" charset="0"/>
+              <a:cs typeface="Sans Serif Collection" panose="020B0502040504020204" pitchFamily="34" charset="0"/>
+            </a:endParaRPr>
+          </a:p>
+        </p:txBody>
+      </p:sp>
+      <p:pic>
+        <p:nvPicPr>
+          <p:cNvPr id="160" name="Picture 159">
+            <a:extLst>
+              <a:ext uri="{FF2B5EF4-FFF2-40B4-BE49-F238E27FC236}">
+                <a16:creationId xmlns:a16="http://schemas.microsoft.com/office/drawing/2014/main" id="{EB415472-1A49-1599-EE17-227300B70D7D}"/>
+              </a:ext>
+            </a:extLst>
+          </p:cNvPr>
+          <p:cNvPicPr>
+            <a:picLocks noChangeAspect="1"/>
+          </p:cNvPicPr>
+          <p:nvPr/>
+        </p:nvPicPr>
+        <p:blipFill>
+          <a:blip r:embed="rId12">
+            <a:extLst>
+              <a:ext uri="{28A0092B-C50C-407E-A947-70E740481C1C}">
+                <a14:useLocalDpi xmlns:a14="http://schemas.microsoft.com/office/drawing/2010/main" val="0"/>
+              </a:ext>
+            </a:extLst>
+          </a:blip>
+          <a:stretch>
+            <a:fillRect/>
+          </a:stretch>
+        </p:blipFill>
+        <p:spPr>
+          <a:xfrm>
+            <a:off x="36678561" y="10203443"/>
+            <a:ext cx="5336740" cy="3712515"/>
+          </a:xfrm>
+          <a:prstGeom prst="rect">
+            <a:avLst/>
+          </a:prstGeom>
+        </p:spPr>
+      </p:pic>
+      <p:sp>
+        <p:nvSpPr>
+          <p:cNvPr id="162" name="TextBox 161">
+            <a:extLst>
+              <a:ext uri="{FF2B5EF4-FFF2-40B4-BE49-F238E27FC236}">
+                <a16:creationId xmlns:a16="http://schemas.microsoft.com/office/drawing/2014/main" id="{F31CBD7B-4CD3-4D28-1A2D-67E917A010A7}"/>
+              </a:ext>
+            </a:extLst>
+          </p:cNvPr>
+          <p:cNvSpPr txBox="1"/>
+          <p:nvPr/>
+        </p:nvSpPr>
+        <p:spPr>
+          <a:xfrm>
+            <a:off x="30007336" y="14871437"/>
+            <a:ext cx="11302742" cy="954107"/>
+          </a:xfrm>
+          <a:prstGeom prst="rect">
+            <a:avLst/>
+          </a:prstGeom>
+          <a:noFill/>
+        </p:spPr>
+        <p:txBody>
+          <a:bodyPr wrap="square" rtlCol="0">
+            <a:spAutoFit/>
+          </a:bodyPr>
+          <a:lstStyle/>
+          <a:p>
+            <a:pPr algn="just"/>
+            <a:r>
+              <a:rPr lang="en-US" sz="2800" dirty="0">
+                <a:latin typeface="UCL Sans" panose="020B0604020202020204" charset="0"/>
+                <a:ea typeface="Sans Serif Collection" panose="020B0502040504020204" pitchFamily="34" charset="0"/>
+                <a:cs typeface="Sans Serif Collection" panose="020B0502040504020204" pitchFamily="34" charset="0"/>
+              </a:rPr>
+              <a:t>Cross-section plot computed with states up to J=141. Partition function convergence suggests J=120 could be sufficient.</a:t>
+            </a:r>
+            <a:endParaRPr lang="en-GB" sz="2800" dirty="0">
+              <a:latin typeface="UCL Sans" panose="020B0604020202020204" charset="0"/>
+              <a:ea typeface="Sans Serif Collection" panose="020B0502040504020204" pitchFamily="34" charset="0"/>
+              <a:cs typeface="Sans Serif Collection" panose="020B0502040504020204" pitchFamily="34" charset="0"/>
+            </a:endParaRPr>
+          </a:p>
+        </p:txBody>
+      </p:sp>
       <p:grpSp>
         <p:nvGrpSpPr>
           <p:cNvPr id="12" name="Group 11">
@@ -6954,7 +8364,7 @@
         </p:nvGrpSpPr>
         <p:grpSpPr>
           <a:xfrm>
-            <a:off x="1010365" y="12511660"/>
+            <a:off x="1010365" y="16552721"/>
             <a:ext cx="6243647" cy="3778948"/>
             <a:chOff x="2529884" y="1485419"/>
             <a:chExt cx="4296945" cy="2600713"/>
@@ -7368,7 +8778,7 @@
                   <a:avLst/>
                 </a:prstGeom>
                 <a:blipFill>
-                  <a:blip r:embed="rId2"/>
+                  <a:blip r:embed="rId13"/>
                   <a:stretch>
                     <a:fillRect/>
                   </a:stretch>
@@ -7477,7 +8887,7 @@
                   <a:avLst/>
                 </a:prstGeom>
                 <a:blipFill>
-                  <a:blip r:embed="rId3"/>
+                  <a:blip r:embed="rId14"/>
                   <a:stretch>
                     <a:fillRect/>
                   </a:stretch>
@@ -7597,7 +9007,7 @@
                   <a:avLst/>
                 </a:prstGeom>
                 <a:blipFill>
-                  <a:blip r:embed="rId4"/>
+                  <a:blip r:embed="rId15"/>
                   <a:stretch>
                     <a:fillRect b="-12308"/>
                   </a:stretch>
@@ -7619,50 +9029,6 @@
           </mc:Fallback>
         </mc:AlternateContent>
       </p:grpSp>
-      <p:sp>
-        <p:nvSpPr>
-          <p:cNvPr id="2" name="TextBox 1">
-            <a:extLst>
-              <a:ext uri="{FF2B5EF4-FFF2-40B4-BE49-F238E27FC236}">
-                <a16:creationId xmlns:a16="http://schemas.microsoft.com/office/drawing/2014/main" id="{2F22A643-DE8D-84E7-00F6-97D6EBB88D71}"/>
-              </a:ext>
-            </a:extLst>
-          </p:cNvPr>
-          <p:cNvSpPr txBox="1"/>
-          <p:nvPr/>
-        </p:nvSpPr>
-        <p:spPr>
-          <a:xfrm>
-            <a:off x="764373" y="6827017"/>
-            <a:ext cx="6083717" cy="769441"/>
-          </a:xfrm>
-          <a:prstGeom prst="rect">
-            <a:avLst/>
-          </a:prstGeom>
-          <a:noFill/>
-        </p:spPr>
-        <p:txBody>
-          <a:bodyPr wrap="none" rtlCol="0">
-            <a:spAutoFit/>
-          </a:bodyPr>
-          <a:lstStyle/>
-          <a:p>
-            <a:r>
-              <a:rPr lang="en-US" sz="4400" dirty="0">
-                <a:latin typeface="UCL Sans" panose="020B0604020202020204" charset="0"/>
-                <a:ea typeface="Sans Serif Collection" panose="020B0502040504020204" pitchFamily="34" charset="0"/>
-                <a:cs typeface="Sans Serif Collection" panose="020B0502040504020204" pitchFamily="34" charset="0"/>
-              </a:rPr>
-              <a:t>Motivation: Why HPO?</a:t>
-            </a:r>
-            <a:endParaRPr lang="en-GB" sz="4400" dirty="0">
-              <a:latin typeface="UCL Sans" panose="020B0604020202020204" charset="0"/>
-              <a:ea typeface="Sans Serif Collection" panose="020B0502040504020204" pitchFamily="34" charset="0"/>
-              <a:cs typeface="Sans Serif Collection" panose="020B0502040504020204" pitchFamily="34" charset="0"/>
-            </a:endParaRPr>
-          </a:p>
-        </p:txBody>
-      </p:sp>
       <p:grpSp>
         <p:nvGrpSpPr>
           <p:cNvPr id="3" name="Group 2">
@@ -7677,7 +9043,7 @@
         </p:nvGrpSpPr>
         <p:grpSpPr>
           <a:xfrm>
-            <a:off x="1545067" y="17984890"/>
+            <a:off x="1663055" y="22025951"/>
             <a:ext cx="4662417" cy="4886198"/>
             <a:chOff x="3599376" y="899191"/>
             <a:chExt cx="5178253" cy="5426792"/>
@@ -8092,7 +9458,7 @@
                   <a:avLst/>
                 </a:prstGeom>
                 <a:blipFill>
-                  <a:blip r:embed="rId5"/>
+                  <a:blip r:embed="rId16"/>
                   <a:stretch>
                     <a:fillRect/>
                   </a:stretch>
@@ -8210,7 +9576,7 @@
                   <a:avLst/>
                 </a:prstGeom>
                 <a:blipFill>
-                  <a:blip r:embed="rId6"/>
+                  <a:blip r:embed="rId17"/>
                   <a:stretch>
                     <a:fillRect/>
                   </a:stretch>
@@ -8307,7 +9673,7 @@
                   <a:avLst/>
                 </a:prstGeom>
                 <a:blipFill>
-                  <a:blip r:embed="rId7"/>
+                  <a:blip r:embed="rId18"/>
                   <a:stretch>
                     <a:fillRect/>
                   </a:stretch>
@@ -8515,7 +9881,7 @@
                   <a:avLst/>
                 </a:prstGeom>
                 <a:blipFill>
-                  <a:blip r:embed="rId8"/>
+                  <a:blip r:embed="rId19"/>
                   <a:stretch>
                     <a:fillRect/>
                   </a:stretch>
@@ -8620,7 +9986,7 @@
                   <a:avLst/>
                 </a:prstGeom>
                 <a:blipFill>
-                  <a:blip r:embed="rId9"/>
+                  <a:blip r:embed="rId20"/>
                   <a:stretch>
                     <a:fillRect/>
                   </a:stretch>
@@ -8642,516 +10008,6 @@
           </mc:Fallback>
         </mc:AlternateContent>
       </p:grpSp>
-      <p:grpSp>
-        <p:nvGrpSpPr>
-          <p:cNvPr id="98" name="Group 97">
-            <a:extLst>
-              <a:ext uri="{FF2B5EF4-FFF2-40B4-BE49-F238E27FC236}">
-                <a16:creationId xmlns:a16="http://schemas.microsoft.com/office/drawing/2014/main" id="{70EDD302-18ED-C6AA-9E7D-27967A6ADEE2}"/>
-              </a:ext>
-            </a:extLst>
-          </p:cNvPr>
-          <p:cNvGrpSpPr/>
-          <p:nvPr/>
-        </p:nvGrpSpPr>
-        <p:grpSpPr>
-          <a:xfrm>
-            <a:off x="8110659" y="8841867"/>
-            <a:ext cx="7164163" cy="15847007"/>
-            <a:chOff x="10860170" y="9150571"/>
-            <a:chExt cx="7164163" cy="15847007"/>
-          </a:xfrm>
-        </p:grpSpPr>
-        <p:pic>
-          <p:nvPicPr>
-            <p:cNvPr id="93" name="Picture 92">
-              <a:extLst>
-                <a:ext uri="{FF2B5EF4-FFF2-40B4-BE49-F238E27FC236}">
-                  <a16:creationId xmlns:a16="http://schemas.microsoft.com/office/drawing/2014/main" id="{9DE9A554-6170-1FB0-5AE6-E7B4A65BB537}"/>
-                </a:ext>
-              </a:extLst>
-            </p:cNvPr>
-            <p:cNvPicPr>
-              <a:picLocks noChangeAspect="1"/>
-            </p:cNvPicPr>
-            <p:nvPr/>
-          </p:nvPicPr>
-          <p:blipFill>
-            <a:blip r:embed="rId10">
-              <a:extLst>
-                <a:ext uri="{28A0092B-C50C-407E-A947-70E740481C1C}">
-                  <a14:useLocalDpi xmlns:a14="http://schemas.microsoft.com/office/drawing/2010/main" val="0"/>
-                </a:ext>
-              </a:extLst>
-            </a:blip>
-            <a:stretch>
-              <a:fillRect/>
-            </a:stretch>
-          </p:blipFill>
-          <p:spPr>
-            <a:xfrm>
-              <a:off x="10860170" y="9150571"/>
-              <a:ext cx="7000254" cy="5246749"/>
-            </a:xfrm>
-            <a:prstGeom prst="rect">
-              <a:avLst/>
-            </a:prstGeom>
-          </p:spPr>
-        </p:pic>
-        <p:pic>
-          <p:nvPicPr>
-            <p:cNvPr id="95" name="Picture 94">
-              <a:extLst>
-                <a:ext uri="{FF2B5EF4-FFF2-40B4-BE49-F238E27FC236}">
-                  <a16:creationId xmlns:a16="http://schemas.microsoft.com/office/drawing/2014/main" id="{EE9BC05F-B7E3-CA11-DC00-15C950FA7D23}"/>
-                </a:ext>
-              </a:extLst>
-            </p:cNvPr>
-            <p:cNvPicPr>
-              <a:picLocks noChangeAspect="1"/>
-            </p:cNvPicPr>
-            <p:nvPr/>
-          </p:nvPicPr>
-          <p:blipFill>
-            <a:blip r:embed="rId11">
-              <a:extLst>
-                <a:ext uri="{28A0092B-C50C-407E-A947-70E740481C1C}">
-                  <a14:useLocalDpi xmlns:a14="http://schemas.microsoft.com/office/drawing/2010/main" val="0"/>
-                </a:ext>
-              </a:extLst>
-            </a:blip>
-            <a:stretch>
-              <a:fillRect/>
-            </a:stretch>
-          </p:blipFill>
-          <p:spPr>
-            <a:xfrm>
-              <a:off x="10860170" y="14397320"/>
-              <a:ext cx="7164163" cy="5309131"/>
-            </a:xfrm>
-            <a:prstGeom prst="rect">
-              <a:avLst/>
-            </a:prstGeom>
-          </p:spPr>
-        </p:pic>
-        <p:pic>
-          <p:nvPicPr>
-            <p:cNvPr id="97" name="Picture 96">
-              <a:extLst>
-                <a:ext uri="{FF2B5EF4-FFF2-40B4-BE49-F238E27FC236}">
-                  <a16:creationId xmlns:a16="http://schemas.microsoft.com/office/drawing/2014/main" id="{794851A6-82D4-39F5-1845-5DDF13F7AA74}"/>
-                </a:ext>
-              </a:extLst>
-            </p:cNvPr>
-            <p:cNvPicPr>
-              <a:picLocks noChangeAspect="1"/>
-            </p:cNvPicPr>
-            <p:nvPr/>
-          </p:nvPicPr>
-          <p:blipFill>
-            <a:blip r:embed="rId12">
-              <a:extLst>
-                <a:ext uri="{28A0092B-C50C-407E-A947-70E740481C1C}">
-                  <a14:useLocalDpi xmlns:a14="http://schemas.microsoft.com/office/drawing/2010/main" val="0"/>
-                </a:ext>
-              </a:extLst>
-            </a:blip>
-            <a:stretch>
-              <a:fillRect/>
-            </a:stretch>
-          </p:blipFill>
-          <p:spPr>
-            <a:xfrm>
-              <a:off x="10860170" y="19808636"/>
-              <a:ext cx="7000254" cy="5188942"/>
-            </a:xfrm>
-            <a:prstGeom prst="rect">
-              <a:avLst/>
-            </a:prstGeom>
-          </p:spPr>
-        </p:pic>
-      </p:grpSp>
-      <p:grpSp>
-        <p:nvGrpSpPr>
-          <p:cNvPr id="110" name="Group 109">
-            <a:extLst>
-              <a:ext uri="{FF2B5EF4-FFF2-40B4-BE49-F238E27FC236}">
-                <a16:creationId xmlns:a16="http://schemas.microsoft.com/office/drawing/2014/main" id="{FAAE2DBF-EC9C-C88B-C9D6-87E5697F5B99}"/>
-              </a:ext>
-            </a:extLst>
-          </p:cNvPr>
-          <p:cNvGrpSpPr/>
-          <p:nvPr/>
-        </p:nvGrpSpPr>
-        <p:grpSpPr>
-          <a:xfrm>
-            <a:off x="15145204" y="8862176"/>
-            <a:ext cx="6777654" cy="15834238"/>
-            <a:chOff x="16550641" y="7751918"/>
-            <a:chExt cx="6777654" cy="15834238"/>
-          </a:xfrm>
-        </p:grpSpPr>
-        <p:pic>
-          <p:nvPicPr>
-            <p:cNvPr id="100" name="Picture 99">
-              <a:extLst>
-                <a:ext uri="{FF2B5EF4-FFF2-40B4-BE49-F238E27FC236}">
-                  <a16:creationId xmlns:a16="http://schemas.microsoft.com/office/drawing/2014/main" id="{1B28F01E-BDE3-52AD-4093-67C1EF6A1087}"/>
-                </a:ext>
-              </a:extLst>
-            </p:cNvPr>
-            <p:cNvPicPr>
-              <a:picLocks noChangeAspect="1"/>
-            </p:cNvPicPr>
-            <p:nvPr/>
-          </p:nvPicPr>
-          <p:blipFill>
-            <a:blip r:embed="rId13">
-              <a:extLst>
-                <a:ext uri="{28A0092B-C50C-407E-A947-70E740481C1C}">
-                  <a14:useLocalDpi xmlns:a14="http://schemas.microsoft.com/office/drawing/2010/main" val="0"/>
-                </a:ext>
-              </a:extLst>
-            </a:blip>
-            <a:stretch>
-              <a:fillRect/>
-            </a:stretch>
-          </p:blipFill>
-          <p:spPr>
-            <a:xfrm>
-              <a:off x="16587985" y="7751918"/>
-              <a:ext cx="6649560" cy="5242975"/>
-            </a:xfrm>
-            <a:prstGeom prst="rect">
-              <a:avLst/>
-            </a:prstGeom>
-          </p:spPr>
-        </p:pic>
-        <p:pic>
-          <p:nvPicPr>
-            <p:cNvPr id="104" name="Picture 103">
-              <a:extLst>
-                <a:ext uri="{FF2B5EF4-FFF2-40B4-BE49-F238E27FC236}">
-                  <a16:creationId xmlns:a16="http://schemas.microsoft.com/office/drawing/2014/main" id="{9507A142-E620-ECAA-B88A-B067DBD071DF}"/>
-                </a:ext>
-              </a:extLst>
-            </p:cNvPr>
-            <p:cNvPicPr>
-              <a:picLocks noChangeAspect="1"/>
-            </p:cNvPicPr>
-            <p:nvPr/>
-          </p:nvPicPr>
-          <p:blipFill>
-            <a:blip r:embed="rId14">
-              <a:extLst>
-                <a:ext uri="{28A0092B-C50C-407E-A947-70E740481C1C}">
-                  <a14:useLocalDpi xmlns:a14="http://schemas.microsoft.com/office/drawing/2010/main" val="0"/>
-                </a:ext>
-              </a:extLst>
-            </a:blip>
-            <a:stretch>
-              <a:fillRect/>
-            </a:stretch>
-          </p:blipFill>
-          <p:spPr>
-            <a:xfrm>
-              <a:off x="16550641" y="18382133"/>
-              <a:ext cx="6777654" cy="5204023"/>
-            </a:xfrm>
-            <a:prstGeom prst="rect">
-              <a:avLst/>
-            </a:prstGeom>
-          </p:spPr>
-        </p:pic>
-        <p:grpSp>
-          <p:nvGrpSpPr>
-            <p:cNvPr id="109" name="Group 108">
-              <a:extLst>
-                <a:ext uri="{FF2B5EF4-FFF2-40B4-BE49-F238E27FC236}">
-                  <a16:creationId xmlns:a16="http://schemas.microsoft.com/office/drawing/2014/main" id="{B56A29A5-C706-62D4-382F-F23E7EE689F5}"/>
-                </a:ext>
-              </a:extLst>
-            </p:cNvPr>
-            <p:cNvGrpSpPr/>
-            <p:nvPr/>
-          </p:nvGrpSpPr>
-          <p:grpSpPr>
-            <a:xfrm>
-              <a:off x="16550641" y="13040740"/>
-              <a:ext cx="6686904" cy="5246749"/>
-              <a:chOff x="16550640" y="13040740"/>
-              <a:chExt cx="6686904" cy="5246749"/>
-            </a:xfrm>
-          </p:grpSpPr>
-          <p:pic>
-            <p:nvPicPr>
-              <p:cNvPr id="102" name="Picture 101">
-                <a:extLst>
-                  <a:ext uri="{FF2B5EF4-FFF2-40B4-BE49-F238E27FC236}">
-                    <a16:creationId xmlns:a16="http://schemas.microsoft.com/office/drawing/2014/main" id="{C081D37A-3F34-CEE6-7DF1-5F1F3CD99C8F}"/>
-                  </a:ext>
-                </a:extLst>
-              </p:cNvPr>
-              <p:cNvPicPr>
-                <a:picLocks noChangeAspect="1"/>
-              </p:cNvPicPr>
-              <p:nvPr/>
-            </p:nvPicPr>
-            <p:blipFill>
-              <a:blip r:embed="rId15">
-                <a:extLst>
-                  <a:ext uri="{28A0092B-C50C-407E-A947-70E740481C1C}">
-                    <a14:useLocalDpi xmlns:a14="http://schemas.microsoft.com/office/drawing/2010/main" val="0"/>
-                  </a:ext>
-                </a:extLst>
-              </a:blip>
-              <a:srcRect l="4971"/>
-              <a:stretch>
-                <a:fillRect/>
-              </a:stretch>
-            </p:blipFill>
-            <p:spPr>
-              <a:xfrm>
-                <a:off x="16748759" y="13040740"/>
-                <a:ext cx="6488785" cy="5246749"/>
-              </a:xfrm>
-              <a:prstGeom prst="rect">
-                <a:avLst/>
-              </a:prstGeom>
-            </p:spPr>
-          </p:pic>
-          <p:pic>
-            <p:nvPicPr>
-              <p:cNvPr id="108" name="Picture 107">
-                <a:extLst>
-                  <a:ext uri="{FF2B5EF4-FFF2-40B4-BE49-F238E27FC236}">
-                    <a16:creationId xmlns:a16="http://schemas.microsoft.com/office/drawing/2014/main" id="{CFCC7DEF-BBEC-AE27-044B-9962CF97977D}"/>
-                  </a:ext>
-                </a:extLst>
-              </p:cNvPr>
-              <p:cNvPicPr>
-                <a:picLocks noChangeAspect="1"/>
-              </p:cNvPicPr>
-              <p:nvPr/>
-            </p:nvPicPr>
-            <p:blipFill>
-              <a:blip r:embed="rId15">
-                <a:extLst>
-                  <a:ext uri="{28A0092B-C50C-407E-A947-70E740481C1C}">
-                    <a14:useLocalDpi xmlns:a14="http://schemas.microsoft.com/office/drawing/2010/main" val="0"/>
-                  </a:ext>
-                </a:extLst>
-              </a:blip>
-              <a:srcRect l="-163" t="28555" r="93913" b="39203"/>
-              <a:stretch>
-                <a:fillRect/>
-              </a:stretch>
-            </p:blipFill>
-            <p:spPr>
-              <a:xfrm>
-                <a:off x="16550640" y="14538961"/>
-                <a:ext cx="426719" cy="1691640"/>
-              </a:xfrm>
-              <a:prstGeom prst="rect">
-                <a:avLst/>
-              </a:prstGeom>
-            </p:spPr>
-          </p:pic>
-        </p:grpSp>
-      </p:grpSp>
-      <p:grpSp>
-        <p:nvGrpSpPr>
-          <p:cNvPr id="120" name="Group 119">
-            <a:extLst>
-              <a:ext uri="{FF2B5EF4-FFF2-40B4-BE49-F238E27FC236}">
-                <a16:creationId xmlns:a16="http://schemas.microsoft.com/office/drawing/2014/main" id="{002A3799-5903-3234-64B3-B834543B2289}"/>
-              </a:ext>
-            </a:extLst>
-          </p:cNvPr>
-          <p:cNvGrpSpPr/>
-          <p:nvPr/>
-        </p:nvGrpSpPr>
-        <p:grpSpPr>
-          <a:xfrm>
-            <a:off x="21941824" y="8834468"/>
-            <a:ext cx="6838565" cy="15820229"/>
-            <a:chOff x="22108078" y="7545441"/>
-            <a:chExt cx="6838565" cy="15820229"/>
-          </a:xfrm>
-        </p:grpSpPr>
-        <p:pic>
-          <p:nvPicPr>
-            <p:cNvPr id="115" name="Picture 114">
-              <a:extLst>
-                <a:ext uri="{FF2B5EF4-FFF2-40B4-BE49-F238E27FC236}">
-                  <a16:creationId xmlns:a16="http://schemas.microsoft.com/office/drawing/2014/main" id="{45C465AF-A32D-E5BD-4910-FD76854046B2}"/>
-                </a:ext>
-              </a:extLst>
-            </p:cNvPr>
-            <p:cNvPicPr>
-              <a:picLocks noChangeAspect="1"/>
-            </p:cNvPicPr>
-            <p:nvPr/>
-          </p:nvPicPr>
-          <p:blipFill>
-            <a:blip r:embed="rId16">
-              <a:extLst>
-                <a:ext uri="{28A0092B-C50C-407E-A947-70E740481C1C}">
-                  <a14:useLocalDpi xmlns:a14="http://schemas.microsoft.com/office/drawing/2010/main" val="0"/>
-                </a:ext>
-              </a:extLst>
-            </a:blip>
-            <a:stretch>
-              <a:fillRect/>
-            </a:stretch>
-          </p:blipFill>
-          <p:spPr>
-            <a:xfrm>
-              <a:off x="22108078" y="7545441"/>
-              <a:ext cx="6649560" cy="5191178"/>
-            </a:xfrm>
-            <a:prstGeom prst="rect">
-              <a:avLst/>
-            </a:prstGeom>
-          </p:spPr>
-        </p:pic>
-        <p:pic>
-          <p:nvPicPr>
-            <p:cNvPr id="117" name="Picture 116">
-              <a:extLst>
-                <a:ext uri="{FF2B5EF4-FFF2-40B4-BE49-F238E27FC236}">
-                  <a16:creationId xmlns:a16="http://schemas.microsoft.com/office/drawing/2014/main" id="{473FE8C4-79D5-CFD5-CD80-AFDDCC556867}"/>
-                </a:ext>
-              </a:extLst>
-            </p:cNvPr>
-            <p:cNvPicPr>
-              <a:picLocks noChangeAspect="1"/>
-            </p:cNvPicPr>
-            <p:nvPr/>
-          </p:nvPicPr>
-          <p:blipFill>
-            <a:blip r:embed="rId17">
-              <a:extLst>
-                <a:ext uri="{28A0092B-C50C-407E-A947-70E740481C1C}">
-                  <a14:useLocalDpi xmlns:a14="http://schemas.microsoft.com/office/drawing/2010/main" val="0"/>
-                </a:ext>
-              </a:extLst>
-            </a:blip>
-            <a:stretch>
-              <a:fillRect/>
-            </a:stretch>
-          </p:blipFill>
-          <p:spPr>
-            <a:xfrm>
-              <a:off x="22173470" y="12852409"/>
-              <a:ext cx="6773173" cy="5192950"/>
-            </a:xfrm>
-            <a:prstGeom prst="rect">
-              <a:avLst/>
-            </a:prstGeom>
-          </p:spPr>
-        </p:pic>
-        <p:pic>
-          <p:nvPicPr>
-            <p:cNvPr id="119" name="Picture 118">
-              <a:extLst>
-                <a:ext uri="{FF2B5EF4-FFF2-40B4-BE49-F238E27FC236}">
-                  <a16:creationId xmlns:a16="http://schemas.microsoft.com/office/drawing/2014/main" id="{68896298-5E3F-7709-5EF4-9050D41EFA1B}"/>
-                </a:ext>
-              </a:extLst>
-            </p:cNvPr>
-            <p:cNvPicPr>
-              <a:picLocks noChangeAspect="1"/>
-            </p:cNvPicPr>
-            <p:nvPr/>
-          </p:nvPicPr>
-          <p:blipFill>
-            <a:blip r:embed="rId18">
-              <a:extLst>
-                <a:ext uri="{28A0092B-C50C-407E-A947-70E740481C1C}">
-                  <a14:useLocalDpi xmlns:a14="http://schemas.microsoft.com/office/drawing/2010/main" val="0"/>
-                </a:ext>
-              </a:extLst>
-            </a:blip>
-            <a:stretch>
-              <a:fillRect/>
-            </a:stretch>
-          </p:blipFill>
-          <p:spPr>
-            <a:xfrm>
-              <a:off x="22163999" y="18174590"/>
-              <a:ext cx="6677002" cy="5191080"/>
-            </a:xfrm>
-            <a:prstGeom prst="rect">
-              <a:avLst/>
-            </a:prstGeom>
-          </p:spPr>
-        </p:pic>
-      </p:grpSp>
-      <p:sp>
-        <p:nvSpPr>
-          <p:cNvPr id="122" name="TextBox 121">
-            <a:extLst>
-              <a:ext uri="{FF2B5EF4-FFF2-40B4-BE49-F238E27FC236}">
-                <a16:creationId xmlns:a16="http://schemas.microsoft.com/office/drawing/2014/main" id="{D8407765-B900-8615-E960-4F485E521845}"/>
-              </a:ext>
-            </a:extLst>
-          </p:cNvPr>
-          <p:cNvSpPr txBox="1"/>
-          <p:nvPr/>
-        </p:nvSpPr>
-        <p:spPr>
-          <a:xfrm>
-            <a:off x="641959" y="7877029"/>
-            <a:ext cx="6612054" cy="3539430"/>
-          </a:xfrm>
-          <a:prstGeom prst="rect">
-            <a:avLst/>
-          </a:prstGeom>
-          <a:noFill/>
-        </p:spPr>
-        <p:txBody>
-          <a:bodyPr wrap="square" rtlCol="0">
-            <a:spAutoFit/>
-          </a:bodyPr>
-          <a:lstStyle/>
-          <a:p>
-            <a:pPr algn="just"/>
-            <a:r>
-              <a:rPr lang="en-US" sz="2800" dirty="0">
-                <a:latin typeface="UCL Sans" panose="020B0604020202020204" charset="0"/>
-                <a:ea typeface="Sans Serif Collection" panose="020B0502040504020204" pitchFamily="34" charset="0"/>
-                <a:cs typeface="Sans Serif Collection" panose="020B0502040504020204" pitchFamily="34" charset="0"/>
-              </a:rPr>
-              <a:t>HPO appears as a precursor molecule in proposed abiotic mechanisms to form phosphine on Venus. It was predicted to be detectable in the interstellar medium.</a:t>
-            </a:r>
-          </a:p>
-          <a:p>
-            <a:pPr algn="just"/>
-            <a:endParaRPr lang="en-US" sz="2800" dirty="0">
-              <a:latin typeface="UCL Sans" panose="020B0604020202020204" charset="0"/>
-              <a:ea typeface="Sans Serif Collection" panose="020B0502040504020204" pitchFamily="34" charset="0"/>
-              <a:cs typeface="Sans Serif Collection" panose="020B0502040504020204" pitchFamily="34" charset="0"/>
-            </a:endParaRPr>
-          </a:p>
-          <a:p>
-            <a:pPr algn="just"/>
-            <a:r>
-              <a:rPr lang="en-US" sz="2800" dirty="0">
-                <a:latin typeface="UCL Sans" panose="020B0604020202020204" charset="0"/>
-                <a:ea typeface="Sans Serif Collection" panose="020B0502040504020204" pitchFamily="34" charset="0"/>
-                <a:cs typeface="Sans Serif Collection" panose="020B0502040504020204" pitchFamily="34" charset="0"/>
-              </a:rPr>
-              <a:t>Can HPO play a role on lava or rocky exoplanets?</a:t>
-            </a:r>
-            <a:endParaRPr lang="en-GB" sz="2800" dirty="0">
-              <a:latin typeface="UCL Sans" panose="020B0604020202020204" charset="0"/>
-              <a:ea typeface="Sans Serif Collection" panose="020B0502040504020204" pitchFamily="34" charset="0"/>
-              <a:cs typeface="Sans Serif Collection" panose="020B0502040504020204" pitchFamily="34" charset="0"/>
-            </a:endParaRPr>
-          </a:p>
-        </p:txBody>
-      </p:sp>
       <p:sp>
         <p:nvSpPr>
           <p:cNvPr id="124" name="TextBox 123">
@@ -9166,7 +10022,7 @@
         </p:nvSpPr>
         <p:spPr>
           <a:xfrm>
-            <a:off x="783828" y="16831981"/>
+            <a:off x="783828" y="20873042"/>
             <a:ext cx="6604524" cy="954107"/>
           </a:xfrm>
           <a:prstGeom prst="rect">
@@ -9187,854 +10043,6 @@
                 <a:cs typeface="Sans Serif Collection" panose="020B0502040504020204" pitchFamily="34" charset="0"/>
               </a:rPr>
               <a:t>We use the internal coordinates and Cartesian axis as presented:</a:t>
-            </a:r>
-            <a:endParaRPr lang="en-GB" sz="2800" dirty="0">
-              <a:latin typeface="UCL Sans" panose="020B0604020202020204" charset="0"/>
-              <a:ea typeface="Sans Serif Collection" panose="020B0502040504020204" pitchFamily="34" charset="0"/>
-              <a:cs typeface="Sans Serif Collection" panose="020B0502040504020204" pitchFamily="34" charset="0"/>
-            </a:endParaRPr>
-          </a:p>
-        </p:txBody>
-      </p:sp>
-      <p:sp>
-        <p:nvSpPr>
-          <p:cNvPr id="126" name="TextBox 125">
-            <a:extLst>
-              <a:ext uri="{FF2B5EF4-FFF2-40B4-BE49-F238E27FC236}">
-                <a16:creationId xmlns:a16="http://schemas.microsoft.com/office/drawing/2014/main" id="{E2A49FD0-0556-0FCA-8AE6-9CC8ACD65A06}"/>
-              </a:ext>
-            </a:extLst>
-          </p:cNvPr>
-          <p:cNvSpPr txBox="1"/>
-          <p:nvPr/>
-        </p:nvSpPr>
-        <p:spPr>
-          <a:xfrm>
-            <a:off x="641958" y="24578797"/>
-            <a:ext cx="6525674" cy="2246769"/>
-          </a:xfrm>
-          <a:prstGeom prst="rect">
-            <a:avLst/>
-          </a:prstGeom>
-          <a:noFill/>
-        </p:spPr>
-        <p:txBody>
-          <a:bodyPr wrap="square" rtlCol="0">
-            <a:spAutoFit/>
-          </a:bodyPr>
-          <a:lstStyle/>
-          <a:p>
-            <a:pPr marL="457200" indent="-457200">
-              <a:buFont typeface="Arial" panose="020B0604020202020204" pitchFamily="34" charset="0"/>
-              <a:buChar char="•"/>
-            </a:pPr>
-            <a:r>
-              <a:rPr lang="en-US" sz="2800" dirty="0">
-                <a:latin typeface="UCL Sans" panose="020B0604020202020204" charset="0"/>
-                <a:ea typeface="Sans Serif Collection" panose="020B0502040504020204" pitchFamily="34" charset="0"/>
-                <a:cs typeface="Sans Serif Collection" panose="020B0502040504020204" pitchFamily="34" charset="0"/>
-              </a:rPr>
-              <a:t>Produce a rovibrational linelist for HPO (electronic ground state only).</a:t>
-            </a:r>
-          </a:p>
-          <a:p>
-            <a:pPr marL="457200" indent="-457200">
-              <a:buFont typeface="Arial" panose="020B0604020202020204" pitchFamily="34" charset="0"/>
-              <a:buChar char="•"/>
-            </a:pPr>
-            <a:endParaRPr lang="en-US" sz="2800" dirty="0">
-              <a:latin typeface="UCL Sans" panose="020B0604020202020204" charset="0"/>
-              <a:ea typeface="Sans Serif Collection" panose="020B0502040504020204" pitchFamily="34" charset="0"/>
-              <a:cs typeface="Sans Serif Collection" panose="020B0502040504020204" pitchFamily="34" charset="0"/>
-            </a:endParaRPr>
-          </a:p>
-          <a:p>
-            <a:pPr marL="457200" indent="-457200">
-              <a:buFont typeface="Arial" panose="020B0604020202020204" pitchFamily="34" charset="0"/>
-              <a:buChar char="•"/>
-            </a:pPr>
-            <a:r>
-              <a:rPr lang="en-US" sz="2800" dirty="0">
-                <a:latin typeface="UCL Sans" panose="020B0604020202020204" charset="0"/>
-                <a:ea typeface="Sans Serif Collection" panose="020B0502040504020204" pitchFamily="34" charset="0"/>
-                <a:cs typeface="Sans Serif Collection" panose="020B0502040504020204" pitchFamily="34" charset="0"/>
-              </a:rPr>
-              <a:t>Evaluate potential for HPO detection on exoplanets/planets.</a:t>
-            </a:r>
-            <a:endParaRPr lang="en-GB" sz="2800" dirty="0">
-              <a:latin typeface="UCL Sans" panose="020B0604020202020204" charset="0"/>
-              <a:ea typeface="Sans Serif Collection" panose="020B0502040504020204" pitchFamily="34" charset="0"/>
-              <a:cs typeface="Sans Serif Collection" panose="020B0502040504020204" pitchFamily="34" charset="0"/>
-            </a:endParaRPr>
-          </a:p>
-        </p:txBody>
-      </p:sp>
-      <p:pic>
-        <p:nvPicPr>
-          <p:cNvPr id="128" name="Picture 127">
-            <a:extLst>
-              <a:ext uri="{FF2B5EF4-FFF2-40B4-BE49-F238E27FC236}">
-                <a16:creationId xmlns:a16="http://schemas.microsoft.com/office/drawing/2014/main" id="{D7009208-CC3F-BADB-A338-3C3DDCD5B861}"/>
-              </a:ext>
-            </a:extLst>
-          </p:cNvPr>
-          <p:cNvPicPr>
-            <a:picLocks noChangeAspect="1"/>
-          </p:cNvPicPr>
-          <p:nvPr/>
-        </p:nvPicPr>
-        <p:blipFill>
-          <a:blip r:embed="rId19">
-            <a:extLst>
-              <a:ext uri="{28A0092B-C50C-407E-A947-70E740481C1C}">
-                <a14:useLocalDpi xmlns:a14="http://schemas.microsoft.com/office/drawing/2010/main" val="0"/>
-              </a:ext>
-            </a:extLst>
-          </a:blip>
-          <a:stretch>
-            <a:fillRect/>
-          </a:stretch>
-        </p:blipFill>
-        <p:spPr>
-          <a:xfrm>
-            <a:off x="29779473" y="8862176"/>
-            <a:ext cx="10982810" cy="7640054"/>
-          </a:xfrm>
-          <a:prstGeom prst="rect">
-            <a:avLst/>
-          </a:prstGeom>
-        </p:spPr>
-      </p:pic>
-      <p:sp>
-        <p:nvSpPr>
-          <p:cNvPr id="130" name="TextBox 129">
-            <a:extLst>
-              <a:ext uri="{FF2B5EF4-FFF2-40B4-BE49-F238E27FC236}">
-                <a16:creationId xmlns:a16="http://schemas.microsoft.com/office/drawing/2014/main" id="{A0746360-9288-5B65-2758-EF1FE2B0E04A}"/>
-              </a:ext>
-            </a:extLst>
-          </p:cNvPr>
-          <p:cNvSpPr txBox="1"/>
-          <p:nvPr/>
-        </p:nvSpPr>
-        <p:spPr>
-          <a:xfrm>
-            <a:off x="8550652" y="6887494"/>
-            <a:ext cx="6096541" cy="707886"/>
-          </a:xfrm>
-          <a:prstGeom prst="rect">
-            <a:avLst/>
-          </a:prstGeom>
-          <a:noFill/>
-        </p:spPr>
-        <p:txBody>
-          <a:bodyPr wrap="none" rtlCol="0">
-            <a:spAutoFit/>
-          </a:bodyPr>
-          <a:lstStyle/>
-          <a:p>
-            <a:r>
-              <a:rPr lang="en-US" sz="4000" dirty="0">
-                <a:latin typeface="UCL Sans" panose="020B0604020202020204" charset="0"/>
-                <a:ea typeface="Sans Serif Collection" panose="020B0502040504020204" pitchFamily="34" charset="0"/>
-                <a:cs typeface="Sans Serif Collection" panose="020B0502040504020204" pitchFamily="34" charset="0"/>
-              </a:rPr>
-              <a:t>Potential Energy Surface</a:t>
-            </a:r>
-            <a:endParaRPr lang="en-GB" sz="4000" dirty="0">
-              <a:latin typeface="UCL Sans" panose="020B0604020202020204" charset="0"/>
-              <a:ea typeface="Sans Serif Collection" panose="020B0502040504020204" pitchFamily="34" charset="0"/>
-              <a:cs typeface="Sans Serif Collection" panose="020B0502040504020204" pitchFamily="34" charset="0"/>
-            </a:endParaRPr>
-          </a:p>
-        </p:txBody>
-      </p:sp>
-      <p:sp>
-        <p:nvSpPr>
-          <p:cNvPr id="132" name="TextBox 131">
-            <a:extLst>
-              <a:ext uri="{FF2B5EF4-FFF2-40B4-BE49-F238E27FC236}">
-                <a16:creationId xmlns:a16="http://schemas.microsoft.com/office/drawing/2014/main" id="{516C16C9-1626-D91A-CF2B-6969A6CEFED9}"/>
-              </a:ext>
-            </a:extLst>
-          </p:cNvPr>
-          <p:cNvSpPr txBox="1"/>
-          <p:nvPr/>
-        </p:nvSpPr>
-        <p:spPr>
-          <a:xfrm>
-            <a:off x="15775123" y="6898051"/>
-            <a:ext cx="6110968" cy="707886"/>
-          </a:xfrm>
-          <a:prstGeom prst="rect">
-            <a:avLst/>
-          </a:prstGeom>
-          <a:noFill/>
-        </p:spPr>
-        <p:txBody>
-          <a:bodyPr wrap="none" rtlCol="0">
-            <a:spAutoFit/>
-          </a:bodyPr>
-          <a:lstStyle/>
-          <a:p>
-            <a:r>
-              <a:rPr lang="en-US" sz="4000" dirty="0">
-                <a:latin typeface="UCL Sans" panose="020B0604020202020204" charset="0"/>
-                <a:ea typeface="Sans Serif Collection" panose="020B0502040504020204" pitchFamily="34" charset="0"/>
-                <a:cs typeface="Sans Serif Collection" panose="020B0502040504020204" pitchFamily="34" charset="0"/>
-              </a:rPr>
-              <a:t>Dipole Moment Surfaces</a:t>
-            </a:r>
-            <a:endParaRPr lang="en-GB" sz="4000" dirty="0">
-              <a:latin typeface="UCL Sans" panose="020B0604020202020204" charset="0"/>
-              <a:ea typeface="Sans Serif Collection" panose="020B0502040504020204" pitchFamily="34" charset="0"/>
-              <a:cs typeface="Sans Serif Collection" panose="020B0502040504020204" pitchFamily="34" charset="0"/>
-            </a:endParaRPr>
-          </a:p>
-        </p:txBody>
-      </p:sp>
-      <p:sp>
-        <p:nvSpPr>
-          <p:cNvPr id="136" name="TextBox 135">
-            <a:extLst>
-              <a:ext uri="{FF2B5EF4-FFF2-40B4-BE49-F238E27FC236}">
-                <a16:creationId xmlns:a16="http://schemas.microsoft.com/office/drawing/2014/main" id="{F4EF452A-4DA2-1AB6-CAE4-A54B11573821}"/>
-              </a:ext>
-            </a:extLst>
-          </p:cNvPr>
-          <p:cNvSpPr txBox="1"/>
-          <p:nvPr/>
-        </p:nvSpPr>
-        <p:spPr>
-          <a:xfrm>
-            <a:off x="23742924" y="6869888"/>
-            <a:ext cx="3398687" cy="707886"/>
-          </a:xfrm>
-          <a:prstGeom prst="rect">
-            <a:avLst/>
-          </a:prstGeom>
-          <a:noFill/>
-        </p:spPr>
-        <p:txBody>
-          <a:bodyPr wrap="none" rtlCol="0">
-            <a:spAutoFit/>
-          </a:bodyPr>
-          <a:lstStyle/>
-          <a:p>
-            <a:r>
-              <a:rPr lang="en-US" sz="4000" dirty="0">
-                <a:latin typeface="UCL Sans" panose="020B0604020202020204" charset="0"/>
-                <a:ea typeface="Sans Serif Collection" panose="020B0502040504020204" pitchFamily="34" charset="0"/>
-                <a:cs typeface="Sans Serif Collection" panose="020B0502040504020204" pitchFamily="34" charset="0"/>
-              </a:rPr>
-              <a:t>Stick Spectra</a:t>
-            </a:r>
-            <a:endParaRPr lang="en-GB" sz="4000" dirty="0">
-              <a:latin typeface="UCL Sans" panose="020B0604020202020204" charset="0"/>
-              <a:ea typeface="Sans Serif Collection" panose="020B0502040504020204" pitchFamily="34" charset="0"/>
-              <a:cs typeface="Sans Serif Collection" panose="020B0502040504020204" pitchFamily="34" charset="0"/>
-            </a:endParaRPr>
-          </a:p>
-        </p:txBody>
-      </p:sp>
-      <p:sp>
-        <p:nvSpPr>
-          <p:cNvPr id="138" name="TextBox 137">
-            <a:extLst>
-              <a:ext uri="{FF2B5EF4-FFF2-40B4-BE49-F238E27FC236}">
-                <a16:creationId xmlns:a16="http://schemas.microsoft.com/office/drawing/2014/main" id="{B375B841-8EB3-F0F1-A242-4003E08E4EC6}"/>
-              </a:ext>
-            </a:extLst>
-          </p:cNvPr>
-          <p:cNvSpPr txBox="1"/>
-          <p:nvPr/>
-        </p:nvSpPr>
-        <p:spPr>
-          <a:xfrm>
-            <a:off x="7902099" y="24798599"/>
-            <a:ext cx="7164163" cy="2739211"/>
-          </a:xfrm>
-          <a:prstGeom prst="rect">
-            <a:avLst/>
-          </a:prstGeom>
-          <a:noFill/>
-        </p:spPr>
-        <p:txBody>
-          <a:bodyPr wrap="square" rtlCol="0">
-            <a:spAutoFit/>
-          </a:bodyPr>
-          <a:lstStyle/>
-          <a:p>
-            <a:pPr marL="457200" indent="-457200" algn="just">
-              <a:buFont typeface="Arial" panose="020B0604020202020204" pitchFamily="34" charset="0"/>
-              <a:buChar char="•"/>
-            </a:pPr>
-            <a:r>
-              <a:rPr lang="en-US" sz="2400" dirty="0">
-                <a:latin typeface="UCL Sans" panose="020B0604020202020204" charset="0"/>
-                <a:ea typeface="Sans Serif Collection" panose="020B0502040504020204" pitchFamily="34" charset="0"/>
-                <a:cs typeface="Sans Serif Collection" panose="020B0502040504020204" pitchFamily="34" charset="0"/>
-              </a:rPr>
-              <a:t>Fit PES has root-mean-square error of 2 cm</a:t>
-            </a:r>
-            <a:r>
-              <a:rPr lang="en-US" sz="2400" baseline="30000" dirty="0">
-                <a:latin typeface="UCL Sans" panose="020B0604020202020204" charset="0"/>
-                <a:ea typeface="Sans Serif Collection" panose="020B0502040504020204" pitchFamily="34" charset="0"/>
-                <a:cs typeface="Sans Serif Collection" panose="020B0502040504020204" pitchFamily="34" charset="0"/>
-              </a:rPr>
-              <a:t>-1</a:t>
-            </a:r>
-            <a:r>
-              <a:rPr lang="en-US" sz="2400" dirty="0">
-                <a:latin typeface="UCL Sans" panose="020B0604020202020204" charset="0"/>
-                <a:ea typeface="Sans Serif Collection" panose="020B0502040504020204" pitchFamily="34" charset="0"/>
-                <a:cs typeface="Sans Serif Collection" panose="020B0502040504020204" pitchFamily="34" charset="0"/>
-              </a:rPr>
-              <a:t> for energies under 18,000 cm</a:t>
-            </a:r>
-            <a:r>
-              <a:rPr lang="en-US" sz="2400" baseline="30000" dirty="0">
-                <a:latin typeface="UCL Sans" panose="020B0604020202020204" charset="0"/>
-                <a:ea typeface="Sans Serif Collection" panose="020B0502040504020204" pitchFamily="34" charset="0"/>
-                <a:cs typeface="Sans Serif Collection" panose="020B0502040504020204" pitchFamily="34" charset="0"/>
-              </a:rPr>
-              <a:t>-1</a:t>
-            </a:r>
-            <a:r>
-              <a:rPr lang="en-US" sz="2400" dirty="0">
-                <a:latin typeface="UCL Sans" panose="020B0604020202020204" charset="0"/>
-                <a:ea typeface="Sans Serif Collection" panose="020B0502040504020204" pitchFamily="34" charset="0"/>
-                <a:cs typeface="Sans Serif Collection" panose="020B0502040504020204" pitchFamily="34" charset="0"/>
-              </a:rPr>
-              <a:t> </a:t>
-            </a:r>
-          </a:p>
-          <a:p>
-            <a:pPr marL="457200" indent="-457200" algn="just">
-              <a:buFont typeface="Arial" panose="020B0604020202020204" pitchFamily="34" charset="0"/>
-              <a:buChar char="•"/>
-            </a:pPr>
-            <a:endParaRPr lang="en-US" sz="2400" dirty="0">
-              <a:latin typeface="UCL Sans" panose="020B0604020202020204" charset="0"/>
-              <a:ea typeface="Sans Serif Collection" panose="020B0502040504020204" pitchFamily="34" charset="0"/>
-              <a:cs typeface="Sans Serif Collection" panose="020B0502040504020204" pitchFamily="34" charset="0"/>
-            </a:endParaRPr>
-          </a:p>
-          <a:p>
-            <a:pPr marL="457200" indent="-457200" algn="just">
-              <a:buFont typeface="Arial" panose="020B0604020202020204" pitchFamily="34" charset="0"/>
-              <a:buChar char="•"/>
-            </a:pPr>
-            <a:r>
-              <a:rPr lang="en-US" sz="2400" dirty="0">
-                <a:latin typeface="UCL Sans" panose="020B0604020202020204" charset="0"/>
-                <a:ea typeface="Sans Serif Collection" panose="020B0502040504020204" pitchFamily="34" charset="0"/>
-                <a:cs typeface="Sans Serif Collection" panose="020B0502040504020204" pitchFamily="34" charset="0"/>
-              </a:rPr>
-              <a:t>Molecule appears relatively rigid (stiff bending), we can use non-singular methods to perform variational calculations.  </a:t>
-            </a:r>
-          </a:p>
-          <a:p>
-            <a:pPr marL="457200" indent="-457200" algn="just">
-              <a:buFont typeface="Arial" panose="020B0604020202020204" pitchFamily="34" charset="0"/>
-              <a:buChar char="•"/>
-            </a:pPr>
-            <a:endParaRPr lang="en-GB" sz="2800" dirty="0">
-              <a:latin typeface="UCL Sans" panose="020B0604020202020204" charset="0"/>
-              <a:ea typeface="Sans Serif Collection" panose="020B0502040504020204" pitchFamily="34" charset="0"/>
-              <a:cs typeface="Sans Serif Collection" panose="020B0502040504020204" pitchFamily="34" charset="0"/>
-            </a:endParaRPr>
-          </a:p>
-        </p:txBody>
-      </p:sp>
-      <p:sp>
-        <p:nvSpPr>
-          <p:cNvPr id="142" name="TextBox 141">
-            <a:extLst>
-              <a:ext uri="{FF2B5EF4-FFF2-40B4-BE49-F238E27FC236}">
-                <a16:creationId xmlns:a16="http://schemas.microsoft.com/office/drawing/2014/main" id="{9EDD83B0-40A2-0632-433F-9045CB4B273E}"/>
-              </a:ext>
-            </a:extLst>
-          </p:cNvPr>
-          <p:cNvSpPr txBox="1"/>
-          <p:nvPr/>
-        </p:nvSpPr>
-        <p:spPr>
-          <a:xfrm>
-            <a:off x="8550652" y="7762121"/>
-            <a:ext cx="6096541" cy="954107"/>
-          </a:xfrm>
-          <a:prstGeom prst="rect">
-            <a:avLst/>
-          </a:prstGeom>
-          <a:noFill/>
-        </p:spPr>
-        <p:txBody>
-          <a:bodyPr wrap="square" rtlCol="0">
-            <a:spAutoFit/>
-          </a:bodyPr>
-          <a:lstStyle/>
-          <a:p>
-            <a:pPr algn="just"/>
-            <a:r>
-              <a:rPr lang="en-US" sz="2800" dirty="0">
-                <a:latin typeface="UCL Sans" panose="020B0604020202020204" charset="0"/>
-                <a:ea typeface="Sans Serif Collection" panose="020B0502040504020204" pitchFamily="34" charset="0"/>
-                <a:cs typeface="Sans Serif Collection" panose="020B0502040504020204" pitchFamily="34" charset="0"/>
-              </a:rPr>
-              <a:t>7770 </a:t>
-            </a:r>
-            <a:r>
-              <a:rPr lang="en-US" sz="2800" i="1" dirty="0">
-                <a:latin typeface="UCL Sans" panose="020B0604020202020204" charset="0"/>
-                <a:ea typeface="Sans Serif Collection" panose="020B0502040504020204" pitchFamily="34" charset="0"/>
-                <a:cs typeface="Sans Serif Collection" panose="020B0502040504020204" pitchFamily="34" charset="0"/>
-              </a:rPr>
-              <a:t>ab initio </a:t>
-            </a:r>
-            <a:r>
-              <a:rPr lang="en-US" sz="2800" dirty="0">
-                <a:latin typeface="UCL Sans" panose="020B0604020202020204" charset="0"/>
-                <a:ea typeface="Sans Serif Collection" panose="020B0502040504020204" pitchFamily="34" charset="0"/>
-                <a:cs typeface="Sans Serif Collection" panose="020B0502040504020204" pitchFamily="34" charset="0"/>
-              </a:rPr>
-              <a:t>points computed with CCSD(T)-F12/cc-pVQZ-F12a</a:t>
-            </a:r>
-          </a:p>
-        </p:txBody>
-      </p:sp>
-      <p:sp>
-        <p:nvSpPr>
-          <p:cNvPr id="144" name="TextBox 143">
-            <a:extLst>
-              <a:ext uri="{FF2B5EF4-FFF2-40B4-BE49-F238E27FC236}">
-                <a16:creationId xmlns:a16="http://schemas.microsoft.com/office/drawing/2014/main" id="{96199BD6-6C8F-8CCB-2FA9-7FDB19CAA5B5}"/>
-              </a:ext>
-            </a:extLst>
-          </p:cNvPr>
-          <p:cNvSpPr txBox="1"/>
-          <p:nvPr/>
-        </p:nvSpPr>
-        <p:spPr>
-          <a:xfrm>
-            <a:off x="15845283" y="7762121"/>
-            <a:ext cx="6096541" cy="954107"/>
-          </a:xfrm>
-          <a:prstGeom prst="rect">
-            <a:avLst/>
-          </a:prstGeom>
-          <a:noFill/>
-        </p:spPr>
-        <p:txBody>
-          <a:bodyPr wrap="square" rtlCol="0">
-            <a:spAutoFit/>
-          </a:bodyPr>
-          <a:lstStyle/>
-          <a:p>
-            <a:pPr algn="just"/>
-            <a:r>
-              <a:rPr lang="en-US" sz="2800" dirty="0">
-                <a:latin typeface="UCL Sans" panose="020B0604020202020204" charset="0"/>
-                <a:ea typeface="Sans Serif Collection" panose="020B0502040504020204" pitchFamily="34" charset="0"/>
-                <a:cs typeface="Sans Serif Collection" panose="020B0502040504020204" pitchFamily="34" charset="0"/>
-              </a:rPr>
-              <a:t>Same grid as the PES computed with CCSD(T)/aug-cc-pV(5+d)Z</a:t>
-            </a:r>
-          </a:p>
-        </p:txBody>
-      </p:sp>
-      <p:sp>
-        <p:nvSpPr>
-          <p:cNvPr id="148" name="TextBox 147">
-            <a:extLst>
-              <a:ext uri="{FF2B5EF4-FFF2-40B4-BE49-F238E27FC236}">
-                <a16:creationId xmlns:a16="http://schemas.microsoft.com/office/drawing/2014/main" id="{24883706-EECC-D3A3-0F66-2BDE6B4405DC}"/>
-              </a:ext>
-            </a:extLst>
-          </p:cNvPr>
-          <p:cNvSpPr txBox="1"/>
-          <p:nvPr/>
-        </p:nvSpPr>
-        <p:spPr>
-          <a:xfrm>
-            <a:off x="22525986" y="7756000"/>
-            <a:ext cx="5630585" cy="949238"/>
-          </a:xfrm>
-          <a:prstGeom prst="rect">
-            <a:avLst/>
-          </a:prstGeom>
-          <a:noFill/>
-        </p:spPr>
-        <p:txBody>
-          <a:bodyPr wrap="square" rtlCol="0">
-            <a:spAutoFit/>
-          </a:bodyPr>
-          <a:lstStyle/>
-          <a:p>
-            <a:pPr algn="just"/>
-            <a:r>
-              <a:rPr lang="en-US" sz="2800" dirty="0">
-                <a:latin typeface="UCL Sans" panose="020B0604020202020204" charset="0"/>
-                <a:ea typeface="Sans Serif Collection" panose="020B0502040504020204" pitchFamily="34" charset="0"/>
-                <a:cs typeface="Sans Serif Collection" panose="020B0502040504020204" pitchFamily="34" charset="0"/>
-              </a:rPr>
-              <a:t>Rotational stick spectra of the fundamental vibrational modes</a:t>
-            </a:r>
-          </a:p>
-        </p:txBody>
-      </p:sp>
-      <p:sp>
-        <p:nvSpPr>
-          <p:cNvPr id="150" name="TextBox 149">
-            <a:extLst>
-              <a:ext uri="{FF2B5EF4-FFF2-40B4-BE49-F238E27FC236}">
-                <a16:creationId xmlns:a16="http://schemas.microsoft.com/office/drawing/2014/main" id="{CD1DF30F-309F-9DC5-B2C9-7211FFA6AE3E}"/>
-              </a:ext>
-            </a:extLst>
-          </p:cNvPr>
-          <p:cNvSpPr txBox="1"/>
-          <p:nvPr/>
-        </p:nvSpPr>
-        <p:spPr>
-          <a:xfrm>
-            <a:off x="30397568" y="6900756"/>
-            <a:ext cx="3855543" cy="707886"/>
-          </a:xfrm>
-          <a:prstGeom prst="rect">
-            <a:avLst/>
-          </a:prstGeom>
-          <a:noFill/>
-        </p:spPr>
-        <p:txBody>
-          <a:bodyPr wrap="none" rtlCol="0">
-            <a:spAutoFit/>
-          </a:bodyPr>
-          <a:lstStyle/>
-          <a:p>
-            <a:r>
-              <a:rPr lang="en-US" sz="4000" dirty="0">
-                <a:latin typeface="UCL Sans" panose="020B0604020202020204" charset="0"/>
-                <a:ea typeface="Sans Serif Collection" panose="020B0502040504020204" pitchFamily="34" charset="0"/>
-                <a:cs typeface="Sans Serif Collection" panose="020B0502040504020204" pitchFamily="34" charset="0"/>
-              </a:rPr>
-              <a:t>Cross-sections</a:t>
-            </a:r>
-            <a:endParaRPr lang="en-GB" sz="4000" dirty="0">
-              <a:latin typeface="UCL Sans" panose="020B0604020202020204" charset="0"/>
-              <a:ea typeface="Sans Serif Collection" panose="020B0502040504020204" pitchFamily="34" charset="0"/>
-              <a:cs typeface="Sans Serif Collection" panose="020B0502040504020204" pitchFamily="34" charset="0"/>
-            </a:endParaRPr>
-          </a:p>
-        </p:txBody>
-      </p:sp>
-      <p:sp>
-        <p:nvSpPr>
-          <p:cNvPr id="152" name="TextBox 151">
-            <a:extLst>
-              <a:ext uri="{FF2B5EF4-FFF2-40B4-BE49-F238E27FC236}">
-                <a16:creationId xmlns:a16="http://schemas.microsoft.com/office/drawing/2014/main" id="{AA5254B2-4677-A5F8-4213-BF2F405814E3}"/>
-              </a:ext>
-            </a:extLst>
-          </p:cNvPr>
-          <p:cNvSpPr txBox="1"/>
-          <p:nvPr/>
-        </p:nvSpPr>
-        <p:spPr>
-          <a:xfrm>
-            <a:off x="15306427" y="24798685"/>
-            <a:ext cx="6525681" cy="2000548"/>
-          </a:xfrm>
-          <a:prstGeom prst="rect">
-            <a:avLst/>
-          </a:prstGeom>
-          <a:noFill/>
-        </p:spPr>
-        <p:txBody>
-          <a:bodyPr wrap="square" rtlCol="0">
-            <a:spAutoFit/>
-          </a:bodyPr>
-          <a:lstStyle/>
-          <a:p>
-            <a:pPr marL="457200" indent="-457200" algn="just">
-              <a:buFont typeface="Arial" panose="020B0604020202020204" pitchFamily="34" charset="0"/>
-              <a:buChar char="•"/>
-            </a:pPr>
-            <a:r>
-              <a:rPr lang="en-US" sz="2400" dirty="0">
-                <a:latin typeface="UCL Sans" panose="020B0604020202020204" charset="0"/>
-                <a:ea typeface="Sans Serif Collection" panose="020B0502040504020204" pitchFamily="34" charset="0"/>
-                <a:cs typeface="Sans Serif Collection" panose="020B0502040504020204" pitchFamily="34" charset="0"/>
-              </a:rPr>
-              <a:t>Dipole values calculated oriented with respect to the Cartesian axis given. </a:t>
-            </a:r>
-          </a:p>
-          <a:p>
-            <a:pPr marL="457200" indent="-457200" algn="just">
-              <a:buFont typeface="Arial" panose="020B0604020202020204" pitchFamily="34" charset="0"/>
-              <a:buChar char="•"/>
-            </a:pPr>
-            <a:endParaRPr lang="en-US" sz="2400" dirty="0">
-              <a:latin typeface="UCL Sans" panose="020B0604020202020204" charset="0"/>
-              <a:ea typeface="Sans Serif Collection" panose="020B0502040504020204" pitchFamily="34" charset="0"/>
-              <a:cs typeface="Sans Serif Collection" panose="020B0502040504020204" pitchFamily="34" charset="0"/>
-            </a:endParaRPr>
-          </a:p>
-          <a:p>
-            <a:pPr marL="457200" indent="-457200" algn="just">
-              <a:buFont typeface="Arial" panose="020B0604020202020204" pitchFamily="34" charset="0"/>
-              <a:buChar char="•"/>
-            </a:pPr>
-            <a:r>
-              <a:rPr lang="en-US" sz="2400" dirty="0">
-                <a:latin typeface="UCL Sans" panose="020B0604020202020204" charset="0"/>
-                <a:ea typeface="Sans Serif Collection" panose="020B0502040504020204" pitchFamily="34" charset="0"/>
-                <a:cs typeface="Sans Serif Collection" panose="020B0502040504020204" pitchFamily="34" charset="0"/>
-              </a:rPr>
-              <a:t>Fitted to a Taylor-series type expansion.</a:t>
-            </a:r>
-          </a:p>
-          <a:p>
-            <a:pPr marL="457200" indent="-457200" algn="just">
-              <a:buFont typeface="Arial" panose="020B0604020202020204" pitchFamily="34" charset="0"/>
-              <a:buChar char="•"/>
-            </a:pPr>
-            <a:endParaRPr lang="en-GB" sz="2800" dirty="0">
-              <a:latin typeface="UCL Sans" panose="020B0604020202020204" charset="0"/>
-              <a:ea typeface="Sans Serif Collection" panose="020B0502040504020204" pitchFamily="34" charset="0"/>
-              <a:cs typeface="Sans Serif Collection" panose="020B0502040504020204" pitchFamily="34" charset="0"/>
-            </a:endParaRPr>
-          </a:p>
-        </p:txBody>
-      </p:sp>
-      <p:sp>
-        <p:nvSpPr>
-          <p:cNvPr id="154" name="TextBox 153">
-            <a:extLst>
-              <a:ext uri="{FF2B5EF4-FFF2-40B4-BE49-F238E27FC236}">
-                <a16:creationId xmlns:a16="http://schemas.microsoft.com/office/drawing/2014/main" id="{E7F24C27-2DFA-996C-26A7-E7A3E3B7583F}"/>
-              </a:ext>
-            </a:extLst>
-          </p:cNvPr>
-          <p:cNvSpPr txBox="1"/>
-          <p:nvPr/>
-        </p:nvSpPr>
-        <p:spPr>
-          <a:xfrm>
-            <a:off x="22007216" y="24798599"/>
-            <a:ext cx="6525681" cy="1569660"/>
-          </a:xfrm>
-          <a:prstGeom prst="rect">
-            <a:avLst/>
-          </a:prstGeom>
-          <a:noFill/>
-        </p:spPr>
-        <p:txBody>
-          <a:bodyPr wrap="square" rtlCol="0">
-            <a:spAutoFit/>
-          </a:bodyPr>
-          <a:lstStyle/>
-          <a:p>
-            <a:pPr marL="457200" indent="-457200" algn="just">
-              <a:buFont typeface="Arial" panose="020B0604020202020204" pitchFamily="34" charset="0"/>
-              <a:buChar char="•"/>
-            </a:pPr>
-            <a:r>
-              <a:rPr lang="en-US" sz="2400" dirty="0">
-                <a:latin typeface="UCL Sans" panose="020B0604020202020204" charset="0"/>
-                <a:ea typeface="Sans Serif Collection" panose="020B0502040504020204" pitchFamily="34" charset="0"/>
-                <a:cs typeface="Sans Serif Collection" panose="020B0502040504020204" pitchFamily="34" charset="0"/>
-              </a:rPr>
-              <a:t>The first and third fundamental modes have been experimentally measured, but not the second, despite intensity seeming higher.</a:t>
-            </a:r>
-            <a:endParaRPr lang="en-GB" sz="2400" dirty="0">
-              <a:latin typeface="UCL Sans" panose="020B0604020202020204" charset="0"/>
-              <a:ea typeface="Sans Serif Collection" panose="020B0502040504020204" pitchFamily="34" charset="0"/>
-              <a:cs typeface="Sans Serif Collection" panose="020B0502040504020204" pitchFamily="34" charset="0"/>
-            </a:endParaRPr>
-          </a:p>
-        </p:txBody>
-      </p:sp>
-      <p:sp>
-        <p:nvSpPr>
-          <p:cNvPr id="156" name="TextBox 155">
-            <a:extLst>
-              <a:ext uri="{FF2B5EF4-FFF2-40B4-BE49-F238E27FC236}">
-                <a16:creationId xmlns:a16="http://schemas.microsoft.com/office/drawing/2014/main" id="{5829362F-B08F-4FBF-4EF7-5BBF774E6B93}"/>
-              </a:ext>
-            </a:extLst>
-          </p:cNvPr>
-          <p:cNvSpPr txBox="1"/>
-          <p:nvPr/>
-        </p:nvSpPr>
-        <p:spPr>
-          <a:xfrm>
-            <a:off x="829926" y="23608216"/>
-            <a:ext cx="1369286" cy="707886"/>
-          </a:xfrm>
-          <a:prstGeom prst="rect">
-            <a:avLst/>
-          </a:prstGeom>
-          <a:noFill/>
-        </p:spPr>
-        <p:txBody>
-          <a:bodyPr wrap="none" rtlCol="0">
-            <a:spAutoFit/>
-          </a:bodyPr>
-          <a:lstStyle/>
-          <a:p>
-            <a:r>
-              <a:rPr lang="en-US" sz="4000" dirty="0">
-                <a:latin typeface="UCL Sans" panose="020B0604020202020204" charset="0"/>
-                <a:ea typeface="Sans Serif Collection" panose="020B0502040504020204" pitchFamily="34" charset="0"/>
-                <a:cs typeface="Sans Serif Collection" panose="020B0502040504020204" pitchFamily="34" charset="0"/>
-              </a:rPr>
-              <a:t>Aims</a:t>
-            </a:r>
-            <a:endParaRPr lang="en-GB" sz="4000" dirty="0">
-              <a:latin typeface="UCL Sans" panose="020B0604020202020204" charset="0"/>
-              <a:ea typeface="Sans Serif Collection" panose="020B0502040504020204" pitchFamily="34" charset="0"/>
-              <a:cs typeface="Sans Serif Collection" panose="020B0502040504020204" pitchFamily="34" charset="0"/>
-            </a:endParaRPr>
-          </a:p>
-        </p:txBody>
-      </p:sp>
-      <p:sp>
-        <p:nvSpPr>
-          <p:cNvPr id="158" name="TextBox 157">
-            <a:extLst>
-              <a:ext uri="{FF2B5EF4-FFF2-40B4-BE49-F238E27FC236}">
-                <a16:creationId xmlns:a16="http://schemas.microsoft.com/office/drawing/2014/main" id="{921CFE3D-2C64-682F-0F74-CB48C110ED37}"/>
-              </a:ext>
-            </a:extLst>
-          </p:cNvPr>
-          <p:cNvSpPr txBox="1"/>
-          <p:nvPr/>
-        </p:nvSpPr>
-        <p:spPr>
-          <a:xfrm>
-            <a:off x="29278024" y="7746773"/>
-            <a:ext cx="12761366" cy="1384995"/>
-          </a:xfrm>
-          <a:prstGeom prst="rect">
-            <a:avLst/>
-          </a:prstGeom>
-          <a:noFill/>
-        </p:spPr>
-        <p:txBody>
-          <a:bodyPr wrap="square" rtlCol="0">
-            <a:spAutoFit/>
-          </a:bodyPr>
-          <a:lstStyle/>
-          <a:p>
-            <a:pPr algn="just"/>
-            <a:r>
-              <a:rPr lang="en-US" sz="2800" dirty="0">
-                <a:latin typeface="UCL Sans" panose="020B0604020202020204" charset="0"/>
-                <a:ea typeface="Sans Serif Collection" panose="020B0502040504020204" pitchFamily="34" charset="0"/>
-                <a:cs typeface="Sans Serif Collection" panose="020B0502040504020204" pitchFamily="34" charset="0"/>
-              </a:rPr>
-              <a:t>Rovibrational energies and wavefunctions are computed with variational nuclear motion program TROVE, then used to compute stick spectra and cross sections.</a:t>
-            </a:r>
-            <a:endParaRPr lang="en-GB" sz="2800" dirty="0">
-              <a:latin typeface="UCL Sans" panose="020B0604020202020204" charset="0"/>
-              <a:ea typeface="Sans Serif Collection" panose="020B0502040504020204" pitchFamily="34" charset="0"/>
-              <a:cs typeface="Sans Serif Collection" panose="020B0502040504020204" pitchFamily="34" charset="0"/>
-            </a:endParaRPr>
-          </a:p>
-        </p:txBody>
-      </p:sp>
-      <p:pic>
-        <p:nvPicPr>
-          <p:cNvPr id="160" name="Picture 159">
-            <a:extLst>
-              <a:ext uri="{FF2B5EF4-FFF2-40B4-BE49-F238E27FC236}">
-                <a16:creationId xmlns:a16="http://schemas.microsoft.com/office/drawing/2014/main" id="{EB415472-1A49-1599-EE17-227300B70D7D}"/>
-              </a:ext>
-            </a:extLst>
-          </p:cNvPr>
-          <p:cNvPicPr>
-            <a:picLocks noChangeAspect="1"/>
-          </p:cNvPicPr>
-          <p:nvPr/>
-        </p:nvPicPr>
-        <p:blipFill>
-          <a:blip r:embed="rId20">
-            <a:extLst>
-              <a:ext uri="{28A0092B-C50C-407E-A947-70E740481C1C}">
-                <a14:useLocalDpi xmlns:a14="http://schemas.microsoft.com/office/drawing/2010/main" val="0"/>
-              </a:ext>
-            </a:extLst>
-          </a:blip>
-          <a:stretch>
-            <a:fillRect/>
-          </a:stretch>
-        </p:blipFill>
-        <p:spPr>
-          <a:xfrm>
-            <a:off x="35260507" y="16780718"/>
-            <a:ext cx="5336740" cy="3712515"/>
-          </a:xfrm>
-          <a:prstGeom prst="rect">
-            <a:avLst/>
-          </a:prstGeom>
-        </p:spPr>
-      </p:pic>
-      <p:sp>
-        <p:nvSpPr>
-          <p:cNvPr id="162" name="TextBox 161">
-            <a:extLst>
-              <a:ext uri="{FF2B5EF4-FFF2-40B4-BE49-F238E27FC236}">
-                <a16:creationId xmlns:a16="http://schemas.microsoft.com/office/drawing/2014/main" id="{F31CBD7B-4CD3-4D28-1A2D-67E917A010A7}"/>
-              </a:ext>
-            </a:extLst>
-          </p:cNvPr>
-          <p:cNvSpPr txBox="1"/>
-          <p:nvPr/>
-        </p:nvSpPr>
-        <p:spPr>
-          <a:xfrm>
-            <a:off x="29818125" y="17077227"/>
-            <a:ext cx="5336740" cy="2677656"/>
-          </a:xfrm>
-          <a:prstGeom prst="rect">
-            <a:avLst/>
-          </a:prstGeom>
-          <a:noFill/>
-        </p:spPr>
-        <p:txBody>
-          <a:bodyPr wrap="square" rtlCol="0">
-            <a:spAutoFit/>
-          </a:bodyPr>
-          <a:lstStyle/>
-          <a:p>
-            <a:pPr algn="just"/>
-            <a:r>
-              <a:rPr lang="en-US" sz="2800" dirty="0">
-                <a:latin typeface="UCL Sans" panose="020B0604020202020204" charset="0"/>
-                <a:ea typeface="Sans Serif Collection" panose="020B0502040504020204" pitchFamily="34" charset="0"/>
-                <a:cs typeface="Sans Serif Collection" panose="020B0502040504020204" pitchFamily="34" charset="0"/>
-              </a:rPr>
-              <a:t>Cross-section plot computed with states up to J=141. </a:t>
-            </a:r>
-          </a:p>
-          <a:p>
-            <a:pPr algn="just"/>
-            <a:endParaRPr lang="en-US" sz="2800" dirty="0">
-              <a:latin typeface="UCL Sans" panose="020B0604020202020204" charset="0"/>
-              <a:ea typeface="Sans Serif Collection" panose="020B0502040504020204" pitchFamily="34" charset="0"/>
-              <a:cs typeface="Sans Serif Collection" panose="020B0502040504020204" pitchFamily="34" charset="0"/>
-            </a:endParaRPr>
-          </a:p>
-          <a:p>
-            <a:pPr algn="just"/>
-            <a:r>
-              <a:rPr lang="en-US" sz="2800" dirty="0">
-                <a:latin typeface="UCL Sans" panose="020B0604020202020204" charset="0"/>
-                <a:ea typeface="Sans Serif Collection" panose="020B0502040504020204" pitchFamily="34" charset="0"/>
-                <a:cs typeface="Sans Serif Collection" panose="020B0502040504020204" pitchFamily="34" charset="0"/>
-              </a:rPr>
-              <a:t>Partition function convergence suggests J=120 could be sufficient.</a:t>
             </a:r>
             <a:endParaRPr lang="en-GB" sz="2800" dirty="0">
               <a:latin typeface="UCL Sans" panose="020B0604020202020204" charset="0"/>
@@ -10058,7 +10066,7 @@
         </p:nvSpPr>
         <p:spPr>
           <a:xfrm>
-            <a:off x="649488" y="11743615"/>
+            <a:off x="649488" y="15784676"/>
             <a:ext cx="6604524" cy="954107"/>
           </a:xfrm>
           <a:prstGeom prst="rect">
@@ -10081,6 +10089,300 @@
               <a:t>Equilibrium bond lengths and angles at the electronic ground state:</a:t>
             </a:r>
             <a:endParaRPr lang="en-GB" sz="2800" dirty="0">
+              <a:latin typeface="UCL Sans" panose="020B0604020202020204" charset="0"/>
+              <a:ea typeface="Sans Serif Collection" panose="020B0502040504020204" pitchFamily="34" charset="0"/>
+              <a:cs typeface="Sans Serif Collection" panose="020B0502040504020204" pitchFamily="34" charset="0"/>
+            </a:endParaRPr>
+          </a:p>
+        </p:txBody>
+      </p:sp>
+      <p:pic>
+        <p:nvPicPr>
+          <p:cNvPr id="168" name="Picture 167">
+            <a:extLst>
+              <a:ext uri="{FF2B5EF4-FFF2-40B4-BE49-F238E27FC236}">
+                <a16:creationId xmlns:a16="http://schemas.microsoft.com/office/drawing/2014/main" id="{5EC106AB-5B2D-BBCE-AF51-5032489B7332}"/>
+              </a:ext>
+            </a:extLst>
+          </p:cNvPr>
+          <p:cNvPicPr>
+            <a:picLocks noChangeAspect="1"/>
+          </p:cNvPicPr>
+          <p:nvPr/>
+        </p:nvPicPr>
+        <p:blipFill>
+          <a:blip r:embed="rId21">
+            <a:extLst>
+              <a:ext uri="{28A0092B-C50C-407E-A947-70E740481C1C}">
+                <a14:useLocalDpi xmlns:a14="http://schemas.microsoft.com/office/drawing/2010/main" val="0"/>
+              </a:ext>
+            </a:extLst>
+          </a:blip>
+          <a:stretch>
+            <a:fillRect/>
+          </a:stretch>
+        </p:blipFill>
+        <p:spPr>
+          <a:xfrm>
+            <a:off x="33633320" y="16418432"/>
+            <a:ext cx="7714704" cy="5366638"/>
+          </a:xfrm>
+          <a:prstGeom prst="rect">
+            <a:avLst/>
+          </a:prstGeom>
+        </p:spPr>
+      </p:pic>
+      <p:pic>
+        <p:nvPicPr>
+          <p:cNvPr id="170" name="Picture 169">
+            <a:extLst>
+              <a:ext uri="{FF2B5EF4-FFF2-40B4-BE49-F238E27FC236}">
+                <a16:creationId xmlns:a16="http://schemas.microsoft.com/office/drawing/2014/main" id="{59B91E42-0FF0-7E80-97A1-4BCBA412972C}"/>
+              </a:ext>
+            </a:extLst>
+          </p:cNvPr>
+          <p:cNvPicPr>
+            <a:picLocks noChangeAspect="1"/>
+          </p:cNvPicPr>
+          <p:nvPr/>
+        </p:nvPicPr>
+        <p:blipFill>
+          <a:blip r:embed="rId22">
+            <a:extLst>
+              <a:ext uri="{28A0092B-C50C-407E-A947-70E740481C1C}">
+                <a14:useLocalDpi xmlns:a14="http://schemas.microsoft.com/office/drawing/2010/main" val="0"/>
+              </a:ext>
+            </a:extLst>
+          </a:blip>
+          <a:stretch>
+            <a:fillRect/>
+          </a:stretch>
+        </p:blipFill>
+        <p:spPr>
+          <a:xfrm>
+            <a:off x="33724070" y="21795474"/>
+            <a:ext cx="7495746" cy="5214322"/>
+          </a:xfrm>
+          <a:prstGeom prst="rect">
+            <a:avLst/>
+          </a:prstGeom>
+        </p:spPr>
+      </p:pic>
+      <p:sp>
+        <p:nvSpPr>
+          <p:cNvPr id="172" name="TextBox 171">
+            <a:extLst>
+              <a:ext uri="{FF2B5EF4-FFF2-40B4-BE49-F238E27FC236}">
+                <a16:creationId xmlns:a16="http://schemas.microsoft.com/office/drawing/2014/main" id="{95893D50-B6C1-E420-02C3-190327F57E9B}"/>
+              </a:ext>
+            </a:extLst>
+          </p:cNvPr>
+          <p:cNvSpPr txBox="1"/>
+          <p:nvPr/>
+        </p:nvSpPr>
+        <p:spPr>
+          <a:xfrm>
+            <a:off x="29119970" y="18130078"/>
+            <a:ext cx="4407707" cy="3539430"/>
+          </a:xfrm>
+          <a:prstGeom prst="rect">
+            <a:avLst/>
+          </a:prstGeom>
+          <a:noFill/>
+        </p:spPr>
+        <p:txBody>
+          <a:bodyPr wrap="square" rtlCol="0">
+            <a:spAutoFit/>
+          </a:bodyPr>
+          <a:lstStyle/>
+          <a:p>
+            <a:pPr algn="just"/>
+            <a:r>
+              <a:rPr lang="en-US" sz="2800" dirty="0">
+                <a:latin typeface="UCL Sans" panose="020B0604020202020204" charset="0"/>
+                <a:ea typeface="Sans Serif Collection" panose="020B0502040504020204" pitchFamily="34" charset="0"/>
+                <a:cs typeface="Sans Serif Collection" panose="020B0502040504020204" pitchFamily="34" charset="0"/>
+              </a:rPr>
+              <a:t>The fundamental bands of HPO do not overlap with water. This makes detection more feasible.</a:t>
+            </a:r>
+          </a:p>
+          <a:p>
+            <a:pPr algn="just"/>
+            <a:endParaRPr lang="en-US" sz="2800" dirty="0">
+              <a:latin typeface="UCL Sans" panose="020B0604020202020204" charset="0"/>
+              <a:ea typeface="Sans Serif Collection" panose="020B0502040504020204" pitchFamily="34" charset="0"/>
+              <a:cs typeface="Sans Serif Collection" panose="020B0502040504020204" pitchFamily="34" charset="0"/>
+            </a:endParaRPr>
+          </a:p>
+          <a:p>
+            <a:pPr algn="just"/>
+            <a:r>
+              <a:rPr lang="en-US" sz="2800" dirty="0">
+                <a:latin typeface="UCL Sans" panose="020B0604020202020204" charset="0"/>
+                <a:ea typeface="Sans Serif Collection" panose="020B0502040504020204" pitchFamily="34" charset="0"/>
+                <a:cs typeface="Sans Serif Collection" panose="020B0502040504020204" pitchFamily="34" charset="0"/>
+              </a:rPr>
+              <a:t>Detection appears more likely for cooler planets.</a:t>
+            </a:r>
+          </a:p>
+          <a:p>
+            <a:pPr algn="just"/>
+            <a:endParaRPr lang="en-US" sz="2800" dirty="0">
+              <a:latin typeface="UCL Sans" panose="020B0604020202020204" charset="0"/>
+              <a:ea typeface="Sans Serif Collection" panose="020B0502040504020204" pitchFamily="34" charset="0"/>
+              <a:cs typeface="Sans Serif Collection" panose="020B0502040504020204" pitchFamily="34" charset="0"/>
+            </a:endParaRPr>
+          </a:p>
+        </p:txBody>
+      </p:sp>
+      <p:sp>
+        <p:nvSpPr>
+          <p:cNvPr id="174" name="TextBox 173">
+            <a:extLst>
+              <a:ext uri="{FF2B5EF4-FFF2-40B4-BE49-F238E27FC236}">
+                <a16:creationId xmlns:a16="http://schemas.microsoft.com/office/drawing/2014/main" id="{980858E8-683A-2577-D40D-F2E523E6DEFE}"/>
+              </a:ext>
+            </a:extLst>
+          </p:cNvPr>
+          <p:cNvSpPr txBox="1"/>
+          <p:nvPr/>
+        </p:nvSpPr>
+        <p:spPr>
+          <a:xfrm>
+            <a:off x="29836301" y="16649730"/>
+            <a:ext cx="2811988" cy="1446550"/>
+          </a:xfrm>
+          <a:prstGeom prst="rect">
+            <a:avLst/>
+          </a:prstGeom>
+          <a:noFill/>
+        </p:spPr>
+        <p:txBody>
+          <a:bodyPr wrap="none" rtlCol="0">
+            <a:spAutoFit/>
+          </a:bodyPr>
+          <a:lstStyle/>
+          <a:p>
+            <a:r>
+              <a:rPr lang="en-US" sz="4400" dirty="0">
+                <a:latin typeface="UCL Sans" panose="020B0604020202020204" charset="0"/>
+                <a:ea typeface="Sans Serif Collection" panose="020B0502040504020204" pitchFamily="34" charset="0"/>
+                <a:cs typeface="Sans Serif Collection" panose="020B0502040504020204" pitchFamily="34" charset="0"/>
+              </a:rPr>
+              <a:t>Exoplanet</a:t>
+            </a:r>
+          </a:p>
+          <a:p>
+            <a:r>
+              <a:rPr lang="en-US" sz="4400" dirty="0">
+                <a:latin typeface="UCL Sans" panose="020B0604020202020204" charset="0"/>
+                <a:ea typeface="Sans Serif Collection" panose="020B0502040504020204" pitchFamily="34" charset="0"/>
+                <a:cs typeface="Sans Serif Collection" panose="020B0502040504020204" pitchFamily="34" charset="0"/>
+              </a:rPr>
+              <a:t>Detection</a:t>
+            </a:r>
+          </a:p>
+        </p:txBody>
+      </p:sp>
+      <p:sp>
+        <p:nvSpPr>
+          <p:cNvPr id="176" name="TextBox 175">
+            <a:extLst>
+              <a:ext uri="{FF2B5EF4-FFF2-40B4-BE49-F238E27FC236}">
+                <a16:creationId xmlns:a16="http://schemas.microsoft.com/office/drawing/2014/main" id="{FE9BCABD-D78F-9529-5E63-8C6CA3571D5A}"/>
+              </a:ext>
+            </a:extLst>
+          </p:cNvPr>
+          <p:cNvSpPr txBox="1"/>
+          <p:nvPr/>
+        </p:nvSpPr>
+        <p:spPr>
+          <a:xfrm>
+            <a:off x="29589951" y="21565213"/>
+            <a:ext cx="3786798" cy="769441"/>
+          </a:xfrm>
+          <a:prstGeom prst="rect">
+            <a:avLst/>
+          </a:prstGeom>
+          <a:noFill/>
+        </p:spPr>
+        <p:txBody>
+          <a:bodyPr wrap="square" rtlCol="0">
+            <a:spAutoFit/>
+          </a:bodyPr>
+          <a:lstStyle/>
+          <a:p>
+            <a:r>
+              <a:rPr lang="en-US" sz="4400" dirty="0">
+                <a:latin typeface="UCL Sans" panose="020B0604020202020204" charset="0"/>
+                <a:ea typeface="Sans Serif Collection" panose="020B0502040504020204" pitchFamily="34" charset="0"/>
+                <a:cs typeface="Sans Serif Collection" panose="020B0502040504020204" pitchFamily="34" charset="0"/>
+              </a:rPr>
+              <a:t>Conclusion</a:t>
+            </a:r>
+          </a:p>
+        </p:txBody>
+      </p:sp>
+      <p:sp>
+        <p:nvSpPr>
+          <p:cNvPr id="178" name="TextBox 177">
+            <a:extLst>
+              <a:ext uri="{FF2B5EF4-FFF2-40B4-BE49-F238E27FC236}">
+                <a16:creationId xmlns:a16="http://schemas.microsoft.com/office/drawing/2014/main" id="{1269B754-7CEA-2333-DCE1-5FA63413416B}"/>
+              </a:ext>
+            </a:extLst>
+          </p:cNvPr>
+          <p:cNvSpPr txBox="1"/>
+          <p:nvPr/>
+        </p:nvSpPr>
+        <p:spPr>
+          <a:xfrm>
+            <a:off x="29022068" y="22551830"/>
+            <a:ext cx="4548574" cy="4401205"/>
+          </a:xfrm>
+          <a:prstGeom prst="rect">
+            <a:avLst/>
+          </a:prstGeom>
+          <a:noFill/>
+        </p:spPr>
+        <p:txBody>
+          <a:bodyPr wrap="square" rtlCol="0">
+            <a:spAutoFit/>
+          </a:bodyPr>
+          <a:lstStyle/>
+          <a:p>
+            <a:pPr algn="just"/>
+            <a:r>
+              <a:rPr lang="en-US" sz="2800" dirty="0">
+                <a:latin typeface="UCL Sans" panose="020B0604020202020204" charset="0"/>
+                <a:ea typeface="Sans Serif Collection" panose="020B0502040504020204" pitchFamily="34" charset="0"/>
+                <a:cs typeface="Sans Serif Collection" panose="020B0502040504020204" pitchFamily="34" charset="0"/>
+              </a:rPr>
+              <a:t>Rovibrational spectra of HPO is easier to compute to due rigid bending of the molecule.</a:t>
+            </a:r>
+          </a:p>
+          <a:p>
+            <a:pPr algn="just"/>
+            <a:endParaRPr lang="en-US" sz="2800" dirty="0">
+              <a:latin typeface="UCL Sans" panose="020B0604020202020204" charset="0"/>
+              <a:ea typeface="Sans Serif Collection" panose="020B0502040504020204" pitchFamily="34" charset="0"/>
+              <a:cs typeface="Sans Serif Collection" panose="020B0502040504020204" pitchFamily="34" charset="0"/>
+            </a:endParaRPr>
+          </a:p>
+          <a:p>
+            <a:pPr algn="just"/>
+            <a:r>
+              <a:rPr lang="en-US" sz="2800" dirty="0">
+                <a:latin typeface="UCL Sans" panose="020B0604020202020204" charset="0"/>
+                <a:ea typeface="Sans Serif Collection" panose="020B0502040504020204" pitchFamily="34" charset="0"/>
+                <a:cs typeface="Sans Serif Collection" panose="020B0502040504020204" pitchFamily="34" charset="0"/>
+              </a:rPr>
+              <a:t>Can be of interest for studying exoplanets and the planetary chemistry of phosphorus. </a:t>
+            </a:r>
+          </a:p>
+          <a:p>
+            <a:pPr algn="just"/>
+            <a:endParaRPr lang="en-US" sz="2800" dirty="0">
               <a:latin typeface="UCL Sans" panose="020B0604020202020204" charset="0"/>
               <a:ea typeface="Sans Serif Collection" panose="020B0502040504020204" pitchFamily="34" charset="0"/>
               <a:cs typeface="Sans Serif Collection" panose="020B0502040504020204" pitchFamily="34" charset="0"/>
